--- a/protected-downloads/praesentation/M14.pptx
+++ b/protected-downloads/praesentation/M14.pptx
@@ -9,16 +9,16 @@
     <p:sldId id="257" r:id="rId8"/>
     <p:sldId id="258" r:id="rId9"/>
     <p:sldId id="259" r:id="rId10"/>
-    <p:sldId id="260" r:id="rId11"/>
-    <p:sldId id="261" r:id="rId12"/>
-    <p:sldId id="262" r:id="rId13"/>
-    <p:sldId id="263" r:id="rId14"/>
-    <p:sldId id="264" r:id="rId15"/>
-    <p:sldId id="265" r:id="rId16"/>
-    <p:sldId id="266" r:id="rId17"/>
-    <p:sldId id="267" r:id="rId18"/>
-    <p:sldId id="268" r:id="rId19"/>
-    <p:sldId id="269" r:id="rId20"/>
+    <p:sldId id="260" r:id="rId12"/>
+    <p:sldId id="261" r:id="rId13"/>
+    <p:sldId id="262" r:id="rId14"/>
+    <p:sldId id="263" r:id="rId15"/>
+    <p:sldId id="264" r:id="rId16"/>
+    <p:sldId id="265" r:id="rId17"/>
+    <p:sldId id="266" r:id="rId18"/>
+    <p:sldId id="267" r:id="rId19"/>
+    <p:sldId id="268" r:id="rId20"/>
+    <p:sldId id="269" r:id="rId21"/>
   </p:sldIdLst>
   <p:sldSz cx="12188952" cy="6858000" type="screen4x3"/>
   <p:notesSz cx="6858000" cy="9144000"/>
@@ -118,6 +118,1126 @@
     </a:lvl9pPr>
   </p:defaultTextStyle>
 </p:presentation>
+</file>
+
+<file path=ppt/notesMasters/notesMaster1.xml><?xml version="1.0" encoding="utf-8"?>
+<p:notesMaster xmlns:a="http://schemas.openxmlformats.org/drawingml/2006/main" xmlns:p="http://schemas.openxmlformats.org/presentationml/2006/main" xmlns:r="http://schemas.openxmlformats.org/officeDocument/2006/relationships">
+  <p:cSld>
+    <p:bg>
+      <p:bgRef idx="1001">
+        <a:schemeClr val="bg1"/>
+      </p:bgRef>
+    </p:bg>
+    <p:spTree>
+      <p:nvGrpSpPr>
+        <p:cNvPr id="1" name=""/>
+        <p:cNvGrpSpPr/>
+        <p:nvPr/>
+      </p:nvGrpSpPr>
+      <p:grpSpPr>
+        <a:xfrm>
+          <a:off x="0" y="0"/>
+          <a:ext cx="0" cy="0"/>
+          <a:chOff x="0" y="0"/>
+          <a:chExt cx="0" cy="0"/>
+        </a:xfrm>
+      </p:grpSpPr>
+      <p:sp>
+        <p:nvSpPr>
+          <p:cNvPr id="2" name="Header Placeholder 1"/>
+          <p:cNvSpPr>
+            <a:spLocks noGrp="1"/>
+          </p:cNvSpPr>
+          <p:nvPr>
+            <p:ph type="hdr" sz="quarter"/>
+          </p:nvPr>
+        </p:nvSpPr>
+        <p:spPr>
+          <a:xfrm>
+            <a:off x="0" y="0"/>
+            <a:ext cx="2971800" cy="457200"/>
+          </a:xfrm>
+          <a:prstGeom prst="rect">
+            <a:avLst/>
+          </a:prstGeom>
+        </p:spPr>
+        <p:txBody>
+          <a:bodyPr vert="horz" lIns="91440" tIns="45720" rIns="91440" bIns="45720" rtlCol="0"/>
+          <a:lstStyle>
+            <a:lvl1pPr algn="l">
+              <a:defRPr sz="1200"/>
+            </a:lvl1pPr>
+          </a:lstStyle>
+          <a:p>
+            <a:endParaRPr lang="en-US"/>
+          </a:p>
+        </p:txBody>
+      </p:sp>
+      <p:sp>
+        <p:nvSpPr>
+          <p:cNvPr id="3" name="Date Placeholder 2"/>
+          <p:cNvSpPr>
+            <a:spLocks noGrp="1"/>
+          </p:cNvSpPr>
+          <p:nvPr>
+            <p:ph type="dt" idx="1"/>
+          </p:nvPr>
+        </p:nvSpPr>
+        <p:spPr>
+          <a:xfrm>
+            <a:off x="3884613" y="0"/>
+            <a:ext cx="2971800" cy="457200"/>
+          </a:xfrm>
+          <a:prstGeom prst="rect">
+            <a:avLst/>
+          </a:prstGeom>
+        </p:spPr>
+        <p:txBody>
+          <a:bodyPr vert="horz" lIns="91440" tIns="45720" rIns="91440" bIns="45720" rtlCol="0"/>
+          <a:lstStyle>
+            <a:lvl1pPr algn="r">
+              <a:defRPr sz="1200"/>
+            </a:lvl1pPr>
+          </a:lstStyle>
+          <a:p>
+            <a:fld id="{0F89C1C7-3DCD-1040-A9CF-14679D8B5DDD}" type="datetimeFigureOut">
+              <a:rPr lang="en-US" smtClean="0"/>
+              <a:t>10/17/16</a:t>
+            </a:fld>
+            <a:endParaRPr lang="en-US"/>
+          </a:p>
+        </p:txBody>
+      </p:sp>
+      <p:sp>
+        <p:nvSpPr>
+          <p:cNvPr id="4" name="Slide Image Placeholder 3"/>
+          <p:cNvSpPr>
+            <a:spLocks noGrp="1" noRot="1" noChangeAspect="1"/>
+          </p:cNvSpPr>
+          <p:nvPr>
+            <p:ph type="sldImg" idx="2"/>
+          </p:nvPr>
+        </p:nvSpPr>
+        <p:spPr>
+          <a:xfrm>
+            <a:off x="1143000" y="685800"/>
+            <a:ext cx="4572000" cy="3429000"/>
+          </a:xfrm>
+          <a:prstGeom prst="rect">
+            <a:avLst/>
+          </a:prstGeom>
+          <a:noFill/>
+          <a:ln w="12700">
+            <a:solidFill>
+              <a:prstClr val="black"/>
+            </a:solidFill>
+          </a:ln>
+        </p:spPr>
+        <p:txBody>
+          <a:bodyPr vert="horz" lIns="91440" tIns="45720" rIns="91440" bIns="45720" rtlCol="0" anchor="ctr"/>
+          <a:lstStyle/>
+          <a:p>
+            <a:endParaRPr lang="en-US"/>
+          </a:p>
+        </p:txBody>
+      </p:sp>
+      <p:sp>
+        <p:nvSpPr>
+          <p:cNvPr id="5" name="Notes Placeholder 4"/>
+          <p:cNvSpPr>
+            <a:spLocks noGrp="1"/>
+          </p:cNvSpPr>
+          <p:nvPr>
+            <p:ph type="body" sz="quarter" idx="3"/>
+          </p:nvPr>
+        </p:nvSpPr>
+        <p:spPr>
+          <a:xfrm>
+            <a:off x="685800" y="4343400"/>
+            <a:ext cx="5486400" cy="4114800"/>
+          </a:xfrm>
+          <a:prstGeom prst="rect">
+            <a:avLst/>
+          </a:prstGeom>
+        </p:spPr>
+        <p:txBody>
+          <a:bodyPr vert="horz" lIns="91440" tIns="45720" rIns="91440" bIns="45720" rtlCol="0"/>
+          <a:lstStyle/>
+          <a:p>
+            <a:pPr lvl="0"/>
+            <a:r>
+              <a:rPr lang="en-US" smtClean="0"/>
+              <a:t>Click to edit Master text styles</a:t>
+            </a:r>
+          </a:p>
+          <a:p>
+            <a:pPr lvl="1"/>
+            <a:r>
+              <a:rPr lang="en-US" smtClean="0"/>
+              <a:t>Second level</a:t>
+            </a:r>
+          </a:p>
+          <a:p>
+            <a:pPr lvl="2"/>
+            <a:r>
+              <a:rPr lang="en-US" smtClean="0"/>
+              <a:t>Third level</a:t>
+            </a:r>
+          </a:p>
+          <a:p>
+            <a:pPr lvl="3"/>
+            <a:r>
+              <a:rPr lang="en-US" smtClean="0"/>
+              <a:t>Fourth level</a:t>
+            </a:r>
+          </a:p>
+          <a:p>
+            <a:pPr lvl="4"/>
+            <a:r>
+              <a:rPr lang="en-US" smtClean="0"/>
+              <a:t>Fifth level</a:t>
+            </a:r>
+            <a:endParaRPr lang="en-US"/>
+          </a:p>
+        </p:txBody>
+      </p:sp>
+      <p:sp>
+        <p:nvSpPr>
+          <p:cNvPr id="6" name="Footer Placeholder 5"/>
+          <p:cNvSpPr>
+            <a:spLocks noGrp="1"/>
+          </p:cNvSpPr>
+          <p:nvPr>
+            <p:ph type="ftr" sz="quarter" idx="4"/>
+          </p:nvPr>
+        </p:nvSpPr>
+        <p:spPr>
+          <a:xfrm>
+            <a:off x="0" y="8685213"/>
+            <a:ext cx="2971800" cy="457200"/>
+          </a:xfrm>
+          <a:prstGeom prst="rect">
+            <a:avLst/>
+          </a:prstGeom>
+        </p:spPr>
+        <p:txBody>
+          <a:bodyPr vert="horz" lIns="91440" tIns="45720" rIns="91440" bIns="45720" rtlCol="0" anchor="b"/>
+          <a:lstStyle>
+            <a:lvl1pPr algn="l">
+              <a:defRPr sz="1200"/>
+            </a:lvl1pPr>
+          </a:lstStyle>
+          <a:p>
+            <a:endParaRPr lang="en-US"/>
+          </a:p>
+        </p:txBody>
+      </p:sp>
+      <p:sp>
+        <p:nvSpPr>
+          <p:cNvPr id="7" name="Slide Number Placeholder 6"/>
+          <p:cNvSpPr>
+            <a:spLocks noGrp="1"/>
+          </p:cNvSpPr>
+          <p:nvPr>
+            <p:ph type="sldNum" sz="quarter" idx="5"/>
+          </p:nvPr>
+        </p:nvSpPr>
+        <p:spPr>
+          <a:xfrm>
+            <a:off x="3884613" y="8685213"/>
+            <a:ext cx="2971800" cy="457200"/>
+          </a:xfrm>
+          <a:prstGeom prst="rect">
+            <a:avLst/>
+          </a:prstGeom>
+        </p:spPr>
+        <p:txBody>
+          <a:bodyPr vert="horz" lIns="91440" tIns="45720" rIns="91440" bIns="45720" rtlCol="0" anchor="b"/>
+          <a:lstStyle>
+            <a:lvl1pPr algn="r">
+              <a:defRPr sz="1200"/>
+            </a:lvl1pPr>
+          </a:lstStyle>
+          <a:p>
+            <a:fld id="{BB5E49A5-4136-284D-997B-48E1D791AD67}" type="slidenum">
+              <a:rPr lang="en-US" smtClean="0"/>
+              <a:t>‹#›</a:t>
+            </a:fld>
+            <a:endParaRPr lang="en-US"/>
+          </a:p>
+        </p:txBody>
+      </p:sp>
+    </p:spTree>
+    <p:extLst>
+      <p:ext uri="{BB962C8B-B14F-4D97-AF65-F5344CB8AC3E}">
+        <p14:creationId xmlns:p14="http://schemas.microsoft.com/office/powerpoint/2010/main" val="2623252185"/>
+      </p:ext>
+    </p:extLst>
+  </p:cSld>
+  <p:clrMap bg1="lt1" tx1="dk1" bg2="lt2" tx2="dk2" accent1="accent1" accent2="accent2" accent3="accent3" accent4="accent4" accent5="accent5" accent6="accent6" hlink="hlink" folHlink="folHlink"/>
+  <p:notesStyle>
+    <a:lvl1pPr marL="0" algn="l" defTabSz="457200" rtl="0" eaLnBrk="1" latinLnBrk="0" hangingPunct="1">
+      <a:defRPr sz="1200" kern="1200">
+        <a:solidFill>
+          <a:schemeClr val="tx1"/>
+        </a:solidFill>
+        <a:latin typeface="+mn-lt"/>
+        <a:ea typeface="+mn-ea"/>
+        <a:cs typeface="+mn-cs"/>
+      </a:defRPr>
+    </a:lvl1pPr>
+    <a:lvl2pPr marL="457200" algn="l" defTabSz="457200" rtl="0" eaLnBrk="1" latinLnBrk="0" hangingPunct="1">
+      <a:defRPr sz="1200" kern="1200">
+        <a:solidFill>
+          <a:schemeClr val="tx1"/>
+        </a:solidFill>
+        <a:latin typeface="+mn-lt"/>
+        <a:ea typeface="+mn-ea"/>
+        <a:cs typeface="+mn-cs"/>
+      </a:defRPr>
+    </a:lvl2pPr>
+    <a:lvl3pPr marL="914400" algn="l" defTabSz="457200" rtl="0" eaLnBrk="1" latinLnBrk="0" hangingPunct="1">
+      <a:defRPr sz="1200" kern="1200">
+        <a:solidFill>
+          <a:schemeClr val="tx1"/>
+        </a:solidFill>
+        <a:latin typeface="+mn-lt"/>
+        <a:ea typeface="+mn-ea"/>
+        <a:cs typeface="+mn-cs"/>
+      </a:defRPr>
+    </a:lvl3pPr>
+    <a:lvl4pPr marL="1371600" algn="l" defTabSz="457200" rtl="0" eaLnBrk="1" latinLnBrk="0" hangingPunct="1">
+      <a:defRPr sz="1200" kern="1200">
+        <a:solidFill>
+          <a:schemeClr val="tx1"/>
+        </a:solidFill>
+        <a:latin typeface="+mn-lt"/>
+        <a:ea typeface="+mn-ea"/>
+        <a:cs typeface="+mn-cs"/>
+      </a:defRPr>
+    </a:lvl4pPr>
+    <a:lvl5pPr marL="1828800" algn="l" defTabSz="457200" rtl="0" eaLnBrk="1" latinLnBrk="0" hangingPunct="1">
+      <a:defRPr sz="1200" kern="1200">
+        <a:solidFill>
+          <a:schemeClr val="tx1"/>
+        </a:solidFill>
+        <a:latin typeface="+mn-lt"/>
+        <a:ea typeface="+mn-ea"/>
+        <a:cs typeface="+mn-cs"/>
+      </a:defRPr>
+    </a:lvl5pPr>
+    <a:lvl6pPr marL="2286000" algn="l" defTabSz="457200" rtl="0" eaLnBrk="1" latinLnBrk="0" hangingPunct="1">
+      <a:defRPr sz="1200" kern="1200">
+        <a:solidFill>
+          <a:schemeClr val="tx1"/>
+        </a:solidFill>
+        <a:latin typeface="+mn-lt"/>
+        <a:ea typeface="+mn-ea"/>
+        <a:cs typeface="+mn-cs"/>
+      </a:defRPr>
+    </a:lvl6pPr>
+    <a:lvl7pPr marL="2743200" algn="l" defTabSz="457200" rtl="0" eaLnBrk="1" latinLnBrk="0" hangingPunct="1">
+      <a:defRPr sz="1200" kern="1200">
+        <a:solidFill>
+          <a:schemeClr val="tx1"/>
+        </a:solidFill>
+        <a:latin typeface="+mn-lt"/>
+        <a:ea typeface="+mn-ea"/>
+        <a:cs typeface="+mn-cs"/>
+      </a:defRPr>
+    </a:lvl7pPr>
+    <a:lvl8pPr marL="3200400" algn="l" defTabSz="457200" rtl="0" eaLnBrk="1" latinLnBrk="0" hangingPunct="1">
+      <a:defRPr sz="1200" kern="1200">
+        <a:solidFill>
+          <a:schemeClr val="tx1"/>
+        </a:solidFill>
+        <a:latin typeface="+mn-lt"/>
+        <a:ea typeface="+mn-ea"/>
+        <a:cs typeface="+mn-cs"/>
+      </a:defRPr>
+    </a:lvl8pPr>
+    <a:lvl9pPr marL="3657600" algn="l" defTabSz="457200" rtl="0" eaLnBrk="1" latinLnBrk="0" hangingPunct="1">
+      <a:defRPr sz="1200" kern="1200">
+        <a:solidFill>
+          <a:schemeClr val="tx1"/>
+        </a:solidFill>
+        <a:latin typeface="+mn-lt"/>
+        <a:ea typeface="+mn-ea"/>
+        <a:cs typeface="+mn-cs"/>
+      </a:defRPr>
+    </a:lvl9pPr>
+  </p:notesStyle>
+</p:notesMaster>
+</file>
+
+<file path=ppt/notesSlides/notesSlide1.xml><?xml version="1.0" encoding="utf-8"?>
+<p:notes xmlns:a="http://schemas.openxmlformats.org/drawingml/2006/main" xmlns:p="http://schemas.openxmlformats.org/presentationml/2006/main" xmlns:r="http://schemas.openxmlformats.org/officeDocument/2006/relationships">
+  <p:cSld>
+    <p:spTree>
+      <p:nvGrpSpPr>
+        <p:cNvPr id="1" name=""/>
+        <p:cNvGrpSpPr/>
+        <p:nvPr/>
+      </p:nvGrpSpPr>
+      <p:grpSpPr>
+        <a:xfrm>
+          <a:off x="0" y="0"/>
+          <a:ext cx="0" cy="0"/>
+          <a:chOff x="0" y="0"/>
+          <a:chExt cx="0" cy="0"/>
+        </a:xfrm>
+      </p:grpSpPr>
+      <p:sp>
+        <p:nvSpPr>
+          <p:cNvPr id="2" name="Slide Image Placeholder 1"/>
+          <p:cNvSpPr>
+            <a:spLocks noGrp="1"/>
+          </p:cNvSpPr>
+          <p:nvPr>
+            <p:ph type="sldImg" idx="2"/>
+          </p:nvPr>
+        </p:nvSpPr>
+        <p:spPr/>
+      </p:sp>
+      <p:sp>
+        <p:nvSpPr>
+          <p:cNvPr id="3" name="Notes Placeholder 2"/>
+          <p:cNvSpPr>
+            <a:spLocks noGrp="1"/>
+          </p:cNvSpPr>
+          <p:nvPr>
+            <p:ph type="body" idx="3" sz="quarter"/>
+          </p:nvPr>
+        </p:nvSpPr>
+        <p:spPr/>
+        <p:txBody>
+          <a:bodyPr/>
+          <a:lstStyle/>
+          <a:p>
+            <a:r>
+              <a:t>Siehe Trainerhandbuch (Sektion 3) für Moderationshinweise, Timing und erwartete Teilnehmerreaktionen.</a:t>
+            </a:r>
+          </a:p>
+        </p:txBody>
+      </p:sp>
+      <p:sp>
+        <p:nvSpPr>
+          <p:cNvPr id="4" name="Slide Number Placeholder 3"/>
+          <p:cNvSpPr>
+            <a:spLocks noGrp="1"/>
+          </p:cNvSpPr>
+          <p:nvPr>
+            <p:ph type="sldNum" idx="5" sz="quarter"/>
+          </p:nvPr>
+        </p:nvSpPr>
+        <p:spPr/>
+      </p:sp>
+    </p:spTree>
+  </p:cSld>
+  <p:clrMapOvr>
+    <a:masterClrMapping/>
+  </p:clrMapOvr>
+</p:notes>
+</file>
+
+<file path=ppt/notesSlides/notesSlide10.xml><?xml version="1.0" encoding="utf-8"?>
+<p:notes xmlns:a="http://schemas.openxmlformats.org/drawingml/2006/main" xmlns:p="http://schemas.openxmlformats.org/presentationml/2006/main" xmlns:r="http://schemas.openxmlformats.org/officeDocument/2006/relationships">
+  <p:cSld>
+    <p:spTree>
+      <p:nvGrpSpPr>
+        <p:cNvPr id="1" name=""/>
+        <p:cNvGrpSpPr/>
+        <p:nvPr/>
+      </p:nvGrpSpPr>
+      <p:grpSpPr>
+        <a:xfrm>
+          <a:off x="0" y="0"/>
+          <a:ext cx="0" cy="0"/>
+          <a:chOff x="0" y="0"/>
+          <a:chExt cx="0" cy="0"/>
+        </a:xfrm>
+      </p:grpSpPr>
+      <p:sp>
+        <p:nvSpPr>
+          <p:cNvPr id="2" name="Slide Image Placeholder 1"/>
+          <p:cNvSpPr>
+            <a:spLocks noGrp="1"/>
+          </p:cNvSpPr>
+          <p:nvPr>
+            <p:ph type="sldImg" idx="2"/>
+          </p:nvPr>
+        </p:nvSpPr>
+        <p:spPr/>
+      </p:sp>
+      <p:sp>
+        <p:nvSpPr>
+          <p:cNvPr id="3" name="Notes Placeholder 2"/>
+          <p:cNvSpPr>
+            <a:spLocks noGrp="1"/>
+          </p:cNvSpPr>
+          <p:nvPr>
+            <p:ph type="body" idx="3" sz="quarter"/>
+          </p:nvPr>
+        </p:nvSpPr>
+        <p:spPr/>
+        <p:txBody>
+          <a:bodyPr/>
+          <a:lstStyle/>
+          <a:p>
+            <a:r>
+              <a:t>Siehe Trainerhandbuch (Sektion 3) für Moderationshinweise, Timing und erwartete Teilnehmerreaktionen.</a:t>
+            </a:r>
+          </a:p>
+        </p:txBody>
+      </p:sp>
+      <p:sp>
+        <p:nvSpPr>
+          <p:cNvPr id="4" name="Slide Number Placeholder 3"/>
+          <p:cNvSpPr>
+            <a:spLocks noGrp="1"/>
+          </p:cNvSpPr>
+          <p:nvPr>
+            <p:ph type="sldNum" idx="5" sz="quarter"/>
+          </p:nvPr>
+        </p:nvSpPr>
+        <p:spPr/>
+      </p:sp>
+    </p:spTree>
+  </p:cSld>
+  <p:clrMapOvr>
+    <a:masterClrMapping/>
+  </p:clrMapOvr>
+</p:notes>
+</file>
+
+<file path=ppt/notesSlides/notesSlide11.xml><?xml version="1.0" encoding="utf-8"?>
+<p:notes xmlns:a="http://schemas.openxmlformats.org/drawingml/2006/main" xmlns:p="http://schemas.openxmlformats.org/presentationml/2006/main" xmlns:r="http://schemas.openxmlformats.org/officeDocument/2006/relationships">
+  <p:cSld>
+    <p:spTree>
+      <p:nvGrpSpPr>
+        <p:cNvPr id="1" name=""/>
+        <p:cNvGrpSpPr/>
+        <p:nvPr/>
+      </p:nvGrpSpPr>
+      <p:grpSpPr>
+        <a:xfrm>
+          <a:off x="0" y="0"/>
+          <a:ext cx="0" cy="0"/>
+          <a:chOff x="0" y="0"/>
+          <a:chExt cx="0" cy="0"/>
+        </a:xfrm>
+      </p:grpSpPr>
+      <p:sp>
+        <p:nvSpPr>
+          <p:cNvPr id="2" name="Slide Image Placeholder 1"/>
+          <p:cNvSpPr>
+            <a:spLocks noGrp="1"/>
+          </p:cNvSpPr>
+          <p:nvPr>
+            <p:ph type="sldImg" idx="2"/>
+          </p:nvPr>
+        </p:nvSpPr>
+        <p:spPr/>
+      </p:sp>
+      <p:sp>
+        <p:nvSpPr>
+          <p:cNvPr id="3" name="Notes Placeholder 2"/>
+          <p:cNvSpPr>
+            <a:spLocks noGrp="1"/>
+          </p:cNvSpPr>
+          <p:nvPr>
+            <p:ph type="body" idx="3" sz="quarter"/>
+          </p:nvPr>
+        </p:nvSpPr>
+        <p:spPr/>
+        <p:txBody>
+          <a:bodyPr/>
+          <a:lstStyle/>
+          <a:p>
+            <a:r>
+              <a:t>Siehe Trainerhandbuch (Sektion 3) für Moderationshinweise, Timing und erwartete Teilnehmerreaktionen.</a:t>
+            </a:r>
+          </a:p>
+        </p:txBody>
+      </p:sp>
+      <p:sp>
+        <p:nvSpPr>
+          <p:cNvPr id="4" name="Slide Number Placeholder 3"/>
+          <p:cNvSpPr>
+            <a:spLocks noGrp="1"/>
+          </p:cNvSpPr>
+          <p:nvPr>
+            <p:ph type="sldNum" idx="5" sz="quarter"/>
+          </p:nvPr>
+        </p:nvSpPr>
+        <p:spPr/>
+      </p:sp>
+    </p:spTree>
+  </p:cSld>
+  <p:clrMapOvr>
+    <a:masterClrMapping/>
+  </p:clrMapOvr>
+</p:notes>
+</file>
+
+<file path=ppt/notesSlides/notesSlide2.xml><?xml version="1.0" encoding="utf-8"?>
+<p:notes xmlns:a="http://schemas.openxmlformats.org/drawingml/2006/main" xmlns:p="http://schemas.openxmlformats.org/presentationml/2006/main" xmlns:r="http://schemas.openxmlformats.org/officeDocument/2006/relationships">
+  <p:cSld>
+    <p:spTree>
+      <p:nvGrpSpPr>
+        <p:cNvPr id="1" name=""/>
+        <p:cNvGrpSpPr/>
+        <p:nvPr/>
+      </p:nvGrpSpPr>
+      <p:grpSpPr>
+        <a:xfrm>
+          <a:off x="0" y="0"/>
+          <a:ext cx="0" cy="0"/>
+          <a:chOff x="0" y="0"/>
+          <a:chExt cx="0" cy="0"/>
+        </a:xfrm>
+      </p:grpSpPr>
+      <p:sp>
+        <p:nvSpPr>
+          <p:cNvPr id="2" name="Slide Image Placeholder 1"/>
+          <p:cNvSpPr>
+            <a:spLocks noGrp="1"/>
+          </p:cNvSpPr>
+          <p:nvPr>
+            <p:ph type="sldImg" idx="2"/>
+          </p:nvPr>
+        </p:nvSpPr>
+        <p:spPr/>
+      </p:sp>
+      <p:sp>
+        <p:nvSpPr>
+          <p:cNvPr id="3" name="Notes Placeholder 2"/>
+          <p:cNvSpPr>
+            <a:spLocks noGrp="1"/>
+          </p:cNvSpPr>
+          <p:nvPr>
+            <p:ph type="body" idx="3" sz="quarter"/>
+          </p:nvPr>
+        </p:nvSpPr>
+        <p:spPr/>
+        <p:txBody>
+          <a:bodyPr/>
+          <a:lstStyle/>
+          <a:p>
+            <a:r>
+              <a:t>Siehe Trainerhandbuch (Sektion 3) für Moderationshinweise, Timing und erwartete Teilnehmerreaktionen.</a:t>
+            </a:r>
+          </a:p>
+        </p:txBody>
+      </p:sp>
+      <p:sp>
+        <p:nvSpPr>
+          <p:cNvPr id="4" name="Slide Number Placeholder 3"/>
+          <p:cNvSpPr>
+            <a:spLocks noGrp="1"/>
+          </p:cNvSpPr>
+          <p:nvPr>
+            <p:ph type="sldNum" idx="5" sz="quarter"/>
+          </p:nvPr>
+        </p:nvSpPr>
+        <p:spPr/>
+      </p:sp>
+    </p:spTree>
+  </p:cSld>
+  <p:clrMapOvr>
+    <a:masterClrMapping/>
+  </p:clrMapOvr>
+</p:notes>
+</file>
+
+<file path=ppt/notesSlides/notesSlide3.xml><?xml version="1.0" encoding="utf-8"?>
+<p:notes xmlns:a="http://schemas.openxmlformats.org/drawingml/2006/main" xmlns:p="http://schemas.openxmlformats.org/presentationml/2006/main" xmlns:r="http://schemas.openxmlformats.org/officeDocument/2006/relationships">
+  <p:cSld>
+    <p:spTree>
+      <p:nvGrpSpPr>
+        <p:cNvPr id="1" name=""/>
+        <p:cNvGrpSpPr/>
+        <p:nvPr/>
+      </p:nvGrpSpPr>
+      <p:grpSpPr>
+        <a:xfrm>
+          <a:off x="0" y="0"/>
+          <a:ext cx="0" cy="0"/>
+          <a:chOff x="0" y="0"/>
+          <a:chExt cx="0" cy="0"/>
+        </a:xfrm>
+      </p:grpSpPr>
+      <p:sp>
+        <p:nvSpPr>
+          <p:cNvPr id="2" name="Slide Image Placeholder 1"/>
+          <p:cNvSpPr>
+            <a:spLocks noGrp="1"/>
+          </p:cNvSpPr>
+          <p:nvPr>
+            <p:ph type="sldImg" idx="2"/>
+          </p:nvPr>
+        </p:nvSpPr>
+        <p:spPr/>
+      </p:sp>
+      <p:sp>
+        <p:nvSpPr>
+          <p:cNvPr id="3" name="Notes Placeholder 2"/>
+          <p:cNvSpPr>
+            <a:spLocks noGrp="1"/>
+          </p:cNvSpPr>
+          <p:nvPr>
+            <p:ph type="body" idx="3" sz="quarter"/>
+          </p:nvPr>
+        </p:nvSpPr>
+        <p:spPr/>
+        <p:txBody>
+          <a:bodyPr/>
+          <a:lstStyle/>
+          <a:p>
+            <a:r>
+              <a:t>Siehe Trainerhandbuch (Sektion 3) für Moderationshinweise, Timing und erwartete Teilnehmerreaktionen.</a:t>
+            </a:r>
+          </a:p>
+        </p:txBody>
+      </p:sp>
+      <p:sp>
+        <p:nvSpPr>
+          <p:cNvPr id="4" name="Slide Number Placeholder 3"/>
+          <p:cNvSpPr>
+            <a:spLocks noGrp="1"/>
+          </p:cNvSpPr>
+          <p:nvPr>
+            <p:ph type="sldNum" idx="5" sz="quarter"/>
+          </p:nvPr>
+        </p:nvSpPr>
+        <p:spPr/>
+      </p:sp>
+    </p:spTree>
+  </p:cSld>
+  <p:clrMapOvr>
+    <a:masterClrMapping/>
+  </p:clrMapOvr>
+</p:notes>
+</file>
+
+<file path=ppt/notesSlides/notesSlide4.xml><?xml version="1.0" encoding="utf-8"?>
+<p:notes xmlns:a="http://schemas.openxmlformats.org/drawingml/2006/main" xmlns:p="http://schemas.openxmlformats.org/presentationml/2006/main" xmlns:r="http://schemas.openxmlformats.org/officeDocument/2006/relationships">
+  <p:cSld>
+    <p:spTree>
+      <p:nvGrpSpPr>
+        <p:cNvPr id="1" name=""/>
+        <p:cNvGrpSpPr/>
+        <p:nvPr/>
+      </p:nvGrpSpPr>
+      <p:grpSpPr>
+        <a:xfrm>
+          <a:off x="0" y="0"/>
+          <a:ext cx="0" cy="0"/>
+          <a:chOff x="0" y="0"/>
+          <a:chExt cx="0" cy="0"/>
+        </a:xfrm>
+      </p:grpSpPr>
+      <p:sp>
+        <p:nvSpPr>
+          <p:cNvPr id="2" name="Slide Image Placeholder 1"/>
+          <p:cNvSpPr>
+            <a:spLocks noGrp="1"/>
+          </p:cNvSpPr>
+          <p:nvPr>
+            <p:ph type="sldImg" idx="2"/>
+          </p:nvPr>
+        </p:nvSpPr>
+        <p:spPr/>
+      </p:sp>
+      <p:sp>
+        <p:nvSpPr>
+          <p:cNvPr id="3" name="Notes Placeholder 2"/>
+          <p:cNvSpPr>
+            <a:spLocks noGrp="1"/>
+          </p:cNvSpPr>
+          <p:nvPr>
+            <p:ph type="body" idx="3" sz="quarter"/>
+          </p:nvPr>
+        </p:nvSpPr>
+        <p:spPr/>
+        <p:txBody>
+          <a:bodyPr/>
+          <a:lstStyle/>
+          <a:p>
+            <a:r>
+              <a:t>Siehe Trainerhandbuch (Sektion 3) für Moderationshinweise, Timing und erwartete Teilnehmerreaktionen.</a:t>
+            </a:r>
+          </a:p>
+        </p:txBody>
+      </p:sp>
+      <p:sp>
+        <p:nvSpPr>
+          <p:cNvPr id="4" name="Slide Number Placeholder 3"/>
+          <p:cNvSpPr>
+            <a:spLocks noGrp="1"/>
+          </p:cNvSpPr>
+          <p:nvPr>
+            <p:ph type="sldNum" idx="5" sz="quarter"/>
+          </p:nvPr>
+        </p:nvSpPr>
+        <p:spPr/>
+      </p:sp>
+    </p:spTree>
+  </p:cSld>
+  <p:clrMapOvr>
+    <a:masterClrMapping/>
+  </p:clrMapOvr>
+</p:notes>
+</file>
+
+<file path=ppt/notesSlides/notesSlide5.xml><?xml version="1.0" encoding="utf-8"?>
+<p:notes xmlns:a="http://schemas.openxmlformats.org/drawingml/2006/main" xmlns:p="http://schemas.openxmlformats.org/presentationml/2006/main" xmlns:r="http://schemas.openxmlformats.org/officeDocument/2006/relationships">
+  <p:cSld>
+    <p:spTree>
+      <p:nvGrpSpPr>
+        <p:cNvPr id="1" name=""/>
+        <p:cNvGrpSpPr/>
+        <p:nvPr/>
+      </p:nvGrpSpPr>
+      <p:grpSpPr>
+        <a:xfrm>
+          <a:off x="0" y="0"/>
+          <a:ext cx="0" cy="0"/>
+          <a:chOff x="0" y="0"/>
+          <a:chExt cx="0" cy="0"/>
+        </a:xfrm>
+      </p:grpSpPr>
+      <p:sp>
+        <p:nvSpPr>
+          <p:cNvPr id="2" name="Slide Image Placeholder 1"/>
+          <p:cNvSpPr>
+            <a:spLocks noGrp="1"/>
+          </p:cNvSpPr>
+          <p:nvPr>
+            <p:ph type="sldImg" idx="2"/>
+          </p:nvPr>
+        </p:nvSpPr>
+        <p:spPr/>
+      </p:sp>
+      <p:sp>
+        <p:nvSpPr>
+          <p:cNvPr id="3" name="Notes Placeholder 2"/>
+          <p:cNvSpPr>
+            <a:spLocks noGrp="1"/>
+          </p:cNvSpPr>
+          <p:nvPr>
+            <p:ph type="body" idx="3" sz="quarter"/>
+          </p:nvPr>
+        </p:nvSpPr>
+        <p:spPr/>
+        <p:txBody>
+          <a:bodyPr/>
+          <a:lstStyle/>
+          <a:p>
+            <a:r>
+              <a:t>Siehe Trainerhandbuch (Sektion 3) für Moderationshinweise, Timing und erwartete Teilnehmerreaktionen.</a:t>
+            </a:r>
+          </a:p>
+        </p:txBody>
+      </p:sp>
+      <p:sp>
+        <p:nvSpPr>
+          <p:cNvPr id="4" name="Slide Number Placeholder 3"/>
+          <p:cNvSpPr>
+            <a:spLocks noGrp="1"/>
+          </p:cNvSpPr>
+          <p:nvPr>
+            <p:ph type="sldNum" idx="5" sz="quarter"/>
+          </p:nvPr>
+        </p:nvSpPr>
+        <p:spPr/>
+      </p:sp>
+    </p:spTree>
+  </p:cSld>
+  <p:clrMapOvr>
+    <a:masterClrMapping/>
+  </p:clrMapOvr>
+</p:notes>
+</file>
+
+<file path=ppt/notesSlides/notesSlide6.xml><?xml version="1.0" encoding="utf-8"?>
+<p:notes xmlns:a="http://schemas.openxmlformats.org/drawingml/2006/main" xmlns:p="http://schemas.openxmlformats.org/presentationml/2006/main" xmlns:r="http://schemas.openxmlformats.org/officeDocument/2006/relationships">
+  <p:cSld>
+    <p:spTree>
+      <p:nvGrpSpPr>
+        <p:cNvPr id="1" name=""/>
+        <p:cNvGrpSpPr/>
+        <p:nvPr/>
+      </p:nvGrpSpPr>
+      <p:grpSpPr>
+        <a:xfrm>
+          <a:off x="0" y="0"/>
+          <a:ext cx="0" cy="0"/>
+          <a:chOff x="0" y="0"/>
+          <a:chExt cx="0" cy="0"/>
+        </a:xfrm>
+      </p:grpSpPr>
+      <p:sp>
+        <p:nvSpPr>
+          <p:cNvPr id="2" name="Slide Image Placeholder 1"/>
+          <p:cNvSpPr>
+            <a:spLocks noGrp="1"/>
+          </p:cNvSpPr>
+          <p:nvPr>
+            <p:ph type="sldImg" idx="2"/>
+          </p:nvPr>
+        </p:nvSpPr>
+        <p:spPr/>
+      </p:sp>
+      <p:sp>
+        <p:nvSpPr>
+          <p:cNvPr id="3" name="Notes Placeholder 2"/>
+          <p:cNvSpPr>
+            <a:spLocks noGrp="1"/>
+          </p:cNvSpPr>
+          <p:nvPr>
+            <p:ph type="body" idx="3" sz="quarter"/>
+          </p:nvPr>
+        </p:nvSpPr>
+        <p:spPr/>
+        <p:txBody>
+          <a:bodyPr/>
+          <a:lstStyle/>
+          <a:p>
+            <a:r>
+              <a:t>Siehe Trainerhandbuch (Sektion 3) für Moderationshinweise, Timing und erwartete Teilnehmerreaktionen.</a:t>
+            </a:r>
+          </a:p>
+        </p:txBody>
+      </p:sp>
+      <p:sp>
+        <p:nvSpPr>
+          <p:cNvPr id="4" name="Slide Number Placeholder 3"/>
+          <p:cNvSpPr>
+            <a:spLocks noGrp="1"/>
+          </p:cNvSpPr>
+          <p:nvPr>
+            <p:ph type="sldNum" idx="5" sz="quarter"/>
+          </p:nvPr>
+        </p:nvSpPr>
+        <p:spPr/>
+      </p:sp>
+    </p:spTree>
+  </p:cSld>
+  <p:clrMapOvr>
+    <a:masterClrMapping/>
+  </p:clrMapOvr>
+</p:notes>
+</file>
+
+<file path=ppt/notesSlides/notesSlide7.xml><?xml version="1.0" encoding="utf-8"?>
+<p:notes xmlns:a="http://schemas.openxmlformats.org/drawingml/2006/main" xmlns:p="http://schemas.openxmlformats.org/presentationml/2006/main" xmlns:r="http://schemas.openxmlformats.org/officeDocument/2006/relationships">
+  <p:cSld>
+    <p:spTree>
+      <p:nvGrpSpPr>
+        <p:cNvPr id="1" name=""/>
+        <p:cNvGrpSpPr/>
+        <p:nvPr/>
+      </p:nvGrpSpPr>
+      <p:grpSpPr>
+        <a:xfrm>
+          <a:off x="0" y="0"/>
+          <a:ext cx="0" cy="0"/>
+          <a:chOff x="0" y="0"/>
+          <a:chExt cx="0" cy="0"/>
+        </a:xfrm>
+      </p:grpSpPr>
+      <p:sp>
+        <p:nvSpPr>
+          <p:cNvPr id="2" name="Slide Image Placeholder 1"/>
+          <p:cNvSpPr>
+            <a:spLocks noGrp="1"/>
+          </p:cNvSpPr>
+          <p:nvPr>
+            <p:ph type="sldImg" idx="2"/>
+          </p:nvPr>
+        </p:nvSpPr>
+        <p:spPr/>
+      </p:sp>
+      <p:sp>
+        <p:nvSpPr>
+          <p:cNvPr id="3" name="Notes Placeholder 2"/>
+          <p:cNvSpPr>
+            <a:spLocks noGrp="1"/>
+          </p:cNvSpPr>
+          <p:nvPr>
+            <p:ph type="body" idx="3" sz="quarter"/>
+          </p:nvPr>
+        </p:nvSpPr>
+        <p:spPr/>
+        <p:txBody>
+          <a:bodyPr/>
+          <a:lstStyle/>
+          <a:p>
+            <a:r>
+              <a:t>Siehe Trainerhandbuch (Sektion 3) für Moderationshinweise, Timing und erwartete Teilnehmerreaktionen.</a:t>
+            </a:r>
+          </a:p>
+        </p:txBody>
+      </p:sp>
+      <p:sp>
+        <p:nvSpPr>
+          <p:cNvPr id="4" name="Slide Number Placeholder 3"/>
+          <p:cNvSpPr>
+            <a:spLocks noGrp="1"/>
+          </p:cNvSpPr>
+          <p:nvPr>
+            <p:ph type="sldNum" idx="5" sz="quarter"/>
+          </p:nvPr>
+        </p:nvSpPr>
+        <p:spPr/>
+      </p:sp>
+    </p:spTree>
+  </p:cSld>
+  <p:clrMapOvr>
+    <a:masterClrMapping/>
+  </p:clrMapOvr>
+</p:notes>
+</file>
+
+<file path=ppt/notesSlides/notesSlide8.xml><?xml version="1.0" encoding="utf-8"?>
+<p:notes xmlns:a="http://schemas.openxmlformats.org/drawingml/2006/main" xmlns:p="http://schemas.openxmlformats.org/presentationml/2006/main" xmlns:r="http://schemas.openxmlformats.org/officeDocument/2006/relationships">
+  <p:cSld>
+    <p:spTree>
+      <p:nvGrpSpPr>
+        <p:cNvPr id="1" name=""/>
+        <p:cNvGrpSpPr/>
+        <p:nvPr/>
+      </p:nvGrpSpPr>
+      <p:grpSpPr>
+        <a:xfrm>
+          <a:off x="0" y="0"/>
+          <a:ext cx="0" cy="0"/>
+          <a:chOff x="0" y="0"/>
+          <a:chExt cx="0" cy="0"/>
+        </a:xfrm>
+      </p:grpSpPr>
+      <p:sp>
+        <p:nvSpPr>
+          <p:cNvPr id="2" name="Slide Image Placeholder 1"/>
+          <p:cNvSpPr>
+            <a:spLocks noGrp="1"/>
+          </p:cNvSpPr>
+          <p:nvPr>
+            <p:ph type="sldImg" idx="2"/>
+          </p:nvPr>
+        </p:nvSpPr>
+        <p:spPr/>
+      </p:sp>
+      <p:sp>
+        <p:nvSpPr>
+          <p:cNvPr id="3" name="Notes Placeholder 2"/>
+          <p:cNvSpPr>
+            <a:spLocks noGrp="1"/>
+          </p:cNvSpPr>
+          <p:nvPr>
+            <p:ph type="body" idx="3" sz="quarter"/>
+          </p:nvPr>
+        </p:nvSpPr>
+        <p:spPr/>
+        <p:txBody>
+          <a:bodyPr/>
+          <a:lstStyle/>
+          <a:p>
+            <a:r>
+              <a:t>Siehe Trainerhandbuch (Sektion 3) für Moderationshinweise, Timing und erwartete Teilnehmerreaktionen.</a:t>
+            </a:r>
+          </a:p>
+        </p:txBody>
+      </p:sp>
+      <p:sp>
+        <p:nvSpPr>
+          <p:cNvPr id="4" name="Slide Number Placeholder 3"/>
+          <p:cNvSpPr>
+            <a:spLocks noGrp="1"/>
+          </p:cNvSpPr>
+          <p:nvPr>
+            <p:ph type="sldNum" idx="5" sz="quarter"/>
+          </p:nvPr>
+        </p:nvSpPr>
+        <p:spPr/>
+      </p:sp>
+    </p:spTree>
+  </p:cSld>
+  <p:clrMapOvr>
+    <a:masterClrMapping/>
+  </p:clrMapOvr>
+</p:notes>
+</file>
+
+<file path=ppt/notesSlides/notesSlide9.xml><?xml version="1.0" encoding="utf-8"?>
+<p:notes xmlns:a="http://schemas.openxmlformats.org/drawingml/2006/main" xmlns:p="http://schemas.openxmlformats.org/presentationml/2006/main" xmlns:r="http://schemas.openxmlformats.org/officeDocument/2006/relationships">
+  <p:cSld>
+    <p:spTree>
+      <p:nvGrpSpPr>
+        <p:cNvPr id="1" name=""/>
+        <p:cNvGrpSpPr/>
+        <p:nvPr/>
+      </p:nvGrpSpPr>
+      <p:grpSpPr>
+        <a:xfrm>
+          <a:off x="0" y="0"/>
+          <a:ext cx="0" cy="0"/>
+          <a:chOff x="0" y="0"/>
+          <a:chExt cx="0" cy="0"/>
+        </a:xfrm>
+      </p:grpSpPr>
+      <p:sp>
+        <p:nvSpPr>
+          <p:cNvPr id="2" name="Slide Image Placeholder 1"/>
+          <p:cNvSpPr>
+            <a:spLocks noGrp="1"/>
+          </p:cNvSpPr>
+          <p:nvPr>
+            <p:ph type="sldImg" idx="2"/>
+          </p:nvPr>
+        </p:nvSpPr>
+        <p:spPr/>
+      </p:sp>
+      <p:sp>
+        <p:nvSpPr>
+          <p:cNvPr id="3" name="Notes Placeholder 2"/>
+          <p:cNvSpPr>
+            <a:spLocks noGrp="1"/>
+          </p:cNvSpPr>
+          <p:nvPr>
+            <p:ph type="body" idx="3" sz="quarter"/>
+          </p:nvPr>
+        </p:nvSpPr>
+        <p:spPr/>
+        <p:txBody>
+          <a:bodyPr/>
+          <a:lstStyle/>
+          <a:p>
+            <a:r>
+              <a:t>Siehe Trainerhandbuch (Sektion 3) für Moderationshinweise, Timing und erwartete Teilnehmerreaktionen.</a:t>
+            </a:r>
+          </a:p>
+        </p:txBody>
+      </p:sp>
+      <p:sp>
+        <p:nvSpPr>
+          <p:cNvPr id="4" name="Slide Number Placeholder 3"/>
+          <p:cNvSpPr>
+            <a:spLocks noGrp="1"/>
+          </p:cNvSpPr>
+          <p:nvPr>
+            <p:ph type="sldNum" idx="5" sz="quarter"/>
+          </p:nvPr>
+        </p:nvSpPr>
+        <p:spPr/>
+      </p:sp>
+    </p:spTree>
+  </p:cSld>
+  <p:clrMapOvr>
+    <a:masterClrMapping/>
+  </p:clrMapOvr>
+</p:notes>
 </file>
 
 <file path=ppt/slideLayouts/slideLayout1.xml><?xml version="1.0" encoding="utf-8"?>
@@ -5456,64 +6576,7 @@
                 </a:solidFill>
                 <a:latin typeface="Arial"/>
               </a:rPr>
-              <a:t>Kundenname (anonymisiert): ___________________________ Analysedatum: _______________</a:t>
-            </a:r>
-          </a:p>
-          <a:p>
-            <a:pPr>
-              <a:spcBef>
-                <a:spcPts val="400"/>
-              </a:spcBef>
-              <a:spcAft>
-                <a:spcPts val="200"/>
-              </a:spcAft>
-            </a:pPr>
-            <a:r>
-              <a:rPr sz="1200">
-                <a:solidFill>
-                  <a:srgbClr val="3D5466"/>
-                </a:solidFill>
-                <a:latin typeface="Arial"/>
-              </a:rPr>
               <a:t>Optimierungshebel (Top 2):</a:t>
-            </a:r>
-          </a:p>
-          <a:p>
-            <a:pPr>
-              <a:spcBef>
-                <a:spcPts val="400"/>
-              </a:spcBef>
-              <a:spcAft>
-                <a:spcPts val="200"/>
-              </a:spcAft>
-            </a:pPr>
-            <a:r>
-              <a:rPr sz="1300">
-                <a:solidFill>
-                  <a:srgbClr val="3D5466"/>
-                </a:solidFill>
-                <a:latin typeface="Arial"/>
-              </a:rPr>
-              <a:t>▸  ___________________________________________________________________________</a:t>
-            </a:r>
-          </a:p>
-          <a:p>
-            <a:pPr>
-              <a:spcBef>
-                <a:spcPts val="400"/>
-              </a:spcBef>
-              <a:spcAft>
-                <a:spcPts val="200"/>
-              </a:spcAft>
-            </a:pPr>
-            <a:r>
-              <a:rPr sz="1300">
-                <a:solidFill>
-                  <a:srgbClr val="3D5466"/>
-                </a:solidFill>
-                <a:latin typeface="Arial"/>
-              </a:rPr>
-              <a:t>▸  ___________________________________________________________________________</a:t>
             </a:r>
           </a:p>
         </p:txBody>
@@ -5912,7 +6975,7 @@
                 </a:solidFill>
                 <a:latin typeface="Arial"/>
               </a:rPr>
-              <a:t>___________________________________________________________________________</a:t>
+              <a:t>Marktumfeld-Erklärung (Phase 2) – Welche externen Faktoren begründen die Anpassung?</a:t>
             </a:r>
           </a:p>
           <a:p>
@@ -5931,7 +6994,7 @@
                 </a:solidFill>
                 <a:latin typeface="Arial"/>
               </a:rPr>
-              <a:t>Marktumfeld-Erklärung (Phase 2) – Welche externen Faktoren begründen die Anpassung?</a:t>
+              <a:t>Konkrete Anpassung (Phase 3):</a:t>
             </a:r>
           </a:p>
           <a:p>
@@ -5950,83 +7013,7 @@
                 </a:solidFill>
                 <a:latin typeface="Arial"/>
               </a:rPr>
-              <a:t>___________________________________________________________________________</a:t>
-            </a:r>
-          </a:p>
-          <a:p>
-            <a:pPr>
-              <a:spcBef>
-                <a:spcPts val="400"/>
-              </a:spcBef>
-              <a:spcAft>
-                <a:spcPts val="200"/>
-              </a:spcAft>
-            </a:pPr>
-            <a:r>
-              <a:rPr sz="1200">
-                <a:solidFill>
-                  <a:srgbClr val="3D5466"/>
-                </a:solidFill>
-                <a:latin typeface="Arial"/>
-              </a:rPr>
-              <a:t>Konkrete Anpassung (Phase 3):</a:t>
-            </a:r>
-          </a:p>
-          <a:p>
-            <a:pPr>
-              <a:spcBef>
-                <a:spcPts val="400"/>
-              </a:spcBef>
-              <a:spcAft>
-                <a:spcPts val="200"/>
-              </a:spcAft>
-            </a:pPr>
-            <a:r>
-              <a:rPr sz="1200">
-                <a:solidFill>
-                  <a:srgbClr val="3D5466"/>
-                </a:solidFill>
-                <a:latin typeface="Arial"/>
-              </a:rPr>
-              <a:t>___________________________________________________________________________</a:t>
-            </a:r>
-          </a:p>
-          <a:p>
-            <a:pPr>
-              <a:spcBef>
-                <a:spcPts val="400"/>
-              </a:spcBef>
-              <a:spcAft>
-                <a:spcPts val="200"/>
-              </a:spcAft>
-            </a:pPr>
-            <a:r>
-              <a:rPr sz="1200">
-                <a:solidFill>
-                  <a:srgbClr val="3D5466"/>
-                </a:solidFill>
-                <a:latin typeface="Arial"/>
-              </a:rPr>
               <a:t>Alternativen (Phase 4) – Welche Optionen biete ich an?</a:t>
-            </a:r>
-          </a:p>
-          <a:p>
-            <a:pPr>
-              <a:spcBef>
-                <a:spcPts val="400"/>
-              </a:spcBef>
-              <a:spcAft>
-                <a:spcPts val="200"/>
-              </a:spcAft>
-            </a:pPr>
-            <a:r>
-              <a:rPr sz="1200">
-                <a:solidFill>
-                  <a:srgbClr val="3D5466"/>
-                </a:solidFill>
-                <a:latin typeface="Arial"/>
-              </a:rPr>
-              <a:t>___________________________________________________________________________</a:t>
             </a:r>
           </a:p>
           <a:p>
@@ -9630,4 +10617,324 @@
   </a:objectDefaults>
   <a:extraClrSchemeLst/>
 </a:theme>
+</file>
+
+<file path=ppt/theme/theme2.xml><?xml version="1.0" encoding="utf-8"?>
+<a:theme xmlns:a="http://schemas.openxmlformats.org/drawingml/2006/main" name="Office Theme">
+  <a:themeElements>
+    <a:clrScheme name="Office">
+      <a:dk1>
+        <a:sysClr val="windowText" lastClr="000000"/>
+      </a:dk1>
+      <a:lt1>
+        <a:sysClr val="window" lastClr="FFFFFF"/>
+      </a:lt1>
+      <a:dk2>
+        <a:srgbClr val="1F497D"/>
+      </a:dk2>
+      <a:lt2>
+        <a:srgbClr val="EEECE1"/>
+      </a:lt2>
+      <a:accent1>
+        <a:srgbClr val="4F81BD"/>
+      </a:accent1>
+      <a:accent2>
+        <a:srgbClr val="C0504D"/>
+      </a:accent2>
+      <a:accent3>
+        <a:srgbClr val="9BBB59"/>
+      </a:accent3>
+      <a:accent4>
+        <a:srgbClr val="8064A2"/>
+      </a:accent4>
+      <a:accent5>
+        <a:srgbClr val="4BACC6"/>
+      </a:accent5>
+      <a:accent6>
+        <a:srgbClr val="F79646"/>
+      </a:accent6>
+      <a:hlink>
+        <a:srgbClr val="0000FF"/>
+      </a:hlink>
+      <a:folHlink>
+        <a:srgbClr val="800080"/>
+      </a:folHlink>
+    </a:clrScheme>
+    <a:fontScheme name="Office">
+      <a:majorFont>
+        <a:latin typeface="Calibri"/>
+        <a:ea typeface=""/>
+        <a:cs typeface=""/>
+        <a:font script="Jpan" typeface="ＭＳ Ｐゴシック"/>
+        <a:font script="Hang" typeface="맑은 고딕"/>
+        <a:font script="Hans" typeface="宋体"/>
+        <a:font script="Hant" typeface="新細明體"/>
+        <a:font script="Arab" typeface="Times New Roman"/>
+        <a:font script="Hebr" typeface="Times New Roman"/>
+        <a:font script="Thai" typeface="Angsana New"/>
+        <a:font script="Ethi" typeface="Nyala"/>
+        <a:font script="Beng" typeface="Vrinda"/>
+        <a:font script="Gujr" typeface="Shruti"/>
+        <a:font script="Khmr" typeface="MoolBoran"/>
+        <a:font script="Knda" typeface="Tunga"/>
+        <a:font script="Guru" typeface="Raavi"/>
+        <a:font script="Cans" typeface="Euphemia"/>
+        <a:font script="Cher" typeface="Plantagenet Cherokee"/>
+        <a:font script="Yiii" typeface="Microsoft Yi Baiti"/>
+        <a:font script="Tibt" typeface="Microsoft Himalaya"/>
+        <a:font script="Thaa" typeface="MV Boli"/>
+        <a:font script="Deva" typeface="Mangal"/>
+        <a:font script="Telu" typeface="Gautami"/>
+        <a:font script="Taml" typeface="Latha"/>
+        <a:font script="Syrc" typeface="Estrangelo Edessa"/>
+        <a:font script="Orya" typeface="Kalinga"/>
+        <a:font script="Mlym" typeface="Kartika"/>
+        <a:font script="Laoo" typeface="DokChampa"/>
+        <a:font script="Sinh" typeface="Iskoola Pota"/>
+        <a:font script="Mong" typeface="Mongolian Baiti"/>
+        <a:font script="Viet" typeface="Times New Roman"/>
+        <a:font script="Uigh" typeface="Microsoft Uighur"/>
+        <a:font script="Geor" typeface="Sylfaen"/>
+      </a:majorFont>
+      <a:minorFont>
+        <a:latin typeface="Calibri"/>
+        <a:ea typeface=""/>
+        <a:cs typeface=""/>
+        <a:font script="Jpan" typeface="ＭＳ Ｐゴシック"/>
+        <a:font script="Hang" typeface="맑은 고딕"/>
+        <a:font script="Hans" typeface="宋体"/>
+        <a:font script="Hant" typeface="新細明體"/>
+        <a:font script="Arab" typeface="Arial"/>
+        <a:font script="Hebr" typeface="Arial"/>
+        <a:font script="Thai" typeface="Cordia New"/>
+        <a:font script="Ethi" typeface="Nyala"/>
+        <a:font script="Beng" typeface="Vrinda"/>
+        <a:font script="Gujr" typeface="Shruti"/>
+        <a:font script="Khmr" typeface="DaunPenh"/>
+        <a:font script="Knda" typeface="Tunga"/>
+        <a:font script="Guru" typeface="Raavi"/>
+        <a:font script="Cans" typeface="Euphemia"/>
+        <a:font script="Cher" typeface="Plantagenet Cherokee"/>
+        <a:font script="Yiii" typeface="Microsoft Yi Baiti"/>
+        <a:font script="Tibt" typeface="Microsoft Himalaya"/>
+        <a:font script="Thaa" typeface="MV Boli"/>
+        <a:font script="Deva" typeface="Mangal"/>
+        <a:font script="Telu" typeface="Gautami"/>
+        <a:font script="Taml" typeface="Latha"/>
+        <a:font script="Syrc" typeface="Estrangelo Edessa"/>
+        <a:font script="Orya" typeface="Kalinga"/>
+        <a:font script="Mlym" typeface="Kartika"/>
+        <a:font script="Laoo" typeface="DokChampa"/>
+        <a:font script="Sinh" typeface="Iskoola Pota"/>
+        <a:font script="Mong" typeface="Mongolian Baiti"/>
+        <a:font script="Viet" typeface="Arial"/>
+        <a:font script="Uigh" typeface="Microsoft Uighur"/>
+        <a:font script="Geor" typeface="Sylfaen"/>
+      </a:minorFont>
+    </a:fontScheme>
+    <a:fmtScheme name="Office">
+      <a:fillStyleLst>
+        <a:solidFill>
+          <a:schemeClr val="phClr"/>
+        </a:solidFill>
+        <a:gradFill rotWithShape="1">
+          <a:gsLst>
+            <a:gs pos="0">
+              <a:schemeClr val="phClr">
+                <a:tint val="50000"/>
+                <a:satMod val="300000"/>
+              </a:schemeClr>
+            </a:gs>
+            <a:gs pos="35000">
+              <a:schemeClr val="phClr">
+                <a:tint val="37000"/>
+                <a:satMod val="300000"/>
+              </a:schemeClr>
+            </a:gs>
+            <a:gs pos="100000">
+              <a:schemeClr val="phClr">
+                <a:tint val="15000"/>
+                <a:satMod val="350000"/>
+              </a:schemeClr>
+            </a:gs>
+          </a:gsLst>
+          <a:lin ang="16200000" scaled="1"/>
+        </a:gradFill>
+        <a:gradFill rotWithShape="1">
+          <a:gsLst>
+            <a:gs pos="0">
+              <a:schemeClr val="phClr">
+                <a:tint val="100000"/>
+                <a:shade val="100000"/>
+                <a:satMod val="130000"/>
+              </a:schemeClr>
+            </a:gs>
+            <a:gs pos="100000">
+              <a:schemeClr val="phClr">
+                <a:tint val="50000"/>
+                <a:shade val="100000"/>
+                <a:satMod val="350000"/>
+              </a:schemeClr>
+            </a:gs>
+          </a:gsLst>
+          <a:lin ang="16200000" scaled="0"/>
+        </a:gradFill>
+      </a:fillStyleLst>
+      <a:lnStyleLst>
+        <a:ln w="9525" cap="flat" cmpd="sng" algn="ctr">
+          <a:solidFill>
+            <a:schemeClr val="phClr">
+              <a:shade val="95000"/>
+              <a:satMod val="105000"/>
+            </a:schemeClr>
+          </a:solidFill>
+          <a:prstDash val="solid"/>
+        </a:ln>
+        <a:ln w="25400" cap="flat" cmpd="sng" algn="ctr">
+          <a:solidFill>
+            <a:schemeClr val="phClr"/>
+          </a:solidFill>
+          <a:prstDash val="solid"/>
+        </a:ln>
+        <a:ln w="38100" cap="flat" cmpd="sng" algn="ctr">
+          <a:solidFill>
+            <a:schemeClr val="phClr"/>
+          </a:solidFill>
+          <a:prstDash val="solid"/>
+        </a:ln>
+      </a:lnStyleLst>
+      <a:effectStyleLst>
+        <a:effectStyle>
+          <a:effectLst>
+            <a:outerShdw blurRad="40000" dist="20000" dir="5400000" rotWithShape="0">
+              <a:srgbClr val="000000">
+                <a:alpha val="38000"/>
+              </a:srgbClr>
+            </a:outerShdw>
+          </a:effectLst>
+        </a:effectStyle>
+        <a:effectStyle>
+          <a:effectLst>
+            <a:outerShdw blurRad="40000" dist="23000" dir="5400000" rotWithShape="0">
+              <a:srgbClr val="000000">
+                <a:alpha val="35000"/>
+              </a:srgbClr>
+            </a:outerShdw>
+          </a:effectLst>
+        </a:effectStyle>
+        <a:effectStyle>
+          <a:effectLst>
+            <a:outerShdw blurRad="40000" dist="23000" dir="5400000" rotWithShape="0">
+              <a:srgbClr val="000000">
+                <a:alpha val="35000"/>
+              </a:srgbClr>
+            </a:outerShdw>
+          </a:effectLst>
+          <a:scene3d>
+            <a:camera prst="orthographicFront">
+              <a:rot lat="0" lon="0" rev="0"/>
+            </a:camera>
+            <a:lightRig rig="threePt" dir="t">
+              <a:rot lat="0" lon="0" rev="1200000"/>
+            </a:lightRig>
+          </a:scene3d>
+          <a:sp3d>
+            <a:bevelT w="63500" h="25400"/>
+          </a:sp3d>
+        </a:effectStyle>
+      </a:effectStyleLst>
+      <a:bgFillStyleLst>
+        <a:solidFill>
+          <a:schemeClr val="phClr"/>
+        </a:solidFill>
+        <a:gradFill rotWithShape="1">
+          <a:gsLst>
+            <a:gs pos="0">
+              <a:schemeClr val="phClr">
+                <a:tint val="40000"/>
+                <a:satMod val="350000"/>
+              </a:schemeClr>
+            </a:gs>
+            <a:gs pos="40000">
+              <a:schemeClr val="phClr">
+                <a:tint val="45000"/>
+                <a:shade val="99000"/>
+                <a:satMod val="350000"/>
+              </a:schemeClr>
+            </a:gs>
+            <a:gs pos="100000">
+              <a:schemeClr val="phClr">
+                <a:shade val="20000"/>
+                <a:satMod val="255000"/>
+              </a:schemeClr>
+            </a:gs>
+          </a:gsLst>
+          <a:path path="circle">
+            <a:fillToRect l="50000" t="-80000" r="50000" b="180000"/>
+          </a:path>
+        </a:gradFill>
+        <a:gradFill rotWithShape="1">
+          <a:gsLst>
+            <a:gs pos="0">
+              <a:schemeClr val="phClr">
+                <a:tint val="80000"/>
+                <a:satMod val="300000"/>
+              </a:schemeClr>
+            </a:gs>
+            <a:gs pos="100000">
+              <a:schemeClr val="phClr">
+                <a:shade val="30000"/>
+                <a:satMod val="200000"/>
+              </a:schemeClr>
+            </a:gs>
+          </a:gsLst>
+          <a:path path="circle">
+            <a:fillToRect l="50000" t="50000" r="50000" b="50000"/>
+          </a:path>
+        </a:gradFill>
+      </a:bgFillStyleLst>
+    </a:fmtScheme>
+  </a:themeElements>
+  <a:objectDefaults>
+    <a:spDef>
+      <a:spPr/>
+      <a:bodyPr/>
+      <a:lstStyle/>
+      <a:style>
+        <a:lnRef idx="1">
+          <a:schemeClr val="accent1"/>
+        </a:lnRef>
+        <a:fillRef idx="3">
+          <a:schemeClr val="accent1"/>
+        </a:fillRef>
+        <a:effectRef idx="2">
+          <a:schemeClr val="accent1"/>
+        </a:effectRef>
+        <a:fontRef idx="minor">
+          <a:schemeClr val="lt1"/>
+        </a:fontRef>
+      </a:style>
+    </a:spDef>
+    <a:lnDef>
+      <a:spPr/>
+      <a:bodyPr/>
+      <a:lstStyle/>
+      <a:style>
+        <a:lnRef idx="2">
+          <a:schemeClr val="accent1"/>
+        </a:lnRef>
+        <a:fillRef idx="0">
+          <a:schemeClr val="accent1"/>
+        </a:fillRef>
+        <a:effectRef idx="1">
+          <a:schemeClr val="accent1"/>
+        </a:effectRef>
+        <a:fontRef idx="minor">
+          <a:schemeClr val="tx1"/>
+        </a:fontRef>
+      </a:style>
+    </a:lnDef>
+  </a:objectDefaults>
+  <a:extraClrSchemeLst/>
+</a:theme>
 </file>
--- a/protected-downloads/praesentation/M14.pptx
+++ b/protected-downloads/praesentation/M14.pptx
@@ -4590,7 +4590,7 @@
                 </a:solidFill>
                 <a:latin typeface="Arial"/>
               </a:rPr>
-              <a:t>Sparring</a:t>
+              <a:t>Sparringspartner</a:t>
             </a:r>
           </a:p>
         </p:txBody>

--- a/protected-downloads/praesentation/M14.pptx
+++ b/protected-downloads/praesentation/M14.pptx
@@ -7014,25 +7014,6 @@
                 <a:latin typeface="Arial"/>
               </a:rPr>
               <a:t>Alternativen (Phase 4) – Welche Optionen biete ich an?</a:t>
-            </a:r>
-          </a:p>
-          <a:p>
-            <a:pPr>
-              <a:spcBef>
-                <a:spcPts val="400"/>
-              </a:spcBef>
-              <a:spcAft>
-                <a:spcPts val="200"/>
-              </a:spcAft>
-            </a:pPr>
-            <a:r>
-              <a:rPr sz="1200">
-                <a:solidFill>
-                  <a:srgbClr val="3D5466"/>
-                </a:solidFill>
-                <a:latin typeface="Arial"/>
-              </a:rPr>
-              <a:t># 5. PRAXISTRANSFER</a:t>
             </a:r>
           </a:p>
         </p:txBody>

--- a/protected-downloads/praesentation/M14.pptx
+++ b/protected-downloads/praesentation/M14.pptx
@@ -19,6 +19,7 @@
     <p:sldId id="267" r:id="rId19"/>
     <p:sldId id="268" r:id="rId20"/>
     <p:sldId id="269" r:id="rId21"/>
+    <p:sldId id="270" r:id="rId22"/>
   </p:sldIdLst>
   <p:sldSz cx="12188952" cy="6858000" type="screen4x3"/>
   <p:notesSz cx="6858000" cy="9144000"/>
@@ -5607,6 +5608,25 @@
                 </a:solidFill>
                 <a:latin typeface="Arial"/>
               </a:rPr>
+              <a:t>Die folgende Handlungsempfehlung-Karte verknüpft diese Ertragssignale mit dem jeweils passenden Vertriebsimpuls:</a:t>
+            </a:r>
+          </a:p>
+          <a:p>
+            <a:pPr>
+              <a:spcBef>
+                <a:spcPts val="400"/>
+              </a:spcBef>
+              <a:spcAft>
+                <a:spcPts val="200"/>
+              </a:spcAft>
+            </a:pPr>
+            <a:r>
+              <a:rPr sz="1200">
+                <a:solidFill>
+                  <a:srgbClr val="3D5466"/>
+                </a:solidFill>
+                <a:latin typeface="Arial"/>
+              </a:rPr>
               <a:t>## 4.4 Das Konditionengespräch wertbasiert führen</a:t>
             </a:r>
           </a:p>
@@ -5723,7 +5743,7 @@
             <a:avLst/>
           </a:prstGeom>
           <a:solidFill>
-            <a:srgbClr val="EDEDF3"/>
+            <a:srgbClr val="FFFFFF"/>
           </a:solidFill>
           <a:ln>
             <a:noFill/>
@@ -5824,51 +5844,43 @@
                 </a:solidFill>
                 <a:latin typeface="JetBrains Mono"/>
               </a:rPr>
-              <a:t>M14  ·  INHALT</a:t>
-            </a:r>
-          </a:p>
-        </p:txBody>
-      </p:sp>
-      <p:sp>
-        <p:nvSpPr>
-          <p:cNvPr id="5" name="Rectangle 4"/>
-          <p:cNvSpPr/>
-          <p:nvPr/>
-        </p:nvSpPr>
-        <p:spPr>
-          <a:xfrm>
-            <a:off x="0" y="1234440"/>
-            <a:ext cx="12188952" cy="12700"/>
-          </a:xfrm>
-          <a:prstGeom prst="rect">
-            <a:avLst/>
-          </a:prstGeom>
-          <a:solidFill>
-            <a:srgbClr val="D8DFE4"/>
-          </a:solidFill>
-          <a:ln>
-            <a:noFill/>
-          </a:ln>
-        </p:spPr>
-        <p:style>
-          <a:lnRef idx="1">
-            <a:schemeClr val="accent1"/>
-          </a:lnRef>
-          <a:fillRef idx="3">
-            <a:schemeClr val="accent1"/>
-          </a:fillRef>
-          <a:effectRef idx="2">
-            <a:schemeClr val="accent1"/>
-          </a:effectRef>
-          <a:fontRef idx="minor">
-            <a:schemeClr val="lt1"/>
-          </a:fontRef>
-        </p:style>
-        <p:txBody>
-          <a:bodyPr rtlCol="0" anchor="ctr"/>
-          <a:lstStyle/>
-          <a:p>
-            <a:pPr algn="ctr"/>
+              <a:t>M14  ·  SCHAUBILD</a:t>
+            </a:r>
+          </a:p>
+        </p:txBody>
+      </p:sp>
+      <p:sp>
+        <p:nvSpPr>
+          <p:cNvPr id="5" name="TextBox 4"/>
+          <p:cNvSpPr txBox="1"/>
+          <p:nvPr/>
+        </p:nvSpPr>
+        <p:spPr>
+          <a:xfrm>
+            <a:off x="685800" y="502920"/>
+            <a:ext cx="10817352" cy="594360"/>
+          </a:xfrm>
+          <a:prstGeom prst="rect">
+            <a:avLst/>
+          </a:prstGeom>
+          <a:noFill/>
+        </p:spPr>
+        <p:txBody>
+          <a:bodyPr wrap="square">
+            <a:spAutoFit/>
+          </a:bodyPr>
+          <a:lstStyle/>
+          <a:p>
+            <a:pPr algn="l"/>
+            <a:r>
+              <a:rPr sz="2000" b="1" i="0">
+                <a:solidFill>
+                  <a:srgbClr val="1F2C56"/>
+                </a:solidFill>
+                <a:latin typeface="Source Serif 4"/>
+              </a:rPr>
+              <a:t>Handlungsempfehlung</a:t>
+            </a:r>
           </a:p>
         </p:txBody>
       </p:sp>
@@ -5880,8 +5892,8 @@
         </p:nvSpPr>
         <p:spPr>
           <a:xfrm>
-            <a:off x="685800" y="502920"/>
-            <a:ext cx="36576" cy="658368"/>
+            <a:off x="685800" y="1143000"/>
+            <a:ext cx="10817352" cy="25400"/>
           </a:xfrm>
           <a:prstGeom prst="rect">
             <a:avLst/>
@@ -5915,295 +5927,33 @@
           </a:p>
         </p:txBody>
       </p:sp>
-      <p:sp>
-        <p:nvSpPr>
-          <p:cNvPr id="7" name="TextBox 6"/>
-          <p:cNvSpPr txBox="1"/>
-          <p:nvPr/>
-        </p:nvSpPr>
-        <p:spPr>
-          <a:xfrm>
-            <a:off x="813816" y="502920"/>
-            <a:ext cx="10634472" cy="685800"/>
-          </a:xfrm>
-          <a:prstGeom prst="rect">
-            <a:avLst/>
-          </a:prstGeom>
-          <a:noFill/>
-        </p:spPr>
-        <p:txBody>
-          <a:bodyPr wrap="square">
-            <a:spAutoFit/>
-          </a:bodyPr>
-          <a:lstStyle/>
-          <a:p>
-            <a:pPr algn="l"/>
-            <a:r>
-              <a:rPr sz="2400" b="1" i="0">
-                <a:solidFill>
-                  <a:srgbClr val="1F2C56"/>
-                </a:solidFill>
-                <a:latin typeface="Source Serif 4"/>
-              </a:rPr>
-              <a:t>Vom Konditionengespräch zum Wertgespräch</a:t>
-            </a:r>
-          </a:p>
-        </p:txBody>
-      </p:sp>
-      <p:sp>
-        <p:nvSpPr>
-          <p:cNvPr id="8" name="TextBox 7"/>
-          <p:cNvSpPr txBox="1"/>
-          <p:nvPr/>
-        </p:nvSpPr>
-        <p:spPr>
-          <a:xfrm>
-            <a:off x="685800" y="1417320"/>
-            <a:ext cx="10817352" cy="5029200"/>
-          </a:xfrm>
-          <a:prstGeom prst="rect">
-            <a:avLst/>
-          </a:prstGeom>
-          <a:noFill/>
-        </p:spPr>
-        <p:txBody>
-          <a:bodyPr wrap="square">
-            <a:spAutoFit/>
-          </a:bodyPr>
-          <a:lstStyle/>
-          <a:p>
-            <a:pPr>
-              <a:spcBef>
-                <a:spcPts val="400"/>
-              </a:spcBef>
-              <a:spcAft>
-                <a:spcPts val="200"/>
-              </a:spcAft>
-            </a:pPr>
-            <a:r>
-              <a:rPr sz="1200">
-                <a:solidFill>
-                  <a:srgbClr val="3D5466"/>
-                </a:solidFill>
-                <a:latin typeface="Arial"/>
-              </a:rPr>
-              <a:t>Ein wertbasierter Ansatz kehrt die Reihenfolge um:</a:t>
-            </a:r>
-          </a:p>
-          <a:p>
-            <a:pPr>
-              <a:spcBef>
-                <a:spcPts val="400"/>
-              </a:spcBef>
-              <a:spcAft>
-                <a:spcPts val="200"/>
-              </a:spcAft>
-            </a:pPr>
-            <a:r>
-              <a:rPr sz="1200">
-                <a:solidFill>
-                  <a:srgbClr val="3D5466"/>
-                </a:solidFill>
-                <a:latin typeface="Arial"/>
-              </a:rPr>
-              <a:t>Phase 1: Wert der Beziehung artikulieren</a:t>
-            </a:r>
-          </a:p>
-          <a:p>
-            <a:pPr>
-              <a:spcBef>
-                <a:spcPts val="400"/>
-              </a:spcBef>
-              <a:spcAft>
-                <a:spcPts val="200"/>
-              </a:spcAft>
-            </a:pPr>
-            <a:r>
-              <a:rPr sz="1200">
-                <a:solidFill>
-                  <a:srgbClr val="3D5466"/>
-                </a:solidFill>
-                <a:latin typeface="Arial"/>
-              </a:rPr>
-              <a:t>Phase 2: Marktumfeld erklären</a:t>
-            </a:r>
-          </a:p>
-          <a:p>
-            <a:pPr>
-              <a:spcBef>
-                <a:spcPts val="400"/>
-              </a:spcBef>
-              <a:spcAft>
-                <a:spcPts val="200"/>
-              </a:spcAft>
-            </a:pPr>
-            <a:r>
-              <a:rPr sz="1200">
-                <a:solidFill>
-                  <a:srgbClr val="3D5466"/>
-                </a:solidFill>
-                <a:latin typeface="Arial"/>
-              </a:rPr>
-              <a:t>Zinsentwicklung, Refinanzierungskosten, Risikoumfeld transparent machen – ohne Details zu internen Kalkulationen preiszugeben.</a:t>
-            </a:r>
-          </a:p>
-          <a:p>
-            <a:pPr>
-              <a:spcBef>
-                <a:spcPts val="400"/>
-              </a:spcBef>
-              <a:spcAft>
-                <a:spcPts val="200"/>
-              </a:spcAft>
-            </a:pPr>
-            <a:r>
-              <a:rPr sz="1200">
-                <a:solidFill>
-                  <a:srgbClr val="3D5466"/>
-                </a:solidFill>
-                <a:latin typeface="Arial"/>
-              </a:rPr>
-              <a:t>Phase 3: Konditionen transparent kommunizieren</a:t>
-            </a:r>
-          </a:p>
-          <a:p>
-            <a:pPr>
-              <a:spcBef>
-                <a:spcPts val="400"/>
-              </a:spcBef>
-              <a:spcAft>
-                <a:spcPts val="200"/>
-              </a:spcAft>
-            </a:pPr>
-            <a:r>
-              <a:rPr sz="1200">
-                <a:solidFill>
-                  <a:srgbClr val="3D5466"/>
-                </a:solidFill>
-                <a:latin typeface="Arial"/>
-              </a:rPr>
-              <a:t>Phase 4: Alternativen anbieten</a:t>
-            </a:r>
-          </a:p>
-          <a:p>
-            <a:pPr>
-              <a:spcBef>
-                <a:spcPts val="400"/>
-              </a:spcBef>
-              <a:spcAft>
-                <a:spcPts val="200"/>
-              </a:spcAft>
-            </a:pPr>
-            <a:r>
-              <a:rPr sz="1200">
-                <a:solidFill>
-                  <a:srgbClr val="3D5466"/>
-                </a:solidFill>
-                <a:latin typeface="Arial"/>
-              </a:rPr>
-              <a:t>Dem Kunden Optionen geben: „Wenn wir die Besicherung verbessern, könnten wir bei der Marge etwas flexibler sein." Oder: „Wenn Sie das R+V-Paket hinzunehmen, sehen wir die Gesamtbeziehung anders."</a:t>
-            </a:r>
-          </a:p>
-          <a:p>
-            <a:pPr>
-              <a:spcBef>
-                <a:spcPts val="400"/>
-              </a:spcBef>
-              <a:spcAft>
-                <a:spcPts val="200"/>
-              </a:spcAft>
-            </a:pPr>
-            <a:r>
-              <a:rPr sz="1200">
-                <a:solidFill>
-                  <a:srgbClr val="3D5466"/>
-                </a:solidFill>
-                <a:latin typeface="Arial"/>
-              </a:rPr>
-              <a:t>## 4.5 Praxiscase: Ertragsanalyse Bauer &amp; Söhne GmbH</a:t>
-            </a:r>
-          </a:p>
-          <a:p>
-            <a:pPr>
-              <a:spcBef>
-                <a:spcPts val="400"/>
-              </a:spcBef>
-              <a:spcAft>
-                <a:spcPts val="200"/>
-              </a:spcAft>
-            </a:pPr>
-            <a:r>
-              <a:rPr sz="1200">
-                <a:solidFill>
-                  <a:srgbClr val="3D5466"/>
-                </a:solidFill>
-                <a:latin typeface="Arial"/>
-              </a:rPr>
-              <a:t>Ausgangssituation</a:t>
-            </a:r>
-          </a:p>
-          <a:p>
-            <a:pPr>
-              <a:spcBef>
-                <a:spcPts val="400"/>
-              </a:spcBef>
-              <a:spcAft>
-                <a:spcPts val="200"/>
-              </a:spcAft>
-            </a:pPr>
-            <a:r>
-              <a:rPr sz="1200">
-                <a:solidFill>
-                  <a:srgbClr val="3D5466"/>
-                </a:solidFill>
-                <a:latin typeface="Arial"/>
-              </a:rPr>
-              <a:t>Bei der Vorbereitung des Jahresgesprächs analysiert Sandra den Deckungsbeitrag:</a:t>
-            </a:r>
-          </a:p>
-          <a:p>
-            <a:pPr>
-              <a:spcBef>
-                <a:spcPts val="400"/>
-              </a:spcBef>
-              <a:spcAft>
-                <a:spcPts val="200"/>
-              </a:spcAft>
-            </a:pPr>
-            <a:r>
-              <a:rPr sz="1200">
-                <a:solidFill>
-                  <a:srgbClr val="3D5466"/>
-                </a:solidFill>
-                <a:latin typeface="Arial"/>
-              </a:rPr>
-              <a:t>Die Analyse zeigt drei Probleme:</a:t>
-            </a:r>
-          </a:p>
-          <a:p>
-            <a:pPr>
-              <a:spcBef>
-                <a:spcPts val="400"/>
-              </a:spcBef>
-              <a:spcAft>
-                <a:spcPts val="200"/>
-              </a:spcAft>
-            </a:pPr>
-            <a:r>
-              <a:rPr sz="1300">
-                <a:solidFill>
-                  <a:srgbClr val="3D5466"/>
-                </a:solidFill>
-                <a:latin typeface="Arial"/>
-              </a:rPr>
-              <a:t>▸  Die Kreditmarge von 1,25 % deckt den EL von 0,65 % nur mit 0,60 % Nettomarge – unter dem bankinternen Mindeststandard von 0,80 % (fiktiver Fallbeispielwert; die konkrete Untergrenze wird hausindividuell festgelegt).</a:t>
-            </a:r>
-          </a:p>
-        </p:txBody>
-      </p:sp>
-      <p:sp>
-        <p:nvSpPr>
-          <p:cNvPr id="9" name="Rectangle 8"/>
+      <p:pic>
+        <p:nvPicPr>
+          <p:cNvPr id="7" name="Picture 6" descr="image.png"/>
+          <p:cNvPicPr>
+            <a:picLocks noChangeAspect="1"/>
+          </p:cNvPicPr>
+          <p:nvPr/>
+        </p:nvPicPr>
+        <p:blipFill>
+          <a:blip r:embed="rId2"/>
+          <a:stretch>
+            <a:fillRect/>
+          </a:stretch>
+        </p:blipFill>
+        <p:spPr>
+          <a:xfrm>
+            <a:off x="2303489" y="1325880"/>
+            <a:ext cx="7581973" cy="4937760"/>
+          </a:xfrm>
+          <a:prstGeom prst="rect">
+            <a:avLst/>
+          </a:prstGeom>
+        </p:spPr>
+      </p:pic>
+      <p:sp>
+        <p:nvSpPr>
+          <p:cNvPr id="8" name="Rectangle 7"/>
           <p:cNvSpPr/>
           <p:nvPr/>
         </p:nvSpPr>
@@ -6246,7 +5996,7 @@
       </p:sp>
       <p:sp>
         <p:nvSpPr>
-          <p:cNvPr id="10" name="TextBox 9"/>
+          <p:cNvPr id="9" name="TextBox 8"/>
           <p:cNvSpPr txBox="1"/>
           <p:nvPr/>
         </p:nvSpPr>
@@ -6275,6 +6025,41 @@
                 <a:latin typeface="JetBrains Mono"/>
               </a:rPr>
               <a:t>Benedikt Zoller Coaching  ·  FKB Campus  ·  M14</a:t>
+            </a:r>
+          </a:p>
+        </p:txBody>
+      </p:sp>
+      <p:sp>
+        <p:nvSpPr>
+          <p:cNvPr id="10" name="TextBox 9"/>
+          <p:cNvSpPr txBox="1"/>
+          <p:nvPr/>
+        </p:nvSpPr>
+        <p:spPr>
+          <a:xfrm>
+            <a:off x="7176211" y="6583680"/>
+            <a:ext cx="4326940" cy="256032"/>
+          </a:xfrm>
+          <a:prstGeom prst="rect">
+            <a:avLst/>
+          </a:prstGeom>
+          <a:noFill/>
+        </p:spPr>
+        <p:txBody>
+          <a:bodyPr wrap="none">
+            <a:spAutoFit/>
+          </a:bodyPr>
+          <a:lstStyle/>
+          <a:p>
+            <a:pPr algn="r"/>
+            <a:r>
+              <a:rPr sz="700">
+                <a:solidFill>
+                  <a:srgbClr val="A0B4D2"/>
+                </a:solidFill>
+                <a:latin typeface="JetBrains Mono"/>
+              </a:rPr>
+              <a:t>Schaubild</a:t>
             </a:r>
           </a:p>
         </p:txBody>
@@ -6534,7 +6319,7 @@
                 </a:solidFill>
                 <a:latin typeface="Source Serif 4"/>
               </a:rPr>
-              <a:t>Arbeitsblatt A: Deckungsbeitragsrechnung</a:t>
+              <a:t>Vom Konditionengespräch zum Wertgespräch</a:t>
             </a:r>
           </a:p>
         </p:txBody>
@@ -6576,7 +6361,216 @@
                 </a:solidFill>
                 <a:latin typeface="Arial"/>
               </a:rPr>
-              <a:t>Optimierungshebel (Top 2):</a:t>
+              <a:t>Ein wertbasierter Ansatz kehrt die Reihenfolge um:</a:t>
+            </a:r>
+          </a:p>
+          <a:p>
+            <a:pPr>
+              <a:spcBef>
+                <a:spcPts val="400"/>
+              </a:spcBef>
+              <a:spcAft>
+                <a:spcPts val="200"/>
+              </a:spcAft>
+            </a:pPr>
+            <a:r>
+              <a:rPr sz="1200">
+                <a:solidFill>
+                  <a:srgbClr val="3D5466"/>
+                </a:solidFill>
+                <a:latin typeface="Arial"/>
+              </a:rPr>
+              <a:t>Phase 1: Wert der Beziehung artikulieren</a:t>
+            </a:r>
+          </a:p>
+          <a:p>
+            <a:pPr>
+              <a:spcBef>
+                <a:spcPts val="400"/>
+              </a:spcBef>
+              <a:spcAft>
+                <a:spcPts val="200"/>
+              </a:spcAft>
+            </a:pPr>
+            <a:r>
+              <a:rPr sz="1200">
+                <a:solidFill>
+                  <a:srgbClr val="3D5466"/>
+                </a:solidFill>
+                <a:latin typeface="Arial"/>
+              </a:rPr>
+              <a:t>Phase 2: Marktumfeld erklären</a:t>
+            </a:r>
+          </a:p>
+          <a:p>
+            <a:pPr>
+              <a:spcBef>
+                <a:spcPts val="400"/>
+              </a:spcBef>
+              <a:spcAft>
+                <a:spcPts val="200"/>
+              </a:spcAft>
+            </a:pPr>
+            <a:r>
+              <a:rPr sz="1200">
+                <a:solidFill>
+                  <a:srgbClr val="3D5466"/>
+                </a:solidFill>
+                <a:latin typeface="Arial"/>
+              </a:rPr>
+              <a:t>Zinsentwicklung, Refinanzierungskosten, Risikoumfeld transparent machen – ohne Details zu internen Kalkulationen preiszugeben.</a:t>
+            </a:r>
+          </a:p>
+          <a:p>
+            <a:pPr>
+              <a:spcBef>
+                <a:spcPts val="400"/>
+              </a:spcBef>
+              <a:spcAft>
+                <a:spcPts val="200"/>
+              </a:spcAft>
+            </a:pPr>
+            <a:r>
+              <a:rPr sz="1200">
+                <a:solidFill>
+                  <a:srgbClr val="3D5466"/>
+                </a:solidFill>
+                <a:latin typeface="Arial"/>
+              </a:rPr>
+              <a:t>Phase 3: Konditionen transparent kommunizieren</a:t>
+            </a:r>
+          </a:p>
+          <a:p>
+            <a:pPr>
+              <a:spcBef>
+                <a:spcPts val="400"/>
+              </a:spcBef>
+              <a:spcAft>
+                <a:spcPts val="200"/>
+              </a:spcAft>
+            </a:pPr>
+            <a:r>
+              <a:rPr sz="1200">
+                <a:solidFill>
+                  <a:srgbClr val="3D5466"/>
+                </a:solidFill>
+                <a:latin typeface="Arial"/>
+              </a:rPr>
+              <a:t>Phase 4: Alternativen anbieten</a:t>
+            </a:r>
+          </a:p>
+          <a:p>
+            <a:pPr>
+              <a:spcBef>
+                <a:spcPts val="400"/>
+              </a:spcBef>
+              <a:spcAft>
+                <a:spcPts val="200"/>
+              </a:spcAft>
+            </a:pPr>
+            <a:r>
+              <a:rPr sz="1200">
+                <a:solidFill>
+                  <a:srgbClr val="3D5466"/>
+                </a:solidFill>
+                <a:latin typeface="Arial"/>
+              </a:rPr>
+              <a:t>Dem Kunden Optionen geben: „Wenn wir die Besicherung verbessern, könnten wir bei der Marge etwas flexibler sein." Oder: „Wenn Sie das R+V-Paket hinzunehmen, sehen wir die Gesamtbeziehung anders."</a:t>
+            </a:r>
+          </a:p>
+          <a:p>
+            <a:pPr>
+              <a:spcBef>
+                <a:spcPts val="400"/>
+              </a:spcBef>
+              <a:spcAft>
+                <a:spcPts val="200"/>
+              </a:spcAft>
+            </a:pPr>
+            <a:r>
+              <a:rPr sz="1200">
+                <a:solidFill>
+                  <a:srgbClr val="3D5466"/>
+                </a:solidFill>
+                <a:latin typeface="Arial"/>
+              </a:rPr>
+              <a:t>## 4.5 Praxiscase: Ertragsanalyse Bauer &amp; Söhne GmbH</a:t>
+            </a:r>
+          </a:p>
+          <a:p>
+            <a:pPr>
+              <a:spcBef>
+                <a:spcPts val="400"/>
+              </a:spcBef>
+              <a:spcAft>
+                <a:spcPts val="200"/>
+              </a:spcAft>
+            </a:pPr>
+            <a:r>
+              <a:rPr sz="1200">
+                <a:solidFill>
+                  <a:srgbClr val="3D5466"/>
+                </a:solidFill>
+                <a:latin typeface="Arial"/>
+              </a:rPr>
+              <a:t>Ausgangssituation</a:t>
+            </a:r>
+          </a:p>
+          <a:p>
+            <a:pPr>
+              <a:spcBef>
+                <a:spcPts val="400"/>
+              </a:spcBef>
+              <a:spcAft>
+                <a:spcPts val="200"/>
+              </a:spcAft>
+            </a:pPr>
+            <a:r>
+              <a:rPr sz="1200">
+                <a:solidFill>
+                  <a:srgbClr val="3D5466"/>
+                </a:solidFill>
+                <a:latin typeface="Arial"/>
+              </a:rPr>
+              <a:t>Bei der Vorbereitung des Jahresgesprächs analysiert Sandra den Deckungsbeitrag:</a:t>
+            </a:r>
+          </a:p>
+          <a:p>
+            <a:pPr>
+              <a:spcBef>
+                <a:spcPts val="400"/>
+              </a:spcBef>
+              <a:spcAft>
+                <a:spcPts val="200"/>
+              </a:spcAft>
+            </a:pPr>
+            <a:r>
+              <a:rPr sz="1200">
+                <a:solidFill>
+                  <a:srgbClr val="3D5466"/>
+                </a:solidFill>
+                <a:latin typeface="Arial"/>
+              </a:rPr>
+              <a:t>Die Analyse zeigt drei Probleme:</a:t>
+            </a:r>
+          </a:p>
+          <a:p>
+            <a:pPr>
+              <a:spcBef>
+                <a:spcPts val="400"/>
+              </a:spcBef>
+              <a:spcAft>
+                <a:spcPts val="200"/>
+              </a:spcAft>
+            </a:pPr>
+            <a:r>
+              <a:rPr sz="1300">
+                <a:solidFill>
+                  <a:srgbClr val="3D5466"/>
+                </a:solidFill>
+                <a:latin typeface="Arial"/>
+              </a:rPr>
+              <a:t>▸  Die Kreditmarge von 1,25 % deckt den EL von 0,65 % nur mit 0,60 % Nettomarge – unter dem bankinternen Mindeststandard von 0,80 % (fiktiver Fallbeispielwert; die konkrete Untergrenze wird hausindividuell festgelegt).</a:t>
             </a:r>
           </a:p>
         </p:txBody>
@@ -6668,6 +6662,386 @@
 </file>
 
 <file path=ppt/slides/slide14.xml><?xml version="1.0" encoding="utf-8"?>
+<p:sld xmlns:a="http://schemas.openxmlformats.org/drawingml/2006/main" xmlns:p="http://schemas.openxmlformats.org/presentationml/2006/main" xmlns:r="http://schemas.openxmlformats.org/officeDocument/2006/relationships">
+  <p:cSld>
+    <p:spTree>
+      <p:nvGrpSpPr>
+        <p:cNvPr id="1" name=""/>
+        <p:cNvGrpSpPr/>
+        <p:nvPr/>
+      </p:nvGrpSpPr>
+      <p:grpSpPr/>
+      <p:sp>
+        <p:nvSpPr>
+          <p:cNvPr id="2" name="Rectangle 1"/>
+          <p:cNvSpPr/>
+          <p:nvPr/>
+        </p:nvSpPr>
+        <p:spPr>
+          <a:xfrm>
+            <a:off x="0" y="0"/>
+            <a:ext cx="12188952" cy="6858000"/>
+          </a:xfrm>
+          <a:prstGeom prst="rect">
+            <a:avLst/>
+          </a:prstGeom>
+          <a:solidFill>
+            <a:srgbClr val="EDEDF3"/>
+          </a:solidFill>
+          <a:ln>
+            <a:noFill/>
+          </a:ln>
+        </p:spPr>
+        <p:style>
+          <a:lnRef idx="1">
+            <a:schemeClr val="accent1"/>
+          </a:lnRef>
+          <a:fillRef idx="3">
+            <a:schemeClr val="accent1"/>
+          </a:fillRef>
+          <a:effectRef idx="2">
+            <a:schemeClr val="accent1"/>
+          </a:effectRef>
+          <a:fontRef idx="minor">
+            <a:schemeClr val="lt1"/>
+          </a:fontRef>
+        </p:style>
+        <p:txBody>
+          <a:bodyPr rtlCol="0" anchor="ctr"/>
+          <a:lstStyle/>
+          <a:p>
+            <a:pPr algn="ctr"/>
+          </a:p>
+        </p:txBody>
+      </p:sp>
+      <p:sp>
+        <p:nvSpPr>
+          <p:cNvPr id="3" name="Rectangle 2"/>
+          <p:cNvSpPr/>
+          <p:nvPr/>
+        </p:nvSpPr>
+        <p:spPr>
+          <a:xfrm>
+            <a:off x="0" y="0"/>
+            <a:ext cx="12188952" cy="50292"/>
+          </a:xfrm>
+          <a:prstGeom prst="rect">
+            <a:avLst/>
+          </a:prstGeom>
+          <a:solidFill>
+            <a:srgbClr val="1F2C56"/>
+          </a:solidFill>
+          <a:ln>
+            <a:noFill/>
+          </a:ln>
+        </p:spPr>
+        <p:style>
+          <a:lnRef idx="1">
+            <a:schemeClr val="accent1"/>
+          </a:lnRef>
+          <a:fillRef idx="3">
+            <a:schemeClr val="accent1"/>
+          </a:fillRef>
+          <a:effectRef idx="2">
+            <a:schemeClr val="accent1"/>
+          </a:effectRef>
+          <a:fontRef idx="minor">
+            <a:schemeClr val="lt1"/>
+          </a:fontRef>
+        </p:style>
+        <p:txBody>
+          <a:bodyPr rtlCol="0" anchor="ctr"/>
+          <a:lstStyle/>
+          <a:p>
+            <a:pPr algn="ctr"/>
+          </a:p>
+        </p:txBody>
+      </p:sp>
+      <p:sp>
+        <p:nvSpPr>
+          <p:cNvPr id="4" name="TextBox 3"/>
+          <p:cNvSpPr txBox="1"/>
+          <p:nvPr/>
+        </p:nvSpPr>
+        <p:spPr>
+          <a:xfrm>
+            <a:off x="685800" y="109728"/>
+            <a:ext cx="10817352" cy="228600"/>
+          </a:xfrm>
+          <a:prstGeom prst="rect">
+            <a:avLst/>
+          </a:prstGeom>
+          <a:noFill/>
+        </p:spPr>
+        <p:txBody>
+          <a:bodyPr wrap="none">
+            <a:spAutoFit/>
+          </a:bodyPr>
+          <a:lstStyle/>
+          <a:p>
+            <a:pPr algn="l"/>
+            <a:r>
+              <a:rPr sz="750">
+                <a:solidFill>
+                  <a:srgbClr val="78808C"/>
+                </a:solidFill>
+                <a:latin typeface="JetBrains Mono"/>
+              </a:rPr>
+              <a:t>M14  ·  INHALT</a:t>
+            </a:r>
+          </a:p>
+        </p:txBody>
+      </p:sp>
+      <p:sp>
+        <p:nvSpPr>
+          <p:cNvPr id="5" name="Rectangle 4"/>
+          <p:cNvSpPr/>
+          <p:nvPr/>
+        </p:nvSpPr>
+        <p:spPr>
+          <a:xfrm>
+            <a:off x="0" y="1234440"/>
+            <a:ext cx="12188952" cy="12700"/>
+          </a:xfrm>
+          <a:prstGeom prst="rect">
+            <a:avLst/>
+          </a:prstGeom>
+          <a:solidFill>
+            <a:srgbClr val="D8DFE4"/>
+          </a:solidFill>
+          <a:ln>
+            <a:noFill/>
+          </a:ln>
+        </p:spPr>
+        <p:style>
+          <a:lnRef idx="1">
+            <a:schemeClr val="accent1"/>
+          </a:lnRef>
+          <a:fillRef idx="3">
+            <a:schemeClr val="accent1"/>
+          </a:fillRef>
+          <a:effectRef idx="2">
+            <a:schemeClr val="accent1"/>
+          </a:effectRef>
+          <a:fontRef idx="minor">
+            <a:schemeClr val="lt1"/>
+          </a:fontRef>
+        </p:style>
+        <p:txBody>
+          <a:bodyPr rtlCol="0" anchor="ctr"/>
+          <a:lstStyle/>
+          <a:p>
+            <a:pPr algn="ctr"/>
+          </a:p>
+        </p:txBody>
+      </p:sp>
+      <p:sp>
+        <p:nvSpPr>
+          <p:cNvPr id="6" name="Rectangle 5"/>
+          <p:cNvSpPr/>
+          <p:nvPr/>
+        </p:nvSpPr>
+        <p:spPr>
+          <a:xfrm>
+            <a:off x="685800" y="502920"/>
+            <a:ext cx="36576" cy="658368"/>
+          </a:xfrm>
+          <a:prstGeom prst="rect">
+            <a:avLst/>
+          </a:prstGeom>
+          <a:solidFill>
+            <a:srgbClr val="D9C089"/>
+          </a:solidFill>
+          <a:ln>
+            <a:noFill/>
+          </a:ln>
+        </p:spPr>
+        <p:style>
+          <a:lnRef idx="1">
+            <a:schemeClr val="accent1"/>
+          </a:lnRef>
+          <a:fillRef idx="3">
+            <a:schemeClr val="accent1"/>
+          </a:fillRef>
+          <a:effectRef idx="2">
+            <a:schemeClr val="accent1"/>
+          </a:effectRef>
+          <a:fontRef idx="minor">
+            <a:schemeClr val="lt1"/>
+          </a:fontRef>
+        </p:style>
+        <p:txBody>
+          <a:bodyPr rtlCol="0" anchor="ctr"/>
+          <a:lstStyle/>
+          <a:p>
+            <a:pPr algn="ctr"/>
+          </a:p>
+        </p:txBody>
+      </p:sp>
+      <p:sp>
+        <p:nvSpPr>
+          <p:cNvPr id="7" name="TextBox 6"/>
+          <p:cNvSpPr txBox="1"/>
+          <p:nvPr/>
+        </p:nvSpPr>
+        <p:spPr>
+          <a:xfrm>
+            <a:off x="813816" y="502920"/>
+            <a:ext cx="10634472" cy="685800"/>
+          </a:xfrm>
+          <a:prstGeom prst="rect">
+            <a:avLst/>
+          </a:prstGeom>
+          <a:noFill/>
+        </p:spPr>
+        <p:txBody>
+          <a:bodyPr wrap="square">
+            <a:spAutoFit/>
+          </a:bodyPr>
+          <a:lstStyle/>
+          <a:p>
+            <a:pPr algn="l"/>
+            <a:r>
+              <a:rPr sz="2400" b="1" i="0">
+                <a:solidFill>
+                  <a:srgbClr val="1F2C56"/>
+                </a:solidFill>
+                <a:latin typeface="Source Serif 4"/>
+              </a:rPr>
+              <a:t>Arbeitsblatt A: Deckungsbeitragsrechnung</a:t>
+            </a:r>
+          </a:p>
+        </p:txBody>
+      </p:sp>
+      <p:sp>
+        <p:nvSpPr>
+          <p:cNvPr id="8" name="TextBox 7"/>
+          <p:cNvSpPr txBox="1"/>
+          <p:nvPr/>
+        </p:nvSpPr>
+        <p:spPr>
+          <a:xfrm>
+            <a:off x="685800" y="1417320"/>
+            <a:ext cx="10817352" cy="5029200"/>
+          </a:xfrm>
+          <a:prstGeom prst="rect">
+            <a:avLst/>
+          </a:prstGeom>
+          <a:noFill/>
+        </p:spPr>
+        <p:txBody>
+          <a:bodyPr wrap="square">
+            <a:spAutoFit/>
+          </a:bodyPr>
+          <a:lstStyle/>
+          <a:p>
+            <a:pPr>
+              <a:spcBef>
+                <a:spcPts val="400"/>
+              </a:spcBef>
+              <a:spcAft>
+                <a:spcPts val="200"/>
+              </a:spcAft>
+            </a:pPr>
+            <a:r>
+              <a:rPr sz="1200">
+                <a:solidFill>
+                  <a:srgbClr val="3D5466"/>
+                </a:solidFill>
+                <a:latin typeface="Arial"/>
+              </a:rPr>
+              <a:t>Optimierungshebel (Top 2):</a:t>
+            </a:r>
+          </a:p>
+        </p:txBody>
+      </p:sp>
+      <p:sp>
+        <p:nvSpPr>
+          <p:cNvPr id="9" name="Rectangle 8"/>
+          <p:cNvSpPr/>
+          <p:nvPr/>
+        </p:nvSpPr>
+        <p:spPr>
+          <a:xfrm>
+            <a:off x="0" y="6510528"/>
+            <a:ext cx="12188952" cy="347472"/>
+          </a:xfrm>
+          <a:prstGeom prst="rect">
+            <a:avLst/>
+          </a:prstGeom>
+          <a:solidFill>
+            <a:srgbClr val="0A1937"/>
+          </a:solidFill>
+          <a:ln>
+            <a:noFill/>
+          </a:ln>
+        </p:spPr>
+        <p:style>
+          <a:lnRef idx="1">
+            <a:schemeClr val="accent1"/>
+          </a:lnRef>
+          <a:fillRef idx="3">
+            <a:schemeClr val="accent1"/>
+          </a:fillRef>
+          <a:effectRef idx="2">
+            <a:schemeClr val="accent1"/>
+          </a:effectRef>
+          <a:fontRef idx="minor">
+            <a:schemeClr val="lt1"/>
+          </a:fontRef>
+        </p:style>
+        <p:txBody>
+          <a:bodyPr rtlCol="0" anchor="ctr"/>
+          <a:lstStyle/>
+          <a:p>
+            <a:pPr algn="ctr"/>
+          </a:p>
+        </p:txBody>
+      </p:sp>
+      <p:sp>
+        <p:nvSpPr>
+          <p:cNvPr id="10" name="TextBox 9"/>
+          <p:cNvSpPr txBox="1"/>
+          <p:nvPr/>
+        </p:nvSpPr>
+        <p:spPr>
+          <a:xfrm>
+            <a:off x="685800" y="6583680"/>
+            <a:ext cx="6490411" cy="256032"/>
+          </a:xfrm>
+          <a:prstGeom prst="rect">
+            <a:avLst/>
+          </a:prstGeom>
+          <a:noFill/>
+        </p:spPr>
+        <p:txBody>
+          <a:bodyPr wrap="none">
+            <a:spAutoFit/>
+          </a:bodyPr>
+          <a:lstStyle/>
+          <a:p>
+            <a:pPr algn="l"/>
+            <a:r>
+              <a:rPr sz="700">
+                <a:solidFill>
+                  <a:srgbClr val="A0B4D2"/>
+                </a:solidFill>
+                <a:latin typeface="JetBrains Mono"/>
+              </a:rPr>
+              <a:t>Benedikt Zoller Coaching  ·  FKB Campus  ·  M14</a:t>
+            </a:r>
+          </a:p>
+        </p:txBody>
+      </p:sp>
+    </p:spTree>
+  </p:cSld>
+  <p:clrMapOvr>
+    <a:masterClrMapping/>
+  </p:clrMapOvr>
+</p:sld>
+</file>
+
+<file path=ppt/slides/slide15.xml><?xml version="1.0" encoding="utf-8"?>
 <p:sld xmlns:a="http://schemas.openxmlformats.org/drawingml/2006/main" xmlns:p="http://schemas.openxmlformats.org/presentationml/2006/main" xmlns:r="http://schemas.openxmlformats.org/officeDocument/2006/relationships">
   <p:cSld>
     <p:spTree>

--- a/protected-downloads/praesentation/M14.pptx
+++ b/protected-downloads/praesentation/M14.pptx
@@ -9,7 +9,7 @@
     <p:sldId id="257" r:id="rId8"/>
     <p:sldId id="258" r:id="rId9"/>
     <p:sldId id="259" r:id="rId10"/>
-    <p:sldId id="260" r:id="rId12"/>
+    <p:sldId id="260" r:id="rId11"/>
     <p:sldId id="261" r:id="rId13"/>
     <p:sldId id="262" r:id="rId14"/>
     <p:sldId id="263" r:id="rId15"/>
@@ -20,6 +20,7 @@
     <p:sldId id="268" r:id="rId20"/>
     <p:sldId id="269" r:id="rId21"/>
     <p:sldId id="270" r:id="rId22"/>
+    <p:sldId id="271" r:id="rId23"/>
   </p:sldIdLst>
   <p:sldSz cx="12188952" cy="6858000" type="screen4x3"/>
   <p:notesSz cx="6858000" cy="9144000"/>
@@ -5034,7 +5035,7 @@
                 </a:solidFill>
                 <a:latin typeface="Source Serif 4"/>
               </a:rPr>
-              <a:t>Kundensegmentierung nach Ertragsprofil</a:t>
+              <a:t>Konditionsanpassung vorbereiten</a:t>
             </a:r>
           </a:p>
         </p:txBody>
@@ -5076,7 +5077,7 @@
                 </a:solidFill>
                 <a:latin typeface="Arial"/>
               </a:rPr>
-              <a:t>Eine einfache 2×2-Matrix hilft, den Bestand nach Ertragspotenzial und aktuellem Ertrag zu strukturieren:</a:t>
+              <a:t>Wenn die Analyse zeigt, dass ein Kunde unter dem Mindest-Deckungsbeitrag liegt, gibt es drei Hebel:</a:t>
             </a:r>
           </a:p>
           <a:p>
@@ -5089,13 +5090,13 @@
               </a:spcAft>
             </a:pPr>
             <a:r>
-              <a:rPr sz="1200">
+              <a:rPr sz="1300">
                 <a:solidFill>
                   <a:srgbClr val="3D5466"/>
                 </a:solidFill>
                 <a:latin typeface="Arial"/>
               </a:rPr>
-              <a:t>Kernkunden (hoher DB, hohes Potenzial) erhalten bevorzugte Betreuungsintensität: proaktive Kontakte, Spezialisten einbinden, Strategiegespräche.</a:t>
+              <a:t>▸  Zinsmarge erhöhen: Direkte Wirkung auf DB I. Erfordert Konditionengespräch (Sec 4.4).</a:t>
             </a:r>
           </a:p>
           <a:p>
@@ -5108,13 +5109,13 @@
               </a:spcAft>
             </a:pPr>
             <a:r>
-              <a:rPr sz="1200">
+              <a:rPr sz="1300">
                 <a:solidFill>
                   <a:srgbClr val="3D5466"/>
                 </a:solidFill>
                 <a:latin typeface="Arial"/>
               </a:rPr>
-              <a:t>Entwicklungskunden (niedriger DB, hohes Potenzial) sind die Priorität für Ertragsoptimierung: Hier liegt ungenutztes Wallet-Share-Potenzial.</a:t>
+              <a:t>▸  Cross-Selling ausbauen: Verbundertrag und Provisionen steigern, ohne Zinskonditionen anzufassen. Oft der schonendere Weg.</a:t>
             </a:r>
           </a:p>
           <a:p>
@@ -5127,13 +5128,32 @@
               </a:spcAft>
             </a:pPr>
             <a:r>
-              <a:rPr sz="1200">
+              <a:rPr sz="1300">
                 <a:solidFill>
                   <a:srgbClr val="3D5466"/>
                 </a:solidFill>
                 <a:latin typeface="Arial"/>
               </a:rPr>
-              <a:t>Problemkunden (niedriger DB, niedriges Potenzial) sollten mit minimalem Aufwand betreut werden. Exit aus der Beziehung ist bei dauerhaft negativem DB zu prüfen – aber:</a:t>
+              <a:t>▸  Betreuungskosten senken: Gesprächsfrequenz anpassen, digitale Kanäle stärker nutzen. Wirkt auf DB II.</a:t>
+            </a:r>
+          </a:p>
+          <a:p>
+            <a:pPr>
+              <a:spcBef>
+                <a:spcPts val="400"/>
+              </a:spcBef>
+              <a:spcAft>
+                <a:spcPts val="200"/>
+              </a:spcAft>
+            </a:pPr>
+            <a:r>
+              <a:rPr sz="1200">
+                <a:solidFill>
+                  <a:srgbClr val="3D5466"/>
+                </a:solidFill>
+                <a:latin typeface="Arial"/>
+              </a:rPr>
+              <a:t>## 4.3 Ertragsstruktur-Analyse im Bestand</a:t>
             </a:r>
           </a:p>
         </p:txBody>
@@ -5471,7 +5491,7 @@
                 </a:solidFill>
                 <a:latin typeface="Source Serif 4"/>
               </a:rPr>
-              <a:t>Signale für Unterpreisierung</a:t>
+              <a:t>Kundensegmentierung nach Ertragsprofil</a:t>
             </a:r>
           </a:p>
         </p:txBody>
@@ -5513,7 +5533,7 @@
                 </a:solidFill>
                 <a:latin typeface="Arial"/>
               </a:rPr>
-              <a:t>Berater erkennen unterpreiste Engagements oft an folgenden Signalen:</a:t>
+              <a:t>Eine einfache 2×2-Matrix hilft, den Bestand nach Ertragspotenzial und aktuellem Ertrag zu strukturieren:</a:t>
             </a:r>
           </a:p>
           <a:p>
@@ -5526,13 +5546,13 @@
               </a:spcAft>
             </a:pPr>
             <a:r>
-              <a:rPr sz="1300">
+              <a:rPr sz="1200">
                 <a:solidFill>
                   <a:srgbClr val="3D5466"/>
                 </a:solidFill>
                 <a:latin typeface="Arial"/>
               </a:rPr>
-              <a:t>▸  Kreditmarge liegt deutlich unter Marktüblichkeit (Benchmarkcheck in agree)</a:t>
+              <a:t>Kernkunden (hoher DB, hohes Potenzial) erhalten bevorzugte Betreuungsintensität: proaktive Kontakte, Spezialisten einbinden, Strategiegespräche.</a:t>
             </a:r>
           </a:p>
           <a:p>
@@ -5545,13 +5565,13 @@
               </a:spcAft>
             </a:pPr>
             <a:r>
-              <a:rPr sz="1300">
+              <a:rPr sz="1200">
                 <a:solidFill>
                   <a:srgbClr val="3D5466"/>
                 </a:solidFill>
                 <a:latin typeface="Arial"/>
               </a:rPr>
-              <a:t>▸  Kein Verbundpartner eingebunden, obwohl Potenzial vorhanden</a:t>
+              <a:t>Entwicklungskunden (niedriger DB, hohes Potenzial) sind die Priorität für Ertragsoptimierung: Hier liegt ungenutztes Wallet-Share-Potenzial.</a:t>
             </a:r>
           </a:p>
           <a:p>
@@ -5564,70 +5584,13 @@
               </a:spcAft>
             </a:pPr>
             <a:r>
-              <a:rPr sz="1300">
+              <a:rPr sz="1200">
                 <a:solidFill>
                   <a:srgbClr val="3D5466"/>
                 </a:solidFill>
                 <a:latin typeface="Arial"/>
               </a:rPr>
-              <a:t>▸  Hohe Inanspruchnahme offener Linien → steigt EAD, Marge wurde nie angepasst</a:t>
-            </a:r>
-          </a:p>
-          <a:p>
-            <a:pPr>
-              <a:spcBef>
-                <a:spcPts val="400"/>
-              </a:spcBef>
-              <a:spcAft>
-                <a:spcPts val="200"/>
-              </a:spcAft>
-            </a:pPr>
-            <a:r>
-              <a:rPr sz="1300">
-                <a:solidFill>
-                  <a:srgbClr val="3D5466"/>
-                </a:solidFill>
-                <a:latin typeface="Arial"/>
-              </a:rPr>
-              <a:t>▸  Ratingverschlechterung ohne Konditionsanpassung → EL gestiegen, Marge unverändert</a:t>
-            </a:r>
-          </a:p>
-          <a:p>
-            <a:pPr>
-              <a:spcBef>
-                <a:spcPts val="400"/>
-              </a:spcBef>
-              <a:spcAft>
-                <a:spcPts val="200"/>
-              </a:spcAft>
-            </a:pPr>
-            <a:r>
-              <a:rPr sz="1200">
-                <a:solidFill>
-                  <a:srgbClr val="3D5466"/>
-                </a:solidFill>
-                <a:latin typeface="Arial"/>
-              </a:rPr>
-              <a:t>Die folgende Handlungsempfehlung-Karte verknüpft diese Ertragssignale mit dem jeweils passenden Vertriebsimpuls:</a:t>
-            </a:r>
-          </a:p>
-          <a:p>
-            <a:pPr>
-              <a:spcBef>
-                <a:spcPts val="400"/>
-              </a:spcBef>
-              <a:spcAft>
-                <a:spcPts val="200"/>
-              </a:spcAft>
-            </a:pPr>
-            <a:r>
-              <a:rPr sz="1200">
-                <a:solidFill>
-                  <a:srgbClr val="3D5466"/>
-                </a:solidFill>
-                <a:latin typeface="Arial"/>
-              </a:rPr>
-              <a:t>## 4.4 Das Konditionengespräch wertbasiert führen</a:t>
+              <a:t>Problemkunden (niedriger DB, niedriges Potenzial) sollten mit minimalem Aufwand betreut werden. Exit aus der Beziehung ist bei dauerhaft negativem DB zu prüfen – aber:</a:t>
             </a:r>
           </a:p>
         </p:txBody>
@@ -5743,7 +5706,7 @@
             <a:avLst/>
           </a:prstGeom>
           <a:solidFill>
-            <a:srgbClr val="FFFFFF"/>
+            <a:srgbClr val="EDEDF3"/>
           </a:solidFill>
           <a:ln>
             <a:noFill/>
@@ -5844,43 +5807,51 @@
                 </a:solidFill>
                 <a:latin typeface="JetBrains Mono"/>
               </a:rPr>
-              <a:t>M14  ·  SCHAUBILD</a:t>
-            </a:r>
-          </a:p>
-        </p:txBody>
-      </p:sp>
-      <p:sp>
-        <p:nvSpPr>
-          <p:cNvPr id="5" name="TextBox 4"/>
-          <p:cNvSpPr txBox="1"/>
-          <p:nvPr/>
-        </p:nvSpPr>
-        <p:spPr>
-          <a:xfrm>
-            <a:off x="685800" y="502920"/>
-            <a:ext cx="10817352" cy="594360"/>
-          </a:xfrm>
-          <a:prstGeom prst="rect">
-            <a:avLst/>
-          </a:prstGeom>
-          <a:noFill/>
-        </p:spPr>
-        <p:txBody>
-          <a:bodyPr wrap="square">
-            <a:spAutoFit/>
-          </a:bodyPr>
-          <a:lstStyle/>
-          <a:p>
-            <a:pPr algn="l"/>
-            <a:r>
-              <a:rPr sz="2000" b="1" i="0">
-                <a:solidFill>
-                  <a:srgbClr val="1F2C56"/>
-                </a:solidFill>
-                <a:latin typeface="Source Serif 4"/>
-              </a:rPr>
-              <a:t>Handlungsempfehlung</a:t>
-            </a:r>
+              <a:t>M14  ·  INHALT</a:t>
+            </a:r>
+          </a:p>
+        </p:txBody>
+      </p:sp>
+      <p:sp>
+        <p:nvSpPr>
+          <p:cNvPr id="5" name="Rectangle 4"/>
+          <p:cNvSpPr/>
+          <p:nvPr/>
+        </p:nvSpPr>
+        <p:spPr>
+          <a:xfrm>
+            <a:off x="0" y="1234440"/>
+            <a:ext cx="12188952" cy="12700"/>
+          </a:xfrm>
+          <a:prstGeom prst="rect">
+            <a:avLst/>
+          </a:prstGeom>
+          <a:solidFill>
+            <a:srgbClr val="D8DFE4"/>
+          </a:solidFill>
+          <a:ln>
+            <a:noFill/>
+          </a:ln>
+        </p:spPr>
+        <p:style>
+          <a:lnRef idx="1">
+            <a:schemeClr val="accent1"/>
+          </a:lnRef>
+          <a:fillRef idx="3">
+            <a:schemeClr val="accent1"/>
+          </a:fillRef>
+          <a:effectRef idx="2">
+            <a:schemeClr val="accent1"/>
+          </a:effectRef>
+          <a:fontRef idx="minor">
+            <a:schemeClr val="lt1"/>
+          </a:fontRef>
+        </p:style>
+        <p:txBody>
+          <a:bodyPr rtlCol="0" anchor="ctr"/>
+          <a:lstStyle/>
+          <a:p>
+            <a:pPr algn="ctr"/>
           </a:p>
         </p:txBody>
       </p:sp>
@@ -5892,8 +5863,8 @@
         </p:nvSpPr>
         <p:spPr>
           <a:xfrm>
-            <a:off x="685800" y="1143000"/>
-            <a:ext cx="10817352" cy="25400"/>
+            <a:off x="685800" y="502920"/>
+            <a:ext cx="36576" cy="658368"/>
           </a:xfrm>
           <a:prstGeom prst="rect">
             <a:avLst/>
@@ -5927,33 +5898,200 @@
           </a:p>
         </p:txBody>
       </p:sp>
-      <p:pic>
-        <p:nvPicPr>
-          <p:cNvPr id="7" name="Picture 6" descr="image.png"/>
-          <p:cNvPicPr>
-            <a:picLocks noChangeAspect="1"/>
-          </p:cNvPicPr>
-          <p:nvPr/>
-        </p:nvPicPr>
-        <p:blipFill>
-          <a:blip r:embed="rId2"/>
-          <a:stretch>
-            <a:fillRect/>
-          </a:stretch>
-        </p:blipFill>
-        <p:spPr>
-          <a:xfrm>
-            <a:off x="2303489" y="1325880"/>
-            <a:ext cx="7581973" cy="4937760"/>
-          </a:xfrm>
-          <a:prstGeom prst="rect">
-            <a:avLst/>
-          </a:prstGeom>
-        </p:spPr>
-      </p:pic>
-      <p:sp>
-        <p:nvSpPr>
-          <p:cNvPr id="8" name="Rectangle 7"/>
+      <p:sp>
+        <p:nvSpPr>
+          <p:cNvPr id="7" name="TextBox 6"/>
+          <p:cNvSpPr txBox="1"/>
+          <p:nvPr/>
+        </p:nvSpPr>
+        <p:spPr>
+          <a:xfrm>
+            <a:off x="813816" y="502920"/>
+            <a:ext cx="10634472" cy="685800"/>
+          </a:xfrm>
+          <a:prstGeom prst="rect">
+            <a:avLst/>
+          </a:prstGeom>
+          <a:noFill/>
+        </p:spPr>
+        <p:txBody>
+          <a:bodyPr wrap="square">
+            <a:spAutoFit/>
+          </a:bodyPr>
+          <a:lstStyle/>
+          <a:p>
+            <a:pPr algn="l"/>
+            <a:r>
+              <a:rPr sz="2400" b="1" i="0">
+                <a:solidFill>
+                  <a:srgbClr val="1F2C56"/>
+                </a:solidFill>
+                <a:latin typeface="Source Serif 4"/>
+              </a:rPr>
+              <a:t>Signale für Unterpreisierung</a:t>
+            </a:r>
+          </a:p>
+        </p:txBody>
+      </p:sp>
+      <p:sp>
+        <p:nvSpPr>
+          <p:cNvPr id="8" name="TextBox 7"/>
+          <p:cNvSpPr txBox="1"/>
+          <p:nvPr/>
+        </p:nvSpPr>
+        <p:spPr>
+          <a:xfrm>
+            <a:off x="685800" y="1417320"/>
+            <a:ext cx="10817352" cy="5029200"/>
+          </a:xfrm>
+          <a:prstGeom prst="rect">
+            <a:avLst/>
+          </a:prstGeom>
+          <a:noFill/>
+        </p:spPr>
+        <p:txBody>
+          <a:bodyPr wrap="square">
+            <a:spAutoFit/>
+          </a:bodyPr>
+          <a:lstStyle/>
+          <a:p>
+            <a:pPr>
+              <a:spcBef>
+                <a:spcPts val="400"/>
+              </a:spcBef>
+              <a:spcAft>
+                <a:spcPts val="200"/>
+              </a:spcAft>
+            </a:pPr>
+            <a:r>
+              <a:rPr sz="1200">
+                <a:solidFill>
+                  <a:srgbClr val="3D5466"/>
+                </a:solidFill>
+                <a:latin typeface="Arial"/>
+              </a:rPr>
+              <a:t>Berater erkennen unterpreiste Engagements oft an folgenden Signalen:</a:t>
+            </a:r>
+          </a:p>
+          <a:p>
+            <a:pPr>
+              <a:spcBef>
+                <a:spcPts val="400"/>
+              </a:spcBef>
+              <a:spcAft>
+                <a:spcPts val="200"/>
+              </a:spcAft>
+            </a:pPr>
+            <a:r>
+              <a:rPr sz="1300">
+                <a:solidFill>
+                  <a:srgbClr val="3D5466"/>
+                </a:solidFill>
+                <a:latin typeface="Arial"/>
+              </a:rPr>
+              <a:t>▸  Kreditmarge liegt deutlich unter Marktüblichkeit (Benchmarkcheck in agree)</a:t>
+            </a:r>
+          </a:p>
+          <a:p>
+            <a:pPr>
+              <a:spcBef>
+                <a:spcPts val="400"/>
+              </a:spcBef>
+              <a:spcAft>
+                <a:spcPts val="200"/>
+              </a:spcAft>
+            </a:pPr>
+            <a:r>
+              <a:rPr sz="1300">
+                <a:solidFill>
+                  <a:srgbClr val="3D5466"/>
+                </a:solidFill>
+                <a:latin typeface="Arial"/>
+              </a:rPr>
+              <a:t>▸  Kein Verbundpartner eingebunden, obwohl Potenzial vorhanden</a:t>
+            </a:r>
+          </a:p>
+          <a:p>
+            <a:pPr>
+              <a:spcBef>
+                <a:spcPts val="400"/>
+              </a:spcBef>
+              <a:spcAft>
+                <a:spcPts val="200"/>
+              </a:spcAft>
+            </a:pPr>
+            <a:r>
+              <a:rPr sz="1300">
+                <a:solidFill>
+                  <a:srgbClr val="3D5466"/>
+                </a:solidFill>
+                <a:latin typeface="Arial"/>
+              </a:rPr>
+              <a:t>▸  Hohe Inanspruchnahme offener Linien → steigt EAD, Marge wurde nie angepasst</a:t>
+            </a:r>
+          </a:p>
+          <a:p>
+            <a:pPr>
+              <a:spcBef>
+                <a:spcPts val="400"/>
+              </a:spcBef>
+              <a:spcAft>
+                <a:spcPts val="200"/>
+              </a:spcAft>
+            </a:pPr>
+            <a:r>
+              <a:rPr sz="1300">
+                <a:solidFill>
+                  <a:srgbClr val="3D5466"/>
+                </a:solidFill>
+                <a:latin typeface="Arial"/>
+              </a:rPr>
+              <a:t>▸  Ratingverschlechterung ohne Konditionsanpassung → EL gestiegen, Marge unverändert</a:t>
+            </a:r>
+          </a:p>
+          <a:p>
+            <a:pPr>
+              <a:spcBef>
+                <a:spcPts val="400"/>
+              </a:spcBef>
+              <a:spcAft>
+                <a:spcPts val="200"/>
+              </a:spcAft>
+            </a:pPr>
+            <a:r>
+              <a:rPr sz="1200">
+                <a:solidFill>
+                  <a:srgbClr val="3D5466"/>
+                </a:solidFill>
+                <a:latin typeface="Arial"/>
+              </a:rPr>
+              <a:t>Die folgende Handlungsempfehlung-Karte verknüpft diese Ertragssignale mit dem jeweils passenden Vertriebsimpuls:</a:t>
+            </a:r>
+          </a:p>
+          <a:p>
+            <a:pPr>
+              <a:spcBef>
+                <a:spcPts val="400"/>
+              </a:spcBef>
+              <a:spcAft>
+                <a:spcPts val="200"/>
+              </a:spcAft>
+            </a:pPr>
+            <a:r>
+              <a:rPr sz="1200">
+                <a:solidFill>
+                  <a:srgbClr val="3D5466"/>
+                </a:solidFill>
+                <a:latin typeface="Arial"/>
+              </a:rPr>
+              <a:t>## 4.4 Das Konditionengespräch wertbasiert führen</a:t>
+            </a:r>
+          </a:p>
+        </p:txBody>
+      </p:sp>
+      <p:sp>
+        <p:nvSpPr>
+          <p:cNvPr id="9" name="Rectangle 8"/>
           <p:cNvSpPr/>
           <p:nvPr/>
         </p:nvSpPr>
@@ -5996,7 +6134,7 @@
       </p:sp>
       <p:sp>
         <p:nvSpPr>
-          <p:cNvPr id="9" name="TextBox 8"/>
+          <p:cNvPr id="10" name="TextBox 9"/>
           <p:cNvSpPr txBox="1"/>
           <p:nvPr/>
         </p:nvSpPr>
@@ -6025,41 +6163,6 @@
                 <a:latin typeface="JetBrains Mono"/>
               </a:rPr>
               <a:t>Benedikt Zoller Coaching  ·  FKB Campus  ·  M14</a:t>
-            </a:r>
-          </a:p>
-        </p:txBody>
-      </p:sp>
-      <p:sp>
-        <p:nvSpPr>
-          <p:cNvPr id="10" name="TextBox 9"/>
-          <p:cNvSpPr txBox="1"/>
-          <p:nvPr/>
-        </p:nvSpPr>
-        <p:spPr>
-          <a:xfrm>
-            <a:off x="7176211" y="6583680"/>
-            <a:ext cx="4326940" cy="256032"/>
-          </a:xfrm>
-          <a:prstGeom prst="rect">
-            <a:avLst/>
-          </a:prstGeom>
-          <a:noFill/>
-        </p:spPr>
-        <p:txBody>
-          <a:bodyPr wrap="none">
-            <a:spAutoFit/>
-          </a:bodyPr>
-          <a:lstStyle/>
-          <a:p>
-            <a:pPr algn="r"/>
-            <a:r>
-              <a:rPr sz="700">
-                <a:solidFill>
-                  <a:srgbClr val="A0B4D2"/>
-                </a:solidFill>
-                <a:latin typeface="JetBrains Mono"/>
-              </a:rPr>
-              <a:t>Schaubild</a:t>
             </a:r>
           </a:p>
         </p:txBody>
@@ -6097,7 +6200,7 @@
             <a:avLst/>
           </a:prstGeom>
           <a:solidFill>
-            <a:srgbClr val="EDEDF3"/>
+            <a:srgbClr val="FFFFFF"/>
           </a:solidFill>
           <a:ln>
             <a:noFill/>
@@ -6198,51 +6301,43 @@
                 </a:solidFill>
                 <a:latin typeface="JetBrains Mono"/>
               </a:rPr>
-              <a:t>M14  ·  INHALT</a:t>
-            </a:r>
-          </a:p>
-        </p:txBody>
-      </p:sp>
-      <p:sp>
-        <p:nvSpPr>
-          <p:cNvPr id="5" name="Rectangle 4"/>
-          <p:cNvSpPr/>
-          <p:nvPr/>
-        </p:nvSpPr>
-        <p:spPr>
-          <a:xfrm>
-            <a:off x="0" y="1234440"/>
-            <a:ext cx="12188952" cy="12700"/>
-          </a:xfrm>
-          <a:prstGeom prst="rect">
-            <a:avLst/>
-          </a:prstGeom>
-          <a:solidFill>
-            <a:srgbClr val="D8DFE4"/>
-          </a:solidFill>
-          <a:ln>
-            <a:noFill/>
-          </a:ln>
-        </p:spPr>
-        <p:style>
-          <a:lnRef idx="1">
-            <a:schemeClr val="accent1"/>
-          </a:lnRef>
-          <a:fillRef idx="3">
-            <a:schemeClr val="accent1"/>
-          </a:fillRef>
-          <a:effectRef idx="2">
-            <a:schemeClr val="accent1"/>
-          </a:effectRef>
-          <a:fontRef idx="minor">
-            <a:schemeClr val="lt1"/>
-          </a:fontRef>
-        </p:style>
-        <p:txBody>
-          <a:bodyPr rtlCol="0" anchor="ctr"/>
-          <a:lstStyle/>
-          <a:p>
-            <a:pPr algn="ctr"/>
+              <a:t>M14  ·  SCHAUBILD</a:t>
+            </a:r>
+          </a:p>
+        </p:txBody>
+      </p:sp>
+      <p:sp>
+        <p:nvSpPr>
+          <p:cNvPr id="5" name="TextBox 4"/>
+          <p:cNvSpPr txBox="1"/>
+          <p:nvPr/>
+        </p:nvSpPr>
+        <p:spPr>
+          <a:xfrm>
+            <a:off x="685800" y="502920"/>
+            <a:ext cx="10817352" cy="594360"/>
+          </a:xfrm>
+          <a:prstGeom prst="rect">
+            <a:avLst/>
+          </a:prstGeom>
+          <a:noFill/>
+        </p:spPr>
+        <p:txBody>
+          <a:bodyPr wrap="square">
+            <a:spAutoFit/>
+          </a:bodyPr>
+          <a:lstStyle/>
+          <a:p>
+            <a:pPr algn="l"/>
+            <a:r>
+              <a:rPr sz="2000" b="1" i="0">
+                <a:solidFill>
+                  <a:srgbClr val="1F2C56"/>
+                </a:solidFill>
+                <a:latin typeface="Source Serif 4"/>
+              </a:rPr>
+              <a:t>Handlungsempfehlung</a:t>
+            </a:r>
           </a:p>
         </p:txBody>
       </p:sp>
@@ -6254,8 +6349,8 @@
         </p:nvSpPr>
         <p:spPr>
           <a:xfrm>
-            <a:off x="685800" y="502920"/>
-            <a:ext cx="36576" cy="658368"/>
+            <a:off x="685800" y="1143000"/>
+            <a:ext cx="10817352" cy="25400"/>
           </a:xfrm>
           <a:prstGeom prst="rect">
             <a:avLst/>
@@ -6289,295 +6384,33 @@
           </a:p>
         </p:txBody>
       </p:sp>
-      <p:sp>
-        <p:nvSpPr>
-          <p:cNvPr id="7" name="TextBox 6"/>
-          <p:cNvSpPr txBox="1"/>
-          <p:nvPr/>
-        </p:nvSpPr>
-        <p:spPr>
-          <a:xfrm>
-            <a:off x="813816" y="502920"/>
-            <a:ext cx="10634472" cy="685800"/>
-          </a:xfrm>
-          <a:prstGeom prst="rect">
-            <a:avLst/>
-          </a:prstGeom>
-          <a:noFill/>
-        </p:spPr>
-        <p:txBody>
-          <a:bodyPr wrap="square">
-            <a:spAutoFit/>
-          </a:bodyPr>
-          <a:lstStyle/>
-          <a:p>
-            <a:pPr algn="l"/>
-            <a:r>
-              <a:rPr sz="2400" b="1" i="0">
-                <a:solidFill>
-                  <a:srgbClr val="1F2C56"/>
-                </a:solidFill>
-                <a:latin typeface="Source Serif 4"/>
-              </a:rPr>
-              <a:t>Vom Konditionengespräch zum Wertgespräch</a:t>
-            </a:r>
-          </a:p>
-        </p:txBody>
-      </p:sp>
-      <p:sp>
-        <p:nvSpPr>
-          <p:cNvPr id="8" name="TextBox 7"/>
-          <p:cNvSpPr txBox="1"/>
-          <p:nvPr/>
-        </p:nvSpPr>
-        <p:spPr>
-          <a:xfrm>
-            <a:off x="685800" y="1417320"/>
-            <a:ext cx="10817352" cy="5029200"/>
-          </a:xfrm>
-          <a:prstGeom prst="rect">
-            <a:avLst/>
-          </a:prstGeom>
-          <a:noFill/>
-        </p:spPr>
-        <p:txBody>
-          <a:bodyPr wrap="square">
-            <a:spAutoFit/>
-          </a:bodyPr>
-          <a:lstStyle/>
-          <a:p>
-            <a:pPr>
-              <a:spcBef>
-                <a:spcPts val="400"/>
-              </a:spcBef>
-              <a:spcAft>
-                <a:spcPts val="200"/>
-              </a:spcAft>
-            </a:pPr>
-            <a:r>
-              <a:rPr sz="1200">
-                <a:solidFill>
-                  <a:srgbClr val="3D5466"/>
-                </a:solidFill>
-                <a:latin typeface="Arial"/>
-              </a:rPr>
-              <a:t>Ein wertbasierter Ansatz kehrt die Reihenfolge um:</a:t>
-            </a:r>
-          </a:p>
-          <a:p>
-            <a:pPr>
-              <a:spcBef>
-                <a:spcPts val="400"/>
-              </a:spcBef>
-              <a:spcAft>
-                <a:spcPts val="200"/>
-              </a:spcAft>
-            </a:pPr>
-            <a:r>
-              <a:rPr sz="1200">
-                <a:solidFill>
-                  <a:srgbClr val="3D5466"/>
-                </a:solidFill>
-                <a:latin typeface="Arial"/>
-              </a:rPr>
-              <a:t>Phase 1: Wert der Beziehung artikulieren</a:t>
-            </a:r>
-          </a:p>
-          <a:p>
-            <a:pPr>
-              <a:spcBef>
-                <a:spcPts val="400"/>
-              </a:spcBef>
-              <a:spcAft>
-                <a:spcPts val="200"/>
-              </a:spcAft>
-            </a:pPr>
-            <a:r>
-              <a:rPr sz="1200">
-                <a:solidFill>
-                  <a:srgbClr val="3D5466"/>
-                </a:solidFill>
-                <a:latin typeface="Arial"/>
-              </a:rPr>
-              <a:t>Phase 2: Marktumfeld erklären</a:t>
-            </a:r>
-          </a:p>
-          <a:p>
-            <a:pPr>
-              <a:spcBef>
-                <a:spcPts val="400"/>
-              </a:spcBef>
-              <a:spcAft>
-                <a:spcPts val="200"/>
-              </a:spcAft>
-            </a:pPr>
-            <a:r>
-              <a:rPr sz="1200">
-                <a:solidFill>
-                  <a:srgbClr val="3D5466"/>
-                </a:solidFill>
-                <a:latin typeface="Arial"/>
-              </a:rPr>
-              <a:t>Zinsentwicklung, Refinanzierungskosten, Risikoumfeld transparent machen – ohne Details zu internen Kalkulationen preiszugeben.</a:t>
-            </a:r>
-          </a:p>
-          <a:p>
-            <a:pPr>
-              <a:spcBef>
-                <a:spcPts val="400"/>
-              </a:spcBef>
-              <a:spcAft>
-                <a:spcPts val="200"/>
-              </a:spcAft>
-            </a:pPr>
-            <a:r>
-              <a:rPr sz="1200">
-                <a:solidFill>
-                  <a:srgbClr val="3D5466"/>
-                </a:solidFill>
-                <a:latin typeface="Arial"/>
-              </a:rPr>
-              <a:t>Phase 3: Konditionen transparent kommunizieren</a:t>
-            </a:r>
-          </a:p>
-          <a:p>
-            <a:pPr>
-              <a:spcBef>
-                <a:spcPts val="400"/>
-              </a:spcBef>
-              <a:spcAft>
-                <a:spcPts val="200"/>
-              </a:spcAft>
-            </a:pPr>
-            <a:r>
-              <a:rPr sz="1200">
-                <a:solidFill>
-                  <a:srgbClr val="3D5466"/>
-                </a:solidFill>
-                <a:latin typeface="Arial"/>
-              </a:rPr>
-              <a:t>Phase 4: Alternativen anbieten</a:t>
-            </a:r>
-          </a:p>
-          <a:p>
-            <a:pPr>
-              <a:spcBef>
-                <a:spcPts val="400"/>
-              </a:spcBef>
-              <a:spcAft>
-                <a:spcPts val="200"/>
-              </a:spcAft>
-            </a:pPr>
-            <a:r>
-              <a:rPr sz="1200">
-                <a:solidFill>
-                  <a:srgbClr val="3D5466"/>
-                </a:solidFill>
-                <a:latin typeface="Arial"/>
-              </a:rPr>
-              <a:t>Dem Kunden Optionen geben: „Wenn wir die Besicherung verbessern, könnten wir bei der Marge etwas flexibler sein." Oder: „Wenn Sie das R+V-Paket hinzunehmen, sehen wir die Gesamtbeziehung anders."</a:t>
-            </a:r>
-          </a:p>
-          <a:p>
-            <a:pPr>
-              <a:spcBef>
-                <a:spcPts val="400"/>
-              </a:spcBef>
-              <a:spcAft>
-                <a:spcPts val="200"/>
-              </a:spcAft>
-            </a:pPr>
-            <a:r>
-              <a:rPr sz="1200">
-                <a:solidFill>
-                  <a:srgbClr val="3D5466"/>
-                </a:solidFill>
-                <a:latin typeface="Arial"/>
-              </a:rPr>
-              <a:t>## 4.5 Praxiscase: Ertragsanalyse Bauer &amp; Söhne GmbH</a:t>
-            </a:r>
-          </a:p>
-          <a:p>
-            <a:pPr>
-              <a:spcBef>
-                <a:spcPts val="400"/>
-              </a:spcBef>
-              <a:spcAft>
-                <a:spcPts val="200"/>
-              </a:spcAft>
-            </a:pPr>
-            <a:r>
-              <a:rPr sz="1200">
-                <a:solidFill>
-                  <a:srgbClr val="3D5466"/>
-                </a:solidFill>
-                <a:latin typeface="Arial"/>
-              </a:rPr>
-              <a:t>Ausgangssituation</a:t>
-            </a:r>
-          </a:p>
-          <a:p>
-            <a:pPr>
-              <a:spcBef>
-                <a:spcPts val="400"/>
-              </a:spcBef>
-              <a:spcAft>
-                <a:spcPts val="200"/>
-              </a:spcAft>
-            </a:pPr>
-            <a:r>
-              <a:rPr sz="1200">
-                <a:solidFill>
-                  <a:srgbClr val="3D5466"/>
-                </a:solidFill>
-                <a:latin typeface="Arial"/>
-              </a:rPr>
-              <a:t>Bei der Vorbereitung des Jahresgesprächs analysiert Sandra den Deckungsbeitrag:</a:t>
-            </a:r>
-          </a:p>
-          <a:p>
-            <a:pPr>
-              <a:spcBef>
-                <a:spcPts val="400"/>
-              </a:spcBef>
-              <a:spcAft>
-                <a:spcPts val="200"/>
-              </a:spcAft>
-            </a:pPr>
-            <a:r>
-              <a:rPr sz="1200">
-                <a:solidFill>
-                  <a:srgbClr val="3D5466"/>
-                </a:solidFill>
-                <a:latin typeface="Arial"/>
-              </a:rPr>
-              <a:t>Die Analyse zeigt drei Probleme:</a:t>
-            </a:r>
-          </a:p>
-          <a:p>
-            <a:pPr>
-              <a:spcBef>
-                <a:spcPts val="400"/>
-              </a:spcBef>
-              <a:spcAft>
-                <a:spcPts val="200"/>
-              </a:spcAft>
-            </a:pPr>
-            <a:r>
-              <a:rPr sz="1300">
-                <a:solidFill>
-                  <a:srgbClr val="3D5466"/>
-                </a:solidFill>
-                <a:latin typeface="Arial"/>
-              </a:rPr>
-              <a:t>▸  Die Kreditmarge von 1,25 % deckt den EL von 0,65 % nur mit 0,60 % Nettomarge – unter dem bankinternen Mindeststandard von 0,80 % (fiktiver Fallbeispielwert; die konkrete Untergrenze wird hausindividuell festgelegt).</a:t>
-            </a:r>
-          </a:p>
-        </p:txBody>
-      </p:sp>
-      <p:sp>
-        <p:nvSpPr>
-          <p:cNvPr id="9" name="Rectangle 8"/>
+      <p:pic>
+        <p:nvPicPr>
+          <p:cNvPr id="7" name="Picture 6" descr="image.png"/>
+          <p:cNvPicPr>
+            <a:picLocks noChangeAspect="1"/>
+          </p:cNvPicPr>
+          <p:nvPr/>
+        </p:nvPicPr>
+        <p:blipFill>
+          <a:blip r:embed="rId2"/>
+          <a:stretch>
+            <a:fillRect/>
+          </a:stretch>
+        </p:blipFill>
+        <p:spPr>
+          <a:xfrm>
+            <a:off x="2303489" y="1325880"/>
+            <a:ext cx="7581973" cy="4937760"/>
+          </a:xfrm>
+          <a:prstGeom prst="rect">
+            <a:avLst/>
+          </a:prstGeom>
+        </p:spPr>
+      </p:pic>
+      <p:sp>
+        <p:nvSpPr>
+          <p:cNvPr id="8" name="Rectangle 7"/>
           <p:cNvSpPr/>
           <p:nvPr/>
         </p:nvSpPr>
@@ -6620,7 +6453,7 @@
       </p:sp>
       <p:sp>
         <p:nvSpPr>
-          <p:cNvPr id="10" name="TextBox 9"/>
+          <p:cNvPr id="9" name="TextBox 8"/>
           <p:cNvSpPr txBox="1"/>
           <p:nvPr/>
         </p:nvSpPr>
@@ -6649,6 +6482,41 @@
                 <a:latin typeface="JetBrains Mono"/>
               </a:rPr>
               <a:t>Benedikt Zoller Coaching  ·  FKB Campus  ·  M14</a:t>
+            </a:r>
+          </a:p>
+        </p:txBody>
+      </p:sp>
+      <p:sp>
+        <p:nvSpPr>
+          <p:cNvPr id="10" name="TextBox 9"/>
+          <p:cNvSpPr txBox="1"/>
+          <p:nvPr/>
+        </p:nvSpPr>
+        <p:spPr>
+          <a:xfrm>
+            <a:off x="7176211" y="6583680"/>
+            <a:ext cx="4326940" cy="256032"/>
+          </a:xfrm>
+          <a:prstGeom prst="rect">
+            <a:avLst/>
+          </a:prstGeom>
+          <a:noFill/>
+        </p:spPr>
+        <p:txBody>
+          <a:bodyPr wrap="none">
+            <a:spAutoFit/>
+          </a:bodyPr>
+          <a:lstStyle/>
+          <a:p>
+            <a:pPr algn="r"/>
+            <a:r>
+              <a:rPr sz="700">
+                <a:solidFill>
+                  <a:srgbClr val="A0B4D2"/>
+                </a:solidFill>
+                <a:latin typeface="JetBrains Mono"/>
+              </a:rPr>
+              <a:t>Schaubild</a:t>
             </a:r>
           </a:p>
         </p:txBody>
@@ -6908,7 +6776,7 @@
                 </a:solidFill>
                 <a:latin typeface="Source Serif 4"/>
               </a:rPr>
-              <a:t>Arbeitsblatt A: Deckungsbeitragsrechnung</a:t>
+              <a:t>Vom Konditionengespräch zum Wertgespräch</a:t>
             </a:r>
           </a:p>
         </p:txBody>
@@ -6950,7 +6818,216 @@
                 </a:solidFill>
                 <a:latin typeface="Arial"/>
               </a:rPr>
-              <a:t>Optimierungshebel (Top 2):</a:t>
+              <a:t>Ein wertbasierter Ansatz kehrt die Reihenfolge um:</a:t>
+            </a:r>
+          </a:p>
+          <a:p>
+            <a:pPr>
+              <a:spcBef>
+                <a:spcPts val="400"/>
+              </a:spcBef>
+              <a:spcAft>
+                <a:spcPts val="200"/>
+              </a:spcAft>
+            </a:pPr>
+            <a:r>
+              <a:rPr sz="1200">
+                <a:solidFill>
+                  <a:srgbClr val="3D5466"/>
+                </a:solidFill>
+                <a:latin typeface="Arial"/>
+              </a:rPr>
+              <a:t>Phase 1: Wert der Beziehung artikulieren</a:t>
+            </a:r>
+          </a:p>
+          <a:p>
+            <a:pPr>
+              <a:spcBef>
+                <a:spcPts val="400"/>
+              </a:spcBef>
+              <a:spcAft>
+                <a:spcPts val="200"/>
+              </a:spcAft>
+            </a:pPr>
+            <a:r>
+              <a:rPr sz="1200">
+                <a:solidFill>
+                  <a:srgbClr val="3D5466"/>
+                </a:solidFill>
+                <a:latin typeface="Arial"/>
+              </a:rPr>
+              <a:t>Phase 2: Marktumfeld erklären</a:t>
+            </a:r>
+          </a:p>
+          <a:p>
+            <a:pPr>
+              <a:spcBef>
+                <a:spcPts val="400"/>
+              </a:spcBef>
+              <a:spcAft>
+                <a:spcPts val="200"/>
+              </a:spcAft>
+            </a:pPr>
+            <a:r>
+              <a:rPr sz="1200">
+                <a:solidFill>
+                  <a:srgbClr val="3D5466"/>
+                </a:solidFill>
+                <a:latin typeface="Arial"/>
+              </a:rPr>
+              <a:t>Zinsentwicklung, Refinanzierungskosten, Risikoumfeld transparent machen – ohne Details zu internen Kalkulationen preiszugeben.</a:t>
+            </a:r>
+          </a:p>
+          <a:p>
+            <a:pPr>
+              <a:spcBef>
+                <a:spcPts val="400"/>
+              </a:spcBef>
+              <a:spcAft>
+                <a:spcPts val="200"/>
+              </a:spcAft>
+            </a:pPr>
+            <a:r>
+              <a:rPr sz="1200">
+                <a:solidFill>
+                  <a:srgbClr val="3D5466"/>
+                </a:solidFill>
+                <a:latin typeface="Arial"/>
+              </a:rPr>
+              <a:t>Phase 3: Konditionen transparent kommunizieren</a:t>
+            </a:r>
+          </a:p>
+          <a:p>
+            <a:pPr>
+              <a:spcBef>
+                <a:spcPts val="400"/>
+              </a:spcBef>
+              <a:spcAft>
+                <a:spcPts val="200"/>
+              </a:spcAft>
+            </a:pPr>
+            <a:r>
+              <a:rPr sz="1200">
+                <a:solidFill>
+                  <a:srgbClr val="3D5466"/>
+                </a:solidFill>
+                <a:latin typeface="Arial"/>
+              </a:rPr>
+              <a:t>Phase 4: Alternativen anbieten</a:t>
+            </a:r>
+          </a:p>
+          <a:p>
+            <a:pPr>
+              <a:spcBef>
+                <a:spcPts val="400"/>
+              </a:spcBef>
+              <a:spcAft>
+                <a:spcPts val="200"/>
+              </a:spcAft>
+            </a:pPr>
+            <a:r>
+              <a:rPr sz="1200">
+                <a:solidFill>
+                  <a:srgbClr val="3D5466"/>
+                </a:solidFill>
+                <a:latin typeface="Arial"/>
+              </a:rPr>
+              <a:t>Dem Kunden Optionen geben: „Wenn wir die Besicherung verbessern, könnten wir bei der Marge etwas flexibler sein." Oder: „Wenn Sie das R+V-Paket hinzunehmen, sehen wir die Gesamtbeziehung anders."</a:t>
+            </a:r>
+          </a:p>
+          <a:p>
+            <a:pPr>
+              <a:spcBef>
+                <a:spcPts val="400"/>
+              </a:spcBef>
+              <a:spcAft>
+                <a:spcPts val="200"/>
+              </a:spcAft>
+            </a:pPr>
+            <a:r>
+              <a:rPr sz="1200">
+                <a:solidFill>
+                  <a:srgbClr val="3D5466"/>
+                </a:solidFill>
+                <a:latin typeface="Arial"/>
+              </a:rPr>
+              <a:t>## 4.5 Praxiscase: Ertragsanalyse Bauer &amp; Söhne GmbH</a:t>
+            </a:r>
+          </a:p>
+          <a:p>
+            <a:pPr>
+              <a:spcBef>
+                <a:spcPts val="400"/>
+              </a:spcBef>
+              <a:spcAft>
+                <a:spcPts val="200"/>
+              </a:spcAft>
+            </a:pPr>
+            <a:r>
+              <a:rPr sz="1200">
+                <a:solidFill>
+                  <a:srgbClr val="3D5466"/>
+                </a:solidFill>
+                <a:latin typeface="Arial"/>
+              </a:rPr>
+              <a:t>Ausgangssituation</a:t>
+            </a:r>
+          </a:p>
+          <a:p>
+            <a:pPr>
+              <a:spcBef>
+                <a:spcPts val="400"/>
+              </a:spcBef>
+              <a:spcAft>
+                <a:spcPts val="200"/>
+              </a:spcAft>
+            </a:pPr>
+            <a:r>
+              <a:rPr sz="1200">
+                <a:solidFill>
+                  <a:srgbClr val="3D5466"/>
+                </a:solidFill>
+                <a:latin typeface="Arial"/>
+              </a:rPr>
+              <a:t>Bei der Vorbereitung des Jahresgesprächs analysiert Sandra den Deckungsbeitrag:</a:t>
+            </a:r>
+          </a:p>
+          <a:p>
+            <a:pPr>
+              <a:spcBef>
+                <a:spcPts val="400"/>
+              </a:spcBef>
+              <a:spcAft>
+                <a:spcPts val="200"/>
+              </a:spcAft>
+            </a:pPr>
+            <a:r>
+              <a:rPr sz="1200">
+                <a:solidFill>
+                  <a:srgbClr val="3D5466"/>
+                </a:solidFill>
+                <a:latin typeface="Arial"/>
+              </a:rPr>
+              <a:t>Die Analyse zeigt drei Probleme:</a:t>
+            </a:r>
+          </a:p>
+          <a:p>
+            <a:pPr>
+              <a:spcBef>
+                <a:spcPts val="400"/>
+              </a:spcBef>
+              <a:spcAft>
+                <a:spcPts val="200"/>
+              </a:spcAft>
+            </a:pPr>
+            <a:r>
+              <a:rPr sz="1300">
+                <a:solidFill>
+                  <a:srgbClr val="3D5466"/>
+                </a:solidFill>
+                <a:latin typeface="Arial"/>
+              </a:rPr>
+              <a:t>▸  Die Kreditmarge von 1,25 % deckt den EL von 0,65 % nur mit 0,60 % Nettomarge – unter dem bankinternen Mindeststandard von 0,80 % (fiktiver Fallbeispielwert; die konkrete Untergrenze wird hausindividuell festgelegt).</a:t>
             </a:r>
           </a:p>
         </p:txBody>
@@ -7288,6 +7365,386 @@
                 </a:solidFill>
                 <a:latin typeface="Source Serif 4"/>
               </a:rPr>
+              <a:t>Arbeitsblatt A: Deckungsbeitragsrechnung</a:t>
+            </a:r>
+          </a:p>
+        </p:txBody>
+      </p:sp>
+      <p:sp>
+        <p:nvSpPr>
+          <p:cNvPr id="8" name="TextBox 7"/>
+          <p:cNvSpPr txBox="1"/>
+          <p:nvPr/>
+        </p:nvSpPr>
+        <p:spPr>
+          <a:xfrm>
+            <a:off x="685800" y="1417320"/>
+            <a:ext cx="10817352" cy="5029200"/>
+          </a:xfrm>
+          <a:prstGeom prst="rect">
+            <a:avLst/>
+          </a:prstGeom>
+          <a:noFill/>
+        </p:spPr>
+        <p:txBody>
+          <a:bodyPr wrap="square">
+            <a:spAutoFit/>
+          </a:bodyPr>
+          <a:lstStyle/>
+          <a:p>
+            <a:pPr>
+              <a:spcBef>
+                <a:spcPts val="400"/>
+              </a:spcBef>
+              <a:spcAft>
+                <a:spcPts val="200"/>
+              </a:spcAft>
+            </a:pPr>
+            <a:r>
+              <a:rPr sz="1200">
+                <a:solidFill>
+                  <a:srgbClr val="3D5466"/>
+                </a:solidFill>
+                <a:latin typeface="Arial"/>
+              </a:rPr>
+              <a:t>Optimierungshebel (Top 2):</a:t>
+            </a:r>
+          </a:p>
+        </p:txBody>
+      </p:sp>
+      <p:sp>
+        <p:nvSpPr>
+          <p:cNvPr id="9" name="Rectangle 8"/>
+          <p:cNvSpPr/>
+          <p:nvPr/>
+        </p:nvSpPr>
+        <p:spPr>
+          <a:xfrm>
+            <a:off x="0" y="6510528"/>
+            <a:ext cx="12188952" cy="347472"/>
+          </a:xfrm>
+          <a:prstGeom prst="rect">
+            <a:avLst/>
+          </a:prstGeom>
+          <a:solidFill>
+            <a:srgbClr val="0A1937"/>
+          </a:solidFill>
+          <a:ln>
+            <a:noFill/>
+          </a:ln>
+        </p:spPr>
+        <p:style>
+          <a:lnRef idx="1">
+            <a:schemeClr val="accent1"/>
+          </a:lnRef>
+          <a:fillRef idx="3">
+            <a:schemeClr val="accent1"/>
+          </a:fillRef>
+          <a:effectRef idx="2">
+            <a:schemeClr val="accent1"/>
+          </a:effectRef>
+          <a:fontRef idx="minor">
+            <a:schemeClr val="lt1"/>
+          </a:fontRef>
+        </p:style>
+        <p:txBody>
+          <a:bodyPr rtlCol="0" anchor="ctr"/>
+          <a:lstStyle/>
+          <a:p>
+            <a:pPr algn="ctr"/>
+          </a:p>
+        </p:txBody>
+      </p:sp>
+      <p:sp>
+        <p:nvSpPr>
+          <p:cNvPr id="10" name="TextBox 9"/>
+          <p:cNvSpPr txBox="1"/>
+          <p:nvPr/>
+        </p:nvSpPr>
+        <p:spPr>
+          <a:xfrm>
+            <a:off x="685800" y="6583680"/>
+            <a:ext cx="6490411" cy="256032"/>
+          </a:xfrm>
+          <a:prstGeom prst="rect">
+            <a:avLst/>
+          </a:prstGeom>
+          <a:noFill/>
+        </p:spPr>
+        <p:txBody>
+          <a:bodyPr wrap="none">
+            <a:spAutoFit/>
+          </a:bodyPr>
+          <a:lstStyle/>
+          <a:p>
+            <a:pPr algn="l"/>
+            <a:r>
+              <a:rPr sz="700">
+                <a:solidFill>
+                  <a:srgbClr val="A0B4D2"/>
+                </a:solidFill>
+                <a:latin typeface="JetBrains Mono"/>
+              </a:rPr>
+              <a:t>Benedikt Zoller Coaching  ·  FKB Campus  ·  M14</a:t>
+            </a:r>
+          </a:p>
+        </p:txBody>
+      </p:sp>
+    </p:spTree>
+  </p:cSld>
+  <p:clrMapOvr>
+    <a:masterClrMapping/>
+  </p:clrMapOvr>
+</p:sld>
+</file>
+
+<file path=ppt/slides/slide16.xml><?xml version="1.0" encoding="utf-8"?>
+<p:sld xmlns:a="http://schemas.openxmlformats.org/drawingml/2006/main" xmlns:p="http://schemas.openxmlformats.org/presentationml/2006/main" xmlns:r="http://schemas.openxmlformats.org/officeDocument/2006/relationships">
+  <p:cSld>
+    <p:spTree>
+      <p:nvGrpSpPr>
+        <p:cNvPr id="1" name=""/>
+        <p:cNvGrpSpPr/>
+        <p:nvPr/>
+      </p:nvGrpSpPr>
+      <p:grpSpPr/>
+      <p:sp>
+        <p:nvSpPr>
+          <p:cNvPr id="2" name="Rectangle 1"/>
+          <p:cNvSpPr/>
+          <p:nvPr/>
+        </p:nvSpPr>
+        <p:spPr>
+          <a:xfrm>
+            <a:off x="0" y="0"/>
+            <a:ext cx="12188952" cy="6858000"/>
+          </a:xfrm>
+          <a:prstGeom prst="rect">
+            <a:avLst/>
+          </a:prstGeom>
+          <a:solidFill>
+            <a:srgbClr val="EDEDF3"/>
+          </a:solidFill>
+          <a:ln>
+            <a:noFill/>
+          </a:ln>
+        </p:spPr>
+        <p:style>
+          <a:lnRef idx="1">
+            <a:schemeClr val="accent1"/>
+          </a:lnRef>
+          <a:fillRef idx="3">
+            <a:schemeClr val="accent1"/>
+          </a:fillRef>
+          <a:effectRef idx="2">
+            <a:schemeClr val="accent1"/>
+          </a:effectRef>
+          <a:fontRef idx="minor">
+            <a:schemeClr val="lt1"/>
+          </a:fontRef>
+        </p:style>
+        <p:txBody>
+          <a:bodyPr rtlCol="0" anchor="ctr"/>
+          <a:lstStyle/>
+          <a:p>
+            <a:pPr algn="ctr"/>
+          </a:p>
+        </p:txBody>
+      </p:sp>
+      <p:sp>
+        <p:nvSpPr>
+          <p:cNvPr id="3" name="Rectangle 2"/>
+          <p:cNvSpPr/>
+          <p:nvPr/>
+        </p:nvSpPr>
+        <p:spPr>
+          <a:xfrm>
+            <a:off x="0" y="0"/>
+            <a:ext cx="12188952" cy="50292"/>
+          </a:xfrm>
+          <a:prstGeom prst="rect">
+            <a:avLst/>
+          </a:prstGeom>
+          <a:solidFill>
+            <a:srgbClr val="1F2C56"/>
+          </a:solidFill>
+          <a:ln>
+            <a:noFill/>
+          </a:ln>
+        </p:spPr>
+        <p:style>
+          <a:lnRef idx="1">
+            <a:schemeClr val="accent1"/>
+          </a:lnRef>
+          <a:fillRef idx="3">
+            <a:schemeClr val="accent1"/>
+          </a:fillRef>
+          <a:effectRef idx="2">
+            <a:schemeClr val="accent1"/>
+          </a:effectRef>
+          <a:fontRef idx="minor">
+            <a:schemeClr val="lt1"/>
+          </a:fontRef>
+        </p:style>
+        <p:txBody>
+          <a:bodyPr rtlCol="0" anchor="ctr"/>
+          <a:lstStyle/>
+          <a:p>
+            <a:pPr algn="ctr"/>
+          </a:p>
+        </p:txBody>
+      </p:sp>
+      <p:sp>
+        <p:nvSpPr>
+          <p:cNvPr id="4" name="TextBox 3"/>
+          <p:cNvSpPr txBox="1"/>
+          <p:nvPr/>
+        </p:nvSpPr>
+        <p:spPr>
+          <a:xfrm>
+            <a:off x="685800" y="109728"/>
+            <a:ext cx="10817352" cy="228600"/>
+          </a:xfrm>
+          <a:prstGeom prst="rect">
+            <a:avLst/>
+          </a:prstGeom>
+          <a:noFill/>
+        </p:spPr>
+        <p:txBody>
+          <a:bodyPr wrap="none">
+            <a:spAutoFit/>
+          </a:bodyPr>
+          <a:lstStyle/>
+          <a:p>
+            <a:pPr algn="l"/>
+            <a:r>
+              <a:rPr sz="750">
+                <a:solidFill>
+                  <a:srgbClr val="78808C"/>
+                </a:solidFill>
+                <a:latin typeface="JetBrains Mono"/>
+              </a:rPr>
+              <a:t>M14  ·  INHALT</a:t>
+            </a:r>
+          </a:p>
+        </p:txBody>
+      </p:sp>
+      <p:sp>
+        <p:nvSpPr>
+          <p:cNvPr id="5" name="Rectangle 4"/>
+          <p:cNvSpPr/>
+          <p:nvPr/>
+        </p:nvSpPr>
+        <p:spPr>
+          <a:xfrm>
+            <a:off x="0" y="1234440"/>
+            <a:ext cx="12188952" cy="12700"/>
+          </a:xfrm>
+          <a:prstGeom prst="rect">
+            <a:avLst/>
+          </a:prstGeom>
+          <a:solidFill>
+            <a:srgbClr val="D8DFE4"/>
+          </a:solidFill>
+          <a:ln>
+            <a:noFill/>
+          </a:ln>
+        </p:spPr>
+        <p:style>
+          <a:lnRef idx="1">
+            <a:schemeClr val="accent1"/>
+          </a:lnRef>
+          <a:fillRef idx="3">
+            <a:schemeClr val="accent1"/>
+          </a:fillRef>
+          <a:effectRef idx="2">
+            <a:schemeClr val="accent1"/>
+          </a:effectRef>
+          <a:fontRef idx="minor">
+            <a:schemeClr val="lt1"/>
+          </a:fontRef>
+        </p:style>
+        <p:txBody>
+          <a:bodyPr rtlCol="0" anchor="ctr"/>
+          <a:lstStyle/>
+          <a:p>
+            <a:pPr algn="ctr"/>
+          </a:p>
+        </p:txBody>
+      </p:sp>
+      <p:sp>
+        <p:nvSpPr>
+          <p:cNvPr id="6" name="Rectangle 5"/>
+          <p:cNvSpPr/>
+          <p:nvPr/>
+        </p:nvSpPr>
+        <p:spPr>
+          <a:xfrm>
+            <a:off x="685800" y="502920"/>
+            <a:ext cx="36576" cy="658368"/>
+          </a:xfrm>
+          <a:prstGeom prst="rect">
+            <a:avLst/>
+          </a:prstGeom>
+          <a:solidFill>
+            <a:srgbClr val="D9C089"/>
+          </a:solidFill>
+          <a:ln>
+            <a:noFill/>
+          </a:ln>
+        </p:spPr>
+        <p:style>
+          <a:lnRef idx="1">
+            <a:schemeClr val="accent1"/>
+          </a:lnRef>
+          <a:fillRef idx="3">
+            <a:schemeClr val="accent1"/>
+          </a:fillRef>
+          <a:effectRef idx="2">
+            <a:schemeClr val="accent1"/>
+          </a:effectRef>
+          <a:fontRef idx="minor">
+            <a:schemeClr val="lt1"/>
+          </a:fontRef>
+        </p:style>
+        <p:txBody>
+          <a:bodyPr rtlCol="0" anchor="ctr"/>
+          <a:lstStyle/>
+          <a:p>
+            <a:pPr algn="ctr"/>
+          </a:p>
+        </p:txBody>
+      </p:sp>
+      <p:sp>
+        <p:nvSpPr>
+          <p:cNvPr id="7" name="TextBox 6"/>
+          <p:cNvSpPr txBox="1"/>
+          <p:nvPr/>
+        </p:nvSpPr>
+        <p:spPr>
+          <a:xfrm>
+            <a:off x="813816" y="502920"/>
+            <a:ext cx="10634472" cy="685800"/>
+          </a:xfrm>
+          <a:prstGeom prst="rect">
+            <a:avLst/>
+          </a:prstGeom>
+          <a:noFill/>
+        </p:spPr>
+        <p:txBody>
+          <a:bodyPr wrap="square">
+            <a:spAutoFit/>
+          </a:bodyPr>
+          <a:lstStyle/>
+          <a:p>
+            <a:pPr algn="l"/>
+            <a:r>
+              <a:rPr sz="2400" b="1" i="0">
+                <a:solidFill>
+                  <a:srgbClr val="1F2C56"/>
+                </a:solidFill>
+                <a:latin typeface="Source Serif 4"/>
+              </a:rPr>
               <a:t>Arbeitsblatt B: Konditionengespräch vorbereiten</a:t>
             </a:r>
           </a:p>
@@ -7604,7 +8061,7 @@
                 </a:solidFill>
                 <a:latin typeface="JetBrains Mono"/>
               </a:rPr>
-              <a:t>LERNZIELE  ·  M14</a:t>
+              <a:t>ÜBERBLICK  ·  M14</a:t>
             </a:r>
           </a:p>
         </p:txBody>
@@ -7682,7 +8139,7 @@
                 </a:solidFill>
                 <a:latin typeface="Source Serif 4"/>
               </a:rPr>
-              <a:t>Was Sie heute mitnehmen</a:t>
+              <a:t>Worum geht es heute</a:t>
             </a:r>
           </a:p>
         </p:txBody>
@@ -7695,8 +8152,8 @@
         </p:nvSpPr>
         <p:spPr>
           <a:xfrm>
-            <a:off x="685800" y="1371600"/>
-            <a:ext cx="10817352" cy="5120640"/>
+            <a:off x="685800" y="1737360"/>
+            <a:ext cx="9720072" cy="4206240"/>
           </a:xfrm>
           <a:prstGeom prst="rect">
             <a:avLst/>
@@ -7710,97 +8167,50 @@
           <a:lstStyle/>
           <a:p>
             <a:pPr>
-              <a:spcBef>
-                <a:spcPts val="800"/>
-              </a:spcBef>
               <a:spcAft>
-                <a:spcPts val="200"/>
+                <a:spcPts val="1200"/>
               </a:spcAft>
             </a:pPr>
             <a:r>
-              <a:rPr sz="1400">
+              <a:rPr sz="1700">
                 <a:solidFill>
                   <a:srgbClr val="3D5466"/>
                 </a:solidFill>
                 <a:latin typeface="Arial"/>
               </a:rPr>
-              <a:t>▸  Den Kundendeckungsbeitrag anhand der vier Ertragskomponenten berechnen</a:t>
+              <a:t>Nicht jeder Kunde mit großem Kreditvolumen ist ein guter Kunde – entscheidend ist der Deckungsbeitrag.</a:t>
             </a:r>
           </a:p>
           <a:p>
             <a:pPr>
-              <a:spcBef>
-                <a:spcPts val="800"/>
-              </a:spcBef>
               <a:spcAft>
-                <a:spcPts val="200"/>
+                <a:spcPts val="1200"/>
               </a:spcAft>
             </a:pPr>
             <a:r>
-              <a:rPr sz="1400">
+              <a:rPr sz="1700">
                 <a:solidFill>
                   <a:srgbClr val="3D5466"/>
                 </a:solidFill>
                 <a:latin typeface="Arial"/>
               </a:rPr>
-              <a:t>▸  Die Ertragsstruktur eines Kunden analysieren und die größten Optimierungshebel identifizieren</a:t>
+              <a:t>Sie lernen Kundenkalkulation, risikogerechtes Pricing und die Analyse der Ertragsstruktur im eigenen Bestand.</a:t>
             </a:r>
           </a:p>
           <a:p>
             <a:pPr>
-              <a:spcBef>
-                <a:spcPts val="800"/>
-              </a:spcBef>
               <a:spcAft>
-                <a:spcPts val="200"/>
+                <a:spcPts val="1200"/>
               </a:spcAft>
             </a:pPr>
             <a:r>
-              <a:rPr sz="1400">
+              <a:rPr sz="1700">
                 <a:solidFill>
                   <a:srgbClr val="3D5466"/>
                 </a:solidFill>
                 <a:latin typeface="Arial"/>
               </a:rPr>
-              <a:t>▸  Den Expected Loss in der Konditionenkalkulation erklären und bewerten, ob eine Beziehung risikogerecht bepreist ist</a:t>
-            </a:r>
-          </a:p>
-          <a:p>
-            <a:pPr>
-              <a:spcBef>
-                <a:spcPts val="800"/>
-              </a:spcBef>
-              <a:spcAft>
-                <a:spcPts val="200"/>
-              </a:spcAft>
-            </a:pPr>
-            <a:r>
-              <a:rPr sz="1400">
-                <a:solidFill>
-                  <a:srgbClr val="3D5466"/>
-                </a:solidFill>
-                <a:latin typeface="Arial"/>
-              </a:rPr>
-              <a:t>▸  Drei Optimierungsszenarien bewerten und die ertragswirksamste Option wählen</a:t>
-            </a:r>
-          </a:p>
-          <a:p>
-            <a:pPr>
-              <a:spcBef>
-                <a:spcPts val="800"/>
-              </a:spcBef>
-              <a:spcAft>
-                <a:spcPts val="200"/>
-              </a:spcAft>
-            </a:pPr>
-            <a:r>
-              <a:rPr sz="1400">
-                <a:solidFill>
-                  <a:srgbClr val="3D5466"/>
-                </a:solidFill>
-                <a:latin typeface="Arial"/>
-              </a:rPr>
-              <a:t>▸  Ein Konditionengespräch wertbasiert führen – Nutzen kommunizieren bevor über Konditionen gesprochen wird</a:t>
+              <a:t>Danach erkennen Sie unterpreiste Engagements und führen Konditionengespräche wertbasiert statt defensiv.</a:t>
             </a:r>
           </a:p>
         </p:txBody>
@@ -7916,7 +8326,7 @@
             <a:avLst/>
           </a:prstGeom>
           <a:solidFill>
-            <a:srgbClr val="FFFFFF"/>
+            <a:srgbClr val="EDEDF3"/>
           </a:solidFill>
           <a:ln>
             <a:noFill/>
@@ -8017,62 +8427,27 @@
                 </a:solidFill>
                 <a:latin typeface="JetBrains Mono"/>
               </a:rPr>
-              <a:t>M14  ·  SCHAUBILD</a:t>
-            </a:r>
-          </a:p>
-        </p:txBody>
-      </p:sp>
-      <p:sp>
-        <p:nvSpPr>
-          <p:cNvPr id="5" name="TextBox 4"/>
-          <p:cNvSpPr txBox="1"/>
-          <p:nvPr/>
-        </p:nvSpPr>
-        <p:spPr>
-          <a:xfrm>
-            <a:off x="685800" y="502920"/>
-            <a:ext cx="10817352" cy="594360"/>
-          </a:xfrm>
-          <a:prstGeom prst="rect">
-            <a:avLst/>
-          </a:prstGeom>
-          <a:noFill/>
-        </p:spPr>
-        <p:txBody>
-          <a:bodyPr wrap="square">
-            <a:spAutoFit/>
-          </a:bodyPr>
-          <a:lstStyle/>
-          <a:p>
-            <a:pPr algn="l"/>
-            <a:r>
-              <a:rPr sz="2000" b="1" i="0">
-                <a:solidFill>
-                  <a:srgbClr val="1F2C56"/>
-                </a:solidFill>
-                <a:latin typeface="Source Serif 4"/>
-              </a:rPr>
-              <a:t>Deckungsbeitrags-Wasserfall</a:t>
-            </a:r>
-          </a:p>
-        </p:txBody>
-      </p:sp>
-      <p:sp>
-        <p:nvSpPr>
-          <p:cNvPr id="6" name="Rectangle 5"/>
+              <a:t>LERNZIELE  ·  M14</a:t>
+            </a:r>
+          </a:p>
+        </p:txBody>
+      </p:sp>
+      <p:sp>
+        <p:nvSpPr>
+          <p:cNvPr id="5" name="Rectangle 4"/>
           <p:cNvSpPr/>
           <p:nvPr/>
         </p:nvSpPr>
         <p:spPr>
           <a:xfrm>
-            <a:off x="685800" y="1143000"/>
-            <a:ext cx="10817352" cy="25400"/>
+            <a:off x="0" y="1234440"/>
+            <a:ext cx="12188952" cy="12700"/>
           </a:xfrm>
           <a:prstGeom prst="rect">
             <a:avLst/>
           </a:prstGeom>
           <a:solidFill>
-            <a:srgbClr val="D9C089"/>
+            <a:srgbClr val="D8DFE4"/>
           </a:solidFill>
           <a:ln>
             <a:noFill/>
@@ -8100,30 +8475,159 @@
           </a:p>
         </p:txBody>
       </p:sp>
-      <p:pic>
-        <p:nvPicPr>
-          <p:cNvPr id="7" name="Picture 6" descr="image.png"/>
-          <p:cNvPicPr>
-            <a:picLocks noChangeAspect="1"/>
-          </p:cNvPicPr>
-          <p:nvPr/>
-        </p:nvPicPr>
-        <p:blipFill>
-          <a:blip r:embed="rId2"/>
-          <a:stretch>
-            <a:fillRect/>
-          </a:stretch>
-        </p:blipFill>
-        <p:spPr>
-          <a:xfrm>
-            <a:off x="2303489" y="1325880"/>
-            <a:ext cx="7581973" cy="4937760"/>
-          </a:xfrm>
-          <a:prstGeom prst="rect">
-            <a:avLst/>
-          </a:prstGeom>
-        </p:spPr>
-      </p:pic>
+      <p:sp>
+        <p:nvSpPr>
+          <p:cNvPr id="6" name="TextBox 5"/>
+          <p:cNvSpPr txBox="1"/>
+          <p:nvPr/>
+        </p:nvSpPr>
+        <p:spPr>
+          <a:xfrm>
+            <a:off x="685800" y="502920"/>
+            <a:ext cx="10817352" cy="658368"/>
+          </a:xfrm>
+          <a:prstGeom prst="rect">
+            <a:avLst/>
+          </a:prstGeom>
+          <a:noFill/>
+        </p:spPr>
+        <p:txBody>
+          <a:bodyPr wrap="square">
+            <a:spAutoFit/>
+          </a:bodyPr>
+          <a:lstStyle/>
+          <a:p>
+            <a:pPr algn="l"/>
+            <a:r>
+              <a:rPr sz="2600" b="1" i="0">
+                <a:solidFill>
+                  <a:srgbClr val="1F2C56"/>
+                </a:solidFill>
+                <a:latin typeface="Source Serif 4"/>
+              </a:rPr>
+              <a:t>Was Sie heute mitnehmen</a:t>
+            </a:r>
+          </a:p>
+        </p:txBody>
+      </p:sp>
+      <p:sp>
+        <p:nvSpPr>
+          <p:cNvPr id="7" name="TextBox 6"/>
+          <p:cNvSpPr txBox="1"/>
+          <p:nvPr/>
+        </p:nvSpPr>
+        <p:spPr>
+          <a:xfrm>
+            <a:off x="685800" y="1371600"/>
+            <a:ext cx="10817352" cy="5120640"/>
+          </a:xfrm>
+          <a:prstGeom prst="rect">
+            <a:avLst/>
+          </a:prstGeom>
+          <a:noFill/>
+        </p:spPr>
+        <p:txBody>
+          <a:bodyPr wrap="square">
+            <a:spAutoFit/>
+          </a:bodyPr>
+          <a:lstStyle/>
+          <a:p>
+            <a:pPr>
+              <a:spcBef>
+                <a:spcPts val="800"/>
+              </a:spcBef>
+              <a:spcAft>
+                <a:spcPts val="200"/>
+              </a:spcAft>
+            </a:pPr>
+            <a:r>
+              <a:rPr sz="1400">
+                <a:solidFill>
+                  <a:srgbClr val="3D5466"/>
+                </a:solidFill>
+                <a:latin typeface="Arial"/>
+              </a:rPr>
+              <a:t>▸  Den Kundendeckungsbeitrag anhand der vier Ertragskomponenten berechnen</a:t>
+            </a:r>
+          </a:p>
+          <a:p>
+            <a:pPr>
+              <a:spcBef>
+                <a:spcPts val="800"/>
+              </a:spcBef>
+              <a:spcAft>
+                <a:spcPts val="200"/>
+              </a:spcAft>
+            </a:pPr>
+            <a:r>
+              <a:rPr sz="1400">
+                <a:solidFill>
+                  <a:srgbClr val="3D5466"/>
+                </a:solidFill>
+                <a:latin typeface="Arial"/>
+              </a:rPr>
+              <a:t>▸  Die Ertragsstruktur eines Kunden analysieren und die größten Optimierungshebel identifizieren</a:t>
+            </a:r>
+          </a:p>
+          <a:p>
+            <a:pPr>
+              <a:spcBef>
+                <a:spcPts val="800"/>
+              </a:spcBef>
+              <a:spcAft>
+                <a:spcPts val="200"/>
+              </a:spcAft>
+            </a:pPr>
+            <a:r>
+              <a:rPr sz="1400">
+                <a:solidFill>
+                  <a:srgbClr val="3D5466"/>
+                </a:solidFill>
+                <a:latin typeface="Arial"/>
+              </a:rPr>
+              <a:t>▸  Den Expected Loss in der Konditionenkalkulation erklären und bewerten, ob eine Beziehung risikogerecht bepreist ist</a:t>
+            </a:r>
+          </a:p>
+          <a:p>
+            <a:pPr>
+              <a:spcBef>
+                <a:spcPts val="800"/>
+              </a:spcBef>
+              <a:spcAft>
+                <a:spcPts val="200"/>
+              </a:spcAft>
+            </a:pPr>
+            <a:r>
+              <a:rPr sz="1400">
+                <a:solidFill>
+                  <a:srgbClr val="3D5466"/>
+                </a:solidFill>
+                <a:latin typeface="Arial"/>
+              </a:rPr>
+              <a:t>▸  Drei Optimierungsszenarien bewerten und die ertragswirksamste Option wählen</a:t>
+            </a:r>
+          </a:p>
+          <a:p>
+            <a:pPr>
+              <a:spcBef>
+                <a:spcPts val="800"/>
+              </a:spcBef>
+              <a:spcAft>
+                <a:spcPts val="200"/>
+              </a:spcAft>
+            </a:pPr>
+            <a:r>
+              <a:rPr sz="1400">
+                <a:solidFill>
+                  <a:srgbClr val="3D5466"/>
+                </a:solidFill>
+                <a:latin typeface="Arial"/>
+              </a:rPr>
+              <a:t>▸  Ein Konditionengespräch wertbasiert führen – Nutzen kommunizieren bevor über Konditionen gesprochen wird</a:t>
+            </a:r>
+          </a:p>
+        </p:txBody>
+      </p:sp>
       <p:sp>
         <p:nvSpPr>
           <p:cNvPr id="8" name="Rectangle 7"/>
@@ -8198,41 +8702,6 @@
                 <a:latin typeface="JetBrains Mono"/>
               </a:rPr>
               <a:t>Benedikt Zoller Coaching  ·  FKB Campus  ·  M14</a:t>
-            </a:r>
-          </a:p>
-        </p:txBody>
-      </p:sp>
-      <p:sp>
-        <p:nvSpPr>
-          <p:cNvPr id="10" name="TextBox 9"/>
-          <p:cNvSpPr txBox="1"/>
-          <p:nvPr/>
-        </p:nvSpPr>
-        <p:spPr>
-          <a:xfrm>
-            <a:off x="7176211" y="6583680"/>
-            <a:ext cx="4326940" cy="256032"/>
-          </a:xfrm>
-          <a:prstGeom prst="rect">
-            <a:avLst/>
-          </a:prstGeom>
-          <a:noFill/>
-        </p:spPr>
-        <p:txBody>
-          <a:bodyPr wrap="none">
-            <a:spAutoFit/>
-          </a:bodyPr>
-          <a:lstStyle/>
-          <a:p>
-            <a:pPr algn="r"/>
-            <a:r>
-              <a:rPr sz="700">
-                <a:solidFill>
-                  <a:srgbClr val="A0B4D2"/>
-                </a:solidFill>
-                <a:latin typeface="JetBrains Mono"/>
-              </a:rPr>
-              <a:t>Schaubild</a:t>
             </a:r>
           </a:p>
         </p:txBody>
@@ -8270,7 +8739,7 @@
             <a:avLst/>
           </a:prstGeom>
           <a:solidFill>
-            <a:srgbClr val="EDEDF3"/>
+            <a:srgbClr val="FFFFFF"/>
           </a:solidFill>
           <a:ln>
             <a:noFill/>
@@ -8371,51 +8840,43 @@
                 </a:solidFill>
                 <a:latin typeface="JetBrains Mono"/>
               </a:rPr>
-              <a:t>M14  ·  INHALT</a:t>
-            </a:r>
-          </a:p>
-        </p:txBody>
-      </p:sp>
-      <p:sp>
-        <p:nvSpPr>
-          <p:cNvPr id="5" name="Rectangle 4"/>
-          <p:cNvSpPr/>
-          <p:nvPr/>
-        </p:nvSpPr>
-        <p:spPr>
-          <a:xfrm>
-            <a:off x="0" y="1234440"/>
-            <a:ext cx="12188952" cy="12700"/>
-          </a:xfrm>
-          <a:prstGeom prst="rect">
-            <a:avLst/>
-          </a:prstGeom>
-          <a:solidFill>
-            <a:srgbClr val="D8DFE4"/>
-          </a:solidFill>
-          <a:ln>
-            <a:noFill/>
-          </a:ln>
-        </p:spPr>
-        <p:style>
-          <a:lnRef idx="1">
-            <a:schemeClr val="accent1"/>
-          </a:lnRef>
-          <a:fillRef idx="3">
-            <a:schemeClr val="accent1"/>
-          </a:fillRef>
-          <a:effectRef idx="2">
-            <a:schemeClr val="accent1"/>
-          </a:effectRef>
-          <a:fontRef idx="minor">
-            <a:schemeClr val="lt1"/>
-          </a:fontRef>
-        </p:style>
-        <p:txBody>
-          <a:bodyPr rtlCol="0" anchor="ctr"/>
-          <a:lstStyle/>
-          <a:p>
-            <a:pPr algn="ctr"/>
+              <a:t>M14  ·  SCHAUBILD</a:t>
+            </a:r>
+          </a:p>
+        </p:txBody>
+      </p:sp>
+      <p:sp>
+        <p:nvSpPr>
+          <p:cNvPr id="5" name="TextBox 4"/>
+          <p:cNvSpPr txBox="1"/>
+          <p:nvPr/>
+        </p:nvSpPr>
+        <p:spPr>
+          <a:xfrm>
+            <a:off x="685800" y="502920"/>
+            <a:ext cx="10817352" cy="594360"/>
+          </a:xfrm>
+          <a:prstGeom prst="rect">
+            <a:avLst/>
+          </a:prstGeom>
+          <a:noFill/>
+        </p:spPr>
+        <p:txBody>
+          <a:bodyPr wrap="square">
+            <a:spAutoFit/>
+          </a:bodyPr>
+          <a:lstStyle/>
+          <a:p>
+            <a:pPr algn="l"/>
+            <a:r>
+              <a:rPr sz="2000" b="1" i="0">
+                <a:solidFill>
+                  <a:srgbClr val="1F2C56"/>
+                </a:solidFill>
+                <a:latin typeface="Source Serif 4"/>
+              </a:rPr>
+              <a:t>Deckungsbeitrags-Wasserfall</a:t>
+            </a:r>
           </a:p>
         </p:txBody>
       </p:sp>
@@ -8427,8 +8888,8 @@
         </p:nvSpPr>
         <p:spPr>
           <a:xfrm>
-            <a:off x="685800" y="502920"/>
-            <a:ext cx="36576" cy="658368"/>
+            <a:off x="685800" y="1143000"/>
+            <a:ext cx="10817352" cy="25400"/>
           </a:xfrm>
           <a:prstGeom prst="rect">
             <a:avLst/>
@@ -8462,41 +8923,30 @@
           </a:p>
         </p:txBody>
       </p:sp>
-      <p:sp>
-        <p:nvSpPr>
-          <p:cNvPr id="7" name="TextBox 6"/>
-          <p:cNvSpPr txBox="1"/>
-          <p:nvPr/>
-        </p:nvSpPr>
-        <p:spPr>
-          <a:xfrm>
-            <a:off x="813816" y="502920"/>
-            <a:ext cx="10634472" cy="685800"/>
-          </a:xfrm>
-          <a:prstGeom prst="rect">
-            <a:avLst/>
-          </a:prstGeom>
-          <a:noFill/>
-        </p:spPr>
-        <p:txBody>
-          <a:bodyPr wrap="square">
-            <a:spAutoFit/>
-          </a:bodyPr>
-          <a:lstStyle/>
-          <a:p>
-            <a:pPr algn="l"/>
-            <a:r>
-              <a:rPr sz="2400" b="1" i="0">
-                <a:solidFill>
-                  <a:srgbClr val="1F2C56"/>
-                </a:solidFill>
-                <a:latin typeface="Source Serif 4"/>
-              </a:rPr>
-              <a:t>Warum Ertrag je Kunde messen?</a:t>
-            </a:r>
-          </a:p>
-        </p:txBody>
-      </p:sp>
+      <p:pic>
+        <p:nvPicPr>
+          <p:cNvPr id="7" name="Picture 6" descr="image.png"/>
+          <p:cNvPicPr>
+            <a:picLocks noChangeAspect="1"/>
+          </p:cNvPicPr>
+          <p:nvPr/>
+        </p:nvPicPr>
+        <p:blipFill>
+          <a:blip r:embed="rId2"/>
+          <a:stretch>
+            <a:fillRect/>
+          </a:stretch>
+        </p:blipFill>
+        <p:spPr>
+          <a:xfrm>
+            <a:off x="2303489" y="1325880"/>
+            <a:ext cx="7581973" cy="4937760"/>
+          </a:xfrm>
+          <a:prstGeom prst="rect">
+            <a:avLst/>
+          </a:prstGeom>
+        </p:spPr>
+      </p:pic>
       <p:sp>
         <p:nvSpPr>
           <p:cNvPr id="8" name="Rectangle 7"/>
@@ -8571,6 +9021,41 @@
                 <a:latin typeface="JetBrains Mono"/>
               </a:rPr>
               <a:t>Benedikt Zoller Coaching  ·  FKB Campus  ·  M14</a:t>
+            </a:r>
+          </a:p>
+        </p:txBody>
+      </p:sp>
+      <p:sp>
+        <p:nvSpPr>
+          <p:cNvPr id="10" name="TextBox 9"/>
+          <p:cNvSpPr txBox="1"/>
+          <p:nvPr/>
+        </p:nvSpPr>
+        <p:spPr>
+          <a:xfrm>
+            <a:off x="7176211" y="6583680"/>
+            <a:ext cx="4326940" cy="256032"/>
+          </a:xfrm>
+          <a:prstGeom prst="rect">
+            <a:avLst/>
+          </a:prstGeom>
+          <a:noFill/>
+        </p:spPr>
+        <p:txBody>
+          <a:bodyPr wrap="none">
+            <a:spAutoFit/>
+          </a:bodyPr>
+          <a:lstStyle/>
+          <a:p>
+            <a:pPr algn="r"/>
+            <a:r>
+              <a:rPr sz="700">
+                <a:solidFill>
+                  <a:srgbClr val="A0B4D2"/>
+                </a:solidFill>
+                <a:latin typeface="JetBrains Mono"/>
+              </a:rPr>
+              <a:t>Schaubild</a:t>
             </a:r>
           </a:p>
         </p:txBody>
@@ -8830,94 +9315,14 @@
                 </a:solidFill>
                 <a:latin typeface="Source Serif 4"/>
               </a:rPr>
-              <a:t>Die vier Ertragskomponenten</a:t>
-            </a:r>
-          </a:p>
-        </p:txBody>
-      </p:sp>
-      <p:sp>
-        <p:nvSpPr>
-          <p:cNvPr id="8" name="TextBox 7"/>
-          <p:cNvSpPr txBox="1"/>
-          <p:nvPr/>
-        </p:nvSpPr>
-        <p:spPr>
-          <a:xfrm>
-            <a:off x="685800" y="1417320"/>
-            <a:ext cx="10817352" cy="5029200"/>
-          </a:xfrm>
-          <a:prstGeom prst="rect">
-            <a:avLst/>
-          </a:prstGeom>
-          <a:noFill/>
-        </p:spPr>
-        <p:txBody>
-          <a:bodyPr wrap="square">
-            <a:spAutoFit/>
-          </a:bodyPr>
-          <a:lstStyle/>
-          <a:p>
-            <a:pPr>
-              <a:spcBef>
-                <a:spcPts val="400"/>
-              </a:spcBef>
-              <a:spcAft>
-                <a:spcPts val="200"/>
-              </a:spcAft>
-            </a:pPr>
-            <a:r>
-              <a:rPr sz="1200">
-                <a:solidFill>
-                  <a:srgbClr val="3D5466"/>
-                </a:solidFill>
-                <a:latin typeface="Arial"/>
-              </a:rPr>
-              <a:t>Der Kundendeckungsbeitrag setzt sich zusammen aus:</a:t>
-            </a:r>
-          </a:p>
-          <a:p>
-            <a:pPr>
-              <a:spcBef>
-                <a:spcPts val="400"/>
-              </a:spcBef>
-              <a:spcAft>
-                <a:spcPts val="200"/>
-              </a:spcAft>
-            </a:pPr>
-            <a:r>
-              <a:rPr sz="1200">
-                <a:solidFill>
-                  <a:srgbClr val="3D5466"/>
-                </a:solidFill>
-                <a:latin typeface="Arial"/>
-              </a:rPr>
-              <a:t>Deckungsbeitrag I = Zinsüberschuss + Provisionsertrag + Verbundertrag − Risikokosten</a:t>
-            </a:r>
-          </a:p>
-          <a:p>
-            <a:pPr>
-              <a:spcBef>
-                <a:spcPts val="400"/>
-              </a:spcBef>
-              <a:spcAft>
-                <a:spcPts val="200"/>
-              </a:spcAft>
-            </a:pPr>
-            <a:r>
-              <a:rPr sz="1200">
-                <a:solidFill>
-                  <a:srgbClr val="3D5466"/>
-                </a:solidFill>
-                <a:latin typeface="Arial"/>
-              </a:rPr>
-              <a:t>Deckungsbeitrag II = DB I − Betriebskosten (Betreuungsaufwand)</a:t>
-            </a:r>
-          </a:p>
-        </p:txBody>
-      </p:sp>
-      <p:sp>
-        <p:nvSpPr>
-          <p:cNvPr id="9" name="Rectangle 8"/>
+              <a:t>Warum Ertrag je Kunde messen?</a:t>
+            </a:r>
+          </a:p>
+        </p:txBody>
+      </p:sp>
+      <p:sp>
+        <p:nvSpPr>
+          <p:cNvPr id="8" name="Rectangle 7"/>
           <p:cNvSpPr/>
           <p:nvPr/>
         </p:nvSpPr>
@@ -8960,7 +9365,7 @@
       </p:sp>
       <p:sp>
         <p:nvSpPr>
-          <p:cNvPr id="10" name="TextBox 9"/>
+          <p:cNvPr id="9" name="TextBox 8"/>
           <p:cNvSpPr txBox="1"/>
           <p:nvPr/>
         </p:nvSpPr>
@@ -9248,7 +9653,7 @@
                 </a:solidFill>
                 <a:latin typeface="Source Serif 4"/>
               </a:rPr>
-              <a:t>Rechenbeispiel: Kundendeckungsbeitrag Müller GmbH</a:t>
+              <a:t>Die vier Ertragskomponenten</a:t>
             </a:r>
           </a:p>
         </p:txBody>
@@ -9290,7 +9695,7 @@
                 </a:solidFill>
                 <a:latin typeface="Arial"/>
               </a:rPr>
-              <a:t>Ertragskennzahl: DB II / Kreditvolumen = 1,58 % (Kundenrendite)</a:t>
+              <a:t>Der Kundendeckungsbeitrag setzt sich zusammen aus:</a:t>
             </a:r>
           </a:p>
           <a:p>
@@ -9309,7 +9714,26 @@
                 </a:solidFill>
                 <a:latin typeface="Arial"/>
               </a:rPr>
-              <a:t>## 4.2 Risikogerechtes Pricing</a:t>
+              <a:t>Deckungsbeitrag I = Zinsüberschuss + Provisionsertrag + Verbundertrag − Risikokosten</a:t>
+            </a:r>
+          </a:p>
+          <a:p>
+            <a:pPr>
+              <a:spcBef>
+                <a:spcPts val="400"/>
+              </a:spcBef>
+              <a:spcAft>
+                <a:spcPts val="200"/>
+              </a:spcAft>
+            </a:pPr>
+            <a:r>
+              <a:rPr sz="1200">
+                <a:solidFill>
+                  <a:srgbClr val="3D5466"/>
+                </a:solidFill>
+                <a:latin typeface="Arial"/>
+              </a:rPr>
+              <a:t>Deckungsbeitrag II = DB I − Betriebskosten (Betreuungsaufwand)</a:t>
             </a:r>
           </a:p>
         </p:txBody>
@@ -9647,7 +10071,7 @@
                 </a:solidFill>
                 <a:latin typeface="Source Serif 4"/>
               </a:rPr>
-              <a:t>Der Expected Loss als Kalkulationsgrundlage</a:t>
+              <a:t>Rechenbeispiel: Kundendeckungsbeitrag Müller GmbH</a:t>
             </a:r>
           </a:p>
         </p:txBody>
@@ -9689,7 +10113,7 @@
                 </a:solidFill>
                 <a:latin typeface="Arial"/>
               </a:rPr>
-              <a:t>In der Konditionenkalkulation muss die Risikoprämie mindestens den Expected Loss (EL) des Kreditengagements abdecken. Der EL errechnet sich nach Basel III  aus:</a:t>
+              <a:t>Ertragskennzahl: DB II / Kreditvolumen = 1,58 % (Kundenrendite)</a:t>
             </a:r>
           </a:p>
           <a:p>
@@ -9708,7 +10132,7 @@
                 </a:solidFill>
                 <a:latin typeface="Arial"/>
               </a:rPr>
-              <a:t>EL = PD × LGD × EAD</a:t>
+              <a:t>## 4.2 Risikogerechtes Pricing</a:t>
             </a:r>
           </a:p>
         </p:txBody>
@@ -10046,7 +10470,7 @@
                 </a:solidFill>
                 <a:latin typeface="Source Serif 4"/>
               </a:rPr>
-              <a:t>Das Nettomargenziel (NMZ) als Steuerungsgröße</a:t>
+              <a:t>Der Expected Loss als Kalkulationsgrundlage</a:t>
             </a:r>
           </a:p>
         </p:txBody>
@@ -10088,26 +10512,26 @@
                 </a:solidFill>
                 <a:latin typeface="Arial"/>
               </a:rPr>
-              <a:t>Logik:</a:t>
+              <a:t>In der Konditionenkalkulation muss die Risikoprämie mindestens den Expected Loss (EL) des Kreditengagements abdecken. Der EL errechnet sich nach Basel III  aus:</a:t>
             </a:r>
           </a:p>
           <a:p>
             <a:pPr>
               <a:spcBef>
-                <a:spcPts val="600"/>
+                <a:spcPts val="400"/>
               </a:spcBef>
               <a:spcAft>
                 <a:spcPts val="200"/>
               </a:spcAft>
             </a:pPr>
             <a:r>
-              <a:rPr sz="1200" i="1">
+              <a:rPr sz="1200">
                 <a:solidFill>
                   <a:srgbClr val="3D5466"/>
                 </a:solidFill>
                 <a:latin typeface="Arial"/>
               </a:rPr>
-              <a:t>→  Bruttomarge (vereinbarte Kreditmarge) − Refinanzierungskosten − EL − Standardbetriebskosten = Nettomarge</a:t>
+              <a:t>EL = PD × LGD × EAD</a:t>
             </a:r>
           </a:p>
         </p:txBody>
@@ -10445,7 +10869,7 @@
                 </a:solidFill>
                 <a:latin typeface="Source Serif 4"/>
               </a:rPr>
-              <a:t>Konditionsanpassung vorbereiten</a:t>
+              <a:t>Das Nettomargenziel (NMZ) als Steuerungsgröße</a:t>
             </a:r>
           </a:p>
         </p:txBody>
@@ -10487,83 +10911,26 @@
                 </a:solidFill>
                 <a:latin typeface="Arial"/>
               </a:rPr>
-              <a:t>Wenn die Analyse zeigt, dass ein Kunde unter dem Mindest-Deckungsbeitrag liegt, gibt es drei Hebel:</a:t>
+              <a:t>Logik:</a:t>
             </a:r>
           </a:p>
           <a:p>
             <a:pPr>
               <a:spcBef>
-                <a:spcPts val="400"/>
+                <a:spcPts val="600"/>
               </a:spcBef>
               <a:spcAft>
                 <a:spcPts val="200"/>
               </a:spcAft>
             </a:pPr>
             <a:r>
-              <a:rPr sz="1300">
+              <a:rPr sz="1200" i="1">
                 <a:solidFill>
                   <a:srgbClr val="3D5466"/>
                 </a:solidFill>
                 <a:latin typeface="Arial"/>
               </a:rPr>
-              <a:t>▸  Zinsmarge erhöhen: Direkte Wirkung auf DB I. Erfordert Konditionengespräch (Sec 4.4).</a:t>
-            </a:r>
-          </a:p>
-          <a:p>
-            <a:pPr>
-              <a:spcBef>
-                <a:spcPts val="400"/>
-              </a:spcBef>
-              <a:spcAft>
-                <a:spcPts val="200"/>
-              </a:spcAft>
-            </a:pPr>
-            <a:r>
-              <a:rPr sz="1300">
-                <a:solidFill>
-                  <a:srgbClr val="3D5466"/>
-                </a:solidFill>
-                <a:latin typeface="Arial"/>
-              </a:rPr>
-              <a:t>▸  Cross-Selling ausbauen: Verbundertrag und Provisionen steigern, ohne Zinskonditionen anzufassen. Oft der schonendere Weg.</a:t>
-            </a:r>
-          </a:p>
-          <a:p>
-            <a:pPr>
-              <a:spcBef>
-                <a:spcPts val="400"/>
-              </a:spcBef>
-              <a:spcAft>
-                <a:spcPts val="200"/>
-              </a:spcAft>
-            </a:pPr>
-            <a:r>
-              <a:rPr sz="1300">
-                <a:solidFill>
-                  <a:srgbClr val="3D5466"/>
-                </a:solidFill>
-                <a:latin typeface="Arial"/>
-              </a:rPr>
-              <a:t>▸  Betreuungskosten senken: Gesprächsfrequenz anpassen, digitale Kanäle stärker nutzen. Wirkt auf DB II.</a:t>
-            </a:r>
-          </a:p>
-          <a:p>
-            <a:pPr>
-              <a:spcBef>
-                <a:spcPts val="400"/>
-              </a:spcBef>
-              <a:spcAft>
-                <a:spcPts val="200"/>
-              </a:spcAft>
-            </a:pPr>
-            <a:r>
-              <a:rPr sz="1200">
-                <a:solidFill>
-                  <a:srgbClr val="3D5466"/>
-                </a:solidFill>
-                <a:latin typeface="Arial"/>
-              </a:rPr>
-              <a:t>## 4.3 Ertragsstruktur-Analyse im Bestand</a:t>
+              <a:t>→  Bruttomarge (vereinbarte Kreditmarge) − Refinanzierungskosten − EL − Standardbetriebskosten = Nettomarge</a:t>
             </a:r>
           </a:p>
         </p:txBody>

--- a/protected-downloads/praesentation/M14.pptx
+++ b/protected-downloads/praesentation/M14.pptx
@@ -9,7 +9,7 @@
     <p:sldId id="257" r:id="rId8"/>
     <p:sldId id="258" r:id="rId9"/>
     <p:sldId id="259" r:id="rId10"/>
-    <p:sldId id="260" r:id="rId11"/>
+    <p:sldId id="260" r:id="rId12"/>
     <p:sldId id="261" r:id="rId13"/>
     <p:sldId id="262" r:id="rId14"/>
     <p:sldId id="263" r:id="rId15"/>
@@ -517,7 +517,7 @@
           <a:lstStyle/>
           <a:p>
             <a:r>
-              <a:t>Siehe Trainerhandbuch (Sektion 3) für Moderationshinweise, Timing und erwartete Teilnehmerreaktionen.</a:t>
+              <a:t>Agenda aus dem Ablaufplan (Sektion 3.1). Timing und Pausen siehe Trainerhandbuch.</a:t>
             </a:r>
           </a:p>
         </p:txBody>
@@ -5071,13 +5071,13 @@
               </a:spcAft>
             </a:pPr>
             <a:r>
-              <a:rPr sz="1200">
+              <a:rPr sz="1300">
                 <a:solidFill>
                   <a:srgbClr val="3D5466"/>
                 </a:solidFill>
                 <a:latin typeface="Arial"/>
               </a:rPr>
-              <a:t>Wenn die Analyse zeigt, dass ein Kunde unter dem Mindest-Deckungsbeitrag liegt, gibt es drei Hebel:</a:t>
+              <a:t>▸  Wenn die Analyse zeigt, dass ein Kunde unter dem Mindest-Deckungsbeitrag liegt, gibt es drei Hebel:</a:t>
             </a:r>
           </a:p>
           <a:p>
@@ -5147,13 +5147,13 @@
               </a:spcAft>
             </a:pPr>
             <a:r>
-              <a:rPr sz="1200">
+              <a:rPr sz="1300">
                 <a:solidFill>
                   <a:srgbClr val="3D5466"/>
                 </a:solidFill>
                 <a:latin typeface="Arial"/>
               </a:rPr>
-              <a:t>## 4.3 Ertragsstruktur-Analyse im Bestand</a:t>
+              <a:t>▸  ## 4.3 Ertragsstruktur-Analyse im Bestand</a:t>
             </a:r>
           </a:p>
         </p:txBody>
@@ -5527,13 +5527,13 @@
               </a:spcAft>
             </a:pPr>
             <a:r>
-              <a:rPr sz="1200">
+              <a:rPr sz="1300">
                 <a:solidFill>
                   <a:srgbClr val="3D5466"/>
                 </a:solidFill>
                 <a:latin typeface="Arial"/>
               </a:rPr>
-              <a:t>Eine einfache 2×2-Matrix hilft, den Bestand nach Ertragspotenzial und aktuellem Ertrag zu strukturieren:</a:t>
+              <a:t>▸  Eine einfache 2×2-Matrix hilft, den Bestand nach Ertragspotenzial und aktuellem Ertrag zu strukturieren:</a:t>
             </a:r>
           </a:p>
           <a:p>
@@ -5546,13 +5546,13 @@
               </a:spcAft>
             </a:pPr>
             <a:r>
-              <a:rPr sz="1200">
+              <a:rPr sz="1300">
                 <a:solidFill>
                   <a:srgbClr val="3D5466"/>
                 </a:solidFill>
                 <a:latin typeface="Arial"/>
               </a:rPr>
-              <a:t>Kernkunden (hoher DB, hohes Potenzial) erhalten bevorzugte Betreuungsintensität: proaktive Kontakte, Spezialisten einbinden, Strategiegespräche.</a:t>
+              <a:t>▸  Kernkunden (hoher DB, hohes Potenzial) erhalten bevorzugte Betreuungsintensität: proaktive Kontakte, Spezialisten einbinden, Strategiegespräche.</a:t>
             </a:r>
           </a:p>
           <a:p>
@@ -5565,13 +5565,13 @@
               </a:spcAft>
             </a:pPr>
             <a:r>
-              <a:rPr sz="1200">
+              <a:rPr sz="1300">
                 <a:solidFill>
                   <a:srgbClr val="3D5466"/>
                 </a:solidFill>
                 <a:latin typeface="Arial"/>
               </a:rPr>
-              <a:t>Entwicklungskunden (niedriger DB, hohes Potenzial) sind die Priorität für Ertragsoptimierung: Hier liegt ungenutztes Wallet-Share-Potenzial.</a:t>
+              <a:t>▸  Entwicklungskunden (niedriger DB, hohes Potenzial) sind die Priorität für Ertragsoptimierung: Hier liegt ungenutztes Wallet-Share-Potenzial.</a:t>
             </a:r>
           </a:p>
           <a:p>
@@ -5584,13 +5584,13 @@
               </a:spcAft>
             </a:pPr>
             <a:r>
-              <a:rPr sz="1200">
+              <a:rPr sz="1300">
                 <a:solidFill>
                   <a:srgbClr val="3D5466"/>
                 </a:solidFill>
                 <a:latin typeface="Arial"/>
               </a:rPr>
-              <a:t>Problemkunden (niedriger DB, niedriges Potenzial) sollten mit minimalem Aufwand betreut werden. Exit aus der Beziehung ist bei dauerhaft negativem DB zu prüfen – aber:</a:t>
+              <a:t>▸  Problemkunden (niedriger DB, niedriges Potenzial) sollten mit minimalem Aufwand betreut werden. Exit aus der Beziehung ist bei dauerhaft negativem DB zu prüfen – aber:</a:t>
             </a:r>
           </a:p>
         </p:txBody>
@@ -5964,13 +5964,13 @@
               </a:spcAft>
             </a:pPr>
             <a:r>
-              <a:rPr sz="1200">
+              <a:rPr sz="1300">
                 <a:solidFill>
                   <a:srgbClr val="3D5466"/>
                 </a:solidFill>
                 <a:latin typeface="Arial"/>
               </a:rPr>
-              <a:t>Berater erkennen unterpreiste Engagements oft an folgenden Signalen:</a:t>
+              <a:t>▸  Berater erkennen unterpreiste Engagements oft an folgenden Signalen:</a:t>
             </a:r>
           </a:p>
           <a:p>
@@ -6059,13 +6059,13 @@
               </a:spcAft>
             </a:pPr>
             <a:r>
-              <a:rPr sz="1200">
+              <a:rPr sz="1300">
                 <a:solidFill>
                   <a:srgbClr val="3D5466"/>
                 </a:solidFill>
                 <a:latin typeface="Arial"/>
               </a:rPr>
-              <a:t>Die folgende Handlungsempfehlung-Karte verknüpft diese Ertragssignale mit dem jeweils passenden Vertriebsimpuls:</a:t>
+              <a:t>▸  Die folgende Handlungsempfehlung-Karte verknüpft diese Ertragssignale mit dem jeweils passenden Vertriebsimpuls:</a:t>
             </a:r>
           </a:p>
           <a:p>
@@ -6078,13 +6078,13 @@
               </a:spcAft>
             </a:pPr>
             <a:r>
-              <a:rPr sz="1200">
+              <a:rPr sz="1300">
                 <a:solidFill>
                   <a:srgbClr val="3D5466"/>
                 </a:solidFill>
                 <a:latin typeface="Arial"/>
               </a:rPr>
-              <a:t>## 4.4 Das Konditionengespräch wertbasiert führen</a:t>
+              <a:t>▸  ## 4.4 Das Konditionengespräch wertbasiert führen</a:t>
             </a:r>
           </a:p>
         </p:txBody>
@@ -6812,13 +6812,13 @@
               </a:spcAft>
             </a:pPr>
             <a:r>
-              <a:rPr sz="1200">
+              <a:rPr sz="1300">
                 <a:solidFill>
                   <a:srgbClr val="3D5466"/>
                 </a:solidFill>
                 <a:latin typeface="Arial"/>
               </a:rPr>
-              <a:t>Ein wertbasierter Ansatz kehrt die Reihenfolge um:</a:t>
+              <a:t>▸  Ein wertbasierter Ansatz kehrt die Reihenfolge um:</a:t>
             </a:r>
           </a:p>
           <a:p>
@@ -6831,13 +6831,13 @@
               </a:spcAft>
             </a:pPr>
             <a:r>
-              <a:rPr sz="1200">
+              <a:rPr sz="1300">
                 <a:solidFill>
                   <a:srgbClr val="3D5466"/>
                 </a:solidFill>
                 <a:latin typeface="Arial"/>
               </a:rPr>
-              <a:t>Phase 1: Wert der Beziehung artikulieren</a:t>
+              <a:t>▸  Phase 1: Wert der Beziehung artikulieren</a:t>
             </a:r>
           </a:p>
           <a:p>
@@ -6850,13 +6850,13 @@
               </a:spcAft>
             </a:pPr>
             <a:r>
-              <a:rPr sz="1200">
+              <a:rPr sz="1300">
                 <a:solidFill>
                   <a:srgbClr val="3D5466"/>
                 </a:solidFill>
                 <a:latin typeface="Arial"/>
               </a:rPr>
-              <a:t>Phase 2: Marktumfeld erklären</a:t>
+              <a:t>▸  Phase 2: Marktumfeld erklären</a:t>
             </a:r>
           </a:p>
           <a:p>
@@ -6869,13 +6869,13 @@
               </a:spcAft>
             </a:pPr>
             <a:r>
-              <a:rPr sz="1200">
+              <a:rPr sz="1300">
                 <a:solidFill>
                   <a:srgbClr val="3D5466"/>
                 </a:solidFill>
                 <a:latin typeface="Arial"/>
               </a:rPr>
-              <a:t>Zinsentwicklung, Refinanzierungskosten, Risikoumfeld transparent machen – ohne Details zu internen Kalkulationen preiszugeben.</a:t>
+              <a:t>▸  Zinsentwicklung, Refinanzierungskosten, Risikoumfeld transparent machen – ohne Details zu internen Kalkulationen preiszugeben.</a:t>
             </a:r>
           </a:p>
           <a:p>
@@ -6888,13 +6888,13 @@
               </a:spcAft>
             </a:pPr>
             <a:r>
-              <a:rPr sz="1200">
+              <a:rPr sz="1300">
                 <a:solidFill>
                   <a:srgbClr val="3D5466"/>
                 </a:solidFill>
                 <a:latin typeface="Arial"/>
               </a:rPr>
-              <a:t>Phase 3: Konditionen transparent kommunizieren</a:t>
+              <a:t>▸  Phase 3: Konditionen transparent kommunizieren</a:t>
             </a:r>
           </a:p>
           <a:p>
@@ -6907,13 +6907,13 @@
               </a:spcAft>
             </a:pPr>
             <a:r>
-              <a:rPr sz="1200">
+              <a:rPr sz="1300">
                 <a:solidFill>
                   <a:srgbClr val="3D5466"/>
                 </a:solidFill>
                 <a:latin typeface="Arial"/>
               </a:rPr>
-              <a:t>Phase 4: Alternativen anbieten</a:t>
+              <a:t>▸  Phase 4: Alternativen anbieten</a:t>
             </a:r>
           </a:p>
           <a:p>
@@ -6926,13 +6926,13 @@
               </a:spcAft>
             </a:pPr>
             <a:r>
-              <a:rPr sz="1200">
+              <a:rPr sz="1300">
                 <a:solidFill>
                   <a:srgbClr val="3D5466"/>
                 </a:solidFill>
                 <a:latin typeface="Arial"/>
               </a:rPr>
-              <a:t>Dem Kunden Optionen geben: „Wenn wir die Besicherung verbessern, könnten wir bei der Marge etwas flexibler sein." Oder: „Wenn Sie das R+V-Paket hinzunehmen, sehen wir die Gesamtbeziehung anders."</a:t>
+              <a:t>▸  Dem Kunden Optionen geben: „Wenn wir die Besicherung verbessern, könnten wir bei der Marge etwas flexibler sein." Oder: „Wenn Sie das R+V-Paket hinzunehmen, sehen wir die Gesamtbeziehung anders."</a:t>
             </a:r>
           </a:p>
           <a:p>
@@ -6945,13 +6945,13 @@
               </a:spcAft>
             </a:pPr>
             <a:r>
-              <a:rPr sz="1200">
+              <a:rPr sz="1300">
                 <a:solidFill>
                   <a:srgbClr val="3D5466"/>
                 </a:solidFill>
                 <a:latin typeface="Arial"/>
               </a:rPr>
-              <a:t>## 4.5 Praxiscase: Ertragsanalyse Bauer &amp; Söhne GmbH</a:t>
+              <a:t>▸  ## 4.5 Praxiscase: Ertragsanalyse Bauer &amp; Söhne GmbH</a:t>
             </a:r>
           </a:p>
           <a:p>
@@ -6964,13 +6964,13 @@
               </a:spcAft>
             </a:pPr>
             <a:r>
-              <a:rPr sz="1200">
+              <a:rPr sz="1300">
                 <a:solidFill>
                   <a:srgbClr val="3D5466"/>
                 </a:solidFill>
                 <a:latin typeface="Arial"/>
               </a:rPr>
-              <a:t>Ausgangssituation</a:t>
+              <a:t>▸  Ausgangssituation</a:t>
             </a:r>
           </a:p>
           <a:p>
@@ -6983,13 +6983,13 @@
               </a:spcAft>
             </a:pPr>
             <a:r>
-              <a:rPr sz="1200">
+              <a:rPr sz="1300">
                 <a:solidFill>
                   <a:srgbClr val="3D5466"/>
                 </a:solidFill>
                 <a:latin typeface="Arial"/>
               </a:rPr>
-              <a:t>Bei der Vorbereitung des Jahresgesprächs analysiert Sandra den Deckungsbeitrag:</a:t>
+              <a:t>▸  Bei der Vorbereitung des Jahresgesprächs analysiert Sandra den Deckungsbeitrag:</a:t>
             </a:r>
           </a:p>
           <a:p>
@@ -7002,13 +7002,13 @@
               </a:spcAft>
             </a:pPr>
             <a:r>
-              <a:rPr sz="1200">
+              <a:rPr sz="1300">
                 <a:solidFill>
                   <a:srgbClr val="3D5466"/>
                 </a:solidFill>
                 <a:latin typeface="Arial"/>
               </a:rPr>
-              <a:t>Die Analyse zeigt drei Probleme:</a:t>
+              <a:t>▸  Die Analyse zeigt drei Probleme:</a:t>
             </a:r>
           </a:p>
           <a:p>
@@ -7401,13 +7401,13 @@
               </a:spcAft>
             </a:pPr>
             <a:r>
-              <a:rPr sz="1200">
+              <a:rPr sz="1300">
                 <a:solidFill>
                   <a:srgbClr val="3D5466"/>
                 </a:solidFill>
                 <a:latin typeface="Arial"/>
               </a:rPr>
-              <a:t>Optimierungshebel (Top 2):</a:t>
+              <a:t>▸  Optimierungshebel (Top 2):</a:t>
             </a:r>
           </a:p>
         </p:txBody>
@@ -7781,13 +7781,13 @@
               </a:spcAft>
             </a:pPr>
             <a:r>
-              <a:rPr sz="1200">
+              <a:rPr sz="1300">
                 <a:solidFill>
                   <a:srgbClr val="3D5466"/>
                 </a:solidFill>
                 <a:latin typeface="Arial"/>
               </a:rPr>
-              <a:t>Wertargumente (Phase 1) – Was hat unsere Beziehung diesem Kunden gebracht?</a:t>
+              <a:t>▸  Wertargumente (Phase 1) – Was hat unsere Beziehung diesem Kunden gebracht?</a:t>
             </a:r>
           </a:p>
           <a:p>
@@ -7800,13 +7800,13 @@
               </a:spcAft>
             </a:pPr>
             <a:r>
-              <a:rPr sz="1200">
+              <a:rPr sz="1300">
                 <a:solidFill>
                   <a:srgbClr val="3D5466"/>
                 </a:solidFill>
                 <a:latin typeface="Arial"/>
               </a:rPr>
-              <a:t>Marktumfeld-Erklärung (Phase 2) – Welche externen Faktoren begründen die Anpassung?</a:t>
+              <a:t>▸  Marktumfeld-Erklärung (Phase 2) – Welche externen Faktoren begründen die Anpassung?</a:t>
             </a:r>
           </a:p>
           <a:p>
@@ -7819,13 +7819,13 @@
               </a:spcAft>
             </a:pPr>
             <a:r>
-              <a:rPr sz="1200">
+              <a:rPr sz="1300">
                 <a:solidFill>
                   <a:srgbClr val="3D5466"/>
                 </a:solidFill>
                 <a:latin typeface="Arial"/>
               </a:rPr>
-              <a:t>Konkrete Anpassung (Phase 3):</a:t>
+              <a:t>▸  Konkrete Anpassung (Phase 3):</a:t>
             </a:r>
           </a:p>
           <a:p>
@@ -7838,13 +7838,13 @@
               </a:spcAft>
             </a:pPr>
             <a:r>
-              <a:rPr sz="1200">
+              <a:rPr sz="1300">
                 <a:solidFill>
                   <a:srgbClr val="3D5466"/>
                 </a:solidFill>
                 <a:latin typeface="Arial"/>
               </a:rPr>
-              <a:t>Alternativen (Phase 4) – Welche Optionen biete ich an?</a:t>
+              <a:t>▸  Alternativen (Phase 4) – Welche Optionen biete ich an?</a:t>
             </a:r>
           </a:p>
         </p:txBody>
@@ -8739,7 +8739,7 @@
             <a:avLst/>
           </a:prstGeom>
           <a:solidFill>
-            <a:srgbClr val="FFFFFF"/>
+            <a:srgbClr val="EDEDF3"/>
           </a:solidFill>
           <a:ln>
             <a:noFill/>
@@ -8840,62 +8840,27 @@
                 </a:solidFill>
                 <a:latin typeface="JetBrains Mono"/>
               </a:rPr>
-              <a:t>M14  ·  SCHAUBILD</a:t>
-            </a:r>
-          </a:p>
-        </p:txBody>
-      </p:sp>
-      <p:sp>
-        <p:nvSpPr>
-          <p:cNvPr id="5" name="TextBox 4"/>
-          <p:cNvSpPr txBox="1"/>
-          <p:nvPr/>
-        </p:nvSpPr>
-        <p:spPr>
-          <a:xfrm>
-            <a:off x="685800" y="502920"/>
-            <a:ext cx="10817352" cy="594360"/>
-          </a:xfrm>
-          <a:prstGeom prst="rect">
-            <a:avLst/>
-          </a:prstGeom>
-          <a:noFill/>
-        </p:spPr>
-        <p:txBody>
-          <a:bodyPr wrap="square">
-            <a:spAutoFit/>
-          </a:bodyPr>
-          <a:lstStyle/>
-          <a:p>
-            <a:pPr algn="l"/>
-            <a:r>
-              <a:rPr sz="2000" b="1" i="0">
-                <a:solidFill>
-                  <a:srgbClr val="1F2C56"/>
-                </a:solidFill>
-                <a:latin typeface="Source Serif 4"/>
-              </a:rPr>
-              <a:t>Deckungsbeitrags-Wasserfall</a:t>
-            </a:r>
-          </a:p>
-        </p:txBody>
-      </p:sp>
-      <p:sp>
-        <p:nvSpPr>
-          <p:cNvPr id="6" name="Rectangle 5"/>
+              <a:t>AGENDA  ·  M14</a:t>
+            </a:r>
+          </a:p>
+        </p:txBody>
+      </p:sp>
+      <p:sp>
+        <p:nvSpPr>
+          <p:cNvPr id="5" name="Rectangle 4"/>
           <p:cNvSpPr/>
           <p:nvPr/>
         </p:nvSpPr>
         <p:spPr>
           <a:xfrm>
-            <a:off x="685800" y="1143000"/>
-            <a:ext cx="10817352" cy="25400"/>
+            <a:off x="0" y="1234440"/>
+            <a:ext cx="12188952" cy="12700"/>
           </a:xfrm>
           <a:prstGeom prst="rect">
             <a:avLst/>
           </a:prstGeom>
           <a:solidFill>
-            <a:srgbClr val="D9C089"/>
+            <a:srgbClr val="D8DFE4"/>
           </a:solidFill>
           <a:ln>
             <a:noFill/>
@@ -8923,30 +8888,360 @@
           </a:p>
         </p:txBody>
       </p:sp>
-      <p:pic>
-        <p:nvPicPr>
-          <p:cNvPr id="7" name="Picture 6" descr="image.png"/>
-          <p:cNvPicPr>
-            <a:picLocks noChangeAspect="1"/>
-          </p:cNvPicPr>
-          <p:nvPr/>
-        </p:nvPicPr>
-        <p:blipFill>
-          <a:blip r:embed="rId2"/>
-          <a:stretch>
-            <a:fillRect/>
-          </a:stretch>
-        </p:blipFill>
-        <p:spPr>
-          <a:xfrm>
-            <a:off x="2303489" y="1325880"/>
-            <a:ext cx="7581973" cy="4937760"/>
-          </a:xfrm>
-          <a:prstGeom prst="rect">
-            <a:avLst/>
-          </a:prstGeom>
-        </p:spPr>
-      </p:pic>
+      <p:sp>
+        <p:nvSpPr>
+          <p:cNvPr id="6" name="TextBox 5"/>
+          <p:cNvSpPr txBox="1"/>
+          <p:nvPr/>
+        </p:nvSpPr>
+        <p:spPr>
+          <a:xfrm>
+            <a:off x="685800" y="502920"/>
+            <a:ext cx="10817352" cy="658368"/>
+          </a:xfrm>
+          <a:prstGeom prst="rect">
+            <a:avLst/>
+          </a:prstGeom>
+          <a:noFill/>
+        </p:spPr>
+        <p:txBody>
+          <a:bodyPr wrap="square">
+            <a:spAutoFit/>
+          </a:bodyPr>
+          <a:lstStyle/>
+          <a:p>
+            <a:pPr algn="l"/>
+            <a:r>
+              <a:rPr sz="2600" b="1" i="0">
+                <a:solidFill>
+                  <a:srgbClr val="1F2C56"/>
+                </a:solidFill>
+                <a:latin typeface="Source Serif 4"/>
+              </a:rPr>
+              <a:t>So läuft das Modul</a:t>
+            </a:r>
+          </a:p>
+        </p:txBody>
+      </p:sp>
+      <p:sp>
+        <p:nvSpPr>
+          <p:cNvPr id="7" name="TextBox 6"/>
+          <p:cNvSpPr txBox="1"/>
+          <p:nvPr/>
+        </p:nvSpPr>
+        <p:spPr>
+          <a:xfrm>
+            <a:off x="685800" y="1463040"/>
+            <a:ext cx="10817352" cy="4937760"/>
+          </a:xfrm>
+          <a:prstGeom prst="rect">
+            <a:avLst/>
+          </a:prstGeom>
+          <a:noFill/>
+        </p:spPr>
+        <p:txBody>
+          <a:bodyPr wrap="square">
+            <a:spAutoFit/>
+          </a:bodyPr>
+          <a:lstStyle/>
+          <a:p>
+            <a:pPr>
+              <a:spcBef>
+                <a:spcPts val="700"/>
+              </a:spcBef>
+              <a:spcAft>
+                <a:spcPts val="100"/>
+              </a:spcAft>
+            </a:pPr>
+            <a:r>
+              <a:rPr sz="1200">
+                <a:solidFill>
+                  <a:srgbClr val="78808C"/>
+                </a:solidFill>
+                <a:latin typeface="Consolas"/>
+              </a:rPr>
+              <a:t>0–5 min     </a:t>
+            </a:r>
+            <a:r>
+              <a:rPr sz="1500" b="1">
+                <a:solidFill>
+                  <a:srgbClr val="3D5466"/>
+                </a:solidFill>
+                <a:latin typeface="Arial"/>
+              </a:rPr>
+              <a:t>  Einstieg &amp; Zielklärung</a:t>
+            </a:r>
+            <a:r>
+              <a:rPr sz="1200">
+                <a:solidFill>
+                  <a:srgbClr val="78808C"/>
+                </a:solidFill>
+                <a:latin typeface="Arial"/>
+              </a:rPr>
+              <a:t>  ·  Plenum, offene Frage</a:t>
+            </a:r>
+          </a:p>
+          <a:p>
+            <a:pPr>
+              <a:spcBef>
+                <a:spcPts val="700"/>
+              </a:spcBef>
+              <a:spcAft>
+                <a:spcPts val="100"/>
+              </a:spcAft>
+            </a:pPr>
+            <a:r>
+              <a:rPr sz="1200">
+                <a:solidFill>
+                  <a:srgbClr val="78808C"/>
+                </a:solidFill>
+                <a:latin typeface="Consolas"/>
+              </a:rPr>
+              <a:t>5–25 min    </a:t>
+            </a:r>
+            <a:r>
+              <a:rPr sz="1500" b="1">
+                <a:solidFill>
+                  <a:srgbClr val="3D5466"/>
+                </a:solidFill>
+                <a:latin typeface="Arial"/>
+              </a:rPr>
+              <a:t>  Theorie-Input: Kundendeckungsbeitrag + Ertragskomponenten</a:t>
+            </a:r>
+            <a:r>
+              <a:rPr sz="1200">
+                <a:solidFill>
+                  <a:srgbClr val="78808C"/>
+                </a:solidFill>
+                <a:latin typeface="Arial"/>
+              </a:rPr>
+              <a:t>  ·  Kurzinput + Flipchart</a:t>
+            </a:r>
+          </a:p>
+          <a:p>
+            <a:pPr>
+              <a:spcBef>
+                <a:spcPts val="700"/>
+              </a:spcBef>
+              <a:spcAft>
+                <a:spcPts val="100"/>
+              </a:spcAft>
+            </a:pPr>
+            <a:r>
+              <a:rPr sz="1200">
+                <a:solidFill>
+                  <a:srgbClr val="78808C"/>
+                </a:solidFill>
+                <a:latin typeface="Consolas"/>
+              </a:rPr>
+              <a:t>25–45 min   </a:t>
+            </a:r>
+            <a:r>
+              <a:rPr sz="1500" b="1">
+                <a:solidFill>
+                  <a:srgbClr val="3D5466"/>
+                </a:solidFill>
+                <a:latin typeface="Arial"/>
+              </a:rPr>
+              <a:t>  Rechenübung 1: Deckungsbeitrag berechnen</a:t>
+            </a:r>
+            <a:r>
+              <a:rPr sz="1200">
+                <a:solidFill>
+                  <a:srgbClr val="78808C"/>
+                </a:solidFill>
+                <a:latin typeface="Arial"/>
+              </a:rPr>
+              <a:t>  ·  Einzelarbeit + Auswertung</a:t>
+            </a:r>
+          </a:p>
+          <a:p>
+            <a:pPr>
+              <a:spcBef>
+                <a:spcPts val="700"/>
+              </a:spcBef>
+              <a:spcAft>
+                <a:spcPts val="100"/>
+              </a:spcAft>
+            </a:pPr>
+            <a:r>
+              <a:rPr sz="1200">
+                <a:solidFill>
+                  <a:srgbClr val="78808C"/>
+                </a:solidFill>
+                <a:latin typeface="Consolas"/>
+              </a:rPr>
+              <a:t>45–55 min   </a:t>
+            </a:r>
+            <a:r>
+              <a:rPr sz="1500" b="1">
+                <a:solidFill>
+                  <a:srgbClr val="3D5466"/>
+                </a:solidFill>
+                <a:latin typeface="Arial"/>
+              </a:rPr>
+              <a:t>  Theorie-Input: Expected Loss und risikoadjustiertes Pricing</a:t>
+            </a:r>
+            <a:r>
+              <a:rPr sz="1200">
+                <a:solidFill>
+                  <a:srgbClr val="78808C"/>
+                </a:solidFill>
+                <a:latin typeface="Arial"/>
+              </a:rPr>
+              <a:t>  ·  Kurzinput</a:t>
+            </a:r>
+          </a:p>
+          <a:p>
+            <a:pPr>
+              <a:spcBef>
+                <a:spcPts val="700"/>
+              </a:spcBef>
+              <a:spcAft>
+                <a:spcPts val="100"/>
+              </a:spcAft>
+            </a:pPr>
+            <a:r>
+              <a:rPr sz="1200">
+                <a:solidFill>
+                  <a:srgbClr val="78808C"/>
+                </a:solidFill>
+                <a:latin typeface="Consolas"/>
+              </a:rPr>
+              <a:t>55–70 min   </a:t>
+            </a:r>
+            <a:r>
+              <a:rPr sz="1500" b="1">
+                <a:solidFill>
+                  <a:srgbClr val="3D5466"/>
+                </a:solidFill>
+                <a:latin typeface="Arial"/>
+              </a:rPr>
+              <a:t>  Rechenübung 2: Optimierungsszenarien</a:t>
+            </a:r>
+            <a:r>
+              <a:rPr sz="1200">
+                <a:solidFill>
+                  <a:srgbClr val="78808C"/>
+                </a:solidFill>
+                <a:latin typeface="Arial"/>
+              </a:rPr>
+              <a:t>  ·  Partnerarbeit</a:t>
+            </a:r>
+          </a:p>
+          <a:p>
+            <a:pPr>
+              <a:spcBef>
+                <a:spcPts val="700"/>
+              </a:spcBef>
+              <a:spcAft>
+                <a:spcPts val="100"/>
+              </a:spcAft>
+            </a:pPr>
+            <a:r>
+              <a:rPr sz="1200">
+                <a:solidFill>
+                  <a:srgbClr val="78808C"/>
+                </a:solidFill>
+                <a:latin typeface="Consolas"/>
+              </a:rPr>
+              <a:t>70–82 min   </a:t>
+            </a:r>
+            <a:r>
+              <a:rPr sz="1500" b="1">
+                <a:solidFill>
+                  <a:srgbClr val="3D5466"/>
+                </a:solidFill>
+                <a:latin typeface="Arial"/>
+              </a:rPr>
+              <a:t>  Rollenspiel: Konditionsgespräch wertbasiert</a:t>
+            </a:r>
+            <a:r>
+              <a:rPr sz="1200">
+                <a:solidFill>
+                  <a:srgbClr val="78808C"/>
+                </a:solidFill>
+                <a:latin typeface="Arial"/>
+              </a:rPr>
+              <a:t>  ·  Paare</a:t>
+            </a:r>
+          </a:p>
+          <a:p>
+            <a:pPr>
+              <a:spcBef>
+                <a:spcPts val="700"/>
+              </a:spcBef>
+              <a:spcAft>
+                <a:spcPts val="100"/>
+              </a:spcAft>
+            </a:pPr>
+            <a:r>
+              <a:rPr sz="1200">
+                <a:solidFill>
+                  <a:srgbClr val="78808C"/>
+                </a:solidFill>
+                <a:latin typeface="Consolas"/>
+              </a:rPr>
+              <a:t>82–88 min   </a:t>
+            </a:r>
+            <a:r>
+              <a:rPr sz="1500" b="1">
+                <a:solidFill>
+                  <a:srgbClr val="3D5466"/>
+                </a:solidFill>
+                <a:latin typeface="Arial"/>
+              </a:rPr>
+              <a:t>  Plenumreflexion</a:t>
+            </a:r>
+            <a:r>
+              <a:rPr sz="1200">
+                <a:solidFill>
+                  <a:srgbClr val="78808C"/>
+                </a:solidFill>
+                <a:latin typeface="Arial"/>
+              </a:rPr>
+              <a:t>  ·  Plenum</a:t>
+            </a:r>
+          </a:p>
+          <a:p>
+            <a:pPr>
+              <a:spcBef>
+                <a:spcPts val="700"/>
+              </a:spcBef>
+              <a:spcAft>
+                <a:spcPts val="100"/>
+              </a:spcAft>
+            </a:pPr>
+            <a:r>
+              <a:rPr sz="1200">
+                <a:solidFill>
+                  <a:srgbClr val="78808C"/>
+                </a:solidFill>
+                <a:latin typeface="Consolas"/>
+              </a:rPr>
+              <a:t>88–90 min   </a:t>
+            </a:r>
+            <a:r>
+              <a:rPr sz="1500" b="1">
+                <a:solidFill>
+                  <a:srgbClr val="3D5466"/>
+                </a:solidFill>
+                <a:latin typeface="Arial"/>
+              </a:rPr>
+              <a:t>  Transfer &amp; Abschluss</a:t>
+            </a:r>
+            <a:r>
+              <a:rPr sz="1200">
+                <a:solidFill>
+                  <a:srgbClr val="78808C"/>
+                </a:solidFill>
+                <a:latin typeface="Arial"/>
+              </a:rPr>
+              <a:t>  ·  Einzelarbeit</a:t>
+            </a:r>
+          </a:p>
+        </p:txBody>
+      </p:sp>
       <p:sp>
         <p:nvSpPr>
           <p:cNvPr id="8" name="Rectangle 7"/>
@@ -9021,41 +9316,6 @@
                 <a:latin typeface="JetBrains Mono"/>
               </a:rPr>
               <a:t>Benedikt Zoller Coaching  ·  FKB Campus  ·  M14</a:t>
-            </a:r>
-          </a:p>
-        </p:txBody>
-      </p:sp>
-      <p:sp>
-        <p:nvSpPr>
-          <p:cNvPr id="10" name="TextBox 9"/>
-          <p:cNvSpPr txBox="1"/>
-          <p:nvPr/>
-        </p:nvSpPr>
-        <p:spPr>
-          <a:xfrm>
-            <a:off x="7176211" y="6583680"/>
-            <a:ext cx="4326940" cy="256032"/>
-          </a:xfrm>
-          <a:prstGeom prst="rect">
-            <a:avLst/>
-          </a:prstGeom>
-          <a:noFill/>
-        </p:spPr>
-        <p:txBody>
-          <a:bodyPr wrap="none">
-            <a:spAutoFit/>
-          </a:bodyPr>
-          <a:lstStyle/>
-          <a:p>
-            <a:pPr algn="r"/>
-            <a:r>
-              <a:rPr sz="700">
-                <a:solidFill>
-                  <a:srgbClr val="A0B4D2"/>
-                </a:solidFill>
-                <a:latin typeface="JetBrains Mono"/>
-              </a:rPr>
-              <a:t>Schaubild</a:t>
             </a:r>
           </a:p>
         </p:txBody>
@@ -9093,7 +9353,7 @@
             <a:avLst/>
           </a:prstGeom>
           <a:solidFill>
-            <a:srgbClr val="EDEDF3"/>
+            <a:srgbClr val="FFFFFF"/>
           </a:solidFill>
           <a:ln>
             <a:noFill/>
@@ -9194,51 +9454,43 @@
                 </a:solidFill>
                 <a:latin typeface="JetBrains Mono"/>
               </a:rPr>
-              <a:t>M14  ·  INHALT</a:t>
-            </a:r>
-          </a:p>
-        </p:txBody>
-      </p:sp>
-      <p:sp>
-        <p:nvSpPr>
-          <p:cNvPr id="5" name="Rectangle 4"/>
-          <p:cNvSpPr/>
-          <p:nvPr/>
-        </p:nvSpPr>
-        <p:spPr>
-          <a:xfrm>
-            <a:off x="0" y="1234440"/>
-            <a:ext cx="12188952" cy="12700"/>
-          </a:xfrm>
-          <a:prstGeom prst="rect">
-            <a:avLst/>
-          </a:prstGeom>
-          <a:solidFill>
-            <a:srgbClr val="D8DFE4"/>
-          </a:solidFill>
-          <a:ln>
-            <a:noFill/>
-          </a:ln>
-        </p:spPr>
-        <p:style>
-          <a:lnRef idx="1">
-            <a:schemeClr val="accent1"/>
-          </a:lnRef>
-          <a:fillRef idx="3">
-            <a:schemeClr val="accent1"/>
-          </a:fillRef>
-          <a:effectRef idx="2">
-            <a:schemeClr val="accent1"/>
-          </a:effectRef>
-          <a:fontRef idx="minor">
-            <a:schemeClr val="lt1"/>
-          </a:fontRef>
-        </p:style>
-        <p:txBody>
-          <a:bodyPr rtlCol="0" anchor="ctr"/>
-          <a:lstStyle/>
-          <a:p>
-            <a:pPr algn="ctr"/>
+              <a:t>M14  ·  SCHAUBILD</a:t>
+            </a:r>
+          </a:p>
+        </p:txBody>
+      </p:sp>
+      <p:sp>
+        <p:nvSpPr>
+          <p:cNvPr id="5" name="TextBox 4"/>
+          <p:cNvSpPr txBox="1"/>
+          <p:nvPr/>
+        </p:nvSpPr>
+        <p:spPr>
+          <a:xfrm>
+            <a:off x="685800" y="502920"/>
+            <a:ext cx="10817352" cy="594360"/>
+          </a:xfrm>
+          <a:prstGeom prst="rect">
+            <a:avLst/>
+          </a:prstGeom>
+          <a:noFill/>
+        </p:spPr>
+        <p:txBody>
+          <a:bodyPr wrap="square">
+            <a:spAutoFit/>
+          </a:bodyPr>
+          <a:lstStyle/>
+          <a:p>
+            <a:pPr algn="l"/>
+            <a:r>
+              <a:rPr sz="2000" b="1" i="0">
+                <a:solidFill>
+                  <a:srgbClr val="1F2C56"/>
+                </a:solidFill>
+                <a:latin typeface="Source Serif 4"/>
+              </a:rPr>
+              <a:t>Deckungsbeitrags-Wasserfall</a:t>
+            </a:r>
           </a:p>
         </p:txBody>
       </p:sp>
@@ -9250,8 +9502,8 @@
         </p:nvSpPr>
         <p:spPr>
           <a:xfrm>
-            <a:off x="685800" y="502920"/>
-            <a:ext cx="36576" cy="658368"/>
+            <a:off x="685800" y="1143000"/>
+            <a:ext cx="10817352" cy="25400"/>
           </a:xfrm>
           <a:prstGeom prst="rect">
             <a:avLst/>
@@ -9285,41 +9537,30 @@
           </a:p>
         </p:txBody>
       </p:sp>
-      <p:sp>
-        <p:nvSpPr>
-          <p:cNvPr id="7" name="TextBox 6"/>
-          <p:cNvSpPr txBox="1"/>
-          <p:nvPr/>
-        </p:nvSpPr>
-        <p:spPr>
-          <a:xfrm>
-            <a:off x="813816" y="502920"/>
-            <a:ext cx="10634472" cy="685800"/>
-          </a:xfrm>
-          <a:prstGeom prst="rect">
-            <a:avLst/>
-          </a:prstGeom>
-          <a:noFill/>
-        </p:spPr>
-        <p:txBody>
-          <a:bodyPr wrap="square">
-            <a:spAutoFit/>
-          </a:bodyPr>
-          <a:lstStyle/>
-          <a:p>
-            <a:pPr algn="l"/>
-            <a:r>
-              <a:rPr sz="2400" b="1" i="0">
-                <a:solidFill>
-                  <a:srgbClr val="1F2C56"/>
-                </a:solidFill>
-                <a:latin typeface="Source Serif 4"/>
-              </a:rPr>
-              <a:t>Warum Ertrag je Kunde messen?</a:t>
-            </a:r>
-          </a:p>
-        </p:txBody>
-      </p:sp>
+      <p:pic>
+        <p:nvPicPr>
+          <p:cNvPr id="7" name="Picture 6" descr="image.png"/>
+          <p:cNvPicPr>
+            <a:picLocks noChangeAspect="1"/>
+          </p:cNvPicPr>
+          <p:nvPr/>
+        </p:nvPicPr>
+        <p:blipFill>
+          <a:blip r:embed="rId2"/>
+          <a:stretch>
+            <a:fillRect/>
+          </a:stretch>
+        </p:blipFill>
+        <p:spPr>
+          <a:xfrm>
+            <a:off x="2303489" y="1325880"/>
+            <a:ext cx="7581973" cy="4937760"/>
+          </a:xfrm>
+          <a:prstGeom prst="rect">
+            <a:avLst/>
+          </a:prstGeom>
+        </p:spPr>
+      </p:pic>
       <p:sp>
         <p:nvSpPr>
           <p:cNvPr id="8" name="Rectangle 7"/>
@@ -9394,6 +9635,41 @@
                 <a:latin typeface="JetBrains Mono"/>
               </a:rPr>
               <a:t>Benedikt Zoller Coaching  ·  FKB Campus  ·  M14</a:t>
+            </a:r>
+          </a:p>
+        </p:txBody>
+      </p:sp>
+      <p:sp>
+        <p:nvSpPr>
+          <p:cNvPr id="10" name="TextBox 9"/>
+          <p:cNvSpPr txBox="1"/>
+          <p:nvPr/>
+        </p:nvSpPr>
+        <p:spPr>
+          <a:xfrm>
+            <a:off x="7176211" y="6583680"/>
+            <a:ext cx="4326940" cy="256032"/>
+          </a:xfrm>
+          <a:prstGeom prst="rect">
+            <a:avLst/>
+          </a:prstGeom>
+          <a:noFill/>
+        </p:spPr>
+        <p:txBody>
+          <a:bodyPr wrap="none">
+            <a:spAutoFit/>
+          </a:bodyPr>
+          <a:lstStyle/>
+          <a:p>
+            <a:pPr algn="r"/>
+            <a:r>
+              <a:rPr sz="700">
+                <a:solidFill>
+                  <a:srgbClr val="A0B4D2"/>
+                </a:solidFill>
+                <a:latin typeface="JetBrains Mono"/>
+              </a:rPr>
+              <a:t>Schaubild</a:t>
             </a:r>
           </a:p>
         </p:txBody>
@@ -9689,13 +9965,13 @@
               </a:spcAft>
             </a:pPr>
             <a:r>
-              <a:rPr sz="1200">
+              <a:rPr sz="1300">
                 <a:solidFill>
                   <a:srgbClr val="3D5466"/>
                 </a:solidFill>
                 <a:latin typeface="Arial"/>
               </a:rPr>
-              <a:t>Der Kundendeckungsbeitrag setzt sich zusammen aus:</a:t>
+              <a:t>▸  Der Kundendeckungsbeitrag setzt sich zusammen aus:</a:t>
             </a:r>
           </a:p>
           <a:p>
@@ -9708,13 +9984,13 @@
               </a:spcAft>
             </a:pPr>
             <a:r>
-              <a:rPr sz="1200">
+              <a:rPr sz="1300">
                 <a:solidFill>
                   <a:srgbClr val="3D5466"/>
                 </a:solidFill>
                 <a:latin typeface="Arial"/>
               </a:rPr>
-              <a:t>Deckungsbeitrag I = Zinsüberschuss + Provisionsertrag + Verbundertrag − Risikokosten</a:t>
+              <a:t>▸  Deckungsbeitrag I = Zinsüberschuss + Provisionsertrag + Verbundertrag − Risikokosten</a:t>
             </a:r>
           </a:p>
           <a:p>
@@ -9727,13 +10003,13 @@
               </a:spcAft>
             </a:pPr>
             <a:r>
-              <a:rPr sz="1200">
+              <a:rPr sz="1300">
                 <a:solidFill>
                   <a:srgbClr val="3D5466"/>
                 </a:solidFill>
                 <a:latin typeface="Arial"/>
               </a:rPr>
-              <a:t>Deckungsbeitrag II = DB I − Betriebskosten (Betreuungsaufwand)</a:t>
+              <a:t>▸  Deckungsbeitrag II = DB I − Betriebskosten (Betreuungsaufwand)</a:t>
             </a:r>
           </a:p>
         </p:txBody>
@@ -10107,13 +10383,13 @@
               </a:spcAft>
             </a:pPr>
             <a:r>
-              <a:rPr sz="1200">
+              <a:rPr sz="1300">
                 <a:solidFill>
                   <a:srgbClr val="3D5466"/>
                 </a:solidFill>
                 <a:latin typeface="Arial"/>
               </a:rPr>
-              <a:t>Ertragskennzahl: DB II / Kreditvolumen = 1,58 % (Kundenrendite)</a:t>
+              <a:t>▸  Ertragskennzahl: DB II / Kreditvolumen = 1,58 % (Kundenrendite)</a:t>
             </a:r>
           </a:p>
           <a:p>
@@ -10126,13 +10402,13 @@
               </a:spcAft>
             </a:pPr>
             <a:r>
-              <a:rPr sz="1200">
+              <a:rPr sz="1300">
                 <a:solidFill>
                   <a:srgbClr val="3D5466"/>
                 </a:solidFill>
                 <a:latin typeface="Arial"/>
               </a:rPr>
-              <a:t>## 4.2 Risikogerechtes Pricing</a:t>
+              <a:t>▸  ## 4.2 Risikogerechtes Pricing</a:t>
             </a:r>
           </a:p>
         </p:txBody>
@@ -10506,13 +10782,13 @@
               </a:spcAft>
             </a:pPr>
             <a:r>
-              <a:rPr sz="1200">
+              <a:rPr sz="1300">
                 <a:solidFill>
                   <a:srgbClr val="3D5466"/>
                 </a:solidFill>
                 <a:latin typeface="Arial"/>
               </a:rPr>
-              <a:t>In der Konditionenkalkulation muss die Risikoprämie mindestens den Expected Loss (EL) des Kreditengagements abdecken. Der EL errechnet sich nach Basel III  aus:</a:t>
+              <a:t>▸  In der Konditionenkalkulation muss die Risikoprämie mindestens den Expected Loss (EL) des Kreditengagements abdecken. Der EL errechnet sich nach Basel III  aus:</a:t>
             </a:r>
           </a:p>
           <a:p>
@@ -10525,13 +10801,13 @@
               </a:spcAft>
             </a:pPr>
             <a:r>
-              <a:rPr sz="1200">
+              <a:rPr sz="1300">
                 <a:solidFill>
                   <a:srgbClr val="3D5466"/>
                 </a:solidFill>
                 <a:latin typeface="Arial"/>
               </a:rPr>
-              <a:t>EL = PD × LGD × EAD</a:t>
+              <a:t>▸  EL = PD × LGD × EAD</a:t>
             </a:r>
           </a:p>
         </p:txBody>
@@ -10905,13 +11181,13 @@
               </a:spcAft>
             </a:pPr>
             <a:r>
-              <a:rPr sz="1200">
+              <a:rPr sz="1300">
                 <a:solidFill>
                   <a:srgbClr val="3D5466"/>
                 </a:solidFill>
                 <a:latin typeface="Arial"/>
               </a:rPr>
-              <a:t>Logik:</a:t>
+              <a:t>▸  Logik:</a:t>
             </a:r>
           </a:p>
           <a:p>

--- a/protected-downloads/praesentation/M14.pptx
+++ b/protected-downloads/praesentation/M14.pptx
@@ -4740,7 +4740,7 @@
                 </a:solidFill>
                 <a:latin typeface="JetBrains Mono"/>
               </a:rPr>
-              <a:t>Benedikt Zoller Coaching  ·  FKB Campus  ·  2026</a:t>
+              <a:t>FKB Campus  ·  2026</a:t>
             </a:r>
           </a:p>
         </p:txBody>
@@ -5231,7 +5231,7 @@
                 </a:solidFill>
                 <a:latin typeface="JetBrains Mono"/>
               </a:rPr>
-              <a:t>Benedikt Zoller Coaching  ·  FKB Campus  ·  M14</a:t>
+              <a:t>FKB Campus  ·  M14</a:t>
             </a:r>
           </a:p>
         </p:txBody>
@@ -5668,7 +5668,7 @@
                 </a:solidFill>
                 <a:latin typeface="JetBrains Mono"/>
               </a:rPr>
-              <a:t>Benedikt Zoller Coaching  ·  FKB Campus  ·  M14</a:t>
+              <a:t>FKB Campus  ·  M14</a:t>
             </a:r>
           </a:p>
         </p:txBody>
@@ -6162,7 +6162,7 @@
                 </a:solidFill>
                 <a:latin typeface="JetBrains Mono"/>
               </a:rPr>
-              <a:t>Benedikt Zoller Coaching  ·  FKB Campus  ·  M14</a:t>
+              <a:t>FKB Campus  ·  M14</a:t>
             </a:r>
           </a:p>
         </p:txBody>
@@ -6481,7 +6481,7 @@
                 </a:solidFill>
                 <a:latin typeface="JetBrains Mono"/>
               </a:rPr>
-              <a:t>Benedikt Zoller Coaching  ·  FKB Campus  ·  M14</a:t>
+              <a:t>FKB Campus  ·  M14</a:t>
             </a:r>
           </a:p>
         </p:txBody>
@@ -7105,7 +7105,7 @@
                 </a:solidFill>
                 <a:latin typeface="JetBrains Mono"/>
               </a:rPr>
-              <a:t>Benedikt Zoller Coaching  ·  FKB Campus  ·  M14</a:t>
+              <a:t>FKB Campus  ·  M14</a:t>
             </a:r>
           </a:p>
         </p:txBody>
@@ -7485,7 +7485,7 @@
                 </a:solidFill>
                 <a:latin typeface="JetBrains Mono"/>
               </a:rPr>
-              <a:t>Benedikt Zoller Coaching  ·  FKB Campus  ·  M14</a:t>
+              <a:t>FKB Campus  ·  M14</a:t>
             </a:r>
           </a:p>
         </p:txBody>
@@ -7922,7 +7922,7 @@
                 </a:solidFill>
                 <a:latin typeface="JetBrains Mono"/>
               </a:rPr>
-              <a:t>Benedikt Zoller Coaching  ·  FKB Campus  ·  M14</a:t>
+              <a:t>FKB Campus  ·  M14</a:t>
             </a:r>
           </a:p>
         </p:txBody>
@@ -8288,7 +8288,7 @@
                 </a:solidFill>
                 <a:latin typeface="JetBrains Mono"/>
               </a:rPr>
-              <a:t>Benedikt Zoller Coaching  ·  FKB Campus  ·  M14</a:t>
+              <a:t>FKB Campus  ·  M14</a:t>
             </a:r>
           </a:p>
         </p:txBody>
@@ -8701,7 +8701,7 @@
                 </a:solidFill>
                 <a:latin typeface="JetBrains Mono"/>
               </a:rPr>
-              <a:t>Benedikt Zoller Coaching  ·  FKB Campus  ·  M14</a:t>
+              <a:t>FKB Campus  ·  M14</a:t>
             </a:r>
           </a:p>
         </p:txBody>
@@ -9315,7 +9315,7 @@
                 </a:solidFill>
                 <a:latin typeface="JetBrains Mono"/>
               </a:rPr>
-              <a:t>Benedikt Zoller Coaching  ·  FKB Campus  ·  M14</a:t>
+              <a:t>FKB Campus  ·  M14</a:t>
             </a:r>
           </a:p>
         </p:txBody>
@@ -9634,7 +9634,7 @@
                 </a:solidFill>
                 <a:latin typeface="JetBrains Mono"/>
               </a:rPr>
-              <a:t>Benedikt Zoller Coaching  ·  FKB Campus  ·  M14</a:t>
+              <a:t>FKB Campus  ·  M14</a:t>
             </a:r>
           </a:p>
         </p:txBody>
@@ -10087,7 +10087,7 @@
                 </a:solidFill>
                 <a:latin typeface="JetBrains Mono"/>
               </a:rPr>
-              <a:t>Benedikt Zoller Coaching  ·  FKB Campus  ·  M14</a:t>
+              <a:t>FKB Campus  ·  M14</a:t>
             </a:r>
           </a:p>
         </p:txBody>
@@ -10486,7 +10486,7 @@
                 </a:solidFill>
                 <a:latin typeface="JetBrains Mono"/>
               </a:rPr>
-              <a:t>Benedikt Zoller Coaching  ·  FKB Campus  ·  M14</a:t>
+              <a:t>FKB Campus  ·  M14</a:t>
             </a:r>
           </a:p>
         </p:txBody>
@@ -10885,7 +10885,7 @@
                 </a:solidFill>
                 <a:latin typeface="JetBrains Mono"/>
               </a:rPr>
-              <a:t>Benedikt Zoller Coaching  ·  FKB Campus  ·  M14</a:t>
+              <a:t>FKB Campus  ·  M14</a:t>
             </a:r>
           </a:p>
         </p:txBody>
@@ -11284,7 +11284,7 @@
                 </a:solidFill>
                 <a:latin typeface="JetBrains Mono"/>
               </a:rPr>
-              <a:t>Benedikt Zoller Coaching  ·  FKB Campus  ·  M14</a:t>
+              <a:t>FKB Campus  ·  M14</a:t>
             </a:r>
           </a:p>
         </p:txBody>

--- a/protected-downloads/praesentation/M14.pptx
+++ b/protected-downloads/praesentation/M14.pptx
@@ -8997,7 +8997,7 @@
                 </a:solidFill>
                 <a:latin typeface="Consolas"/>
               </a:rPr>
-              <a:t>5–25 min    </a:t>
+              <a:t>5–30 min    </a:t>
             </a:r>
             <a:r>
               <a:rPr sz="1500" b="1">
@@ -9034,7 +9034,7 @@
                 </a:solidFill>
                 <a:latin typeface="Consolas"/>
               </a:rPr>
-              <a:t>25–45 min   </a:t>
+              <a:t>30–50 min   </a:t>
             </a:r>
             <a:r>
               <a:rPr sz="1500" b="1">
@@ -9071,7 +9071,7 @@
                 </a:solidFill>
                 <a:latin typeface="Consolas"/>
               </a:rPr>
-              <a:t>45–55 min   </a:t>
+              <a:t>50–62 min   </a:t>
             </a:r>
             <a:r>
               <a:rPr sz="1500" b="1">
@@ -9108,7 +9108,7 @@
                 </a:solidFill>
                 <a:latin typeface="Consolas"/>
               </a:rPr>
-              <a:t>55–70 min   </a:t>
+              <a:t>62–76 min   </a:t>
             </a:r>
             <a:r>
               <a:rPr sz="1500" b="1">
@@ -9145,7 +9145,7 @@
                 </a:solidFill>
                 <a:latin typeface="Consolas"/>
               </a:rPr>
-              <a:t>70–82 min   </a:t>
+              <a:t>76–92 min   </a:t>
             </a:r>
             <a:r>
               <a:rPr sz="1500" b="1">
@@ -9163,7 +9163,7 @@
                 </a:solidFill>
                 <a:latin typeface="Arial"/>
               </a:rPr>
-              <a:t>  ·  Paare</a:t>
+              <a:t>  ·  Dreiergruppen, 2 Runden mit Rollentausch</a:t>
             </a:r>
           </a:p>
           <a:p>
@@ -9182,7 +9182,7 @@
                 </a:solidFill>
                 <a:latin typeface="Consolas"/>
               </a:rPr>
-              <a:t>82–88 min   </a:t>
+              <a:t>92–97 min   </a:t>
             </a:r>
             <a:r>
               <a:rPr sz="1500" b="1">
@@ -9219,7 +9219,7 @@
                 </a:solidFill>
                 <a:latin typeface="Consolas"/>
               </a:rPr>
-              <a:t>88–90 min   </a:t>
+              <a:t>97–100 min  </a:t>
             </a:r>
             <a:r>
               <a:rPr sz="1500" b="1">

--- a/protected-downloads/praesentation/M14.pptx
+++ b/protected-downloads/praesentation/M14.pptx
@@ -4662,7 +4662,7 @@
                 </a:solidFill>
                 <a:latin typeface="Arial"/>
               </a:rPr>
-              <a:t>v0.3</a:t>
+              <a:t>v1.0</a:t>
             </a:r>
           </a:p>
         </p:txBody>

--- a/protected-downloads/praesentation/M14.pptx
+++ b/protected-downloads/praesentation/M14.pptx
@@ -7365,7 +7365,7 @@
                 </a:solidFill>
                 <a:latin typeface="Source Serif 4"/>
               </a:rPr>
-              <a:t>Arbeitsblatt A: Deckungsbeitragsrechnung</a:t>
+              <a:t>AB-1: Deckungsbeitragsrechnung</a:t>
             </a:r>
           </a:p>
         </p:txBody>
@@ -7745,7 +7745,7 @@
                 </a:solidFill>
                 <a:latin typeface="Source Serif 4"/>
               </a:rPr>
-              <a:t>Arbeitsblatt B: Konditionengespräch vorbereiten</a:t>
+              <a:t>AB-2: Konditionengespräch vorbereiten</a:t>
             </a:r>
           </a:p>
         </p:txBody>

--- a/protected-downloads/praesentation/M14.pptx
+++ b/protected-downloads/praesentation/M14.pptx
@@ -4337,7 +4337,7 @@
                 <a:solidFill>
                   <a:srgbClr val="C8D2E6"/>
                 </a:solidFill>
-                <a:latin typeface="JetBrains Mono"/>
+                <a:latin typeface="Consolas"/>
               </a:rPr>
               <a:t>FKB CAMPUS  ·  FIRMENKUNDENAKADEMIE  ·  M14</a:t>
             </a:r>
@@ -4372,7 +4372,7 @@
                 <a:solidFill>
                   <a:srgbClr val="FFFFFF"/>
                 </a:solidFill>
-                <a:latin typeface="Source Serif 4"/>
+                <a:latin typeface="Arial"/>
               </a:rPr>
               <a:t>Ertragsoptimierung pro Kunde</a:t>
             </a:r>
@@ -4407,7 +4407,7 @@
                 <a:solidFill>
                   <a:srgbClr val="BECDE6"/>
                 </a:solidFill>
-                <a:latin typeface="Source Serif 4"/>
+                <a:latin typeface="Arial"/>
               </a:rPr>
               <a:t>Kundendeckungsbeitrag analysieren, risikogerechtes Pricing verstehen und Konditionengespräche wertbasiert führen</a:t>
             </a:r>
@@ -4485,7 +4485,7 @@
                 <a:solidFill>
                   <a:srgbClr val="A0B4D2"/>
                 </a:solidFill>
-                <a:latin typeface="JetBrains Mono"/>
+                <a:latin typeface="Consolas"/>
               </a:rPr>
               <a:t>KOMPETENZFELD</a:t>
             </a:r>
@@ -4555,7 +4555,7 @@
                 <a:solidFill>
                   <a:srgbClr val="A0B4D2"/>
                 </a:solidFill>
-                <a:latin typeface="JetBrains Mono"/>
+                <a:latin typeface="Consolas"/>
               </a:rPr>
               <a:t>KOMPETENZSTUFE</a:t>
             </a:r>
@@ -4625,7 +4625,7 @@
                 <a:solidFill>
                   <a:srgbClr val="A0B4D2"/>
                 </a:solidFill>
-                <a:latin typeface="JetBrains Mono"/>
+                <a:latin typeface="Consolas"/>
               </a:rPr>
               <a:t>VERSION</a:t>
             </a:r>
@@ -4738,7 +4738,7 @@
                 <a:solidFill>
                   <a:srgbClr val="96A5BE"/>
                 </a:solidFill>
-                <a:latin typeface="JetBrains Mono"/>
+                <a:latin typeface="Consolas"/>
               </a:rPr>
               <a:t>FKB Campus  ·  2026</a:t>
             </a:r>
@@ -4773,7 +4773,7 @@
                 <a:solidFill>
                   <a:srgbClr val="96A5BE"/>
                 </a:solidFill>
-                <a:latin typeface="JetBrains Mono"/>
+                <a:latin typeface="Consolas"/>
               </a:rPr>
               <a:t>Trainer-Präsentation</a:t>
             </a:r>
@@ -4912,7 +4912,7 @@
                 <a:solidFill>
                   <a:srgbClr val="78808C"/>
                 </a:solidFill>
-                <a:latin typeface="JetBrains Mono"/>
+                <a:latin typeface="Consolas"/>
               </a:rPr>
               <a:t>M14  ·  INHALT</a:t>
             </a:r>
@@ -5033,7 +5033,7 @@
                 <a:solidFill>
                   <a:srgbClr val="1F2C56"/>
                 </a:solidFill>
-                <a:latin typeface="Source Serif 4"/>
+                <a:latin typeface="Arial"/>
               </a:rPr>
               <a:t>Konditionsanpassung vorbereiten</a:t>
             </a:r>
@@ -5049,7 +5049,7 @@
         <p:spPr>
           <a:xfrm>
             <a:off x="685800" y="1417320"/>
-            <a:ext cx="10817352" cy="5029200"/>
+            <a:ext cx="10817352" cy="4892040"/>
           </a:xfrm>
           <a:prstGeom prst="rect">
             <a:avLst/>
@@ -5057,12 +5057,12 @@
           <a:noFill/>
         </p:spPr>
         <p:txBody>
-          <a:bodyPr wrap="square">
+          <a:bodyPr wrap="square" anchor="ctr">
             <a:spAutoFit/>
           </a:bodyPr>
           <a:lstStyle/>
           <a:p>
-            <a:pPr>
+            <a:pPr marL="190500" indent="-190500">
               <a:spcBef>
                 <a:spcPts val="400"/>
               </a:spcBef>
@@ -5081,7 +5081,7 @@
             </a:r>
           </a:p>
           <a:p>
-            <a:pPr>
+            <a:pPr marL="190500" indent="-190500">
               <a:spcBef>
                 <a:spcPts val="400"/>
               </a:spcBef>
@@ -5100,7 +5100,7 @@
             </a:r>
           </a:p>
           <a:p>
-            <a:pPr>
+            <a:pPr marL="190500" indent="-190500">
               <a:spcBef>
                 <a:spcPts val="400"/>
               </a:spcBef>
@@ -5119,7 +5119,7 @@
             </a:r>
           </a:p>
           <a:p>
-            <a:pPr>
+            <a:pPr marL="190500" indent="-190500">
               <a:spcBef>
                 <a:spcPts val="400"/>
               </a:spcBef>
@@ -5138,7 +5138,7 @@
             </a:r>
           </a:p>
           <a:p>
-            <a:pPr>
+            <a:pPr marL="190500" indent="-190500">
               <a:spcBef>
                 <a:spcPts val="400"/>
               </a:spcBef>
@@ -5229,7 +5229,7 @@
                 <a:solidFill>
                   <a:srgbClr val="A0B4D2"/>
                 </a:solidFill>
-                <a:latin typeface="JetBrains Mono"/>
+                <a:latin typeface="Consolas"/>
               </a:rPr>
               <a:t>FKB Campus  ·  M14</a:t>
             </a:r>
@@ -5368,7 +5368,7 @@
                 <a:solidFill>
                   <a:srgbClr val="78808C"/>
                 </a:solidFill>
-                <a:latin typeface="JetBrains Mono"/>
+                <a:latin typeface="Consolas"/>
               </a:rPr>
               <a:t>M14  ·  INHALT</a:t>
             </a:r>
@@ -5489,7 +5489,7 @@
                 <a:solidFill>
                   <a:srgbClr val="1F2C56"/>
                 </a:solidFill>
-                <a:latin typeface="Source Serif 4"/>
+                <a:latin typeface="Arial"/>
               </a:rPr>
               <a:t>Kundensegmentierung nach Ertragsprofil</a:t>
             </a:r>
@@ -5505,7 +5505,7 @@
         <p:spPr>
           <a:xfrm>
             <a:off x="685800" y="1417320"/>
-            <a:ext cx="10817352" cy="5029200"/>
+            <a:ext cx="10817352" cy="4892040"/>
           </a:xfrm>
           <a:prstGeom prst="rect">
             <a:avLst/>
@@ -5513,12 +5513,12 @@
           <a:noFill/>
         </p:spPr>
         <p:txBody>
-          <a:bodyPr wrap="square">
+          <a:bodyPr wrap="square" anchor="ctr">
             <a:spAutoFit/>
           </a:bodyPr>
           <a:lstStyle/>
           <a:p>
-            <a:pPr>
+            <a:pPr marL="190500" indent="-190500">
               <a:spcBef>
                 <a:spcPts val="400"/>
               </a:spcBef>
@@ -5537,7 +5537,7 @@
             </a:r>
           </a:p>
           <a:p>
-            <a:pPr>
+            <a:pPr marL="190500" indent="-190500">
               <a:spcBef>
                 <a:spcPts val="400"/>
               </a:spcBef>
@@ -5556,7 +5556,7 @@
             </a:r>
           </a:p>
           <a:p>
-            <a:pPr>
+            <a:pPr marL="190500" indent="-190500">
               <a:spcBef>
                 <a:spcPts val="400"/>
               </a:spcBef>
@@ -5575,7 +5575,7 @@
             </a:r>
           </a:p>
           <a:p>
-            <a:pPr>
+            <a:pPr marL="190500" indent="-190500">
               <a:spcBef>
                 <a:spcPts val="400"/>
               </a:spcBef>
@@ -5666,7 +5666,7 @@
                 <a:solidFill>
                   <a:srgbClr val="A0B4D2"/>
                 </a:solidFill>
-                <a:latin typeface="JetBrains Mono"/>
+                <a:latin typeface="Consolas"/>
               </a:rPr>
               <a:t>FKB Campus  ·  M14</a:t>
             </a:r>
@@ -5805,7 +5805,7 @@
                 <a:solidFill>
                   <a:srgbClr val="78808C"/>
                 </a:solidFill>
-                <a:latin typeface="JetBrains Mono"/>
+                <a:latin typeface="Consolas"/>
               </a:rPr>
               <a:t>M14  ·  INHALT</a:t>
             </a:r>
@@ -5926,7 +5926,7 @@
                 <a:solidFill>
                   <a:srgbClr val="1F2C56"/>
                 </a:solidFill>
-                <a:latin typeface="Source Serif 4"/>
+                <a:latin typeface="Arial"/>
               </a:rPr>
               <a:t>Signale für Unterpreisierung</a:t>
             </a:r>
@@ -5942,7 +5942,7 @@
         <p:spPr>
           <a:xfrm>
             <a:off x="685800" y="1417320"/>
-            <a:ext cx="10817352" cy="5029200"/>
+            <a:ext cx="10817352" cy="4892040"/>
           </a:xfrm>
           <a:prstGeom prst="rect">
             <a:avLst/>
@@ -5955,7 +5955,7 @@
           </a:bodyPr>
           <a:lstStyle/>
           <a:p>
-            <a:pPr>
+            <a:pPr marL="190500" indent="-190500">
               <a:spcBef>
                 <a:spcPts val="400"/>
               </a:spcBef>
@@ -5974,7 +5974,7 @@
             </a:r>
           </a:p>
           <a:p>
-            <a:pPr>
+            <a:pPr marL="190500" indent="-190500">
               <a:spcBef>
                 <a:spcPts val="400"/>
               </a:spcBef>
@@ -5993,7 +5993,7 @@
             </a:r>
           </a:p>
           <a:p>
-            <a:pPr>
+            <a:pPr marL="190500" indent="-190500">
               <a:spcBef>
                 <a:spcPts val="400"/>
               </a:spcBef>
@@ -6012,7 +6012,7 @@
             </a:r>
           </a:p>
           <a:p>
-            <a:pPr>
+            <a:pPr marL="190500" indent="-190500">
               <a:spcBef>
                 <a:spcPts val="400"/>
               </a:spcBef>
@@ -6031,7 +6031,7 @@
             </a:r>
           </a:p>
           <a:p>
-            <a:pPr>
+            <a:pPr marL="190500" indent="-190500">
               <a:spcBef>
                 <a:spcPts val="400"/>
               </a:spcBef>
@@ -6050,7 +6050,7 @@
             </a:r>
           </a:p>
           <a:p>
-            <a:pPr>
+            <a:pPr marL="190500" indent="-190500">
               <a:spcBef>
                 <a:spcPts val="400"/>
               </a:spcBef>
@@ -6069,7 +6069,7 @@
             </a:r>
           </a:p>
           <a:p>
-            <a:pPr>
+            <a:pPr marL="190500" indent="-190500">
               <a:spcBef>
                 <a:spcPts val="400"/>
               </a:spcBef>
@@ -6160,7 +6160,7 @@
                 <a:solidFill>
                   <a:srgbClr val="A0B4D2"/>
                 </a:solidFill>
-                <a:latin typeface="JetBrains Mono"/>
+                <a:latin typeface="Consolas"/>
               </a:rPr>
               <a:t>FKB Campus  ·  M14</a:t>
             </a:r>
@@ -6299,7 +6299,7 @@
                 <a:solidFill>
                   <a:srgbClr val="78808C"/>
                 </a:solidFill>
-                <a:latin typeface="JetBrains Mono"/>
+                <a:latin typeface="Consolas"/>
               </a:rPr>
               <a:t>M14  ·  SCHAUBILD</a:t>
             </a:r>
@@ -6334,7 +6334,7 @@
                 <a:solidFill>
                   <a:srgbClr val="1F2C56"/>
                 </a:solidFill>
-                <a:latin typeface="Source Serif 4"/>
+                <a:latin typeface="Arial"/>
               </a:rPr>
               <a:t>Handlungsempfehlung</a:t>
             </a:r>
@@ -6479,7 +6479,7 @@
                 <a:solidFill>
                   <a:srgbClr val="A0B4D2"/>
                 </a:solidFill>
-                <a:latin typeface="JetBrains Mono"/>
+                <a:latin typeface="Consolas"/>
               </a:rPr>
               <a:t>FKB Campus  ·  M14</a:t>
             </a:r>
@@ -6514,7 +6514,7 @@
                 <a:solidFill>
                   <a:srgbClr val="A0B4D2"/>
                 </a:solidFill>
-                <a:latin typeface="JetBrains Mono"/>
+                <a:latin typeface="Consolas"/>
               </a:rPr>
               <a:t>Schaubild</a:t>
             </a:r>
@@ -6653,7 +6653,7 @@
                 <a:solidFill>
                   <a:srgbClr val="78808C"/>
                 </a:solidFill>
-                <a:latin typeface="JetBrains Mono"/>
+                <a:latin typeface="Consolas"/>
               </a:rPr>
               <a:t>M14  ·  INHALT</a:t>
             </a:r>
@@ -6774,7 +6774,7 @@
                 <a:solidFill>
                   <a:srgbClr val="1F2C56"/>
                 </a:solidFill>
-                <a:latin typeface="Source Serif 4"/>
+                <a:latin typeface="Arial"/>
               </a:rPr>
               <a:t>Vom Konditionengespräch zum Wertgespräch</a:t>
             </a:r>
@@ -6790,7 +6790,7 @@
         <p:spPr>
           <a:xfrm>
             <a:off x="685800" y="1417320"/>
-            <a:ext cx="10817352" cy="5029200"/>
+            <a:ext cx="10817352" cy="4892040"/>
           </a:xfrm>
           <a:prstGeom prst="rect">
             <a:avLst/>
@@ -6803,7 +6803,7 @@
           </a:bodyPr>
           <a:lstStyle/>
           <a:p>
-            <a:pPr>
+            <a:pPr marL="190500" indent="-190500">
               <a:spcBef>
                 <a:spcPts val="400"/>
               </a:spcBef>
@@ -6822,7 +6822,7 @@
             </a:r>
           </a:p>
           <a:p>
-            <a:pPr>
+            <a:pPr marL="190500" indent="-190500">
               <a:spcBef>
                 <a:spcPts val="400"/>
               </a:spcBef>
@@ -6841,7 +6841,7 @@
             </a:r>
           </a:p>
           <a:p>
-            <a:pPr>
+            <a:pPr marL="190500" indent="-190500">
               <a:spcBef>
                 <a:spcPts val="400"/>
               </a:spcBef>
@@ -6860,7 +6860,7 @@
             </a:r>
           </a:p>
           <a:p>
-            <a:pPr>
+            <a:pPr marL="190500" indent="-190500">
               <a:spcBef>
                 <a:spcPts val="400"/>
               </a:spcBef>
@@ -6879,7 +6879,7 @@
             </a:r>
           </a:p>
           <a:p>
-            <a:pPr>
+            <a:pPr marL="190500" indent="-190500">
               <a:spcBef>
                 <a:spcPts val="400"/>
               </a:spcBef>
@@ -6898,7 +6898,7 @@
             </a:r>
           </a:p>
           <a:p>
-            <a:pPr>
+            <a:pPr marL="190500" indent="-190500">
               <a:spcBef>
                 <a:spcPts val="400"/>
               </a:spcBef>
@@ -6917,7 +6917,7 @@
             </a:r>
           </a:p>
           <a:p>
-            <a:pPr>
+            <a:pPr marL="190500" indent="-190500">
               <a:spcBef>
                 <a:spcPts val="400"/>
               </a:spcBef>
@@ -6936,7 +6936,7 @@
             </a:r>
           </a:p>
           <a:p>
-            <a:pPr>
+            <a:pPr marL="190500" indent="-190500">
               <a:spcBef>
                 <a:spcPts val="400"/>
               </a:spcBef>
@@ -6955,7 +6955,7 @@
             </a:r>
           </a:p>
           <a:p>
-            <a:pPr>
+            <a:pPr marL="190500" indent="-190500">
               <a:spcBef>
                 <a:spcPts val="400"/>
               </a:spcBef>
@@ -6974,7 +6974,7 @@
             </a:r>
           </a:p>
           <a:p>
-            <a:pPr>
+            <a:pPr marL="190500" indent="-190500">
               <a:spcBef>
                 <a:spcPts val="400"/>
               </a:spcBef>
@@ -6993,7 +6993,7 @@
             </a:r>
           </a:p>
           <a:p>
-            <a:pPr>
+            <a:pPr marL="190500" indent="-190500">
               <a:spcBef>
                 <a:spcPts val="400"/>
               </a:spcBef>
@@ -7012,7 +7012,7 @@
             </a:r>
           </a:p>
           <a:p>
-            <a:pPr>
+            <a:pPr marL="190500" indent="-190500">
               <a:spcBef>
                 <a:spcPts val="400"/>
               </a:spcBef>
@@ -7103,7 +7103,7 @@
                 <a:solidFill>
                   <a:srgbClr val="A0B4D2"/>
                 </a:solidFill>
-                <a:latin typeface="JetBrains Mono"/>
+                <a:latin typeface="Consolas"/>
               </a:rPr>
               <a:t>FKB Campus  ·  M14</a:t>
             </a:r>
@@ -7242,7 +7242,7 @@
                 <a:solidFill>
                   <a:srgbClr val="78808C"/>
                 </a:solidFill>
-                <a:latin typeface="JetBrains Mono"/>
+                <a:latin typeface="Consolas"/>
               </a:rPr>
               <a:t>M14  ·  INHALT</a:t>
             </a:r>
@@ -7363,7 +7363,7 @@
                 <a:solidFill>
                   <a:srgbClr val="1F2C56"/>
                 </a:solidFill>
-                <a:latin typeface="Source Serif 4"/>
+                <a:latin typeface="Arial"/>
               </a:rPr>
               <a:t>AB-1: Deckungsbeitragsrechnung</a:t>
             </a:r>
@@ -7379,7 +7379,7 @@
         <p:spPr>
           <a:xfrm>
             <a:off x="685800" y="1417320"/>
-            <a:ext cx="10817352" cy="5029200"/>
+            <a:ext cx="10817352" cy="4892040"/>
           </a:xfrm>
           <a:prstGeom prst="rect">
             <a:avLst/>
@@ -7387,12 +7387,12 @@
           <a:noFill/>
         </p:spPr>
         <p:txBody>
-          <a:bodyPr wrap="square">
+          <a:bodyPr wrap="square" anchor="ctr">
             <a:spAutoFit/>
           </a:bodyPr>
           <a:lstStyle/>
           <a:p>
-            <a:pPr>
+            <a:pPr marL="190500" indent="-190500">
               <a:spcBef>
                 <a:spcPts val="400"/>
               </a:spcBef>
@@ -7483,7 +7483,7 @@
                 <a:solidFill>
                   <a:srgbClr val="A0B4D2"/>
                 </a:solidFill>
-                <a:latin typeface="JetBrains Mono"/>
+                <a:latin typeface="Consolas"/>
               </a:rPr>
               <a:t>FKB Campus  ·  M14</a:t>
             </a:r>
@@ -7622,7 +7622,7 @@
                 <a:solidFill>
                   <a:srgbClr val="78808C"/>
                 </a:solidFill>
-                <a:latin typeface="JetBrains Mono"/>
+                <a:latin typeface="Consolas"/>
               </a:rPr>
               <a:t>M14  ·  INHALT</a:t>
             </a:r>
@@ -7743,7 +7743,7 @@
                 <a:solidFill>
                   <a:srgbClr val="1F2C56"/>
                 </a:solidFill>
-                <a:latin typeface="Source Serif 4"/>
+                <a:latin typeface="Arial"/>
               </a:rPr>
               <a:t>AB-2: Konditionengespräch vorbereiten</a:t>
             </a:r>
@@ -7759,7 +7759,7 @@
         <p:spPr>
           <a:xfrm>
             <a:off x="685800" y="1417320"/>
-            <a:ext cx="10817352" cy="5029200"/>
+            <a:ext cx="10817352" cy="4892040"/>
           </a:xfrm>
           <a:prstGeom prst="rect">
             <a:avLst/>
@@ -7767,12 +7767,12 @@
           <a:noFill/>
         </p:spPr>
         <p:txBody>
-          <a:bodyPr wrap="square">
+          <a:bodyPr wrap="square" anchor="ctr">
             <a:spAutoFit/>
           </a:bodyPr>
           <a:lstStyle/>
           <a:p>
-            <a:pPr>
+            <a:pPr marL="190500" indent="-190500">
               <a:spcBef>
                 <a:spcPts val="400"/>
               </a:spcBef>
@@ -7791,7 +7791,7 @@
             </a:r>
           </a:p>
           <a:p>
-            <a:pPr>
+            <a:pPr marL="190500" indent="-190500">
               <a:spcBef>
                 <a:spcPts val="400"/>
               </a:spcBef>
@@ -7810,7 +7810,7 @@
             </a:r>
           </a:p>
           <a:p>
-            <a:pPr>
+            <a:pPr marL="190500" indent="-190500">
               <a:spcBef>
                 <a:spcPts val="400"/>
               </a:spcBef>
@@ -7829,7 +7829,7 @@
             </a:r>
           </a:p>
           <a:p>
-            <a:pPr>
+            <a:pPr marL="190500" indent="-190500">
               <a:spcBef>
                 <a:spcPts val="400"/>
               </a:spcBef>
@@ -7920,7 +7920,7 @@
                 <a:solidFill>
                   <a:srgbClr val="A0B4D2"/>
                 </a:solidFill>
-                <a:latin typeface="JetBrains Mono"/>
+                <a:latin typeface="Consolas"/>
               </a:rPr>
               <a:t>FKB Campus  ·  M14</a:t>
             </a:r>
@@ -8059,7 +8059,7 @@
                 <a:solidFill>
                   <a:srgbClr val="78808C"/>
                 </a:solidFill>
-                <a:latin typeface="JetBrains Mono"/>
+                <a:latin typeface="Consolas"/>
               </a:rPr>
               <a:t>ÜBERBLICK  ·  M14</a:t>
             </a:r>
@@ -8137,7 +8137,7 @@
                 <a:solidFill>
                   <a:srgbClr val="1F2C56"/>
                 </a:solidFill>
-                <a:latin typeface="Source Serif 4"/>
+                <a:latin typeface="Arial"/>
               </a:rPr>
               <a:t>Worum geht es heute</a:t>
             </a:r>
@@ -8286,7 +8286,7 @@
                 <a:solidFill>
                   <a:srgbClr val="A0B4D2"/>
                 </a:solidFill>
-                <a:latin typeface="JetBrains Mono"/>
+                <a:latin typeface="Consolas"/>
               </a:rPr>
               <a:t>FKB Campus  ·  M14</a:t>
             </a:r>
@@ -8425,7 +8425,7 @@
                 <a:solidFill>
                   <a:srgbClr val="78808C"/>
                 </a:solidFill>
-                <a:latin typeface="JetBrains Mono"/>
+                <a:latin typeface="Consolas"/>
               </a:rPr>
               <a:t>LERNZIELE  ·  M14</a:t>
             </a:r>
@@ -8503,7 +8503,7 @@
                 <a:solidFill>
                   <a:srgbClr val="1F2C56"/>
                 </a:solidFill>
-                <a:latin typeface="Source Serif 4"/>
+                <a:latin typeface="Arial"/>
               </a:rPr>
               <a:t>Was Sie heute mitnehmen</a:t>
             </a:r>
@@ -8699,7 +8699,7 @@
                 <a:solidFill>
                   <a:srgbClr val="A0B4D2"/>
                 </a:solidFill>
-                <a:latin typeface="JetBrains Mono"/>
+                <a:latin typeface="Consolas"/>
               </a:rPr>
               <a:t>FKB Campus  ·  M14</a:t>
             </a:r>
@@ -8838,7 +8838,7 @@
                 <a:solidFill>
                   <a:srgbClr val="78808C"/>
                 </a:solidFill>
-                <a:latin typeface="JetBrains Mono"/>
+                <a:latin typeface="Consolas"/>
               </a:rPr>
               <a:t>AGENDA  ·  M14</a:t>
             </a:r>
@@ -8916,7 +8916,7 @@
                 <a:solidFill>
                   <a:srgbClr val="1F2C56"/>
                 </a:solidFill>
-                <a:latin typeface="Source Serif 4"/>
+                <a:latin typeface="Arial"/>
               </a:rPr>
               <a:t>So läuft das Modul</a:t>
             </a:r>
@@ -9313,7 +9313,7 @@
                 <a:solidFill>
                   <a:srgbClr val="A0B4D2"/>
                 </a:solidFill>
-                <a:latin typeface="JetBrains Mono"/>
+                <a:latin typeface="Consolas"/>
               </a:rPr>
               <a:t>FKB Campus  ·  M14</a:t>
             </a:r>
@@ -9452,7 +9452,7 @@
                 <a:solidFill>
                   <a:srgbClr val="78808C"/>
                 </a:solidFill>
-                <a:latin typeface="JetBrains Mono"/>
+                <a:latin typeface="Consolas"/>
               </a:rPr>
               <a:t>M14  ·  SCHAUBILD</a:t>
             </a:r>
@@ -9487,7 +9487,7 @@
                 <a:solidFill>
                   <a:srgbClr val="1F2C56"/>
                 </a:solidFill>
-                <a:latin typeface="Source Serif 4"/>
+                <a:latin typeface="Arial"/>
               </a:rPr>
               <a:t>Deckungsbeitrags-Wasserfall</a:t>
             </a:r>
@@ -9632,7 +9632,7 @@
                 <a:solidFill>
                   <a:srgbClr val="A0B4D2"/>
                 </a:solidFill>
-                <a:latin typeface="JetBrains Mono"/>
+                <a:latin typeface="Consolas"/>
               </a:rPr>
               <a:t>FKB Campus  ·  M14</a:t>
             </a:r>
@@ -9667,7 +9667,7 @@
                 <a:solidFill>
                   <a:srgbClr val="A0B4D2"/>
                 </a:solidFill>
-                <a:latin typeface="JetBrains Mono"/>
+                <a:latin typeface="Consolas"/>
               </a:rPr>
               <a:t>Schaubild</a:t>
             </a:r>
@@ -9806,7 +9806,7 @@
                 <a:solidFill>
                   <a:srgbClr val="78808C"/>
                 </a:solidFill>
-                <a:latin typeface="JetBrains Mono"/>
+                <a:latin typeface="Consolas"/>
               </a:rPr>
               <a:t>M14  ·  INHALT</a:t>
             </a:r>
@@ -9927,7 +9927,7 @@
                 <a:solidFill>
                   <a:srgbClr val="1F2C56"/>
                 </a:solidFill>
-                <a:latin typeface="Source Serif 4"/>
+                <a:latin typeface="Arial"/>
               </a:rPr>
               <a:t>Die vier Ertragskomponenten</a:t>
             </a:r>
@@ -9943,7 +9943,7 @@
         <p:spPr>
           <a:xfrm>
             <a:off x="685800" y="1417320"/>
-            <a:ext cx="10817352" cy="5029200"/>
+            <a:ext cx="10817352" cy="4892040"/>
           </a:xfrm>
           <a:prstGeom prst="rect">
             <a:avLst/>
@@ -9951,12 +9951,12 @@
           <a:noFill/>
         </p:spPr>
         <p:txBody>
-          <a:bodyPr wrap="square">
+          <a:bodyPr wrap="square" anchor="ctr">
             <a:spAutoFit/>
           </a:bodyPr>
           <a:lstStyle/>
           <a:p>
-            <a:pPr>
+            <a:pPr marL="190500" indent="-190500">
               <a:spcBef>
                 <a:spcPts val="400"/>
               </a:spcBef>
@@ -9975,7 +9975,7 @@
             </a:r>
           </a:p>
           <a:p>
-            <a:pPr>
+            <a:pPr marL="190500" indent="-190500">
               <a:spcBef>
                 <a:spcPts val="400"/>
               </a:spcBef>
@@ -9994,7 +9994,7 @@
             </a:r>
           </a:p>
           <a:p>
-            <a:pPr>
+            <a:pPr marL="190500" indent="-190500">
               <a:spcBef>
                 <a:spcPts val="400"/>
               </a:spcBef>
@@ -10085,7 +10085,7 @@
                 <a:solidFill>
                   <a:srgbClr val="A0B4D2"/>
                 </a:solidFill>
-                <a:latin typeface="JetBrains Mono"/>
+                <a:latin typeface="Consolas"/>
               </a:rPr>
               <a:t>FKB Campus  ·  M14</a:t>
             </a:r>
@@ -10224,7 +10224,7 @@
                 <a:solidFill>
                   <a:srgbClr val="78808C"/>
                 </a:solidFill>
-                <a:latin typeface="JetBrains Mono"/>
+                <a:latin typeface="Consolas"/>
               </a:rPr>
               <a:t>M14  ·  INHALT</a:t>
             </a:r>
@@ -10345,7 +10345,7 @@
                 <a:solidFill>
                   <a:srgbClr val="1F2C56"/>
                 </a:solidFill>
-                <a:latin typeface="Source Serif 4"/>
+                <a:latin typeface="Arial"/>
               </a:rPr>
               <a:t>Rechenbeispiel: Kundendeckungsbeitrag Müller GmbH</a:t>
             </a:r>
@@ -10361,7 +10361,7 @@
         <p:spPr>
           <a:xfrm>
             <a:off x="685800" y="1417320"/>
-            <a:ext cx="10817352" cy="5029200"/>
+            <a:ext cx="10817352" cy="4892040"/>
           </a:xfrm>
           <a:prstGeom prst="rect">
             <a:avLst/>
@@ -10369,12 +10369,12 @@
           <a:noFill/>
         </p:spPr>
         <p:txBody>
-          <a:bodyPr wrap="square">
+          <a:bodyPr wrap="square" anchor="ctr">
             <a:spAutoFit/>
           </a:bodyPr>
           <a:lstStyle/>
           <a:p>
-            <a:pPr>
+            <a:pPr marL="190500" indent="-190500">
               <a:spcBef>
                 <a:spcPts val="400"/>
               </a:spcBef>
@@ -10393,7 +10393,7 @@
             </a:r>
           </a:p>
           <a:p>
-            <a:pPr>
+            <a:pPr marL="190500" indent="-190500">
               <a:spcBef>
                 <a:spcPts val="400"/>
               </a:spcBef>
@@ -10484,7 +10484,7 @@
                 <a:solidFill>
                   <a:srgbClr val="A0B4D2"/>
                 </a:solidFill>
-                <a:latin typeface="JetBrains Mono"/>
+                <a:latin typeface="Consolas"/>
               </a:rPr>
               <a:t>FKB Campus  ·  M14</a:t>
             </a:r>
@@ -10623,7 +10623,7 @@
                 <a:solidFill>
                   <a:srgbClr val="78808C"/>
                 </a:solidFill>
-                <a:latin typeface="JetBrains Mono"/>
+                <a:latin typeface="Consolas"/>
               </a:rPr>
               <a:t>M14  ·  INHALT</a:t>
             </a:r>
@@ -10744,7 +10744,7 @@
                 <a:solidFill>
                   <a:srgbClr val="1F2C56"/>
                 </a:solidFill>
-                <a:latin typeface="Source Serif 4"/>
+                <a:latin typeface="Arial"/>
               </a:rPr>
               <a:t>Der Expected Loss als Kalkulationsgrundlage</a:t>
             </a:r>
@@ -10760,7 +10760,7 @@
         <p:spPr>
           <a:xfrm>
             <a:off x="685800" y="1417320"/>
-            <a:ext cx="10817352" cy="5029200"/>
+            <a:ext cx="10817352" cy="4892040"/>
           </a:xfrm>
           <a:prstGeom prst="rect">
             <a:avLst/>
@@ -10768,12 +10768,12 @@
           <a:noFill/>
         </p:spPr>
         <p:txBody>
-          <a:bodyPr wrap="square">
+          <a:bodyPr wrap="square" anchor="ctr">
             <a:spAutoFit/>
           </a:bodyPr>
           <a:lstStyle/>
           <a:p>
-            <a:pPr>
+            <a:pPr marL="190500" indent="-190500">
               <a:spcBef>
                 <a:spcPts val="400"/>
               </a:spcBef>
@@ -10792,7 +10792,7 @@
             </a:r>
           </a:p>
           <a:p>
-            <a:pPr>
+            <a:pPr marL="190500" indent="-190500">
               <a:spcBef>
                 <a:spcPts val="400"/>
               </a:spcBef>
@@ -10883,7 +10883,7 @@
                 <a:solidFill>
                   <a:srgbClr val="A0B4D2"/>
                 </a:solidFill>
-                <a:latin typeface="JetBrains Mono"/>
+                <a:latin typeface="Consolas"/>
               </a:rPr>
               <a:t>FKB Campus  ·  M14</a:t>
             </a:r>
@@ -11022,7 +11022,7 @@
                 <a:solidFill>
                   <a:srgbClr val="78808C"/>
                 </a:solidFill>
-                <a:latin typeface="JetBrains Mono"/>
+                <a:latin typeface="Consolas"/>
               </a:rPr>
               <a:t>M14  ·  INHALT</a:t>
             </a:r>
@@ -11143,7 +11143,7 @@
                 <a:solidFill>
                   <a:srgbClr val="1F2C56"/>
                 </a:solidFill>
-                <a:latin typeface="Source Serif 4"/>
+                <a:latin typeface="Arial"/>
               </a:rPr>
               <a:t>Das Nettomargenziel (NMZ) als Steuerungsgröße</a:t>
             </a:r>
@@ -11159,7 +11159,7 @@
         <p:spPr>
           <a:xfrm>
             <a:off x="685800" y="1417320"/>
-            <a:ext cx="10817352" cy="5029200"/>
+            <a:ext cx="10817352" cy="4892040"/>
           </a:xfrm>
           <a:prstGeom prst="rect">
             <a:avLst/>
@@ -11167,12 +11167,12 @@
           <a:noFill/>
         </p:spPr>
         <p:txBody>
-          <a:bodyPr wrap="square">
+          <a:bodyPr wrap="square" anchor="ctr">
             <a:spAutoFit/>
           </a:bodyPr>
           <a:lstStyle/>
           <a:p>
-            <a:pPr>
+            <a:pPr marL="190500" indent="-190500">
               <a:spcBef>
                 <a:spcPts val="400"/>
               </a:spcBef>
@@ -11191,7 +11191,7 @@
             </a:r>
           </a:p>
           <a:p>
-            <a:pPr>
+            <a:pPr marL="177800" indent="-177800">
               <a:spcBef>
                 <a:spcPts val="600"/>
               </a:spcBef>
@@ -11282,7 +11282,7 @@
                 <a:solidFill>
                   <a:srgbClr val="A0B4D2"/>
                 </a:solidFill>
-                <a:latin typeface="JetBrains Mono"/>
+                <a:latin typeface="Consolas"/>
               </a:rPr>
               <a:t>FKB Campus  ·  M14</a:t>
             </a:r>

--- a/protected-downloads/praesentation/M14.pptx
+++ b/protected-downloads/praesentation/M14.pptx
@@ -20,7 +20,6 @@
     <p:sldId id="268" r:id="rId20"/>
     <p:sldId id="269" r:id="rId21"/>
     <p:sldId id="270" r:id="rId22"/>
-    <p:sldId id="271" r:id="rId23"/>
   </p:sldIdLst>
   <p:sldSz cx="12188952" cy="6858000" type="screen4x3"/>
   <p:notesSz cx="6858000" cy="9144000"/>
@@ -542,146 +541,6 @@
 </p:notes>
 </file>
 
-<file path=ppt/notesSlides/notesSlide10.xml><?xml version="1.0" encoding="utf-8"?>
-<p:notes xmlns:a="http://schemas.openxmlformats.org/drawingml/2006/main" xmlns:p="http://schemas.openxmlformats.org/presentationml/2006/main" xmlns:r="http://schemas.openxmlformats.org/officeDocument/2006/relationships">
-  <p:cSld>
-    <p:spTree>
-      <p:nvGrpSpPr>
-        <p:cNvPr id="1" name=""/>
-        <p:cNvGrpSpPr/>
-        <p:nvPr/>
-      </p:nvGrpSpPr>
-      <p:grpSpPr>
-        <a:xfrm>
-          <a:off x="0" y="0"/>
-          <a:ext cx="0" cy="0"/>
-          <a:chOff x="0" y="0"/>
-          <a:chExt cx="0" cy="0"/>
-        </a:xfrm>
-      </p:grpSpPr>
-      <p:sp>
-        <p:nvSpPr>
-          <p:cNvPr id="2" name="Slide Image Placeholder 1"/>
-          <p:cNvSpPr>
-            <a:spLocks noGrp="1"/>
-          </p:cNvSpPr>
-          <p:nvPr>
-            <p:ph type="sldImg" idx="2"/>
-          </p:nvPr>
-        </p:nvSpPr>
-        <p:spPr/>
-      </p:sp>
-      <p:sp>
-        <p:nvSpPr>
-          <p:cNvPr id="3" name="Notes Placeholder 2"/>
-          <p:cNvSpPr>
-            <a:spLocks noGrp="1"/>
-          </p:cNvSpPr>
-          <p:nvPr>
-            <p:ph type="body" idx="3" sz="quarter"/>
-          </p:nvPr>
-        </p:nvSpPr>
-        <p:spPr/>
-        <p:txBody>
-          <a:bodyPr/>
-          <a:lstStyle/>
-          <a:p>
-            <a:r>
-              <a:t>Siehe Trainerhandbuch (Sektion 3) für Moderationshinweise, Timing und erwartete Teilnehmerreaktionen.</a:t>
-            </a:r>
-          </a:p>
-        </p:txBody>
-      </p:sp>
-      <p:sp>
-        <p:nvSpPr>
-          <p:cNvPr id="4" name="Slide Number Placeholder 3"/>
-          <p:cNvSpPr>
-            <a:spLocks noGrp="1"/>
-          </p:cNvSpPr>
-          <p:nvPr>
-            <p:ph type="sldNum" idx="5" sz="quarter"/>
-          </p:nvPr>
-        </p:nvSpPr>
-        <p:spPr/>
-      </p:sp>
-    </p:spTree>
-  </p:cSld>
-  <p:clrMapOvr>
-    <a:masterClrMapping/>
-  </p:clrMapOvr>
-</p:notes>
-</file>
-
-<file path=ppt/notesSlides/notesSlide11.xml><?xml version="1.0" encoding="utf-8"?>
-<p:notes xmlns:a="http://schemas.openxmlformats.org/drawingml/2006/main" xmlns:p="http://schemas.openxmlformats.org/presentationml/2006/main" xmlns:r="http://schemas.openxmlformats.org/officeDocument/2006/relationships">
-  <p:cSld>
-    <p:spTree>
-      <p:nvGrpSpPr>
-        <p:cNvPr id="1" name=""/>
-        <p:cNvGrpSpPr/>
-        <p:nvPr/>
-      </p:nvGrpSpPr>
-      <p:grpSpPr>
-        <a:xfrm>
-          <a:off x="0" y="0"/>
-          <a:ext cx="0" cy="0"/>
-          <a:chOff x="0" y="0"/>
-          <a:chExt cx="0" cy="0"/>
-        </a:xfrm>
-      </p:grpSpPr>
-      <p:sp>
-        <p:nvSpPr>
-          <p:cNvPr id="2" name="Slide Image Placeholder 1"/>
-          <p:cNvSpPr>
-            <a:spLocks noGrp="1"/>
-          </p:cNvSpPr>
-          <p:nvPr>
-            <p:ph type="sldImg" idx="2"/>
-          </p:nvPr>
-        </p:nvSpPr>
-        <p:spPr/>
-      </p:sp>
-      <p:sp>
-        <p:nvSpPr>
-          <p:cNvPr id="3" name="Notes Placeholder 2"/>
-          <p:cNvSpPr>
-            <a:spLocks noGrp="1"/>
-          </p:cNvSpPr>
-          <p:nvPr>
-            <p:ph type="body" idx="3" sz="quarter"/>
-          </p:nvPr>
-        </p:nvSpPr>
-        <p:spPr/>
-        <p:txBody>
-          <a:bodyPr/>
-          <a:lstStyle/>
-          <a:p>
-            <a:r>
-              <a:t>Siehe Trainerhandbuch (Sektion 3) für Moderationshinweise, Timing und erwartete Teilnehmerreaktionen.</a:t>
-            </a:r>
-          </a:p>
-        </p:txBody>
-      </p:sp>
-      <p:sp>
-        <p:nvSpPr>
-          <p:cNvPr id="4" name="Slide Number Placeholder 3"/>
-          <p:cNvSpPr>
-            <a:spLocks noGrp="1"/>
-          </p:cNvSpPr>
-          <p:nvPr>
-            <p:ph type="sldNum" idx="5" sz="quarter"/>
-          </p:nvPr>
-        </p:nvSpPr>
-        <p:spPr/>
-      </p:sp>
-    </p:spTree>
-  </p:cSld>
-  <p:clrMapOvr>
-    <a:masterClrMapping/>
-  </p:clrMapOvr>
-</p:notes>
-</file>
-
 <file path=ppt/notesSlides/notesSlide2.xml><?xml version="1.0" encoding="utf-8"?>
 <p:notes xmlns:a="http://schemas.openxmlformats.org/drawingml/2006/main" xmlns:p="http://schemas.openxmlformats.org/presentationml/2006/main" xmlns:r="http://schemas.openxmlformats.org/officeDocument/2006/relationships">
   <p:cSld>
@@ -727,7 +586,7 @@
           <a:lstStyle/>
           <a:p>
             <a:r>
-              <a:t>Siehe Trainerhandbuch (Sektion 3) für Moderationshinweise, Timing und erwartete Teilnehmerreaktionen.</a:t>
+              <a:t>Einstieg: „Welcher Ihrer größten Kunden bringt womöglich am wenigsten Ertrag?"</a:t>
             </a:r>
           </a:p>
         </p:txBody>
@@ -797,7 +656,7 @@
           <a:lstStyle/>
           <a:p>
             <a:r>
-              <a:t>Siehe Trainerhandbuch (Sektion 3) für Moderationshinweise, Timing und erwartete Teilnehmerreaktionen.</a:t>
+              <a:t>Der Deckungsbeitrags-Wasserfall macht sichtbar, wo der Ertrag entsteht und wo er verloren geht.</a:t>
             </a:r>
           </a:p>
         </p:txBody>
@@ -867,7 +726,7 @@
           <a:lstStyle/>
           <a:p>
             <a:r>
-              <a:t>Siehe Trainerhandbuch (Sektion 3) für Moderationshinweise, Timing und erwartete Teilnehmerreaktionen.</a:t>
+              <a:t>Ein risikoreicher Kunde braucht eine höhere Marge – sonst subventioniert die Bank das Risiko.</a:t>
             </a:r>
           </a:p>
         </p:txBody>
@@ -937,7 +796,7 @@
           <a:lstStyle/>
           <a:p>
             <a:r>
-              <a:t>Siehe Trainerhandbuch (Sektion 3) für Moderationshinweise, Timing und erwartete Teilnehmerreaktionen.</a:t>
+              <a:t>Müller GmbH: DB II 12.610 EUR, Rendite 1,58 %. Das XLSX-Deckungsbeitragsmodell (M14) rechnet DB und Expected Loss mit Optimierungsszenarien.</a:t>
             </a:r>
           </a:p>
         </p:txBody>
@@ -1007,7 +866,7 @@
           <a:lstStyle/>
           <a:p>
             <a:r>
-              <a:t>Siehe Trainerhandbuch (Sektion 3) für Moderationshinweise, Timing und erwartete Teilnehmerreaktionen.</a:t>
+              <a:t>Die Handlungsempfehlung verbindet Ertragssignal und Gesprächsstrategie.</a:t>
             </a:r>
           </a:p>
         </p:txBody>
@@ -1077,7 +936,12 @@
           <a:lstStyle/>
           <a:p>
             <a:r>
-              <a:t>Siehe Trainerhandbuch (Sektion 3) für Moderationshinweise, Timing und erwartete Teilnehmerreaktionen.</a:t>
+              <a:t>AB Musterlösung (Trainer-Version)</a:t>
+            </a:r>
+          </a:p>
+          <a:p>
+            <a:r>
+              <a:t>Ziel: die Rendite über Cross-Selling und risikogerechte Kondition zum NMZ bringen – im Gespräch über Wert, nicht über Nachlass.</a:t>
             </a:r>
           </a:p>
         </p:txBody>
@@ -1147,7 +1011,7 @@
           <a:lstStyle/>
           <a:p>
             <a:r>
-              <a:t>Siehe Trainerhandbuch (Sektion 3) für Moderationshinweise, Timing und erwartete Teilnehmerreaktionen.</a:t>
+              <a:t>Überleitung zum Selbstcheck.</a:t>
             </a:r>
           </a:p>
         </p:txBody>
@@ -1217,7 +1081,7 @@
           <a:lstStyle/>
           <a:p>
             <a:r>
-              <a:t>Siehe Trainerhandbuch (Sektion 3) für Moderationshinweise, Timing und erwartete Teilnehmerreaktionen.</a:t>
+              <a:t>Selbstcheck nach 4 Wochen als Transferanker.</a:t>
             </a:r>
           </a:p>
         </p:txBody>
@@ -5035,7 +4899,7 @@
                 </a:solidFill>
                 <a:latin typeface="Arial"/>
               </a:rPr>
-              <a:t>Konditionsanpassung vorbereiten</a:t>
+              <a:t>Vom Konditionengespräch zum Wertgespräch</a:t>
             </a:r>
           </a:p>
         </p:txBody>
@@ -5061,6 +4925,25 @@
             <a:spAutoFit/>
           </a:bodyPr>
           <a:lstStyle/>
+          <a:p>
+            <a:pPr marL="177800" indent="-177800">
+              <a:spcBef>
+                <a:spcPts val="600"/>
+              </a:spcBef>
+              <a:spcAft>
+                <a:spcPts val="200"/>
+              </a:spcAft>
+            </a:pPr>
+            <a:r>
+              <a:rPr sz="1200" i="1">
+                <a:solidFill>
+                  <a:srgbClr val="3D5466"/>
+                </a:solidFill>
+                <a:latin typeface="Arial"/>
+              </a:rPr>
+              <a:t>→  Wer über Konditionen verhandelt, verliert Marge – wer über Wert spricht, verteidigt sie.</a:t>
+            </a:r>
+          </a:p>
           <a:p>
             <a:pPr marL="190500" indent="-190500">
               <a:spcBef>
@@ -5077,7 +4960,7 @@
                 </a:solidFill>
                 <a:latin typeface="Arial"/>
               </a:rPr>
-              <a:t>▸  Wenn die Analyse zeigt, dass ein Kunde unter dem Mindest-Deckungsbeitrag liegt, gibt es drei Hebel:</a:t>
+              <a:t>▸  Kundensegmentierung nach Ertragsprofil; Signale für Unterpreisierung erkennen.</a:t>
             </a:r>
           </a:p>
           <a:p>
@@ -5096,64 +4979,7 @@
                 </a:solidFill>
                 <a:latin typeface="Arial"/>
               </a:rPr>
-              <a:t>▸  Zinsmarge erhöhen: Direkte Wirkung auf DB I. Erfordert Konditionengespräch (Sec 4.4).</a:t>
-            </a:r>
-          </a:p>
-          <a:p>
-            <a:pPr marL="190500" indent="-190500">
-              <a:spcBef>
-                <a:spcPts val="400"/>
-              </a:spcBef>
-              <a:spcAft>
-                <a:spcPts val="200"/>
-              </a:spcAft>
-            </a:pPr>
-            <a:r>
-              <a:rPr sz="1300">
-                <a:solidFill>
-                  <a:srgbClr val="3D5466"/>
-                </a:solidFill>
-                <a:latin typeface="Arial"/>
-              </a:rPr>
-              <a:t>▸  Cross-Selling ausbauen: Verbundertrag und Provisionen steigern, ohne Zinskonditionen anzufassen. Oft der schonendere Weg.</a:t>
-            </a:r>
-          </a:p>
-          <a:p>
-            <a:pPr marL="190500" indent="-190500">
-              <a:spcBef>
-                <a:spcPts val="400"/>
-              </a:spcBef>
-              <a:spcAft>
-                <a:spcPts val="200"/>
-              </a:spcAft>
-            </a:pPr>
-            <a:r>
-              <a:rPr sz="1300">
-                <a:solidFill>
-                  <a:srgbClr val="3D5466"/>
-                </a:solidFill>
-                <a:latin typeface="Arial"/>
-              </a:rPr>
-              <a:t>▸  Betreuungskosten senken: Gesprächsfrequenz anpassen, digitale Kanäle stärker nutzen. Wirkt auf DB II.</a:t>
-            </a:r>
-          </a:p>
-          <a:p>
-            <a:pPr marL="190500" indent="-190500">
-              <a:spcBef>
-                <a:spcPts val="400"/>
-              </a:spcBef>
-              <a:spcAft>
-                <a:spcPts val="200"/>
-              </a:spcAft>
-            </a:pPr>
-            <a:r>
-              <a:rPr sz="1300">
-                <a:solidFill>
-                  <a:srgbClr val="3D5466"/>
-                </a:solidFill>
-                <a:latin typeface="Arial"/>
-              </a:rPr>
-              <a:t>▸  ## 4.3 Ertragsstruktur-Analyse im Bestand</a:t>
+              <a:t>▸  Das Konditionengespräch wertbasiert führen: Nutzen statt Nachlass.</a:t>
             </a:r>
           </a:p>
         </p:txBody>
@@ -5269,7 +5095,7 @@
             <a:avLst/>
           </a:prstGeom>
           <a:solidFill>
-            <a:srgbClr val="EDEDF3"/>
+            <a:srgbClr val="FFFFFF"/>
           </a:solidFill>
           <a:ln>
             <a:noFill/>
@@ -5370,51 +5196,43 @@
                 </a:solidFill>
                 <a:latin typeface="Consolas"/>
               </a:rPr>
-              <a:t>M14  ·  INHALT</a:t>
-            </a:r>
-          </a:p>
-        </p:txBody>
-      </p:sp>
-      <p:sp>
-        <p:nvSpPr>
-          <p:cNvPr id="5" name="Rectangle 4"/>
-          <p:cNvSpPr/>
-          <p:nvPr/>
-        </p:nvSpPr>
-        <p:spPr>
-          <a:xfrm>
-            <a:off x="0" y="1234440"/>
-            <a:ext cx="12188952" cy="12700"/>
-          </a:xfrm>
-          <a:prstGeom prst="rect">
-            <a:avLst/>
-          </a:prstGeom>
-          <a:solidFill>
-            <a:srgbClr val="D8DFE4"/>
-          </a:solidFill>
-          <a:ln>
-            <a:noFill/>
-          </a:ln>
-        </p:spPr>
-        <p:style>
-          <a:lnRef idx="1">
-            <a:schemeClr val="accent1"/>
-          </a:lnRef>
-          <a:fillRef idx="3">
-            <a:schemeClr val="accent1"/>
-          </a:fillRef>
-          <a:effectRef idx="2">
-            <a:schemeClr val="accent1"/>
-          </a:effectRef>
-          <a:fontRef idx="minor">
-            <a:schemeClr val="lt1"/>
-          </a:fontRef>
-        </p:style>
-        <p:txBody>
-          <a:bodyPr rtlCol="0" anchor="ctr"/>
-          <a:lstStyle/>
-          <a:p>
-            <a:pPr algn="ctr"/>
+              <a:t>M14  ·  SCHAUBILD</a:t>
+            </a:r>
+          </a:p>
+        </p:txBody>
+      </p:sp>
+      <p:sp>
+        <p:nvSpPr>
+          <p:cNvPr id="5" name="TextBox 4"/>
+          <p:cNvSpPr txBox="1"/>
+          <p:nvPr/>
+        </p:nvSpPr>
+        <p:spPr>
+          <a:xfrm>
+            <a:off x="685800" y="502920"/>
+            <a:ext cx="10817352" cy="594360"/>
+          </a:xfrm>
+          <a:prstGeom prst="rect">
+            <a:avLst/>
+          </a:prstGeom>
+          <a:noFill/>
+        </p:spPr>
+        <p:txBody>
+          <a:bodyPr wrap="square">
+            <a:spAutoFit/>
+          </a:bodyPr>
+          <a:lstStyle/>
+          <a:p>
+            <a:pPr algn="l"/>
+            <a:r>
+              <a:rPr sz="2000" b="1" i="0">
+                <a:solidFill>
+                  <a:srgbClr val="1F2C56"/>
+                </a:solidFill>
+                <a:latin typeface="Arial"/>
+              </a:rPr>
+              <a:t>Handlungsempfehlung: vom Ertragssignal zur Kondition</a:t>
+            </a:r>
           </a:p>
         </p:txBody>
       </p:sp>
@@ -5426,8 +5244,8 @@
         </p:nvSpPr>
         <p:spPr>
           <a:xfrm>
-            <a:off x="685800" y="502920"/>
-            <a:ext cx="36576" cy="658368"/>
+            <a:off x="685800" y="1143000"/>
+            <a:ext cx="10817352" cy="25400"/>
           </a:xfrm>
           <a:prstGeom prst="rect">
             <a:avLst/>
@@ -5461,143 +5279,33 @@
           </a:p>
         </p:txBody>
       </p:sp>
-      <p:sp>
-        <p:nvSpPr>
-          <p:cNvPr id="7" name="TextBox 6"/>
-          <p:cNvSpPr txBox="1"/>
-          <p:nvPr/>
-        </p:nvSpPr>
-        <p:spPr>
-          <a:xfrm>
-            <a:off x="813816" y="502920"/>
-            <a:ext cx="10634472" cy="685800"/>
-          </a:xfrm>
-          <a:prstGeom prst="rect">
-            <a:avLst/>
-          </a:prstGeom>
-          <a:noFill/>
-        </p:spPr>
-        <p:txBody>
-          <a:bodyPr wrap="square">
-            <a:spAutoFit/>
-          </a:bodyPr>
-          <a:lstStyle/>
-          <a:p>
-            <a:pPr algn="l"/>
-            <a:r>
-              <a:rPr sz="2400" b="1" i="0">
-                <a:solidFill>
-                  <a:srgbClr val="1F2C56"/>
-                </a:solidFill>
-                <a:latin typeface="Arial"/>
-              </a:rPr>
-              <a:t>Kundensegmentierung nach Ertragsprofil</a:t>
-            </a:r>
-          </a:p>
-        </p:txBody>
-      </p:sp>
-      <p:sp>
-        <p:nvSpPr>
-          <p:cNvPr id="8" name="TextBox 7"/>
-          <p:cNvSpPr txBox="1"/>
-          <p:nvPr/>
-        </p:nvSpPr>
-        <p:spPr>
-          <a:xfrm>
-            <a:off x="685800" y="1417320"/>
-            <a:ext cx="10817352" cy="4892040"/>
-          </a:xfrm>
-          <a:prstGeom prst="rect">
-            <a:avLst/>
-          </a:prstGeom>
-          <a:noFill/>
-        </p:spPr>
-        <p:txBody>
-          <a:bodyPr wrap="square" anchor="ctr">
-            <a:spAutoFit/>
-          </a:bodyPr>
-          <a:lstStyle/>
-          <a:p>
-            <a:pPr marL="190500" indent="-190500">
-              <a:spcBef>
-                <a:spcPts val="400"/>
-              </a:spcBef>
-              <a:spcAft>
-                <a:spcPts val="200"/>
-              </a:spcAft>
-            </a:pPr>
-            <a:r>
-              <a:rPr sz="1300">
-                <a:solidFill>
-                  <a:srgbClr val="3D5466"/>
-                </a:solidFill>
-                <a:latin typeface="Arial"/>
-              </a:rPr>
-              <a:t>▸  Eine einfache 2×2-Matrix hilft, den Bestand nach Ertragspotenzial und aktuellem Ertrag zu strukturieren:</a:t>
-            </a:r>
-          </a:p>
-          <a:p>
-            <a:pPr marL="190500" indent="-190500">
-              <a:spcBef>
-                <a:spcPts val="400"/>
-              </a:spcBef>
-              <a:spcAft>
-                <a:spcPts val="200"/>
-              </a:spcAft>
-            </a:pPr>
-            <a:r>
-              <a:rPr sz="1300">
-                <a:solidFill>
-                  <a:srgbClr val="3D5466"/>
-                </a:solidFill>
-                <a:latin typeface="Arial"/>
-              </a:rPr>
-              <a:t>▸  Kernkunden (hoher DB, hohes Potenzial) erhalten bevorzugte Betreuungsintensität: proaktive Kontakte, Spezialisten einbinden, Strategiegespräche.</a:t>
-            </a:r>
-          </a:p>
-          <a:p>
-            <a:pPr marL="190500" indent="-190500">
-              <a:spcBef>
-                <a:spcPts val="400"/>
-              </a:spcBef>
-              <a:spcAft>
-                <a:spcPts val="200"/>
-              </a:spcAft>
-            </a:pPr>
-            <a:r>
-              <a:rPr sz="1300">
-                <a:solidFill>
-                  <a:srgbClr val="3D5466"/>
-                </a:solidFill>
-                <a:latin typeface="Arial"/>
-              </a:rPr>
-              <a:t>▸  Entwicklungskunden (niedriger DB, hohes Potenzial) sind die Priorität für Ertragsoptimierung: Hier liegt ungenutztes Wallet-Share-Potenzial.</a:t>
-            </a:r>
-          </a:p>
-          <a:p>
-            <a:pPr marL="190500" indent="-190500">
-              <a:spcBef>
-                <a:spcPts val="400"/>
-              </a:spcBef>
-              <a:spcAft>
-                <a:spcPts val="200"/>
-              </a:spcAft>
-            </a:pPr>
-            <a:r>
-              <a:rPr sz="1300">
-                <a:solidFill>
-                  <a:srgbClr val="3D5466"/>
-                </a:solidFill>
-                <a:latin typeface="Arial"/>
-              </a:rPr>
-              <a:t>▸  Problemkunden (niedriger DB, niedriges Potenzial) sollten mit minimalem Aufwand betreut werden. Exit aus der Beziehung ist bei dauerhaft negativem DB zu prüfen – aber:</a:t>
-            </a:r>
-          </a:p>
-        </p:txBody>
-      </p:sp>
-      <p:sp>
-        <p:nvSpPr>
-          <p:cNvPr id="9" name="Rectangle 8"/>
+      <p:pic>
+        <p:nvPicPr>
+          <p:cNvPr id="7" name="Picture 6" descr="image.png"/>
+          <p:cNvPicPr>
+            <a:picLocks noChangeAspect="1"/>
+          </p:cNvPicPr>
+          <p:nvPr/>
+        </p:nvPicPr>
+        <p:blipFill>
+          <a:blip r:embed="rId2"/>
+          <a:stretch>
+            <a:fillRect/>
+          </a:stretch>
+        </p:blipFill>
+        <p:spPr>
+          <a:xfrm>
+            <a:off x="2303489" y="1325880"/>
+            <a:ext cx="7581973" cy="4937760"/>
+          </a:xfrm>
+          <a:prstGeom prst="rect">
+            <a:avLst/>
+          </a:prstGeom>
+        </p:spPr>
+      </p:pic>
+      <p:sp>
+        <p:nvSpPr>
+          <p:cNvPr id="8" name="Rectangle 7"/>
           <p:cNvSpPr/>
           <p:nvPr/>
         </p:nvSpPr>
@@ -5640,7 +5348,7 @@
       </p:sp>
       <p:sp>
         <p:nvSpPr>
-          <p:cNvPr id="10" name="TextBox 9"/>
+          <p:cNvPr id="9" name="TextBox 8"/>
           <p:cNvSpPr txBox="1"/>
           <p:nvPr/>
         </p:nvSpPr>
@@ -5669,6 +5377,41 @@
                 <a:latin typeface="Consolas"/>
               </a:rPr>
               <a:t>FKB Campus  ·  M14</a:t>
+            </a:r>
+          </a:p>
+        </p:txBody>
+      </p:sp>
+      <p:sp>
+        <p:nvSpPr>
+          <p:cNvPr id="10" name="TextBox 9"/>
+          <p:cNvSpPr txBox="1"/>
+          <p:nvPr/>
+        </p:nvSpPr>
+        <p:spPr>
+          <a:xfrm>
+            <a:off x="7176211" y="6583680"/>
+            <a:ext cx="4326940" cy="256032"/>
+          </a:xfrm>
+          <a:prstGeom prst="rect">
+            <a:avLst/>
+          </a:prstGeom>
+          <a:noFill/>
+        </p:spPr>
+        <p:txBody>
+          <a:bodyPr wrap="none">
+            <a:spAutoFit/>
+          </a:bodyPr>
+          <a:lstStyle/>
+          <a:p>
+            <a:pPr algn="r"/>
+            <a:r>
+              <a:rPr sz="700">
+                <a:solidFill>
+                  <a:srgbClr val="A0B4D2"/>
+                </a:solidFill>
+                <a:latin typeface="Consolas"/>
+              </a:rPr>
+              <a:t>Schaubild</a:t>
             </a:r>
           </a:p>
         </p:txBody>
@@ -5706,7 +5449,7 @@
             <a:avLst/>
           </a:prstGeom>
           <a:solidFill>
-            <a:srgbClr val="EDEDF3"/>
+            <a:srgbClr val="1F2C56"/>
           </a:solidFill>
           <a:ln>
             <a:noFill/>
@@ -5736,57 +5479,14 @@
       </p:sp>
       <p:sp>
         <p:nvSpPr>
-          <p:cNvPr id="3" name="Rectangle 2"/>
-          <p:cNvSpPr/>
-          <p:nvPr/>
-        </p:nvSpPr>
-        <p:spPr>
-          <a:xfrm>
-            <a:off x="0" y="0"/>
-            <a:ext cx="12188952" cy="50292"/>
-          </a:xfrm>
-          <a:prstGeom prst="rect">
-            <a:avLst/>
-          </a:prstGeom>
-          <a:solidFill>
-            <a:srgbClr val="1F2C56"/>
-          </a:solidFill>
-          <a:ln>
-            <a:noFill/>
-          </a:ln>
-        </p:spPr>
-        <p:style>
-          <a:lnRef idx="1">
-            <a:schemeClr val="accent1"/>
-          </a:lnRef>
-          <a:fillRef idx="3">
-            <a:schemeClr val="accent1"/>
-          </a:fillRef>
-          <a:effectRef idx="2">
-            <a:schemeClr val="accent1"/>
-          </a:effectRef>
-          <a:fontRef idx="minor">
-            <a:schemeClr val="lt1"/>
-          </a:fontRef>
-        </p:style>
-        <p:txBody>
-          <a:bodyPr rtlCol="0" anchor="ctr"/>
-          <a:lstStyle/>
-          <a:p>
-            <a:pPr algn="ctr"/>
-          </a:p>
-        </p:txBody>
-      </p:sp>
-      <p:sp>
-        <p:nvSpPr>
-          <p:cNvPr id="4" name="TextBox 3"/>
+          <p:cNvPr id="3" name="TextBox 2"/>
           <p:cNvSpPr txBox="1"/>
           <p:nvPr/>
         </p:nvSpPr>
         <p:spPr>
           <a:xfrm>
-            <a:off x="685800" y="109728"/>
-            <a:ext cx="10817352" cy="228600"/>
+            <a:off x="685800" y="2377440"/>
+            <a:ext cx="10817352" cy="365760"/>
           </a:xfrm>
           <a:prstGeom prst="rect">
             <a:avLst/>
@@ -5801,70 +5501,27 @@
           <a:p>
             <a:pPr algn="l"/>
             <a:r>
-              <a:rPr sz="750">
-                <a:solidFill>
-                  <a:srgbClr val="78808C"/>
+              <a:rPr sz="1200">
+                <a:solidFill>
+                  <a:srgbClr val="D9C089"/>
                 </a:solidFill>
                 <a:latin typeface="Consolas"/>
               </a:rPr>
-              <a:t>M14  ·  INHALT</a:t>
-            </a:r>
-          </a:p>
-        </p:txBody>
-      </p:sp>
-      <p:sp>
-        <p:nvSpPr>
-          <p:cNvPr id="5" name="Rectangle 4"/>
+              <a:t>FALLARBEIT</a:t>
+            </a:r>
+          </a:p>
+        </p:txBody>
+      </p:sp>
+      <p:sp>
+        <p:nvSpPr>
+          <p:cNvPr id="4" name="Rectangle 3"/>
           <p:cNvSpPr/>
           <p:nvPr/>
         </p:nvSpPr>
         <p:spPr>
           <a:xfrm>
-            <a:off x="0" y="1234440"/>
-            <a:ext cx="12188952" cy="12700"/>
-          </a:xfrm>
-          <a:prstGeom prst="rect">
-            <a:avLst/>
-          </a:prstGeom>
-          <a:solidFill>
-            <a:srgbClr val="D8DFE4"/>
-          </a:solidFill>
-          <a:ln>
-            <a:noFill/>
-          </a:ln>
-        </p:spPr>
-        <p:style>
-          <a:lnRef idx="1">
-            <a:schemeClr val="accent1"/>
-          </a:lnRef>
-          <a:fillRef idx="3">
-            <a:schemeClr val="accent1"/>
-          </a:fillRef>
-          <a:effectRef idx="2">
-            <a:schemeClr val="accent1"/>
-          </a:effectRef>
-          <a:fontRef idx="minor">
-            <a:schemeClr val="lt1"/>
-          </a:fontRef>
-        </p:style>
-        <p:txBody>
-          <a:bodyPr rtlCol="0" anchor="ctr"/>
-          <a:lstStyle/>
-          <a:p>
-            <a:pPr algn="ctr"/>
-          </a:p>
-        </p:txBody>
-      </p:sp>
-      <p:sp>
-        <p:nvSpPr>
-          <p:cNvPr id="6" name="Rectangle 5"/>
-          <p:cNvSpPr/>
-          <p:nvPr/>
-        </p:nvSpPr>
-        <p:spPr>
-          <a:xfrm>
-            <a:off x="685800" y="502920"/>
-            <a:ext cx="36576" cy="658368"/>
+            <a:off x="685800" y="2788920"/>
+            <a:ext cx="548640" cy="38100"/>
           </a:xfrm>
           <a:prstGeom prst="rect">
             <a:avLst/>
@@ -5900,14 +5557,14 @@
       </p:sp>
       <p:sp>
         <p:nvSpPr>
-          <p:cNvPr id="7" name="TextBox 6"/>
+          <p:cNvPr id="5" name="TextBox 4"/>
           <p:cNvSpPr txBox="1"/>
           <p:nvPr/>
         </p:nvSpPr>
         <p:spPr>
           <a:xfrm>
-            <a:off x="813816" y="502920"/>
-            <a:ext cx="10634472" cy="685800"/>
+            <a:off x="685800" y="3017520"/>
+            <a:ext cx="10817352" cy="1463040"/>
           </a:xfrm>
           <a:prstGeom prst="rect">
             <a:avLst/>
@@ -5922,27 +5579,27 @@
           <a:p>
             <a:pPr algn="l"/>
             <a:r>
-              <a:rPr sz="2400" b="1" i="0">
-                <a:solidFill>
-                  <a:srgbClr val="1F2C56"/>
+              <a:rPr sz="4000" b="1" i="0">
+                <a:solidFill>
+                  <a:srgbClr val="FFFFFF"/>
                 </a:solidFill>
                 <a:latin typeface="Arial"/>
               </a:rPr>
-              <a:t>Signale für Unterpreisierung</a:t>
-            </a:r>
-          </a:p>
-        </p:txBody>
-      </p:sp>
-      <p:sp>
-        <p:nvSpPr>
-          <p:cNvPr id="8" name="TextBox 7"/>
+              <a:t>Praxiscase Bauer &amp; Söhne</a:t>
+            </a:r>
+          </a:p>
+        </p:txBody>
+      </p:sp>
+      <p:sp>
+        <p:nvSpPr>
+          <p:cNvPr id="6" name="TextBox 5"/>
           <p:cNvSpPr txBox="1"/>
           <p:nvPr/>
         </p:nvSpPr>
         <p:spPr>
           <a:xfrm>
-            <a:off x="685800" y="1417320"/>
-            <a:ext cx="10817352" cy="4892040"/>
+            <a:off x="685800" y="4480560"/>
+            <a:ext cx="8653881" cy="1280160"/>
           </a:xfrm>
           <a:prstGeom prst="rect">
             <a:avLst/>
@@ -5955,193 +5612,29 @@
           </a:bodyPr>
           <a:lstStyle/>
           <a:p>
-            <a:pPr marL="190500" indent="-190500">
-              <a:spcBef>
-                <a:spcPts val="400"/>
-              </a:spcBef>
-              <a:spcAft>
-                <a:spcPts val="200"/>
-              </a:spcAft>
-            </a:pPr>
-            <a:r>
-              <a:rPr sz="1300">
-                <a:solidFill>
-                  <a:srgbClr val="3D5466"/>
+            <a:pPr algn="l"/>
+            <a:r>
+              <a:rPr sz="1600" b="0" i="0">
+                <a:solidFill>
+                  <a:srgbClr val="C8D2E6"/>
                 </a:solidFill>
                 <a:latin typeface="Arial"/>
               </a:rPr>
-              <a:t>▸  Berater erkennen unterpreiste Engagements oft an folgenden Signalen:</a:t>
-            </a:r>
-          </a:p>
-          <a:p>
-            <a:pPr marL="190500" indent="-190500">
-              <a:spcBef>
-                <a:spcPts val="400"/>
-              </a:spcBef>
-              <a:spcAft>
-                <a:spcPts val="200"/>
-              </a:spcAft>
-            </a:pPr>
-            <a:r>
-              <a:rPr sz="1300">
-                <a:solidFill>
-                  <a:srgbClr val="3D5466"/>
-                </a:solidFill>
-                <a:latin typeface="Arial"/>
-              </a:rPr>
-              <a:t>▸  Kreditmarge liegt deutlich unter Marktüblichkeit (Benchmarkcheck in agree)</a:t>
-            </a:r>
-          </a:p>
-          <a:p>
-            <a:pPr marL="190500" indent="-190500">
-              <a:spcBef>
-                <a:spcPts val="400"/>
-              </a:spcBef>
-              <a:spcAft>
-                <a:spcPts val="200"/>
-              </a:spcAft>
-            </a:pPr>
-            <a:r>
-              <a:rPr sz="1300">
-                <a:solidFill>
-                  <a:srgbClr val="3D5466"/>
-                </a:solidFill>
-                <a:latin typeface="Arial"/>
-              </a:rPr>
-              <a:t>▸  Kein Verbundpartner eingebunden, obwohl Potenzial vorhanden</a:t>
-            </a:r>
-          </a:p>
-          <a:p>
-            <a:pPr marL="190500" indent="-190500">
-              <a:spcBef>
-                <a:spcPts val="400"/>
-              </a:spcBef>
-              <a:spcAft>
-                <a:spcPts val="200"/>
-              </a:spcAft>
-            </a:pPr>
-            <a:r>
-              <a:rPr sz="1300">
-                <a:solidFill>
-                  <a:srgbClr val="3D5466"/>
-                </a:solidFill>
-                <a:latin typeface="Arial"/>
-              </a:rPr>
-              <a:t>▸  Hohe Inanspruchnahme offener Linien → steigt EAD, Marge wurde nie angepasst</a:t>
-            </a:r>
-          </a:p>
-          <a:p>
-            <a:pPr marL="190500" indent="-190500">
-              <a:spcBef>
-                <a:spcPts val="400"/>
-              </a:spcBef>
-              <a:spcAft>
-                <a:spcPts val="200"/>
-              </a:spcAft>
-            </a:pPr>
-            <a:r>
-              <a:rPr sz="1300">
-                <a:solidFill>
-                  <a:srgbClr val="3D5466"/>
-                </a:solidFill>
-                <a:latin typeface="Arial"/>
-              </a:rPr>
-              <a:t>▸  Ratingverschlechterung ohne Konditionsanpassung → EL gestiegen, Marge unverändert</a:t>
-            </a:r>
-          </a:p>
-          <a:p>
-            <a:pPr marL="190500" indent="-190500">
-              <a:spcBef>
-                <a:spcPts val="400"/>
-              </a:spcBef>
-              <a:spcAft>
-                <a:spcPts val="200"/>
-              </a:spcAft>
-            </a:pPr>
-            <a:r>
-              <a:rPr sz="1300">
-                <a:solidFill>
-                  <a:srgbClr val="3D5466"/>
-                </a:solidFill>
-                <a:latin typeface="Arial"/>
-              </a:rPr>
-              <a:t>▸  Die folgende Handlungsempfehlung-Karte verknüpft diese Ertragssignale mit dem jeweils passenden Vertriebsimpuls:</a:t>
-            </a:r>
-          </a:p>
-          <a:p>
-            <a:pPr marL="190500" indent="-190500">
-              <a:spcBef>
-                <a:spcPts val="400"/>
-              </a:spcBef>
-              <a:spcAft>
-                <a:spcPts val="200"/>
-              </a:spcAft>
-            </a:pPr>
-            <a:r>
-              <a:rPr sz="1300">
-                <a:solidFill>
-                  <a:srgbClr val="3D5466"/>
-                </a:solidFill>
-                <a:latin typeface="Arial"/>
-              </a:rPr>
-              <a:t>▸  ## 4.4 Das Konditionengespräch wertbasiert führen</a:t>
-            </a:r>
-          </a:p>
-        </p:txBody>
-      </p:sp>
-      <p:sp>
-        <p:nvSpPr>
-          <p:cNvPr id="9" name="Rectangle 8"/>
-          <p:cNvSpPr/>
-          <p:nvPr/>
-        </p:nvSpPr>
-        <p:spPr>
-          <a:xfrm>
-            <a:off x="0" y="6510528"/>
-            <a:ext cx="12188952" cy="347472"/>
-          </a:xfrm>
-          <a:prstGeom prst="rect">
-            <a:avLst/>
-          </a:prstGeom>
-          <a:solidFill>
-            <a:srgbClr val="0A1937"/>
-          </a:solidFill>
-          <a:ln>
-            <a:noFill/>
-          </a:ln>
-        </p:spPr>
-        <p:style>
-          <a:lnRef idx="1">
-            <a:schemeClr val="accent1"/>
-          </a:lnRef>
-          <a:fillRef idx="3">
-            <a:schemeClr val="accent1"/>
-          </a:fillRef>
-          <a:effectRef idx="2">
-            <a:schemeClr val="accent1"/>
-          </a:effectRef>
-          <a:fontRef idx="minor">
-            <a:schemeClr val="lt1"/>
-          </a:fontRef>
-        </p:style>
-        <p:txBody>
-          <a:bodyPr rtlCol="0" anchor="ctr"/>
-          <a:lstStyle/>
-          <a:p>
-            <a:pPr algn="ctr"/>
-          </a:p>
-        </p:txBody>
-      </p:sp>
-      <p:sp>
-        <p:nvSpPr>
-          <p:cNvPr id="10" name="TextBox 9"/>
+              <a:t>Die Ertragsstruktur eines Kunden analysieren und ein Wertgespräch vorbereiten.</a:t>
+            </a:r>
+          </a:p>
+        </p:txBody>
+      </p:sp>
+      <p:sp>
+        <p:nvSpPr>
+          <p:cNvPr id="7" name="TextBox 6"/>
           <p:cNvSpPr txBox="1"/>
           <p:nvPr/>
         </p:nvSpPr>
         <p:spPr>
           <a:xfrm>
-            <a:off x="685800" y="6583680"/>
-            <a:ext cx="6490411" cy="256032"/>
+            <a:off x="685800" y="6355080"/>
+            <a:ext cx="10817352" cy="274320"/>
           </a:xfrm>
           <a:prstGeom prst="rect">
             <a:avLst/>
@@ -6158,7 +5651,7 @@
             <a:r>
               <a:rPr sz="700">
                 <a:solidFill>
-                  <a:srgbClr val="A0B4D2"/>
+                  <a:srgbClr val="8CA0C3"/>
                 </a:solidFill>
                 <a:latin typeface="Consolas"/>
               </a:rPr>
@@ -6200,7 +5693,7 @@
             <a:avLst/>
           </a:prstGeom>
           <a:solidFill>
-            <a:srgbClr val="FFFFFF"/>
+            <a:srgbClr val="EDEDF3"/>
           </a:solidFill>
           <a:ln>
             <a:noFill/>
@@ -6301,43 +5794,51 @@
                 </a:solidFill>
                 <a:latin typeface="Consolas"/>
               </a:rPr>
-              <a:t>M14  ·  SCHAUBILD</a:t>
-            </a:r>
-          </a:p>
-        </p:txBody>
-      </p:sp>
-      <p:sp>
-        <p:nvSpPr>
-          <p:cNvPr id="5" name="TextBox 4"/>
-          <p:cNvSpPr txBox="1"/>
-          <p:nvPr/>
-        </p:nvSpPr>
-        <p:spPr>
-          <a:xfrm>
-            <a:off x="685800" y="502920"/>
-            <a:ext cx="10817352" cy="594360"/>
-          </a:xfrm>
-          <a:prstGeom prst="rect">
-            <a:avLst/>
-          </a:prstGeom>
-          <a:noFill/>
-        </p:spPr>
-        <p:txBody>
-          <a:bodyPr wrap="square">
-            <a:spAutoFit/>
-          </a:bodyPr>
-          <a:lstStyle/>
-          <a:p>
-            <a:pPr algn="l"/>
-            <a:r>
-              <a:rPr sz="2000" b="1" i="0">
-                <a:solidFill>
-                  <a:srgbClr val="1F2C56"/>
-                </a:solidFill>
-                <a:latin typeface="Arial"/>
-              </a:rPr>
-              <a:t>Handlungsempfehlung</a:t>
-            </a:r>
+              <a:t>M14  ·  ARBEITSBLATT</a:t>
+            </a:r>
+          </a:p>
+        </p:txBody>
+      </p:sp>
+      <p:sp>
+        <p:nvSpPr>
+          <p:cNvPr id="5" name="Rectangle 4"/>
+          <p:cNvSpPr/>
+          <p:nvPr/>
+        </p:nvSpPr>
+        <p:spPr>
+          <a:xfrm>
+            <a:off x="0" y="1234440"/>
+            <a:ext cx="12188952" cy="12700"/>
+          </a:xfrm>
+          <a:prstGeom prst="rect">
+            <a:avLst/>
+          </a:prstGeom>
+          <a:solidFill>
+            <a:srgbClr val="D8DFE4"/>
+          </a:solidFill>
+          <a:ln>
+            <a:noFill/>
+          </a:ln>
+        </p:spPr>
+        <p:style>
+          <a:lnRef idx="1">
+            <a:schemeClr val="accent1"/>
+          </a:lnRef>
+          <a:fillRef idx="3">
+            <a:schemeClr val="accent1"/>
+          </a:fillRef>
+          <a:effectRef idx="2">
+            <a:schemeClr val="accent1"/>
+          </a:effectRef>
+          <a:fontRef idx="minor">
+            <a:schemeClr val="lt1"/>
+          </a:fontRef>
+        </p:style>
+        <p:txBody>
+          <a:bodyPr rtlCol="0" anchor="ctr"/>
+          <a:lstStyle/>
+          <a:p>
+            <a:pPr algn="ctr"/>
           </a:p>
         </p:txBody>
       </p:sp>
@@ -6349,8 +5850,8 @@
         </p:nvSpPr>
         <p:spPr>
           <a:xfrm>
-            <a:off x="685800" y="1143000"/>
-            <a:ext cx="10817352" cy="25400"/>
+            <a:off x="685800" y="502920"/>
+            <a:ext cx="36576" cy="658368"/>
           </a:xfrm>
           <a:prstGeom prst="rect">
             <a:avLst/>
@@ -6384,33 +5885,202 @@
           </a:p>
         </p:txBody>
       </p:sp>
-      <p:pic>
-        <p:nvPicPr>
-          <p:cNvPr id="7" name="Picture 6" descr="image.png"/>
-          <p:cNvPicPr>
-            <a:picLocks noChangeAspect="1"/>
-          </p:cNvPicPr>
-          <p:nvPr/>
-        </p:nvPicPr>
-        <p:blipFill>
-          <a:blip r:embed="rId2"/>
-          <a:stretch>
-            <a:fillRect/>
-          </a:stretch>
-        </p:blipFill>
-        <p:spPr>
-          <a:xfrm>
-            <a:off x="2303489" y="1325880"/>
-            <a:ext cx="7581973" cy="4937760"/>
-          </a:xfrm>
-          <a:prstGeom prst="rect">
-            <a:avLst/>
-          </a:prstGeom>
-        </p:spPr>
-      </p:pic>
-      <p:sp>
-        <p:nvSpPr>
-          <p:cNvPr id="8" name="Rectangle 7"/>
+      <p:sp>
+        <p:nvSpPr>
+          <p:cNvPr id="7" name="TextBox 6"/>
+          <p:cNvSpPr txBox="1"/>
+          <p:nvPr/>
+        </p:nvSpPr>
+        <p:spPr>
+          <a:xfrm>
+            <a:off x="813816" y="502920"/>
+            <a:ext cx="10634472" cy="685800"/>
+          </a:xfrm>
+          <a:prstGeom prst="rect">
+            <a:avLst/>
+          </a:prstGeom>
+          <a:noFill/>
+        </p:spPr>
+        <p:txBody>
+          <a:bodyPr wrap="square">
+            <a:spAutoFit/>
+          </a:bodyPr>
+          <a:lstStyle/>
+          <a:p>
+            <a:pPr algn="l"/>
+            <a:r>
+              <a:rPr sz="2400" b="1" i="0">
+                <a:solidFill>
+                  <a:srgbClr val="1F2C56"/>
+                </a:solidFill>
+                <a:latin typeface="Arial"/>
+              </a:rPr>
+              <a:t>Ertragsanalyse Bauer &amp; Söhne bearbeiten</a:t>
+            </a:r>
+          </a:p>
+        </p:txBody>
+      </p:sp>
+      <p:sp>
+        <p:nvSpPr>
+          <p:cNvPr id="8" name="TextBox 7"/>
+          <p:cNvSpPr txBox="1"/>
+          <p:nvPr/>
+        </p:nvSpPr>
+        <p:spPr>
+          <a:xfrm>
+            <a:off x="685800" y="1554480"/>
+            <a:ext cx="10817352" cy="3840480"/>
+          </a:xfrm>
+          <a:prstGeom prst="rect">
+            <a:avLst/>
+          </a:prstGeom>
+          <a:noFill/>
+        </p:spPr>
+        <p:txBody>
+          <a:bodyPr wrap="square">
+            <a:spAutoFit/>
+          </a:bodyPr>
+          <a:lstStyle/>
+          <a:p>
+            <a:pPr marL="190500" indent="-190500">
+              <a:spcBef>
+                <a:spcPts val="400"/>
+              </a:spcBef>
+              <a:spcAft>
+                <a:spcPts val="200"/>
+              </a:spcAft>
+            </a:pPr>
+            <a:r>
+              <a:rPr sz="1400">
+                <a:solidFill>
+                  <a:srgbClr val="3D5466"/>
+                </a:solidFill>
+                <a:latin typeface="Arial"/>
+              </a:rPr>
+              <a:t>▸  Erstellen Sie die Deckungsbeitragsrechnung für Bauer &amp; Söhne (AB-1) mit dem XLSX-Modell.</a:t>
+            </a:r>
+          </a:p>
+          <a:p>
+            <a:pPr marL="190500" indent="-190500">
+              <a:spcBef>
+                <a:spcPts val="400"/>
+              </a:spcBef>
+              <a:spcAft>
+                <a:spcPts val="200"/>
+              </a:spcAft>
+            </a:pPr>
+            <a:r>
+              <a:rPr sz="1400">
+                <a:solidFill>
+                  <a:srgbClr val="3D5466"/>
+                </a:solidFill>
+                <a:latin typeface="Arial"/>
+              </a:rPr>
+              <a:t>▸  Berechnen Sie Expected Loss und Kundenrendite und erkennen Sie die Unterpreisierung.</a:t>
+            </a:r>
+          </a:p>
+          <a:p>
+            <a:pPr marL="190500" indent="-190500">
+              <a:spcBef>
+                <a:spcPts val="400"/>
+              </a:spcBef>
+              <a:spcAft>
+                <a:spcPts val="200"/>
+              </a:spcAft>
+            </a:pPr>
+            <a:r>
+              <a:rPr sz="1400">
+                <a:solidFill>
+                  <a:srgbClr val="3D5466"/>
+                </a:solidFill>
+                <a:latin typeface="Arial"/>
+              </a:rPr>
+              <a:t>▸  Bereiten Sie ein wertbasiertes Konditionengespräch vor (AB-2).</a:t>
+            </a:r>
+          </a:p>
+        </p:txBody>
+      </p:sp>
+      <p:sp>
+        <p:nvSpPr>
+          <p:cNvPr id="9" name="Rectangle 8"/>
+          <p:cNvSpPr/>
+          <p:nvPr/>
+        </p:nvSpPr>
+        <p:spPr>
+          <a:xfrm>
+            <a:off x="685800" y="5486400"/>
+            <a:ext cx="10817352" cy="640080"/>
+          </a:xfrm>
+          <a:prstGeom prst="rect">
+            <a:avLst/>
+          </a:prstGeom>
+          <a:solidFill>
+            <a:srgbClr val="1F2C56"/>
+          </a:solidFill>
+          <a:ln>
+            <a:noFill/>
+          </a:ln>
+        </p:spPr>
+        <p:style>
+          <a:lnRef idx="1">
+            <a:schemeClr val="accent1"/>
+          </a:lnRef>
+          <a:fillRef idx="3">
+            <a:schemeClr val="accent1"/>
+          </a:fillRef>
+          <a:effectRef idx="2">
+            <a:schemeClr val="accent1"/>
+          </a:effectRef>
+          <a:fontRef idx="minor">
+            <a:schemeClr val="lt1"/>
+          </a:fontRef>
+        </p:style>
+        <p:txBody>
+          <a:bodyPr rtlCol="0" anchor="ctr"/>
+          <a:lstStyle/>
+          <a:p>
+            <a:pPr algn="ctr"/>
+          </a:p>
+        </p:txBody>
+      </p:sp>
+      <p:sp>
+        <p:nvSpPr>
+          <p:cNvPr id="10" name="TextBox 9"/>
+          <p:cNvSpPr txBox="1"/>
+          <p:nvPr/>
+        </p:nvSpPr>
+        <p:spPr>
+          <a:xfrm>
+            <a:off x="868680" y="5596128"/>
+            <a:ext cx="10451592" cy="457200"/>
+          </a:xfrm>
+          <a:prstGeom prst="rect">
+            <a:avLst/>
+          </a:prstGeom>
+          <a:noFill/>
+        </p:spPr>
+        <p:txBody>
+          <a:bodyPr wrap="square">
+            <a:spAutoFit/>
+          </a:bodyPr>
+          <a:lstStyle/>
+          <a:p>
+            <a:pPr algn="l"/>
+            <a:r>
+              <a:rPr sz="1300" b="1" i="0">
+                <a:solidFill>
+                  <a:srgbClr val="FFFFFF"/>
+                </a:solidFill>
+                <a:latin typeface="Arial"/>
+              </a:rPr>
+              <a:t>→  Bearbeitung im Teilnehmer-Workbook (Arbeitsblatt mit Ausfüllfeldern)</a:t>
+            </a:r>
+          </a:p>
+        </p:txBody>
+      </p:sp>
+      <p:sp>
+        <p:nvSpPr>
+          <p:cNvPr id="11" name="Rectangle 10"/>
           <p:cNvSpPr/>
           <p:nvPr/>
         </p:nvSpPr>
@@ -6453,7 +6123,7 @@
       </p:sp>
       <p:sp>
         <p:nvSpPr>
-          <p:cNvPr id="9" name="TextBox 8"/>
+          <p:cNvPr id="12" name="TextBox 11"/>
           <p:cNvSpPr txBox="1"/>
           <p:nvPr/>
         </p:nvSpPr>
@@ -6482,41 +6152,6 @@
                 <a:latin typeface="Consolas"/>
               </a:rPr>
               <a:t>FKB Campus  ·  M14</a:t>
-            </a:r>
-          </a:p>
-        </p:txBody>
-      </p:sp>
-      <p:sp>
-        <p:nvSpPr>
-          <p:cNvPr id="10" name="TextBox 9"/>
-          <p:cNvSpPr txBox="1"/>
-          <p:nvPr/>
-        </p:nvSpPr>
-        <p:spPr>
-          <a:xfrm>
-            <a:off x="7176211" y="6583680"/>
-            <a:ext cx="4326940" cy="256032"/>
-          </a:xfrm>
-          <a:prstGeom prst="rect">
-            <a:avLst/>
-          </a:prstGeom>
-          <a:noFill/>
-        </p:spPr>
-        <p:txBody>
-          <a:bodyPr wrap="none">
-            <a:spAutoFit/>
-          </a:bodyPr>
-          <a:lstStyle/>
-          <a:p>
-            <a:pPr algn="r"/>
-            <a:r>
-              <a:rPr sz="700">
-                <a:solidFill>
-                  <a:srgbClr val="A0B4D2"/>
-                </a:solidFill>
-                <a:latin typeface="Consolas"/>
-              </a:rPr>
-              <a:t>Schaubild</a:t>
             </a:r>
           </a:p>
         </p:txBody>
@@ -6776,7 +6411,7 @@
                 </a:solidFill>
                 <a:latin typeface="Arial"/>
               </a:rPr>
-              <a:t>Vom Konditionengespräch zum Wertgespräch</a:t>
+              <a:t>Prinzip dieses Moduls</a:t>
             </a:r>
           </a:p>
         </p:txBody>
@@ -6798,10 +6433,29 @@
           <a:noFill/>
         </p:spPr>
         <p:txBody>
-          <a:bodyPr wrap="square">
+          <a:bodyPr wrap="square" anchor="ctr">
             <a:spAutoFit/>
           </a:bodyPr>
           <a:lstStyle/>
+          <a:p>
+            <a:pPr marL="177800" indent="-177800">
+              <a:spcBef>
+                <a:spcPts val="600"/>
+              </a:spcBef>
+              <a:spcAft>
+                <a:spcPts val="200"/>
+              </a:spcAft>
+            </a:pPr>
+            <a:r>
+              <a:rPr sz="1200" i="1">
+                <a:solidFill>
+                  <a:srgbClr val="3D5466"/>
+                </a:solidFill>
+                <a:latin typeface="Arial"/>
+              </a:rPr>
+              <a:t>→  Nicht das Volumen zählt, sondern der Deckungsbeitrag.</a:t>
+            </a:r>
+          </a:p>
           <a:p>
             <a:pPr marL="190500" indent="-190500">
               <a:spcBef>
@@ -6818,216 +6472,7 @@
                 </a:solidFill>
                 <a:latin typeface="Arial"/>
               </a:rPr>
-              <a:t>▸  Ein wertbasierter Ansatz kehrt die Reihenfolge um:</a:t>
-            </a:r>
-          </a:p>
-          <a:p>
-            <a:pPr marL="190500" indent="-190500">
-              <a:spcBef>
-                <a:spcPts val="400"/>
-              </a:spcBef>
-              <a:spcAft>
-                <a:spcPts val="200"/>
-              </a:spcAft>
-            </a:pPr>
-            <a:r>
-              <a:rPr sz="1300">
-                <a:solidFill>
-                  <a:srgbClr val="3D5466"/>
-                </a:solidFill>
-                <a:latin typeface="Arial"/>
-              </a:rPr>
-              <a:t>▸  Phase 1: Wert der Beziehung artikulieren</a:t>
-            </a:r>
-          </a:p>
-          <a:p>
-            <a:pPr marL="190500" indent="-190500">
-              <a:spcBef>
-                <a:spcPts val="400"/>
-              </a:spcBef>
-              <a:spcAft>
-                <a:spcPts val="200"/>
-              </a:spcAft>
-            </a:pPr>
-            <a:r>
-              <a:rPr sz="1300">
-                <a:solidFill>
-                  <a:srgbClr val="3D5466"/>
-                </a:solidFill>
-                <a:latin typeface="Arial"/>
-              </a:rPr>
-              <a:t>▸  Phase 2: Marktumfeld erklären</a:t>
-            </a:r>
-          </a:p>
-          <a:p>
-            <a:pPr marL="190500" indent="-190500">
-              <a:spcBef>
-                <a:spcPts val="400"/>
-              </a:spcBef>
-              <a:spcAft>
-                <a:spcPts val="200"/>
-              </a:spcAft>
-            </a:pPr>
-            <a:r>
-              <a:rPr sz="1300">
-                <a:solidFill>
-                  <a:srgbClr val="3D5466"/>
-                </a:solidFill>
-                <a:latin typeface="Arial"/>
-              </a:rPr>
-              <a:t>▸  Zinsentwicklung, Refinanzierungskosten, Risikoumfeld transparent machen – ohne Details zu internen Kalkulationen preiszugeben.</a:t>
-            </a:r>
-          </a:p>
-          <a:p>
-            <a:pPr marL="190500" indent="-190500">
-              <a:spcBef>
-                <a:spcPts val="400"/>
-              </a:spcBef>
-              <a:spcAft>
-                <a:spcPts val="200"/>
-              </a:spcAft>
-            </a:pPr>
-            <a:r>
-              <a:rPr sz="1300">
-                <a:solidFill>
-                  <a:srgbClr val="3D5466"/>
-                </a:solidFill>
-                <a:latin typeface="Arial"/>
-              </a:rPr>
-              <a:t>▸  Phase 3: Konditionen transparent kommunizieren</a:t>
-            </a:r>
-          </a:p>
-          <a:p>
-            <a:pPr marL="190500" indent="-190500">
-              <a:spcBef>
-                <a:spcPts val="400"/>
-              </a:spcBef>
-              <a:spcAft>
-                <a:spcPts val="200"/>
-              </a:spcAft>
-            </a:pPr>
-            <a:r>
-              <a:rPr sz="1300">
-                <a:solidFill>
-                  <a:srgbClr val="3D5466"/>
-                </a:solidFill>
-                <a:latin typeface="Arial"/>
-              </a:rPr>
-              <a:t>▸  Phase 4: Alternativen anbieten</a:t>
-            </a:r>
-          </a:p>
-          <a:p>
-            <a:pPr marL="190500" indent="-190500">
-              <a:spcBef>
-                <a:spcPts val="400"/>
-              </a:spcBef>
-              <a:spcAft>
-                <a:spcPts val="200"/>
-              </a:spcAft>
-            </a:pPr>
-            <a:r>
-              <a:rPr sz="1300">
-                <a:solidFill>
-                  <a:srgbClr val="3D5466"/>
-                </a:solidFill>
-                <a:latin typeface="Arial"/>
-              </a:rPr>
-              <a:t>▸  Dem Kunden Optionen geben: „Wenn wir die Besicherung verbessern, könnten wir bei der Marge etwas flexibler sein." Oder: „Wenn Sie das R+V-Paket hinzunehmen, sehen wir die Gesamtbeziehung anders."</a:t>
-            </a:r>
-          </a:p>
-          <a:p>
-            <a:pPr marL="190500" indent="-190500">
-              <a:spcBef>
-                <a:spcPts val="400"/>
-              </a:spcBef>
-              <a:spcAft>
-                <a:spcPts val="200"/>
-              </a:spcAft>
-            </a:pPr>
-            <a:r>
-              <a:rPr sz="1300">
-                <a:solidFill>
-                  <a:srgbClr val="3D5466"/>
-                </a:solidFill>
-                <a:latin typeface="Arial"/>
-              </a:rPr>
-              <a:t>▸  ## 4.5 Praxiscase: Ertragsanalyse Bauer &amp; Söhne GmbH</a:t>
-            </a:r>
-          </a:p>
-          <a:p>
-            <a:pPr marL="190500" indent="-190500">
-              <a:spcBef>
-                <a:spcPts val="400"/>
-              </a:spcBef>
-              <a:spcAft>
-                <a:spcPts val="200"/>
-              </a:spcAft>
-            </a:pPr>
-            <a:r>
-              <a:rPr sz="1300">
-                <a:solidFill>
-                  <a:srgbClr val="3D5466"/>
-                </a:solidFill>
-                <a:latin typeface="Arial"/>
-              </a:rPr>
-              <a:t>▸  Ausgangssituation</a:t>
-            </a:r>
-          </a:p>
-          <a:p>
-            <a:pPr marL="190500" indent="-190500">
-              <a:spcBef>
-                <a:spcPts val="400"/>
-              </a:spcBef>
-              <a:spcAft>
-                <a:spcPts val="200"/>
-              </a:spcAft>
-            </a:pPr>
-            <a:r>
-              <a:rPr sz="1300">
-                <a:solidFill>
-                  <a:srgbClr val="3D5466"/>
-                </a:solidFill>
-                <a:latin typeface="Arial"/>
-              </a:rPr>
-              <a:t>▸  Bei der Vorbereitung des Jahresgesprächs analysiert Sandra den Deckungsbeitrag:</a:t>
-            </a:r>
-          </a:p>
-          <a:p>
-            <a:pPr marL="190500" indent="-190500">
-              <a:spcBef>
-                <a:spcPts val="400"/>
-              </a:spcBef>
-              <a:spcAft>
-                <a:spcPts val="200"/>
-              </a:spcAft>
-            </a:pPr>
-            <a:r>
-              <a:rPr sz="1300">
-                <a:solidFill>
-                  <a:srgbClr val="3D5466"/>
-                </a:solidFill>
-                <a:latin typeface="Arial"/>
-              </a:rPr>
-              <a:t>▸  Die Analyse zeigt drei Probleme:</a:t>
-            </a:r>
-          </a:p>
-          <a:p>
-            <a:pPr marL="190500" indent="-190500">
-              <a:spcBef>
-                <a:spcPts val="400"/>
-              </a:spcBef>
-              <a:spcAft>
-                <a:spcPts val="200"/>
-              </a:spcAft>
-            </a:pPr>
-            <a:r>
-              <a:rPr sz="1300">
-                <a:solidFill>
-                  <a:srgbClr val="3D5466"/>
-                </a:solidFill>
-                <a:latin typeface="Arial"/>
-              </a:rPr>
-              <a:t>▸  Die Kreditmarge von 1,25 % deckt den EL von 0,65 % nur mit 0,60 % Nettomarge – unter dem bankinternen Mindeststandard von 0,80 % (fiktiver Fallbeispielwert; die konkrete Untergrenze wird hausindividuell festgelegt).</a:t>
+              <a:t>▸  Ein großer Kredit zu dünner Marge ist ein Verlustgeschäft – wer nur den Zinssatz kennt, verhandelt blind.</a:t>
             </a:r>
           </a:p>
         </p:txBody>
@@ -7365,7 +6810,7 @@
                 </a:solidFill>
                 <a:latin typeface="Arial"/>
               </a:rPr>
-              <a:t>AB-1: Deckungsbeitragsrechnung</a:t>
+              <a:t>Reflexion und Selbstcheck</a:t>
             </a:r>
           </a:p>
         </p:txBody>
@@ -7407,370 +6852,9 @@
                 </a:solidFill>
                 <a:latin typeface="Arial"/>
               </a:rPr>
-              <a:t>▸  Optimierungshebel (Top 2):</a:t>
-            </a:r>
-          </a:p>
-        </p:txBody>
-      </p:sp>
-      <p:sp>
-        <p:nvSpPr>
-          <p:cNvPr id="9" name="Rectangle 8"/>
-          <p:cNvSpPr/>
-          <p:nvPr/>
-        </p:nvSpPr>
-        <p:spPr>
-          <a:xfrm>
-            <a:off x="0" y="6510528"/>
-            <a:ext cx="12188952" cy="347472"/>
-          </a:xfrm>
-          <a:prstGeom prst="rect">
-            <a:avLst/>
-          </a:prstGeom>
-          <a:solidFill>
-            <a:srgbClr val="0A1937"/>
-          </a:solidFill>
-          <a:ln>
-            <a:noFill/>
-          </a:ln>
-        </p:spPr>
-        <p:style>
-          <a:lnRef idx="1">
-            <a:schemeClr val="accent1"/>
-          </a:lnRef>
-          <a:fillRef idx="3">
-            <a:schemeClr val="accent1"/>
-          </a:fillRef>
-          <a:effectRef idx="2">
-            <a:schemeClr val="accent1"/>
-          </a:effectRef>
-          <a:fontRef idx="minor">
-            <a:schemeClr val="lt1"/>
-          </a:fontRef>
-        </p:style>
-        <p:txBody>
-          <a:bodyPr rtlCol="0" anchor="ctr"/>
-          <a:lstStyle/>
-          <a:p>
-            <a:pPr algn="ctr"/>
-          </a:p>
-        </p:txBody>
-      </p:sp>
-      <p:sp>
-        <p:nvSpPr>
-          <p:cNvPr id="10" name="TextBox 9"/>
-          <p:cNvSpPr txBox="1"/>
-          <p:nvPr/>
-        </p:nvSpPr>
-        <p:spPr>
-          <a:xfrm>
-            <a:off x="685800" y="6583680"/>
-            <a:ext cx="6490411" cy="256032"/>
-          </a:xfrm>
-          <a:prstGeom prst="rect">
-            <a:avLst/>
-          </a:prstGeom>
-          <a:noFill/>
-        </p:spPr>
-        <p:txBody>
-          <a:bodyPr wrap="none">
-            <a:spAutoFit/>
-          </a:bodyPr>
-          <a:lstStyle/>
-          <a:p>
-            <a:pPr algn="l"/>
-            <a:r>
-              <a:rPr sz="700">
-                <a:solidFill>
-                  <a:srgbClr val="A0B4D2"/>
-                </a:solidFill>
-                <a:latin typeface="Consolas"/>
-              </a:rPr>
-              <a:t>FKB Campus  ·  M14</a:t>
-            </a:r>
-          </a:p>
-        </p:txBody>
-      </p:sp>
-    </p:spTree>
-  </p:cSld>
-  <p:clrMapOvr>
-    <a:masterClrMapping/>
-  </p:clrMapOvr>
-</p:sld>
-</file>
-
-<file path=ppt/slides/slide16.xml><?xml version="1.0" encoding="utf-8"?>
-<p:sld xmlns:a="http://schemas.openxmlformats.org/drawingml/2006/main" xmlns:p="http://schemas.openxmlformats.org/presentationml/2006/main" xmlns:r="http://schemas.openxmlformats.org/officeDocument/2006/relationships">
-  <p:cSld>
-    <p:spTree>
-      <p:nvGrpSpPr>
-        <p:cNvPr id="1" name=""/>
-        <p:cNvGrpSpPr/>
-        <p:nvPr/>
-      </p:nvGrpSpPr>
-      <p:grpSpPr/>
-      <p:sp>
-        <p:nvSpPr>
-          <p:cNvPr id="2" name="Rectangle 1"/>
-          <p:cNvSpPr/>
-          <p:nvPr/>
-        </p:nvSpPr>
-        <p:spPr>
-          <a:xfrm>
-            <a:off x="0" y="0"/>
-            <a:ext cx="12188952" cy="6858000"/>
-          </a:xfrm>
-          <a:prstGeom prst="rect">
-            <a:avLst/>
-          </a:prstGeom>
-          <a:solidFill>
-            <a:srgbClr val="EDEDF3"/>
-          </a:solidFill>
-          <a:ln>
-            <a:noFill/>
-          </a:ln>
-        </p:spPr>
-        <p:style>
-          <a:lnRef idx="1">
-            <a:schemeClr val="accent1"/>
-          </a:lnRef>
-          <a:fillRef idx="3">
-            <a:schemeClr val="accent1"/>
-          </a:fillRef>
-          <a:effectRef idx="2">
-            <a:schemeClr val="accent1"/>
-          </a:effectRef>
-          <a:fontRef idx="minor">
-            <a:schemeClr val="lt1"/>
-          </a:fontRef>
-        </p:style>
-        <p:txBody>
-          <a:bodyPr rtlCol="0" anchor="ctr"/>
-          <a:lstStyle/>
-          <a:p>
-            <a:pPr algn="ctr"/>
-          </a:p>
-        </p:txBody>
-      </p:sp>
-      <p:sp>
-        <p:nvSpPr>
-          <p:cNvPr id="3" name="Rectangle 2"/>
-          <p:cNvSpPr/>
-          <p:nvPr/>
-        </p:nvSpPr>
-        <p:spPr>
-          <a:xfrm>
-            <a:off x="0" y="0"/>
-            <a:ext cx="12188952" cy="50292"/>
-          </a:xfrm>
-          <a:prstGeom prst="rect">
-            <a:avLst/>
-          </a:prstGeom>
-          <a:solidFill>
-            <a:srgbClr val="1F2C56"/>
-          </a:solidFill>
-          <a:ln>
-            <a:noFill/>
-          </a:ln>
-        </p:spPr>
-        <p:style>
-          <a:lnRef idx="1">
-            <a:schemeClr val="accent1"/>
-          </a:lnRef>
-          <a:fillRef idx="3">
-            <a:schemeClr val="accent1"/>
-          </a:fillRef>
-          <a:effectRef idx="2">
-            <a:schemeClr val="accent1"/>
-          </a:effectRef>
-          <a:fontRef idx="minor">
-            <a:schemeClr val="lt1"/>
-          </a:fontRef>
-        </p:style>
-        <p:txBody>
-          <a:bodyPr rtlCol="0" anchor="ctr"/>
-          <a:lstStyle/>
-          <a:p>
-            <a:pPr algn="ctr"/>
-          </a:p>
-        </p:txBody>
-      </p:sp>
-      <p:sp>
-        <p:nvSpPr>
-          <p:cNvPr id="4" name="TextBox 3"/>
-          <p:cNvSpPr txBox="1"/>
-          <p:nvPr/>
-        </p:nvSpPr>
-        <p:spPr>
-          <a:xfrm>
-            <a:off x="685800" y="109728"/>
-            <a:ext cx="10817352" cy="228600"/>
-          </a:xfrm>
-          <a:prstGeom prst="rect">
-            <a:avLst/>
-          </a:prstGeom>
-          <a:noFill/>
-        </p:spPr>
-        <p:txBody>
-          <a:bodyPr wrap="none">
-            <a:spAutoFit/>
-          </a:bodyPr>
-          <a:lstStyle/>
-          <a:p>
-            <a:pPr algn="l"/>
-            <a:r>
-              <a:rPr sz="750">
-                <a:solidFill>
-                  <a:srgbClr val="78808C"/>
-                </a:solidFill>
-                <a:latin typeface="Consolas"/>
-              </a:rPr>
-              <a:t>M14  ·  INHALT</a:t>
-            </a:r>
-          </a:p>
-        </p:txBody>
-      </p:sp>
-      <p:sp>
-        <p:nvSpPr>
-          <p:cNvPr id="5" name="Rectangle 4"/>
-          <p:cNvSpPr/>
-          <p:nvPr/>
-        </p:nvSpPr>
-        <p:spPr>
-          <a:xfrm>
-            <a:off x="0" y="1234440"/>
-            <a:ext cx="12188952" cy="12700"/>
-          </a:xfrm>
-          <a:prstGeom prst="rect">
-            <a:avLst/>
-          </a:prstGeom>
-          <a:solidFill>
-            <a:srgbClr val="D8DFE4"/>
-          </a:solidFill>
-          <a:ln>
-            <a:noFill/>
-          </a:ln>
-        </p:spPr>
-        <p:style>
-          <a:lnRef idx="1">
-            <a:schemeClr val="accent1"/>
-          </a:lnRef>
-          <a:fillRef idx="3">
-            <a:schemeClr val="accent1"/>
-          </a:fillRef>
-          <a:effectRef idx="2">
-            <a:schemeClr val="accent1"/>
-          </a:effectRef>
-          <a:fontRef idx="minor">
-            <a:schemeClr val="lt1"/>
-          </a:fontRef>
-        </p:style>
-        <p:txBody>
-          <a:bodyPr rtlCol="0" anchor="ctr"/>
-          <a:lstStyle/>
-          <a:p>
-            <a:pPr algn="ctr"/>
-          </a:p>
-        </p:txBody>
-      </p:sp>
-      <p:sp>
-        <p:nvSpPr>
-          <p:cNvPr id="6" name="Rectangle 5"/>
-          <p:cNvSpPr/>
-          <p:nvPr/>
-        </p:nvSpPr>
-        <p:spPr>
-          <a:xfrm>
-            <a:off x="685800" y="502920"/>
-            <a:ext cx="36576" cy="658368"/>
-          </a:xfrm>
-          <a:prstGeom prst="rect">
-            <a:avLst/>
-          </a:prstGeom>
-          <a:solidFill>
-            <a:srgbClr val="D9C089"/>
-          </a:solidFill>
-          <a:ln>
-            <a:noFill/>
-          </a:ln>
-        </p:spPr>
-        <p:style>
-          <a:lnRef idx="1">
-            <a:schemeClr val="accent1"/>
-          </a:lnRef>
-          <a:fillRef idx="3">
-            <a:schemeClr val="accent1"/>
-          </a:fillRef>
-          <a:effectRef idx="2">
-            <a:schemeClr val="accent1"/>
-          </a:effectRef>
-          <a:fontRef idx="minor">
-            <a:schemeClr val="lt1"/>
-          </a:fontRef>
-        </p:style>
-        <p:txBody>
-          <a:bodyPr rtlCol="0" anchor="ctr"/>
-          <a:lstStyle/>
-          <a:p>
-            <a:pPr algn="ctr"/>
-          </a:p>
-        </p:txBody>
-      </p:sp>
-      <p:sp>
-        <p:nvSpPr>
-          <p:cNvPr id="7" name="TextBox 6"/>
-          <p:cNvSpPr txBox="1"/>
-          <p:nvPr/>
-        </p:nvSpPr>
-        <p:spPr>
-          <a:xfrm>
-            <a:off x="813816" y="502920"/>
-            <a:ext cx="10634472" cy="685800"/>
-          </a:xfrm>
-          <a:prstGeom prst="rect">
-            <a:avLst/>
-          </a:prstGeom>
-          <a:noFill/>
-        </p:spPr>
-        <p:txBody>
-          <a:bodyPr wrap="square">
-            <a:spAutoFit/>
-          </a:bodyPr>
-          <a:lstStyle/>
-          <a:p>
-            <a:pPr algn="l"/>
-            <a:r>
-              <a:rPr sz="2400" b="1" i="0">
-                <a:solidFill>
-                  <a:srgbClr val="1F2C56"/>
-                </a:solidFill>
-                <a:latin typeface="Arial"/>
-              </a:rPr>
-              <a:t>AB-2: Konditionengespräch vorbereiten</a:t>
-            </a:r>
-          </a:p>
-        </p:txBody>
-      </p:sp>
-      <p:sp>
-        <p:nvSpPr>
-          <p:cNvPr id="8" name="TextBox 7"/>
-          <p:cNvSpPr txBox="1"/>
-          <p:nvPr/>
-        </p:nvSpPr>
-        <p:spPr>
-          <a:xfrm>
-            <a:off x="685800" y="1417320"/>
-            <a:ext cx="10817352" cy="4892040"/>
-          </a:xfrm>
-          <a:prstGeom prst="rect">
-            <a:avLst/>
-          </a:prstGeom>
-          <a:noFill/>
-        </p:spPr>
-        <p:txBody>
-          <a:bodyPr wrap="square" anchor="ctr">
-            <a:spAutoFit/>
-          </a:bodyPr>
-          <a:lstStyle/>
+              <a:t>▸  Welcher volumenstarke Kunde bringt bei Ihnen womöglich die dünnste Rendite?</a:t>
+            </a:r>
+          </a:p>
           <a:p>
             <a:pPr marL="190500" indent="-190500">
               <a:spcBef>
@@ -7787,7 +6871,7 @@
                 </a:solidFill>
                 <a:latin typeface="Arial"/>
               </a:rPr>
-              <a:t>▸  Wertargumente (Phase 1) – Was hat unsere Beziehung diesem Kunden gebracht?</a:t>
+              <a:t>▸  Welches Signal für Unterpreisierung übersehen Sie im Alltag am ehesten?</a:t>
             </a:r>
           </a:p>
           <a:p>
@@ -7806,45 +6890,7 @@
                 </a:solidFill>
                 <a:latin typeface="Arial"/>
               </a:rPr>
-              <a:t>▸  Marktumfeld-Erklärung (Phase 2) – Welche externen Faktoren begründen die Anpassung?</a:t>
-            </a:r>
-          </a:p>
-          <a:p>
-            <a:pPr marL="190500" indent="-190500">
-              <a:spcBef>
-                <a:spcPts val="400"/>
-              </a:spcBef>
-              <a:spcAft>
-                <a:spcPts val="200"/>
-              </a:spcAft>
-            </a:pPr>
-            <a:r>
-              <a:rPr sz="1300">
-                <a:solidFill>
-                  <a:srgbClr val="3D5466"/>
-                </a:solidFill>
-                <a:latin typeface="Arial"/>
-              </a:rPr>
-              <a:t>▸  Konkrete Anpassung (Phase 3):</a:t>
-            </a:r>
-          </a:p>
-          <a:p>
-            <a:pPr marL="190500" indent="-190500">
-              <a:spcBef>
-                <a:spcPts val="400"/>
-              </a:spcBef>
-              <a:spcAft>
-                <a:spcPts val="200"/>
-              </a:spcAft>
-            </a:pPr>
-            <a:r>
-              <a:rPr sz="1300">
-                <a:solidFill>
-                  <a:srgbClr val="3D5466"/>
-                </a:solidFill>
-                <a:latin typeface="Arial"/>
-              </a:rPr>
-              <a:t>▸  Alternativen (Phase 4) – Welche Optionen biete ich an?</a:t>
+              <a:t>▸  Wie leiten Sie ein Konditionengespräch vom Preis auf den Wert um?</a:t>
             </a:r>
           </a:p>
         </p:txBody>
@@ -9353,7 +8399,7 @@
             <a:avLst/>
           </a:prstGeom>
           <a:solidFill>
-            <a:srgbClr val="FFFFFF"/>
+            <a:srgbClr val="EDEDF3"/>
           </a:solidFill>
           <a:ln>
             <a:noFill/>
@@ -9454,43 +8500,51 @@
                 </a:solidFill>
                 <a:latin typeface="Consolas"/>
               </a:rPr>
-              <a:t>M14  ·  SCHAUBILD</a:t>
-            </a:r>
-          </a:p>
-        </p:txBody>
-      </p:sp>
-      <p:sp>
-        <p:nvSpPr>
-          <p:cNvPr id="5" name="TextBox 4"/>
-          <p:cNvSpPr txBox="1"/>
-          <p:nvPr/>
-        </p:nvSpPr>
-        <p:spPr>
-          <a:xfrm>
-            <a:off x="685800" y="502920"/>
-            <a:ext cx="10817352" cy="594360"/>
-          </a:xfrm>
-          <a:prstGeom prst="rect">
-            <a:avLst/>
-          </a:prstGeom>
-          <a:noFill/>
-        </p:spPr>
-        <p:txBody>
-          <a:bodyPr wrap="square">
-            <a:spAutoFit/>
-          </a:bodyPr>
-          <a:lstStyle/>
-          <a:p>
-            <a:pPr algn="l"/>
-            <a:r>
-              <a:rPr sz="2000" b="1" i="0">
-                <a:solidFill>
-                  <a:srgbClr val="1F2C56"/>
-                </a:solidFill>
-                <a:latin typeface="Arial"/>
-              </a:rPr>
-              <a:t>Deckungsbeitrags-Wasserfall</a:t>
-            </a:r>
+              <a:t>M14  ·  INHALT</a:t>
+            </a:r>
+          </a:p>
+        </p:txBody>
+      </p:sp>
+      <p:sp>
+        <p:nvSpPr>
+          <p:cNvPr id="5" name="Rectangle 4"/>
+          <p:cNvSpPr/>
+          <p:nvPr/>
+        </p:nvSpPr>
+        <p:spPr>
+          <a:xfrm>
+            <a:off x="0" y="1234440"/>
+            <a:ext cx="12188952" cy="12700"/>
+          </a:xfrm>
+          <a:prstGeom prst="rect">
+            <a:avLst/>
+          </a:prstGeom>
+          <a:solidFill>
+            <a:srgbClr val="D8DFE4"/>
+          </a:solidFill>
+          <a:ln>
+            <a:noFill/>
+          </a:ln>
+        </p:spPr>
+        <p:style>
+          <a:lnRef idx="1">
+            <a:schemeClr val="accent1"/>
+          </a:lnRef>
+          <a:fillRef idx="3">
+            <a:schemeClr val="accent1"/>
+          </a:fillRef>
+          <a:effectRef idx="2">
+            <a:schemeClr val="accent1"/>
+          </a:effectRef>
+          <a:fontRef idx="minor">
+            <a:schemeClr val="lt1"/>
+          </a:fontRef>
+        </p:style>
+        <p:txBody>
+          <a:bodyPr rtlCol="0" anchor="ctr"/>
+          <a:lstStyle/>
+          <a:p>
+            <a:pPr algn="ctr"/>
           </a:p>
         </p:txBody>
       </p:sp>
@@ -9502,8 +8556,8 @@
         </p:nvSpPr>
         <p:spPr>
           <a:xfrm>
-            <a:off x="685800" y="1143000"/>
-            <a:ext cx="10817352" cy="25400"/>
+            <a:off x="685800" y="502920"/>
+            <a:ext cx="36576" cy="658368"/>
           </a:xfrm>
           <a:prstGeom prst="rect">
             <a:avLst/>
@@ -9537,33 +8591,124 @@
           </a:p>
         </p:txBody>
       </p:sp>
-      <p:pic>
-        <p:nvPicPr>
-          <p:cNvPr id="7" name="Picture 6" descr="image.png"/>
-          <p:cNvPicPr>
-            <a:picLocks noChangeAspect="1"/>
-          </p:cNvPicPr>
-          <p:nvPr/>
-        </p:nvPicPr>
-        <p:blipFill>
-          <a:blip r:embed="rId2"/>
-          <a:stretch>
-            <a:fillRect/>
-          </a:stretch>
-        </p:blipFill>
-        <p:spPr>
-          <a:xfrm>
-            <a:off x="2303489" y="1325880"/>
-            <a:ext cx="7581973" cy="4937760"/>
-          </a:xfrm>
-          <a:prstGeom prst="rect">
-            <a:avLst/>
-          </a:prstGeom>
-        </p:spPr>
-      </p:pic>
-      <p:sp>
-        <p:nvSpPr>
-          <p:cNvPr id="8" name="Rectangle 7"/>
+      <p:sp>
+        <p:nvSpPr>
+          <p:cNvPr id="7" name="TextBox 6"/>
+          <p:cNvSpPr txBox="1"/>
+          <p:nvPr/>
+        </p:nvSpPr>
+        <p:spPr>
+          <a:xfrm>
+            <a:off x="813816" y="502920"/>
+            <a:ext cx="10634472" cy="685800"/>
+          </a:xfrm>
+          <a:prstGeom prst="rect">
+            <a:avLst/>
+          </a:prstGeom>
+          <a:noFill/>
+        </p:spPr>
+        <p:txBody>
+          <a:bodyPr wrap="square">
+            <a:spAutoFit/>
+          </a:bodyPr>
+          <a:lstStyle/>
+          <a:p>
+            <a:pPr algn="l"/>
+            <a:r>
+              <a:rPr sz="2400" b="1" i="0">
+                <a:solidFill>
+                  <a:srgbClr val="1F2C56"/>
+                </a:solidFill>
+                <a:latin typeface="Arial"/>
+              </a:rPr>
+              <a:t>Nicht das Volumen zählt, sondern der Deckungsbeitrag</a:t>
+            </a:r>
+          </a:p>
+        </p:txBody>
+      </p:sp>
+      <p:sp>
+        <p:nvSpPr>
+          <p:cNvPr id="8" name="TextBox 7"/>
+          <p:cNvSpPr txBox="1"/>
+          <p:nvPr/>
+        </p:nvSpPr>
+        <p:spPr>
+          <a:xfrm>
+            <a:off x="685800" y="1417320"/>
+            <a:ext cx="10817352" cy="4892040"/>
+          </a:xfrm>
+          <a:prstGeom prst="rect">
+            <a:avLst/>
+          </a:prstGeom>
+          <a:noFill/>
+        </p:spPr>
+        <p:txBody>
+          <a:bodyPr wrap="square" anchor="ctr">
+            <a:spAutoFit/>
+          </a:bodyPr>
+          <a:lstStyle/>
+          <a:p>
+            <a:pPr marL="177800" indent="-177800">
+              <a:spcBef>
+                <a:spcPts val="600"/>
+              </a:spcBef>
+              <a:spcAft>
+                <a:spcPts val="200"/>
+              </a:spcAft>
+            </a:pPr>
+            <a:r>
+              <a:rPr sz="1200" i="1">
+                <a:solidFill>
+                  <a:srgbClr val="3D5466"/>
+                </a:solidFill>
+                <a:latin typeface="Arial"/>
+              </a:rPr>
+              <a:t>→  Nicht das Volumen zählt, sondern der Deckungsbeitrag.</a:t>
+            </a:r>
+          </a:p>
+          <a:p>
+            <a:pPr marL="190500" indent="-190500">
+              <a:spcBef>
+                <a:spcPts val="400"/>
+              </a:spcBef>
+              <a:spcAft>
+                <a:spcPts val="200"/>
+              </a:spcAft>
+            </a:pPr>
+            <a:r>
+              <a:rPr sz="1300">
+                <a:solidFill>
+                  <a:srgbClr val="3D5466"/>
+                </a:solidFill>
+                <a:latin typeface="Arial"/>
+              </a:rPr>
+              <a:t>▸  Ein großer Kredit zu dünner Marge ist ein Verlustgeschäft.</a:t>
+            </a:r>
+          </a:p>
+          <a:p>
+            <a:pPr marL="190500" indent="-190500">
+              <a:spcBef>
+                <a:spcPts val="400"/>
+              </a:spcBef>
+              <a:spcAft>
+                <a:spcPts val="200"/>
+              </a:spcAft>
+            </a:pPr>
+            <a:r>
+              <a:rPr sz="1300">
+                <a:solidFill>
+                  <a:srgbClr val="3D5466"/>
+                </a:solidFill>
+                <a:latin typeface="Arial"/>
+              </a:rPr>
+              <a:t>▸  Wer nur den Zinssatz kennt, verhandelt blind – der Deckungsbeitrag zeigt den echten Ertrag je Kunde.</a:t>
+            </a:r>
+          </a:p>
+        </p:txBody>
+      </p:sp>
+      <p:sp>
+        <p:nvSpPr>
+          <p:cNvPr id="9" name="Rectangle 8"/>
           <p:cNvSpPr/>
           <p:nvPr/>
         </p:nvSpPr>
@@ -9606,7 +8751,7 @@
       </p:sp>
       <p:sp>
         <p:nvSpPr>
-          <p:cNvPr id="9" name="TextBox 8"/>
+          <p:cNvPr id="10" name="TextBox 9"/>
           <p:cNvSpPr txBox="1"/>
           <p:nvPr/>
         </p:nvSpPr>
@@ -9635,41 +8780,6 @@
                 <a:latin typeface="Consolas"/>
               </a:rPr>
               <a:t>FKB Campus  ·  M14</a:t>
-            </a:r>
-          </a:p>
-        </p:txBody>
-      </p:sp>
-      <p:sp>
-        <p:nvSpPr>
-          <p:cNvPr id="10" name="TextBox 9"/>
-          <p:cNvSpPr txBox="1"/>
-          <p:nvPr/>
-        </p:nvSpPr>
-        <p:spPr>
-          <a:xfrm>
-            <a:off x="7176211" y="6583680"/>
-            <a:ext cx="4326940" cy="256032"/>
-          </a:xfrm>
-          <a:prstGeom prst="rect">
-            <a:avLst/>
-          </a:prstGeom>
-          <a:noFill/>
-        </p:spPr>
-        <p:txBody>
-          <a:bodyPr wrap="none">
-            <a:spAutoFit/>
-          </a:bodyPr>
-          <a:lstStyle/>
-          <a:p>
-            <a:pPr algn="r"/>
-            <a:r>
-              <a:rPr sz="700">
-                <a:solidFill>
-                  <a:srgbClr val="A0B4D2"/>
-                </a:solidFill>
-                <a:latin typeface="Consolas"/>
-              </a:rPr>
-              <a:t>Schaubild</a:t>
             </a:r>
           </a:p>
         </p:txBody>
@@ -9929,7 +9039,7 @@
                 </a:solidFill>
                 <a:latin typeface="Arial"/>
               </a:rPr>
-              <a:t>Die vier Ertragskomponenten</a:t>
+              <a:t>Die vier Ertragskomponenten je Kunde</a:t>
             </a:r>
           </a:p>
         </p:txBody>
@@ -9955,6 +9065,25 @@
             <a:spAutoFit/>
           </a:bodyPr>
           <a:lstStyle/>
+          <a:p>
+            <a:pPr marL="177800" indent="-177800">
+              <a:spcBef>
+                <a:spcPts val="600"/>
+              </a:spcBef>
+              <a:spcAft>
+                <a:spcPts val="200"/>
+              </a:spcAft>
+            </a:pPr>
+            <a:r>
+              <a:rPr sz="1200" i="1">
+                <a:solidFill>
+                  <a:srgbClr val="3D5466"/>
+                </a:solidFill>
+                <a:latin typeface="Arial"/>
+              </a:rPr>
+              <a:t>→  Der Kundendeckungsbeitrag bündelt alle Ertragsquellen einer Beziehung – nicht nur den Kreditzins.</a:t>
+            </a:r>
+          </a:p>
           <a:p>
             <a:pPr marL="190500" indent="-190500">
               <a:spcBef>
@@ -9971,7 +9100,7 @@
                 </a:solidFill>
                 <a:latin typeface="Arial"/>
               </a:rPr>
-              <a:t>▸  Der Kundendeckungsbeitrag setzt sich zusammen aus:</a:t>
+              <a:t>▸  Zinsergebnis, Provisionen, Verbunderträge, sonstige Erträge.</a:t>
             </a:r>
           </a:p>
           <a:p>
@@ -9990,26 +9119,7 @@
                 </a:solidFill>
                 <a:latin typeface="Arial"/>
               </a:rPr>
-              <a:t>▸  Deckungsbeitrag I = Zinsüberschuss + Provisionsertrag + Verbundertrag − Risikokosten</a:t>
-            </a:r>
-          </a:p>
-          <a:p>
-            <a:pPr marL="190500" indent="-190500">
-              <a:spcBef>
-                <a:spcPts val="400"/>
-              </a:spcBef>
-              <a:spcAft>
-                <a:spcPts val="200"/>
-              </a:spcAft>
-            </a:pPr>
-            <a:r>
-              <a:rPr sz="1300">
-                <a:solidFill>
-                  <a:srgbClr val="3D5466"/>
-                </a:solidFill>
-                <a:latin typeface="Arial"/>
-              </a:rPr>
-              <a:t>▸  Deckungsbeitrag II = DB I − Betriebskosten (Betreuungsaufwand)</a:t>
+              <a:t>▸  Vom Deckungsbeitrag I über die Risikokosten zum Deckungsbeitrag II und zur Kundenrendite.</a:t>
             </a:r>
           </a:p>
         </p:txBody>
@@ -10125,7 +9235,7 @@
             <a:avLst/>
           </a:prstGeom>
           <a:solidFill>
-            <a:srgbClr val="EDEDF3"/>
+            <a:srgbClr val="FFFFFF"/>
           </a:solidFill>
           <a:ln>
             <a:noFill/>
@@ -10226,51 +9336,43 @@
                 </a:solidFill>
                 <a:latin typeface="Consolas"/>
               </a:rPr>
-              <a:t>M14  ·  INHALT</a:t>
-            </a:r>
-          </a:p>
-        </p:txBody>
-      </p:sp>
-      <p:sp>
-        <p:nvSpPr>
-          <p:cNvPr id="5" name="Rectangle 4"/>
-          <p:cNvSpPr/>
-          <p:nvPr/>
-        </p:nvSpPr>
-        <p:spPr>
-          <a:xfrm>
-            <a:off x="0" y="1234440"/>
-            <a:ext cx="12188952" cy="12700"/>
-          </a:xfrm>
-          <a:prstGeom prst="rect">
-            <a:avLst/>
-          </a:prstGeom>
-          <a:solidFill>
-            <a:srgbClr val="D8DFE4"/>
-          </a:solidFill>
-          <a:ln>
-            <a:noFill/>
-          </a:ln>
-        </p:spPr>
-        <p:style>
-          <a:lnRef idx="1">
-            <a:schemeClr val="accent1"/>
-          </a:lnRef>
-          <a:fillRef idx="3">
-            <a:schemeClr val="accent1"/>
-          </a:fillRef>
-          <a:effectRef idx="2">
-            <a:schemeClr val="accent1"/>
-          </a:effectRef>
-          <a:fontRef idx="minor">
-            <a:schemeClr val="lt1"/>
-          </a:fontRef>
-        </p:style>
-        <p:txBody>
-          <a:bodyPr rtlCol="0" anchor="ctr"/>
-          <a:lstStyle/>
-          <a:p>
-            <a:pPr algn="ctr"/>
+              <a:t>M14  ·  SCHAUBILD</a:t>
+            </a:r>
+          </a:p>
+        </p:txBody>
+      </p:sp>
+      <p:sp>
+        <p:nvSpPr>
+          <p:cNvPr id="5" name="TextBox 4"/>
+          <p:cNvSpPr txBox="1"/>
+          <p:nvPr/>
+        </p:nvSpPr>
+        <p:spPr>
+          <a:xfrm>
+            <a:off x="685800" y="502920"/>
+            <a:ext cx="10817352" cy="594360"/>
+          </a:xfrm>
+          <a:prstGeom prst="rect">
+            <a:avLst/>
+          </a:prstGeom>
+          <a:noFill/>
+        </p:spPr>
+        <p:txBody>
+          <a:bodyPr wrap="square">
+            <a:spAutoFit/>
+          </a:bodyPr>
+          <a:lstStyle/>
+          <a:p>
+            <a:pPr algn="l"/>
+            <a:r>
+              <a:rPr sz="2000" b="1" i="0">
+                <a:solidFill>
+                  <a:srgbClr val="1F2C56"/>
+                </a:solidFill>
+                <a:latin typeface="Arial"/>
+              </a:rPr>
+              <a:t>Der Deckungsbeitrags-Wasserfall</a:t>
+            </a:r>
           </a:p>
         </p:txBody>
       </p:sp>
@@ -10282,8 +9384,8 @@
         </p:nvSpPr>
         <p:spPr>
           <a:xfrm>
-            <a:off x="685800" y="502920"/>
-            <a:ext cx="36576" cy="658368"/>
+            <a:off x="685800" y="1143000"/>
+            <a:ext cx="10817352" cy="25400"/>
           </a:xfrm>
           <a:prstGeom prst="rect">
             <a:avLst/>
@@ -10317,105 +9419,33 @@
           </a:p>
         </p:txBody>
       </p:sp>
-      <p:sp>
-        <p:nvSpPr>
-          <p:cNvPr id="7" name="TextBox 6"/>
-          <p:cNvSpPr txBox="1"/>
-          <p:nvPr/>
-        </p:nvSpPr>
-        <p:spPr>
-          <a:xfrm>
-            <a:off x="813816" y="502920"/>
-            <a:ext cx="10634472" cy="685800"/>
-          </a:xfrm>
-          <a:prstGeom prst="rect">
-            <a:avLst/>
-          </a:prstGeom>
-          <a:noFill/>
-        </p:spPr>
-        <p:txBody>
-          <a:bodyPr wrap="square">
-            <a:spAutoFit/>
-          </a:bodyPr>
-          <a:lstStyle/>
-          <a:p>
-            <a:pPr algn="l"/>
-            <a:r>
-              <a:rPr sz="2400" b="1" i="0">
-                <a:solidFill>
-                  <a:srgbClr val="1F2C56"/>
-                </a:solidFill>
-                <a:latin typeface="Arial"/>
-              </a:rPr>
-              <a:t>Rechenbeispiel: Kundendeckungsbeitrag Müller GmbH</a:t>
-            </a:r>
-          </a:p>
-        </p:txBody>
-      </p:sp>
-      <p:sp>
-        <p:nvSpPr>
-          <p:cNvPr id="8" name="TextBox 7"/>
-          <p:cNvSpPr txBox="1"/>
-          <p:nvPr/>
-        </p:nvSpPr>
-        <p:spPr>
-          <a:xfrm>
-            <a:off x="685800" y="1417320"/>
-            <a:ext cx="10817352" cy="4892040"/>
-          </a:xfrm>
-          <a:prstGeom prst="rect">
-            <a:avLst/>
-          </a:prstGeom>
-          <a:noFill/>
-        </p:spPr>
-        <p:txBody>
-          <a:bodyPr wrap="square" anchor="ctr">
-            <a:spAutoFit/>
-          </a:bodyPr>
-          <a:lstStyle/>
-          <a:p>
-            <a:pPr marL="190500" indent="-190500">
-              <a:spcBef>
-                <a:spcPts val="400"/>
-              </a:spcBef>
-              <a:spcAft>
-                <a:spcPts val="200"/>
-              </a:spcAft>
-            </a:pPr>
-            <a:r>
-              <a:rPr sz="1300">
-                <a:solidFill>
-                  <a:srgbClr val="3D5466"/>
-                </a:solidFill>
-                <a:latin typeface="Arial"/>
-              </a:rPr>
-              <a:t>▸  Ertragskennzahl: DB II / Kreditvolumen = 1,58 % (Kundenrendite)</a:t>
-            </a:r>
-          </a:p>
-          <a:p>
-            <a:pPr marL="190500" indent="-190500">
-              <a:spcBef>
-                <a:spcPts val="400"/>
-              </a:spcBef>
-              <a:spcAft>
-                <a:spcPts val="200"/>
-              </a:spcAft>
-            </a:pPr>
-            <a:r>
-              <a:rPr sz="1300">
-                <a:solidFill>
-                  <a:srgbClr val="3D5466"/>
-                </a:solidFill>
-                <a:latin typeface="Arial"/>
-              </a:rPr>
-              <a:t>▸  ## 4.2 Risikogerechtes Pricing</a:t>
-            </a:r>
-          </a:p>
-        </p:txBody>
-      </p:sp>
-      <p:sp>
-        <p:nvSpPr>
-          <p:cNvPr id="9" name="Rectangle 8"/>
+      <p:pic>
+        <p:nvPicPr>
+          <p:cNvPr id="7" name="Picture 6" descr="image.png"/>
+          <p:cNvPicPr>
+            <a:picLocks noChangeAspect="1"/>
+          </p:cNvPicPr>
+          <p:nvPr/>
+        </p:nvPicPr>
+        <p:blipFill>
+          <a:blip r:embed="rId2"/>
+          <a:stretch>
+            <a:fillRect/>
+          </a:stretch>
+        </p:blipFill>
+        <p:spPr>
+          <a:xfrm>
+            <a:off x="2303489" y="1325880"/>
+            <a:ext cx="7581973" cy="4937760"/>
+          </a:xfrm>
+          <a:prstGeom prst="rect">
+            <a:avLst/>
+          </a:prstGeom>
+        </p:spPr>
+      </p:pic>
+      <p:sp>
+        <p:nvSpPr>
+          <p:cNvPr id="8" name="Rectangle 7"/>
           <p:cNvSpPr/>
           <p:nvPr/>
         </p:nvSpPr>
@@ -10458,7 +9488,7 @@
       </p:sp>
       <p:sp>
         <p:nvSpPr>
-          <p:cNvPr id="10" name="TextBox 9"/>
+          <p:cNvPr id="9" name="TextBox 8"/>
           <p:cNvSpPr txBox="1"/>
           <p:nvPr/>
         </p:nvSpPr>
@@ -10487,6 +9517,41 @@
                 <a:latin typeface="Consolas"/>
               </a:rPr>
               <a:t>FKB Campus  ·  M14</a:t>
+            </a:r>
+          </a:p>
+        </p:txBody>
+      </p:sp>
+      <p:sp>
+        <p:nvSpPr>
+          <p:cNvPr id="10" name="TextBox 9"/>
+          <p:cNvSpPr txBox="1"/>
+          <p:nvPr/>
+        </p:nvSpPr>
+        <p:spPr>
+          <a:xfrm>
+            <a:off x="7176211" y="6583680"/>
+            <a:ext cx="4326940" cy="256032"/>
+          </a:xfrm>
+          <a:prstGeom prst="rect">
+            <a:avLst/>
+          </a:prstGeom>
+          <a:noFill/>
+        </p:spPr>
+        <p:txBody>
+          <a:bodyPr wrap="none">
+            <a:spAutoFit/>
+          </a:bodyPr>
+          <a:lstStyle/>
+          <a:p>
+            <a:pPr algn="r"/>
+            <a:r>
+              <a:rPr sz="700">
+                <a:solidFill>
+                  <a:srgbClr val="A0B4D2"/>
+                </a:solidFill>
+                <a:latin typeface="Consolas"/>
+              </a:rPr>
+              <a:t>Schaubild</a:t>
             </a:r>
           </a:p>
         </p:txBody>
@@ -10746,7 +9811,7 @@
                 </a:solidFill>
                 <a:latin typeface="Arial"/>
               </a:rPr>
-              <a:t>Der Expected Loss als Kalkulationsgrundlage</a:t>
+              <a:t>Risikogerechtes Pricing: Expected Loss und NMZ</a:t>
             </a:r>
           </a:p>
         </p:txBody>
@@ -10772,6 +9837,25 @@
             <a:spAutoFit/>
           </a:bodyPr>
           <a:lstStyle/>
+          <a:p>
+            <a:pPr marL="177800" indent="-177800">
+              <a:spcBef>
+                <a:spcPts val="600"/>
+              </a:spcBef>
+              <a:spcAft>
+                <a:spcPts val="200"/>
+              </a:spcAft>
+            </a:pPr>
+            <a:r>
+              <a:rPr sz="1200" i="1">
+                <a:solidFill>
+                  <a:srgbClr val="3D5466"/>
+                </a:solidFill>
+                <a:latin typeface="Arial"/>
+              </a:rPr>
+              <a:t>→  Der Preis muss das Risiko decken – der Expected Loss (PD × LGD × EAD) gehört in jede Kalkulation.</a:t>
+            </a:r>
+          </a:p>
           <a:p>
             <a:pPr marL="190500" indent="-190500">
               <a:spcBef>
@@ -10788,7 +9872,7 @@
                 </a:solidFill>
                 <a:latin typeface="Arial"/>
               </a:rPr>
-              <a:t>▸  In der Konditionenkalkulation muss die Risikoprämie mindestens den Expected Loss (EL) des Kreditengagements abdecken. Der EL errechnet sich nach Basel III  aus:</a:t>
+              <a:t>▸  Expected Loss als Kalkulationsgrundlage; das Nettomargenziel (NMZ) als Steuerungsgröße.</a:t>
             </a:r>
           </a:p>
           <a:p>
@@ -10807,7 +9891,7 @@
                 </a:solidFill>
                 <a:latin typeface="Arial"/>
               </a:rPr>
-              <a:t>▸  EL = PD × LGD × EAD</a:t>
+              <a:t>▸  Konditionsanpassung vorbereiten: wo trägt die Marge das Risiko nicht?</a:t>
             </a:r>
           </a:p>
         </p:txBody>
@@ -10923,7 +10007,7 @@
             <a:avLst/>
           </a:prstGeom>
           <a:solidFill>
-            <a:srgbClr val="EDEDF3"/>
+            <a:srgbClr val="FFFFFF"/>
           </a:solidFill>
           <a:ln>
             <a:noFill/>
@@ -11024,51 +10108,43 @@
                 </a:solidFill>
                 <a:latin typeface="Consolas"/>
               </a:rPr>
-              <a:t>M14  ·  INHALT</a:t>
-            </a:r>
-          </a:p>
-        </p:txBody>
-      </p:sp>
-      <p:sp>
-        <p:nvSpPr>
-          <p:cNvPr id="5" name="Rectangle 4"/>
-          <p:cNvSpPr/>
-          <p:nvPr/>
-        </p:nvSpPr>
-        <p:spPr>
-          <a:xfrm>
-            <a:off x="0" y="1234440"/>
-            <a:ext cx="12188952" cy="12700"/>
-          </a:xfrm>
-          <a:prstGeom prst="rect">
-            <a:avLst/>
-          </a:prstGeom>
-          <a:solidFill>
-            <a:srgbClr val="D8DFE4"/>
-          </a:solidFill>
-          <a:ln>
-            <a:noFill/>
-          </a:ln>
-        </p:spPr>
-        <p:style>
-          <a:lnRef idx="1">
-            <a:schemeClr val="accent1"/>
-          </a:lnRef>
-          <a:fillRef idx="3">
-            <a:schemeClr val="accent1"/>
-          </a:fillRef>
-          <a:effectRef idx="2">
-            <a:schemeClr val="accent1"/>
-          </a:effectRef>
-          <a:fontRef idx="minor">
-            <a:schemeClr val="lt1"/>
-          </a:fontRef>
-        </p:style>
-        <p:txBody>
-          <a:bodyPr rtlCol="0" anchor="ctr"/>
-          <a:lstStyle/>
-          <a:p>
-            <a:pPr algn="ctr"/>
+              <a:t>M14  ·  ÜBERSICHT</a:t>
+            </a:r>
+          </a:p>
+        </p:txBody>
+      </p:sp>
+      <p:sp>
+        <p:nvSpPr>
+          <p:cNvPr id="5" name="TextBox 4"/>
+          <p:cNvSpPr txBox="1"/>
+          <p:nvPr/>
+        </p:nvSpPr>
+        <p:spPr>
+          <a:xfrm>
+            <a:off x="685800" y="502920"/>
+            <a:ext cx="10817352" cy="594360"/>
+          </a:xfrm>
+          <a:prstGeom prst="rect">
+            <a:avLst/>
+          </a:prstGeom>
+          <a:noFill/>
+        </p:spPr>
+        <p:txBody>
+          <a:bodyPr wrap="square">
+            <a:spAutoFit/>
+          </a:bodyPr>
+          <a:lstStyle/>
+          <a:p>
+            <a:pPr algn="l"/>
+            <a:r>
+              <a:rPr sz="2000" b="1" i="0">
+                <a:solidFill>
+                  <a:srgbClr val="1F2C56"/>
+                </a:solidFill>
+                <a:latin typeface="Arial"/>
+              </a:rPr>
+              <a:t>Rechenbeispiel Müller GmbH: Deckungsbeitrag</a:t>
+            </a:r>
           </a:p>
         </p:txBody>
       </p:sp>
@@ -11080,8 +10156,8 @@
         </p:nvSpPr>
         <p:spPr>
           <a:xfrm>
-            <a:off x="685800" y="502920"/>
-            <a:ext cx="36576" cy="658368"/>
+            <a:off x="685800" y="1143000"/>
+            <a:ext cx="10817352" cy="25400"/>
           </a:xfrm>
           <a:prstGeom prst="rect">
             <a:avLst/>
@@ -11115,105 +10191,272 @@
           </a:p>
         </p:txBody>
       </p:sp>
-      <p:sp>
-        <p:nvSpPr>
-          <p:cNvPr id="7" name="TextBox 6"/>
-          <p:cNvSpPr txBox="1"/>
-          <p:nvPr/>
-        </p:nvSpPr>
-        <p:spPr>
-          <a:xfrm>
-            <a:off x="813816" y="502920"/>
-            <a:ext cx="10634472" cy="685800"/>
-          </a:xfrm>
-          <a:prstGeom prst="rect">
-            <a:avLst/>
-          </a:prstGeom>
-          <a:noFill/>
-        </p:spPr>
-        <p:txBody>
-          <a:bodyPr wrap="square">
-            <a:spAutoFit/>
-          </a:bodyPr>
-          <a:lstStyle/>
-          <a:p>
-            <a:pPr algn="l"/>
-            <a:r>
-              <a:rPr sz="2400" b="1" i="0">
-                <a:solidFill>
-                  <a:srgbClr val="1F2C56"/>
-                </a:solidFill>
-                <a:latin typeface="Arial"/>
-              </a:rPr>
-              <a:t>Das Nettomargenziel (NMZ) als Steuerungsgröße</a:t>
-            </a:r>
-          </a:p>
-        </p:txBody>
-      </p:sp>
-      <p:sp>
-        <p:nvSpPr>
-          <p:cNvPr id="8" name="TextBox 7"/>
-          <p:cNvSpPr txBox="1"/>
-          <p:nvPr/>
-        </p:nvSpPr>
-        <p:spPr>
-          <a:xfrm>
-            <a:off x="685800" y="1417320"/>
-            <a:ext cx="10817352" cy="4892040"/>
-          </a:xfrm>
-          <a:prstGeom prst="rect">
-            <a:avLst/>
-          </a:prstGeom>
-          <a:noFill/>
-        </p:spPr>
-        <p:txBody>
-          <a:bodyPr wrap="square" anchor="ctr">
-            <a:spAutoFit/>
-          </a:bodyPr>
-          <a:lstStyle/>
-          <a:p>
-            <a:pPr marL="190500" indent="-190500">
-              <a:spcBef>
-                <a:spcPts val="400"/>
-              </a:spcBef>
-              <a:spcAft>
-                <a:spcPts val="200"/>
-              </a:spcAft>
-            </a:pPr>
-            <a:r>
-              <a:rPr sz="1300">
-                <a:solidFill>
-                  <a:srgbClr val="3D5466"/>
-                </a:solidFill>
-                <a:latin typeface="Arial"/>
-              </a:rPr>
-              <a:t>▸  Logik:</a:t>
-            </a:r>
-          </a:p>
-          <a:p>
-            <a:pPr marL="177800" indent="-177800">
-              <a:spcBef>
-                <a:spcPts val="600"/>
-              </a:spcBef>
-              <a:spcAft>
-                <a:spcPts val="200"/>
-              </a:spcAft>
-            </a:pPr>
-            <a:r>
-              <a:rPr sz="1200" i="1">
-                <a:solidFill>
-                  <a:srgbClr val="3D5466"/>
-                </a:solidFill>
-                <a:latin typeface="Arial"/>
-              </a:rPr>
-              <a:t>→  Bruttomarge (vereinbarte Kreditmarge) − Refinanzierungskosten − EL − Standardbetriebskosten = Nettomarge</a:t>
-            </a:r>
-          </a:p>
-        </p:txBody>
-      </p:sp>
-      <p:sp>
-        <p:nvSpPr>
-          <p:cNvPr id="9" name="Rectangle 8"/>
+      <p:graphicFrame>
+        <p:nvGraphicFramePr>
+          <p:cNvPr id="7" name="Table 6"/>
+          <p:cNvGraphicFramePr>
+            <a:graphicFrameLocks noGrp="1"/>
+          </p:cNvGraphicFramePr>
+          <p:nvPr/>
+        </p:nvGraphicFramePr>
+        <p:xfrm>
+          <a:off x="685800" y="1417320"/>
+          <a:ext cx="10817352" cy="1536192"/>
+        </p:xfrm>
+        <a:graphic>
+          <a:graphicData uri="http://schemas.openxmlformats.org/drawingml/2006/table">
+            <a:tbl>
+              <a:tblPr firstRow="1" bandRow="1">
+                <a:tableStyleId>{5C22544A-7EE6-4342-B048-85BDC9FD1C3A}</a:tableStyleId>
+              </a:tblPr>
+              <a:tblGrid>
+                <a:gridCol w="3605784"/>
+                <a:gridCol w="3605784"/>
+                <a:gridCol w="3605784"/>
+              </a:tblGrid>
+              <a:tr h="384048">
+                <a:tc>
+                  <a:txBody>
+                    <a:bodyPr/>
+                    <a:lstStyle/>
+                    <a:p>
+                      <a:r>
+                        <a:rPr sz="1100" b="1">
+                          <a:solidFill>
+                            <a:srgbClr val="FFFFFF"/>
+                          </a:solidFill>
+                          <a:latin typeface="Arial"/>
+                        </a:rPr>
+                        <a:t>Größe</a:t>
+                      </a:r>
+                    </a:p>
+                  </a:txBody>
+                  <a:tcPr>
+                    <a:solidFill>
+                      <a:srgbClr val="1F2C56"/>
+                    </a:solidFill>
+                  </a:tcPr>
+                </a:tc>
+                <a:tc>
+                  <a:txBody>
+                    <a:bodyPr/>
+                    <a:lstStyle/>
+                    <a:p>
+                      <a:r>
+                        <a:rPr sz="1100" b="1">
+                          <a:solidFill>
+                            <a:srgbClr val="FFFFFF"/>
+                          </a:solidFill>
+                          <a:latin typeface="Arial"/>
+                        </a:rPr>
+                        <a:t>Wert</a:t>
+                      </a:r>
+                    </a:p>
+                  </a:txBody>
+                  <a:tcPr>
+                    <a:solidFill>
+                      <a:srgbClr val="1F2C56"/>
+                    </a:solidFill>
+                  </a:tcPr>
+                </a:tc>
+                <a:tc>
+                  <a:txBody>
+                    <a:bodyPr/>
+                    <a:lstStyle/>
+                    <a:p>
+                      <a:r>
+                        <a:rPr sz="1100" b="1">
+                          <a:solidFill>
+                            <a:srgbClr val="FFFFFF"/>
+                          </a:solidFill>
+                          <a:latin typeface="Arial"/>
+                        </a:rPr>
+                        <a:t>Bewertung</a:t>
+                      </a:r>
+                    </a:p>
+                  </a:txBody>
+                  <a:tcPr>
+                    <a:solidFill>
+                      <a:srgbClr val="1F2C56"/>
+                    </a:solidFill>
+                  </a:tcPr>
+                </a:tc>
+              </a:tr>
+              <a:tr h="384048">
+                <a:tc>
+                  <a:txBody>
+                    <a:bodyPr/>
+                    <a:lstStyle/>
+                    <a:p>
+                      <a:r>
+                        <a:rPr sz="1050">
+                          <a:solidFill>
+                            <a:srgbClr val="3D5466"/>
+                          </a:solidFill>
+                          <a:latin typeface="Arial"/>
+                        </a:rPr>
+                        <a:t>Deckungsbeitrag II</a:t>
+                      </a:r>
+                    </a:p>
+                  </a:txBody>
+                  <a:tcPr/>
+                </a:tc>
+                <a:tc>
+                  <a:txBody>
+                    <a:bodyPr/>
+                    <a:lstStyle/>
+                    <a:p>
+                      <a:r>
+                        <a:rPr sz="1050">
+                          <a:solidFill>
+                            <a:srgbClr val="3D5466"/>
+                          </a:solidFill>
+                          <a:latin typeface="Arial"/>
+                        </a:rPr>
+                        <a:t>12.610 EUR</a:t>
+                      </a:r>
+                    </a:p>
+                  </a:txBody>
+                  <a:tcPr/>
+                </a:tc>
+                <a:tc>
+                  <a:txBody>
+                    <a:bodyPr/>
+                    <a:lstStyle/>
+                    <a:p>
+                      <a:r>
+                        <a:rPr sz="1050">
+                          <a:solidFill>
+                            <a:srgbClr val="3D5466"/>
+                          </a:solidFill>
+                          <a:latin typeface="Arial"/>
+                        </a:rPr>
+                        <a:t>positiv</a:t>
+                      </a:r>
+                    </a:p>
+                  </a:txBody>
+                  <a:tcPr/>
+                </a:tc>
+              </a:tr>
+              <a:tr h="384048">
+                <a:tc>
+                  <a:txBody>
+                    <a:bodyPr/>
+                    <a:lstStyle/>
+                    <a:p>
+                      <a:r>
+                        <a:rPr sz="1050">
+                          <a:solidFill>
+                            <a:srgbClr val="3D5466"/>
+                          </a:solidFill>
+                          <a:latin typeface="Arial"/>
+                        </a:rPr>
+                        <a:t>Kundenrendite</a:t>
+                      </a:r>
+                    </a:p>
+                  </a:txBody>
+                  <a:tcPr/>
+                </a:tc>
+                <a:tc>
+                  <a:txBody>
+                    <a:bodyPr/>
+                    <a:lstStyle/>
+                    <a:p>
+                      <a:r>
+                        <a:rPr sz="1050">
+                          <a:solidFill>
+                            <a:srgbClr val="3D5466"/>
+                          </a:solidFill>
+                          <a:latin typeface="Arial"/>
+                        </a:rPr>
+                        <a:t>1,58 %</a:t>
+                      </a:r>
+                    </a:p>
+                  </a:txBody>
+                  <a:tcPr/>
+                </a:tc>
+                <a:tc>
+                  <a:txBody>
+                    <a:bodyPr/>
+                    <a:lstStyle/>
+                    <a:p>
+                      <a:r>
+                        <a:rPr sz="1050">
+                          <a:solidFill>
+                            <a:srgbClr val="3D5466"/>
+                          </a:solidFill>
+                          <a:latin typeface="Arial"/>
+                        </a:rPr>
+                        <a:t>ausbaufähig</a:t>
+                      </a:r>
+                    </a:p>
+                  </a:txBody>
+                  <a:tcPr/>
+                </a:tc>
+              </a:tr>
+              <a:tr h="384048">
+                <a:tc>
+                  <a:txBody>
+                    <a:bodyPr/>
+                    <a:lstStyle/>
+                    <a:p>
+                      <a:r>
+                        <a:rPr sz="1050">
+                          <a:solidFill>
+                            <a:srgbClr val="3D5466"/>
+                          </a:solidFill>
+                          <a:latin typeface="Arial"/>
+                        </a:rPr>
+                        <a:t>Hebel</a:t>
+                      </a:r>
+                    </a:p>
+                  </a:txBody>
+                  <a:tcPr/>
+                </a:tc>
+                <a:tc>
+                  <a:txBody>
+                    <a:bodyPr/>
+                    <a:lstStyle/>
+                    <a:p>
+                      <a:r>
+                        <a:rPr sz="1050">
+                          <a:solidFill>
+                            <a:srgbClr val="3D5466"/>
+                          </a:solidFill>
+                          <a:latin typeface="Arial"/>
+                        </a:rPr>
+                        <a:t>Cross-Selling / Kondition</a:t>
+                      </a:r>
+                    </a:p>
+                  </a:txBody>
+                  <a:tcPr/>
+                </a:tc>
+                <a:tc>
+                  <a:txBody>
+                    <a:bodyPr/>
+                    <a:lstStyle/>
+                    <a:p>
+                      <a:r>
+                        <a:rPr sz="1050">
+                          <a:solidFill>
+                            <a:srgbClr val="3D5466"/>
+                          </a:solidFill>
+                          <a:latin typeface="Arial"/>
+                        </a:rPr>
+                        <a:t>Wertgespräch</a:t>
+                      </a:r>
+                    </a:p>
+                  </a:txBody>
+                  <a:tcPr/>
+                </a:tc>
+              </a:tr>
+            </a:tbl>
+          </a:graphicData>
+        </a:graphic>
+      </p:graphicFrame>
+      <p:sp>
+        <p:nvSpPr>
+          <p:cNvPr id="8" name="Rectangle 7"/>
           <p:cNvSpPr/>
           <p:nvPr/>
         </p:nvSpPr>
@@ -11256,7 +10499,7 @@
       </p:sp>
       <p:sp>
         <p:nvSpPr>
-          <p:cNvPr id="10" name="TextBox 9"/>
+          <p:cNvPr id="9" name="TextBox 8"/>
           <p:cNvSpPr txBox="1"/>
           <p:nvPr/>
         </p:nvSpPr>
@@ -11285,6 +10528,41 @@
                 <a:latin typeface="Consolas"/>
               </a:rPr>
               <a:t>FKB Campus  ·  M14</a:t>
+            </a:r>
+          </a:p>
+        </p:txBody>
+      </p:sp>
+      <p:sp>
+        <p:nvSpPr>
+          <p:cNvPr id="10" name="TextBox 9"/>
+          <p:cNvSpPr txBox="1"/>
+          <p:nvPr/>
+        </p:nvSpPr>
+        <p:spPr>
+          <a:xfrm>
+            <a:off x="7176211" y="6583680"/>
+            <a:ext cx="4326940" cy="256032"/>
+          </a:xfrm>
+          <a:prstGeom prst="rect">
+            <a:avLst/>
+          </a:prstGeom>
+          <a:noFill/>
+        </p:spPr>
+        <p:txBody>
+          <a:bodyPr wrap="none">
+            <a:spAutoFit/>
+          </a:bodyPr>
+          <a:lstStyle/>
+          <a:p>
+            <a:pPr algn="r"/>
+            <a:r>
+              <a:rPr sz="700">
+                <a:solidFill>
+                  <a:srgbClr val="A0B4D2"/>
+                </a:solidFill>
+                <a:latin typeface="Consolas"/>
+              </a:rPr>
+              <a:t>Übersicht</a:t>
             </a:r>
           </a:p>
         </p:txBody>
